--- a/deck/consultation-deck.pptx
+++ b/deck/consultation-deck.pptx
@@ -3720,8 +3720,8 @@
         </p:nvSpPr>
         <p:spPr>
           <a:xfrm>
-            <a:off x="457200" y="1051560"/>
-            <a:ext cx="5120640" cy="1188720"/>
+            <a:off x="457200" y="1097280"/>
+            <a:ext cx="7863840" cy="1188720"/>
           </a:xfrm>
           <a:prstGeom prst="rect">
             <a:avLst/>
@@ -3735,62 +3735,62 @@
           <a:p>
             <a:pPr algn="l" indent="0" marL="0">
               <a:lnSpc>
-                <a:spcPts val="5220"/>
+                <a:spcPts val="5800"/>
               </a:lnSpc>
               <a:buNone/>
             </a:pPr>
             <a:r>
-              <a:rPr lang="en-US" sz="3600" b="1" dirty="0">
+              <a:rPr lang="en-US" sz="4000" b="1" dirty="0">
                 <a:solidFill>
                   <a:srgbClr val="141416"/>
                 </a:solidFill>
-                <a:latin typeface="Yu Gothic" pitchFamily="34" charset="0"/>
-                <a:ea typeface="Yu Gothic" pitchFamily="34" charset="-122"/>
-                <a:cs typeface="Yu Gothic" pitchFamily="34" charset="-120"/>
+                <a:latin typeface="Yu Mincho" pitchFamily="34" charset="0"/>
+                <a:ea typeface="Yu Mincho" pitchFamily="34" charset="-122"/>
+                <a:cs typeface="Yu Mincho" pitchFamily="34" charset="-120"/>
               </a:rPr>
               <a:t>次の試合で、</a:t>
             </a:r>
-            <a:endParaRPr lang="en-US" sz="3600" dirty="0"/>
+            <a:endParaRPr lang="en-US" sz="4000" dirty="0"/>
           </a:p>
           <a:p>
             <a:pPr algn="l" indent="0" marL="0">
               <a:lnSpc>
-                <a:spcPts val="5220"/>
+                <a:spcPts val="5800"/>
               </a:lnSpc>
               <a:buNone/>
             </a:pPr>
             <a:r>
-              <a:rPr lang="en-US" sz="3600" b="1" dirty="0">
+              <a:rPr lang="en-US" sz="4000" b="1" dirty="0">
                 <a:solidFill>
                   <a:srgbClr val="141416"/>
                 </a:solidFill>
-                <a:latin typeface="Yu Gothic" pitchFamily="34" charset="0"/>
-                <a:ea typeface="Yu Gothic" pitchFamily="34" charset="-122"/>
-                <a:cs typeface="Yu Gothic" pitchFamily="34" charset="-120"/>
+                <a:latin typeface="Yu Mincho" pitchFamily="34" charset="0"/>
+                <a:ea typeface="Yu Mincho" pitchFamily="34" charset="-122"/>
+                <a:cs typeface="Yu Mincho" pitchFamily="34" charset="-120"/>
               </a:rPr>
               <a:t>絶対に取りたい一本は</a:t>
             </a:r>
-            <a:endParaRPr lang="en-US" sz="3600" dirty="0"/>
+            <a:endParaRPr lang="en-US" sz="4000" dirty="0"/>
           </a:p>
           <a:p>
             <a:pPr algn="l" indent="0" marL="0">
               <a:lnSpc>
-                <a:spcPts val="5220"/>
+                <a:spcPts val="5800"/>
               </a:lnSpc>
               <a:buNone/>
             </a:pPr>
             <a:r>
-              <a:rPr lang="en-US" sz="3600" b="1" dirty="0">
+              <a:rPr lang="en-US" sz="4000" b="1" dirty="0">
                 <a:solidFill>
                   <a:srgbClr val="141416"/>
                 </a:solidFill>
-                <a:latin typeface="Yu Gothic" pitchFamily="34" charset="0"/>
-                <a:ea typeface="Yu Gothic" pitchFamily="34" charset="-122"/>
-                <a:cs typeface="Yu Gothic" pitchFamily="34" charset="-120"/>
+                <a:latin typeface="Yu Mincho" pitchFamily="34" charset="0"/>
+                <a:ea typeface="Yu Mincho" pitchFamily="34" charset="-122"/>
+                <a:cs typeface="Yu Mincho" pitchFamily="34" charset="-120"/>
               </a:rPr>
               <a:t>ありますか？</a:t>
             </a:r>
-            <a:endParaRPr lang="en-US" sz="3600" dirty="0"/>
+            <a:endParaRPr lang="en-US" sz="4000" dirty="0"/>
           </a:p>
         </p:txBody>
       </p:sp>
@@ -3802,8 +3802,8 @@
         </p:nvSpPr>
         <p:spPr>
           <a:xfrm>
-            <a:off x="457200" y="3566160"/>
-            <a:ext cx="4937760" cy="914400"/>
+            <a:off x="457200" y="3749040"/>
+            <a:ext cx="7863840" cy="914400"/>
           </a:xfrm>
           <a:prstGeom prst="rect">
             <a:avLst/>
@@ -3856,30 +3856,6 @@
           </a:p>
         </p:txBody>
       </p:sp>
-      <p:pic>
-        <p:nvPicPr>
-          <p:cNvPr id="6" name="Image 0" descr="preencoded.png">    </p:cNvPr>
-          <p:cNvPicPr>
-            <a:picLocks noChangeAspect="1"/>
-          </p:cNvPicPr>
-          <p:nvPr/>
-        </p:nvPicPr>
-        <p:blipFill>
-          <a:blip r:embed="rId1"/>
-          <a:stretch>
-            <a:fillRect/>
-          </a:stretch>
-        </p:blipFill>
-        <p:spPr>
-          <a:xfrm>
-            <a:off x="5852160" y="1371600"/>
-            <a:ext cx="2743200" cy="2743200"/>
-          </a:xfrm>
-          <a:prstGeom prst="rect">
-            <a:avLst/>
-          </a:prstGeom>
-        </p:spPr>
-      </p:pic>
     </p:spTree>
   </p:cSld>
   <p:clrMapOvr>
@@ -4022,9 +3998,9 @@
                 <a:solidFill>
                   <a:srgbClr val="141416"/>
                 </a:solidFill>
-                <a:latin typeface="Yu Gothic" pitchFamily="34" charset="0"/>
-                <a:ea typeface="Yu Gothic" pitchFamily="34" charset="-122"/>
-                <a:cs typeface="Yu Gothic" pitchFamily="34" charset="-120"/>
+                <a:latin typeface="Yu Mincho" pitchFamily="34" charset="0"/>
+                <a:ea typeface="Yu Mincho" pitchFamily="34" charset="-122"/>
+                <a:cs typeface="Yu Mincho" pitchFamily="34" charset="-120"/>
               </a:rPr>
               <a:t>メンタルについて、</a:t>
             </a:r>
@@ -4042,9 +4018,9 @@
                 <a:solidFill>
                   <a:srgbClr val="141416"/>
                 </a:solidFill>
-                <a:latin typeface="Yu Gothic" pitchFamily="34" charset="0"/>
-                <a:ea typeface="Yu Gothic" pitchFamily="34" charset="-122"/>
-                <a:cs typeface="Yu Gothic" pitchFamily="34" charset="-120"/>
+                <a:latin typeface="Yu Mincho" pitchFamily="34" charset="0"/>
+                <a:ea typeface="Yu Mincho" pitchFamily="34" charset="-122"/>
+                <a:cs typeface="Yu Mincho" pitchFamily="34" charset="-120"/>
               </a:rPr>
               <a:t>こんなふうに思っていませんか？</a:t>
             </a:r>
@@ -4125,23 +4101,23 @@
         <p:spPr>
           <a:xfrm>
             <a:off x="932688" y="2286000"/>
-            <a:ext cx="5120640" cy="420624"/>
-          </a:xfrm>
-          <a:prstGeom prst="rect">
-            <a:avLst/>
-          </a:prstGeom>
-          <a:noFill/>
-          <a:ln/>
-        </p:spPr>
-        <p:txBody>
-          <a:bodyPr wrap="square" lIns="0" tIns="0" rIns="0" bIns="0" rtlCol="0" anchor="ctr"/>
-          <a:lstStyle/>
-          <a:p>
-            <a:pPr indent="0" marL="0">
-              <a:buNone/>
-            </a:pPr>
-            <a:r>
-              <a:rPr lang="en-US" sz="2000" dirty="0">
+            <a:ext cx="7132320" cy="420624"/>
+          </a:xfrm>
+          <a:prstGeom prst="rect">
+            <a:avLst/>
+          </a:prstGeom>
+          <a:noFill/>
+          <a:ln/>
+        </p:spPr>
+        <p:txBody>
+          <a:bodyPr wrap="square" lIns="0" tIns="0" rIns="0" bIns="0" rtlCol="0" anchor="ctr"/>
+          <a:lstStyle/>
+          <a:p>
+            <a:pPr indent="0" marL="0">
+              <a:buNone/>
+            </a:pPr>
+            <a:r>
+              <a:rPr lang="en-US" sz="2100" dirty="0">
                 <a:solidFill>
                   <a:srgbClr val="3B3634"/>
                 </a:solidFill>
@@ -4151,7 +4127,7 @@
               </a:rPr>
               <a:t>強い人が勝つ</a:t>
             </a:r>
-            <a:endParaRPr lang="en-US" sz="2000" dirty="0"/>
+            <a:endParaRPr lang="en-US" sz="2100" dirty="0"/>
           </a:p>
         </p:txBody>
       </p:sp>
@@ -4163,7 +4139,7 @@
         </p:nvSpPr>
         <p:spPr>
           <a:xfrm>
-            <a:off x="457200" y="2999232"/>
+            <a:off x="457200" y="3017520"/>
             <a:ext cx="310896" cy="310896"/>
           </a:xfrm>
           <a:prstGeom prst="ellipse">
@@ -4188,7 +4164,7 @@
         </p:nvSpPr>
         <p:spPr>
           <a:xfrm>
-            <a:off x="457200" y="2999232"/>
+            <a:off x="457200" y="3017520"/>
             <a:ext cx="310896" cy="310896"/>
           </a:xfrm>
           <a:prstGeom prst="rect">
@@ -4227,24 +4203,24 @@
         </p:nvSpPr>
         <p:spPr>
           <a:xfrm>
-            <a:off x="932688" y="2944368"/>
-            <a:ext cx="5120640" cy="420624"/>
-          </a:xfrm>
-          <a:prstGeom prst="rect">
-            <a:avLst/>
-          </a:prstGeom>
-          <a:noFill/>
-          <a:ln/>
-        </p:spPr>
-        <p:txBody>
-          <a:bodyPr wrap="square" lIns="0" tIns="0" rIns="0" bIns="0" rtlCol="0" anchor="ctr"/>
-          <a:lstStyle/>
-          <a:p>
-            <a:pPr indent="0" marL="0">
-              <a:buNone/>
-            </a:pPr>
-            <a:r>
-              <a:rPr lang="en-US" sz="2000" dirty="0">
+            <a:off x="932688" y="2962656"/>
+            <a:ext cx="7132320" cy="420624"/>
+          </a:xfrm>
+          <a:prstGeom prst="rect">
+            <a:avLst/>
+          </a:prstGeom>
+          <a:noFill/>
+          <a:ln/>
+        </p:spPr>
+        <p:txBody>
+          <a:bodyPr wrap="square" lIns="0" tIns="0" rIns="0" bIns="0" rtlCol="0" anchor="ctr"/>
+          <a:lstStyle/>
+          <a:p>
+            <a:pPr indent="0" marL="0">
+              <a:buNone/>
+            </a:pPr>
+            <a:r>
+              <a:rPr lang="en-US" sz="2100" dirty="0">
                 <a:solidFill>
                   <a:srgbClr val="3B3634"/>
                 </a:solidFill>
@@ -4254,7 +4230,7 @@
               </a:rPr>
               <a:t>不安は消さなければいけない</a:t>
             </a:r>
-            <a:endParaRPr lang="en-US" sz="2000" dirty="0"/>
+            <a:endParaRPr lang="en-US" sz="2100" dirty="0"/>
           </a:p>
         </p:txBody>
       </p:sp>
@@ -4266,7 +4242,7 @@
         </p:nvSpPr>
         <p:spPr>
           <a:xfrm>
-            <a:off x="457200" y="3657600"/>
+            <a:off x="457200" y="3694176"/>
             <a:ext cx="310896" cy="310896"/>
           </a:xfrm>
           <a:prstGeom prst="ellipse">
@@ -4291,7 +4267,7 @@
         </p:nvSpPr>
         <p:spPr>
           <a:xfrm>
-            <a:off x="457200" y="3657600"/>
+            <a:off x="457200" y="3694176"/>
             <a:ext cx="310896" cy="310896"/>
           </a:xfrm>
           <a:prstGeom prst="rect">
@@ -4330,24 +4306,24 @@
         </p:nvSpPr>
         <p:spPr>
           <a:xfrm>
-            <a:off x="932688" y="3602736"/>
-            <a:ext cx="5120640" cy="420624"/>
-          </a:xfrm>
-          <a:prstGeom prst="rect">
-            <a:avLst/>
-          </a:prstGeom>
-          <a:noFill/>
-          <a:ln/>
-        </p:spPr>
-        <p:txBody>
-          <a:bodyPr wrap="square" lIns="0" tIns="0" rIns="0" bIns="0" rtlCol="0" anchor="ctr"/>
-          <a:lstStyle/>
-          <a:p>
-            <a:pPr indent="0" marL="0">
-              <a:buNone/>
-            </a:pPr>
-            <a:r>
-              <a:rPr lang="en-US" sz="2000" dirty="0">
+            <a:off x="932688" y="3639312"/>
+            <a:ext cx="7132320" cy="420624"/>
+          </a:xfrm>
+          <a:prstGeom prst="rect">
+            <a:avLst/>
+          </a:prstGeom>
+          <a:noFill/>
+          <a:ln/>
+        </p:spPr>
+        <p:txBody>
+          <a:bodyPr wrap="square" lIns="0" tIns="0" rIns="0" bIns="0" rtlCol="0" anchor="ctr"/>
+          <a:lstStyle/>
+          <a:p>
+            <a:pPr indent="0" marL="0">
+              <a:buNone/>
+            </a:pPr>
+            <a:r>
+              <a:rPr lang="en-US" sz="2100" dirty="0">
                 <a:solidFill>
                   <a:srgbClr val="3B3634"/>
                 </a:solidFill>
@@ -4357,7 +4333,7 @@
               </a:rPr>
               <a:t>本番に弱いのは性格だから仕方ない</a:t>
             </a:r>
-            <a:endParaRPr lang="en-US" sz="2000" dirty="0"/>
+            <a:endParaRPr lang="en-US" sz="2100" dirty="0"/>
           </a:p>
         </p:txBody>
       </p:sp>
@@ -4369,8 +4345,8 @@
         </p:nvSpPr>
         <p:spPr>
           <a:xfrm>
-            <a:off x="457200" y="4343400"/>
-            <a:ext cx="5486400" cy="411480"/>
+            <a:off x="457200" y="4434840"/>
+            <a:ext cx="7863840" cy="411480"/>
           </a:xfrm>
           <a:prstGeom prst="rect">
             <a:avLst/>
@@ -4400,30 +4376,6 @@
           </a:p>
         </p:txBody>
       </p:sp>
-      <p:pic>
-        <p:nvPicPr>
-          <p:cNvPr id="15" name="Image 0" descr="preencoded.png">    </p:cNvPr>
-          <p:cNvPicPr>
-            <a:picLocks noChangeAspect="1"/>
-          </p:cNvPicPr>
-          <p:nvPr/>
-        </p:nvPicPr>
-        <p:blipFill>
-          <a:blip r:embed="rId1"/>
-          <a:stretch>
-            <a:fillRect/>
-          </a:stretch>
-        </p:blipFill>
-        <p:spPr>
-          <a:xfrm>
-            <a:off x="6400800" y="2103120"/>
-            <a:ext cx="2286000" cy="2286000"/>
-          </a:xfrm>
-          <a:prstGeom prst="rect">
-            <a:avLst/>
-          </a:prstGeom>
-        </p:spPr>
-      </p:pic>
     </p:spTree>
   </p:cSld>
   <p:clrMapOvr>
@@ -4582,7 +4534,7 @@
         <p:spPr>
           <a:xfrm>
             <a:off x="457200" y="1188720"/>
-            <a:ext cx="5760720" cy="1188720"/>
+            <a:ext cx="7863840" cy="1188720"/>
           </a:xfrm>
           <a:prstGeom prst="rect">
             <a:avLst/>
@@ -4596,22 +4548,22 @@
           <a:p>
             <a:pPr algn="l" indent="0" marL="0">
               <a:lnSpc>
-                <a:spcPts val="4060"/>
+                <a:spcPts val="4640"/>
               </a:lnSpc>
               <a:buNone/>
             </a:pPr>
             <a:r>
-              <a:rPr lang="en-US" sz="2800" b="1" dirty="0">
+              <a:rPr lang="en-US" sz="3200" b="1" dirty="0">
                 <a:solidFill>
                   <a:srgbClr val="141416"/>
                 </a:solidFill>
-                <a:latin typeface="Yu Gothic" pitchFamily="34" charset="0"/>
-                <a:ea typeface="Yu Gothic" pitchFamily="34" charset="-122"/>
-                <a:cs typeface="Yu Gothic" pitchFamily="34" charset="-120"/>
+                <a:latin typeface="Yu Mincho" pitchFamily="34" charset="0"/>
+                <a:ea typeface="Yu Mincho" pitchFamily="34" charset="-122"/>
+                <a:cs typeface="Yu Mincho" pitchFamily="34" charset="-120"/>
               </a:rPr>
               <a:t>「メンタルが強い人が勝つ」</a:t>
             </a:r>
-            <a:endParaRPr lang="en-US" sz="2800" dirty="0"/>
+            <a:endParaRPr lang="en-US" sz="3200" dirty="0"/>
           </a:p>
         </p:txBody>
       </p:sp>
@@ -4623,12 +4575,12 @@
         </p:nvSpPr>
         <p:spPr>
           <a:xfrm>
-            <a:off x="457200" y="2514600"/>
-            <a:ext cx="5120640" cy="685800"/>
+            <a:off x="457200" y="2240280"/>
+            <a:ext cx="7863840" cy="731520"/>
           </a:xfrm>
           <a:prstGeom prst="roundRect">
             <a:avLst>
-              <a:gd name="adj" fmla="val 9333"/>
+              <a:gd name="adj" fmla="val 8750"/>
             </a:avLst>
           </a:prstGeom>
           <a:solidFill>
@@ -4650,24 +4602,24 @@
         </p:nvSpPr>
         <p:spPr>
           <a:xfrm>
-            <a:off x="777240" y="2514600"/>
-            <a:ext cx="4754880" cy="685800"/>
-          </a:xfrm>
-          <a:prstGeom prst="rect">
-            <a:avLst/>
-          </a:prstGeom>
-          <a:noFill/>
-          <a:ln/>
-        </p:spPr>
-        <p:txBody>
-          <a:bodyPr wrap="square" lIns="0" tIns="0" rIns="0" bIns="0" rtlCol="0" anchor="ctr"/>
-          <a:lstStyle/>
-          <a:p>
-            <a:pPr indent="0" marL="0">
-              <a:buNone/>
-            </a:pPr>
-            <a:r>
-              <a:rPr lang="en-US" sz="2000" b="1" dirty="0">
+            <a:off x="822960" y="2240280"/>
+            <a:ext cx="7406640" cy="731520"/>
+          </a:xfrm>
+          <a:prstGeom prst="rect">
+            <a:avLst/>
+          </a:prstGeom>
+          <a:noFill/>
+          <a:ln/>
+        </p:spPr>
+        <p:txBody>
+          <a:bodyPr wrap="square" lIns="0" tIns="0" rIns="0" bIns="0" rtlCol="0" anchor="ctr"/>
+          <a:lstStyle/>
+          <a:p>
+            <a:pPr indent="0" marL="0">
+              <a:buNone/>
+            </a:pPr>
+            <a:r>
+              <a:rPr lang="en-US" sz="2100" b="1" dirty="0">
                 <a:solidFill>
                   <a:srgbClr val="7A1524"/>
                 </a:solidFill>
@@ -4677,7 +4629,7 @@
               </a:rPr>
               <a:t>違います。</a:t>
             </a:r>
-            <a:endParaRPr lang="en-US" sz="2000" dirty="0"/>
+            <a:endParaRPr lang="en-US" sz="2100" dirty="0"/>
           </a:p>
         </p:txBody>
       </p:sp>
@@ -4689,8 +4641,8 @@
         </p:nvSpPr>
         <p:spPr>
           <a:xfrm>
-            <a:off x="457200" y="3429000"/>
-            <a:ext cx="5212080" cy="1371600"/>
+            <a:off x="457200" y="3291840"/>
+            <a:ext cx="7863840" cy="1463040"/>
           </a:xfrm>
           <a:prstGeom prst="rect">
             <a:avLst/>
@@ -4704,12 +4656,12 @@
           <a:p>
             <a:pPr indent="0" marL="0">
               <a:lnSpc>
-                <a:spcPts val="3000"/>
+                <a:spcPts val="3200"/>
               </a:lnSpc>
               <a:buNone/>
             </a:pPr>
             <a:r>
-              <a:rPr lang="en-US" sz="1800" dirty="0">
+              <a:rPr lang="en-US" sz="1900" dirty="0">
                 <a:solidFill>
                   <a:srgbClr val="3B3634"/>
                 </a:solidFill>
@@ -4719,17 +4671,17 @@
               </a:rPr>
               <a:t>必要なのは「強い気持ち」より、</a:t>
             </a:r>
-            <a:endParaRPr lang="en-US" sz="1800" dirty="0"/>
+            <a:endParaRPr lang="en-US" sz="1900" dirty="0"/>
           </a:p>
           <a:p>
             <a:pPr indent="0" marL="0">
               <a:lnSpc>
-                <a:spcPts val="3000"/>
+                <a:spcPts val="3200"/>
               </a:lnSpc>
               <a:buNone/>
             </a:pPr>
             <a:r>
-              <a:rPr lang="en-US" sz="1800" dirty="0">
+              <a:rPr lang="en-US" sz="1900" dirty="0">
                 <a:solidFill>
                   <a:srgbClr val="3B3634"/>
                 </a:solidFill>
@@ -4739,17 +4691,17 @@
               </a:rPr>
               <a:t>大事な場面で</a:t>
             </a:r>
-            <a:endParaRPr lang="en-US" sz="1800" dirty="0"/>
+            <a:endParaRPr lang="en-US" sz="1900" dirty="0"/>
           </a:p>
           <a:p>
             <a:pPr indent="0" marL="0">
               <a:lnSpc>
-                <a:spcPts val="3000"/>
+                <a:spcPts val="3200"/>
               </a:lnSpc>
               <a:buNone/>
             </a:pPr>
             <a:r>
-              <a:rPr lang="en-US" sz="1800" dirty="0">
+              <a:rPr lang="en-US" sz="1900" dirty="0">
                 <a:solidFill>
                   <a:srgbClr val="3B3634"/>
                 </a:solidFill>
@@ -4759,34 +4711,10 @@
               </a:rPr>
               <a:t>「何をするかがわかること」。</a:t>
             </a:r>
-            <a:endParaRPr lang="en-US" sz="1800" dirty="0"/>
-          </a:p>
-        </p:txBody>
-      </p:sp>
-      <p:pic>
-        <p:nvPicPr>
-          <p:cNvPr id="9" name="Image 0" descr="preencoded.png">    </p:cNvPr>
-          <p:cNvPicPr>
-            <a:picLocks noChangeAspect="1"/>
-          </p:cNvPicPr>
-          <p:nvPr/>
-        </p:nvPicPr>
-        <p:blipFill>
-          <a:blip r:embed="rId1"/>
-          <a:stretch>
-            <a:fillRect/>
-          </a:stretch>
-        </p:blipFill>
-        <p:spPr>
-          <a:xfrm>
-            <a:off x="6492240" y="1828800"/>
-            <a:ext cx="2194560" cy="2194560"/>
-          </a:xfrm>
-          <a:prstGeom prst="rect">
-            <a:avLst/>
-          </a:prstGeom>
-        </p:spPr>
-      </p:pic>
+            <a:endParaRPr lang="en-US" sz="1900" dirty="0"/>
+          </a:p>
+        </p:txBody>
+      </p:sp>
     </p:spTree>
   </p:cSld>
   <p:clrMapOvr>
@@ -4945,7 +4873,7 @@
         <p:spPr>
           <a:xfrm>
             <a:off x="457200" y="1188720"/>
-            <a:ext cx="5760720" cy="1188720"/>
+            <a:ext cx="7863840" cy="1188720"/>
           </a:xfrm>
           <a:prstGeom prst="rect">
             <a:avLst/>
@@ -4959,22 +4887,22 @@
           <a:p>
             <a:pPr algn="l" indent="0" marL="0">
               <a:lnSpc>
-                <a:spcPts val="4060"/>
+                <a:spcPts val="4640"/>
               </a:lnSpc>
               <a:buNone/>
             </a:pPr>
             <a:r>
-              <a:rPr lang="en-US" sz="2800" b="1" dirty="0">
+              <a:rPr lang="en-US" sz="3200" b="1" dirty="0">
                 <a:solidFill>
                   <a:srgbClr val="141416"/>
                 </a:solidFill>
-                <a:latin typeface="Yu Gothic" pitchFamily="34" charset="0"/>
-                <a:ea typeface="Yu Gothic" pitchFamily="34" charset="-122"/>
-                <a:cs typeface="Yu Gothic" pitchFamily="34" charset="-120"/>
+                <a:latin typeface="Yu Mincho" pitchFamily="34" charset="0"/>
+                <a:ea typeface="Yu Mincho" pitchFamily="34" charset="-122"/>
+                <a:cs typeface="Yu Mincho" pitchFamily="34" charset="-120"/>
               </a:rPr>
               <a:t>「不安は消さないといけない」</a:t>
             </a:r>
-            <a:endParaRPr lang="en-US" sz="2800" dirty="0"/>
+            <a:endParaRPr lang="en-US" sz="3200" dirty="0"/>
           </a:p>
         </p:txBody>
       </p:sp>
@@ -4986,12 +4914,12 @@
         </p:nvSpPr>
         <p:spPr>
           <a:xfrm>
-            <a:off x="457200" y="2514600"/>
-            <a:ext cx="5120640" cy="685800"/>
+            <a:off x="457200" y="2240280"/>
+            <a:ext cx="7863840" cy="731520"/>
           </a:xfrm>
           <a:prstGeom prst="roundRect">
             <a:avLst>
-              <a:gd name="adj" fmla="val 9333"/>
+              <a:gd name="adj" fmla="val 8750"/>
             </a:avLst>
           </a:prstGeom>
           <a:solidFill>
@@ -5013,24 +4941,24 @@
         </p:nvSpPr>
         <p:spPr>
           <a:xfrm>
-            <a:off x="777240" y="2514600"/>
-            <a:ext cx="4754880" cy="685800"/>
-          </a:xfrm>
-          <a:prstGeom prst="rect">
-            <a:avLst/>
-          </a:prstGeom>
-          <a:noFill/>
-          <a:ln/>
-        </p:spPr>
-        <p:txBody>
-          <a:bodyPr wrap="square" lIns="0" tIns="0" rIns="0" bIns="0" rtlCol="0" anchor="ctr"/>
-          <a:lstStyle/>
-          <a:p>
-            <a:pPr indent="0" marL="0">
-              <a:buNone/>
-            </a:pPr>
-            <a:r>
-              <a:rPr lang="en-US" sz="2000" b="1" dirty="0">
+            <a:off x="822960" y="2240280"/>
+            <a:ext cx="7406640" cy="731520"/>
+          </a:xfrm>
+          <a:prstGeom prst="rect">
+            <a:avLst/>
+          </a:prstGeom>
+          <a:noFill/>
+          <a:ln/>
+        </p:spPr>
+        <p:txBody>
+          <a:bodyPr wrap="square" lIns="0" tIns="0" rIns="0" bIns="0" rtlCol="0" anchor="ctr"/>
+          <a:lstStyle/>
+          <a:p>
+            <a:pPr indent="0" marL="0">
+              <a:buNone/>
+            </a:pPr>
+            <a:r>
+              <a:rPr lang="en-US" sz="2100" b="1" dirty="0">
                 <a:solidFill>
                   <a:srgbClr val="7A1524"/>
                 </a:solidFill>
@@ -5040,7 +4968,7 @@
               </a:rPr>
               <a:t>塗り替えなくていい。</a:t>
             </a:r>
-            <a:endParaRPr lang="en-US" sz="2000" dirty="0"/>
+            <a:endParaRPr lang="en-US" sz="2100" dirty="0"/>
           </a:p>
         </p:txBody>
       </p:sp>
@@ -5052,8 +4980,8 @@
         </p:nvSpPr>
         <p:spPr>
           <a:xfrm>
-            <a:off x="457200" y="3429000"/>
-            <a:ext cx="5212080" cy="1371600"/>
+            <a:off x="457200" y="3291840"/>
+            <a:ext cx="7863840" cy="1463040"/>
           </a:xfrm>
           <a:prstGeom prst="rect">
             <a:avLst/>
@@ -5067,12 +4995,12 @@
           <a:p>
             <a:pPr indent="0" marL="0">
               <a:lnSpc>
-                <a:spcPts val="3000"/>
+                <a:spcPts val="3200"/>
               </a:lnSpc>
               <a:buNone/>
             </a:pPr>
             <a:r>
-              <a:rPr lang="en-US" sz="1800" dirty="0">
+              <a:rPr lang="en-US" sz="1900" dirty="0">
                 <a:solidFill>
                   <a:srgbClr val="3B3634"/>
                 </a:solidFill>
@@ -5082,17 +5010,17 @@
               </a:rPr>
               <a:t>まず「私は今、不安なんだ」とわかる。</a:t>
             </a:r>
-            <a:endParaRPr lang="en-US" sz="1800" dirty="0"/>
+            <a:endParaRPr lang="en-US" sz="1900" dirty="0"/>
           </a:p>
           <a:p>
             <a:pPr indent="0" marL="0">
               <a:lnSpc>
-                <a:spcPts val="3000"/>
+                <a:spcPts val="3200"/>
               </a:lnSpc>
               <a:buNone/>
             </a:pPr>
             <a:r>
-              <a:rPr lang="en-US" sz="1800" dirty="0">
+              <a:rPr lang="en-US" sz="1900" dirty="0">
                 <a:solidFill>
                   <a:srgbClr val="3B3634"/>
                 </a:solidFill>
@@ -5102,17 +5030,17 @@
               </a:rPr>
               <a:t>そして「何が不安なの？」</a:t>
             </a:r>
-            <a:endParaRPr lang="en-US" sz="1800" dirty="0"/>
+            <a:endParaRPr lang="en-US" sz="1900" dirty="0"/>
           </a:p>
           <a:p>
             <a:pPr indent="0" marL="0">
               <a:lnSpc>
-                <a:spcPts val="3000"/>
+                <a:spcPts val="3200"/>
               </a:lnSpc>
               <a:buNone/>
             </a:pPr>
             <a:r>
-              <a:rPr lang="en-US" sz="1800" dirty="0">
+              <a:rPr lang="en-US" sz="1900" dirty="0">
                 <a:solidFill>
                   <a:srgbClr val="3B3634"/>
                 </a:solidFill>
@@ -5122,34 +5050,10 @@
               </a:rPr>
               <a:t>を整理する。</a:t>
             </a:r>
-            <a:endParaRPr lang="en-US" sz="1800" dirty="0"/>
-          </a:p>
-        </p:txBody>
-      </p:sp>
-      <p:pic>
-        <p:nvPicPr>
-          <p:cNvPr id="9" name="Image 0" descr="preencoded.png">    </p:cNvPr>
-          <p:cNvPicPr>
-            <a:picLocks noChangeAspect="1"/>
-          </p:cNvPicPr>
-          <p:nvPr/>
-        </p:nvPicPr>
-        <p:blipFill>
-          <a:blip r:embed="rId1"/>
-          <a:stretch>
-            <a:fillRect/>
-          </a:stretch>
-        </p:blipFill>
-        <p:spPr>
-          <a:xfrm>
-            <a:off x="6492240" y="1828800"/>
-            <a:ext cx="2194560" cy="2194560"/>
-          </a:xfrm>
-          <a:prstGeom prst="rect">
-            <a:avLst/>
-          </a:prstGeom>
-        </p:spPr>
-      </p:pic>
+            <a:endParaRPr lang="en-US" sz="1900" dirty="0"/>
+          </a:p>
+        </p:txBody>
+      </p:sp>
     </p:spTree>
   </p:cSld>
   <p:clrMapOvr>
@@ -5308,7 +5212,7 @@
         <p:spPr>
           <a:xfrm>
             <a:off x="457200" y="1188720"/>
-            <a:ext cx="5760720" cy="1188720"/>
+            <a:ext cx="7863840" cy="1188720"/>
           </a:xfrm>
           <a:prstGeom prst="rect">
             <a:avLst/>
@@ -5322,22 +5226,22 @@
           <a:p>
             <a:pPr algn="l" indent="0" marL="0">
               <a:lnSpc>
-                <a:spcPts val="4060"/>
+                <a:spcPts val="4640"/>
               </a:lnSpc>
               <a:buNone/>
             </a:pPr>
             <a:r>
-              <a:rPr lang="en-US" sz="2800" b="1" dirty="0">
+              <a:rPr lang="en-US" sz="3200" b="1" dirty="0">
                 <a:solidFill>
                   <a:srgbClr val="141416"/>
                 </a:solidFill>
-                <a:latin typeface="Yu Gothic" pitchFamily="34" charset="0"/>
-                <a:ea typeface="Yu Gothic" pitchFamily="34" charset="-122"/>
-                <a:cs typeface="Yu Gothic" pitchFamily="34" charset="-120"/>
+                <a:latin typeface="Yu Mincho" pitchFamily="34" charset="0"/>
+                <a:ea typeface="Yu Mincho" pitchFamily="34" charset="-122"/>
+                <a:cs typeface="Yu Mincho" pitchFamily="34" charset="-120"/>
               </a:rPr>
               <a:t>「私は本番に弱い」</a:t>
             </a:r>
-            <a:endParaRPr lang="en-US" sz="2800" dirty="0"/>
+            <a:endParaRPr lang="en-US" sz="3200" dirty="0"/>
           </a:p>
         </p:txBody>
       </p:sp>
@@ -5349,12 +5253,12 @@
         </p:nvSpPr>
         <p:spPr>
           <a:xfrm>
-            <a:off x="457200" y="2514600"/>
-            <a:ext cx="5120640" cy="685800"/>
+            <a:off x="457200" y="2240280"/>
+            <a:ext cx="7863840" cy="731520"/>
           </a:xfrm>
           <a:prstGeom prst="roundRect">
             <a:avLst>
-              <a:gd name="adj" fmla="val 9333"/>
+              <a:gd name="adj" fmla="val 8750"/>
             </a:avLst>
           </a:prstGeom>
           <a:solidFill>
@@ -5376,24 +5280,24 @@
         </p:nvSpPr>
         <p:spPr>
           <a:xfrm>
-            <a:off x="777240" y="2514600"/>
-            <a:ext cx="4754880" cy="685800"/>
-          </a:xfrm>
-          <a:prstGeom prst="rect">
-            <a:avLst/>
-          </a:prstGeom>
-          <a:noFill/>
-          <a:ln/>
-        </p:spPr>
-        <p:txBody>
-          <a:bodyPr wrap="square" lIns="0" tIns="0" rIns="0" bIns="0" rtlCol="0" anchor="ctr"/>
-          <a:lstStyle/>
-          <a:p>
-            <a:pPr indent="0" marL="0">
-              <a:buNone/>
-            </a:pPr>
-            <a:r>
-              <a:rPr lang="en-US" sz="2000" b="1" dirty="0">
+            <a:off x="822960" y="2240280"/>
+            <a:ext cx="7406640" cy="731520"/>
+          </a:xfrm>
+          <a:prstGeom prst="rect">
+            <a:avLst/>
+          </a:prstGeom>
+          <a:noFill/>
+          <a:ln/>
+        </p:spPr>
+        <p:txBody>
+          <a:bodyPr wrap="square" lIns="0" tIns="0" rIns="0" bIns="0" rtlCol="0" anchor="ctr"/>
+          <a:lstStyle/>
+          <a:p>
+            <a:pPr indent="0" marL="0">
+              <a:buNone/>
+            </a:pPr>
+            <a:r>
+              <a:rPr lang="en-US" sz="2100" b="1" dirty="0">
                 <a:solidFill>
                   <a:srgbClr val="7A1524"/>
                 </a:solidFill>
@@ -5403,7 +5307,7 @@
               </a:rPr>
               <a:t>決めつけないで。</a:t>
             </a:r>
-            <a:endParaRPr lang="en-US" sz="2000" dirty="0"/>
+            <a:endParaRPr lang="en-US" sz="2100" dirty="0"/>
           </a:p>
         </p:txBody>
       </p:sp>
@@ -5415,8 +5319,8 @@
         </p:nvSpPr>
         <p:spPr>
           <a:xfrm>
-            <a:off x="457200" y="3429000"/>
-            <a:ext cx="5212080" cy="1371600"/>
+            <a:off x="457200" y="3291840"/>
+            <a:ext cx="7863840" cy="1463040"/>
           </a:xfrm>
           <a:prstGeom prst="rect">
             <a:avLst/>
@@ -5430,12 +5334,12 @@
           <a:p>
             <a:pPr indent="0" marL="0">
               <a:lnSpc>
-                <a:spcPts val="3000"/>
+                <a:spcPts val="3200"/>
               </a:lnSpc>
               <a:buNone/>
             </a:pPr>
             <a:r>
-              <a:rPr lang="en-US" sz="1800" dirty="0">
+              <a:rPr lang="en-US" sz="1900" dirty="0">
                 <a:solidFill>
                   <a:srgbClr val="3B3634"/>
                 </a:solidFill>
@@ -5445,17 +5349,17 @@
               </a:rPr>
               <a:t>「どんな場面で、どうなりやすい？」</a:t>
             </a:r>
-            <a:endParaRPr lang="en-US" sz="1800" dirty="0"/>
+            <a:endParaRPr lang="en-US" sz="1900" dirty="0"/>
           </a:p>
           <a:p>
             <a:pPr indent="0" marL="0">
               <a:lnSpc>
-                <a:spcPts val="3000"/>
+                <a:spcPts val="3200"/>
               </a:lnSpc>
               <a:buNone/>
             </a:pPr>
             <a:r>
-              <a:rPr lang="en-US" sz="1800" dirty="0">
+              <a:rPr lang="en-US" sz="1900" dirty="0">
                 <a:solidFill>
                   <a:srgbClr val="3B3634"/>
                 </a:solidFill>
@@ -5465,17 +5369,17 @@
               </a:rPr>
               <a:t>を知る。</a:t>
             </a:r>
-            <a:endParaRPr lang="en-US" sz="1800" dirty="0"/>
+            <a:endParaRPr lang="en-US" sz="1900" dirty="0"/>
           </a:p>
           <a:p>
             <a:pPr indent="0" marL="0">
               <a:lnSpc>
-                <a:spcPts val="3000"/>
+                <a:spcPts val="3200"/>
               </a:lnSpc>
               <a:buNone/>
             </a:pPr>
             <a:r>
-              <a:rPr lang="en-US" sz="1800" dirty="0">
+              <a:rPr lang="en-US" sz="1900" dirty="0">
                 <a:solidFill>
                   <a:srgbClr val="3B3634"/>
                 </a:solidFill>
@@ -5485,34 +5389,10 @@
               </a:rPr>
               <a:t>性格ではなく、パターンとして見る。</a:t>
             </a:r>
-            <a:endParaRPr lang="en-US" sz="1800" dirty="0"/>
-          </a:p>
-        </p:txBody>
-      </p:sp>
-      <p:pic>
-        <p:nvPicPr>
-          <p:cNvPr id="9" name="Image 0" descr="preencoded.png">    </p:cNvPr>
-          <p:cNvPicPr>
-            <a:picLocks noChangeAspect="1"/>
-          </p:cNvPicPr>
-          <p:nvPr/>
-        </p:nvPicPr>
-        <p:blipFill>
-          <a:blip r:embed="rId1"/>
-          <a:stretch>
-            <a:fillRect/>
-          </a:stretch>
-        </p:blipFill>
-        <p:spPr>
-          <a:xfrm>
-            <a:off x="6492240" y="1828800"/>
-            <a:ext cx="2194560" cy="2194560"/>
-          </a:xfrm>
-          <a:prstGeom prst="rect">
-            <a:avLst/>
-          </a:prstGeom>
-        </p:spPr>
-      </p:pic>
+            <a:endParaRPr lang="en-US" sz="1900" dirty="0"/>
+          </a:p>
+        </p:txBody>
+      </p:sp>
     </p:spTree>
   </p:cSld>
   <p:clrMapOvr>
@@ -5632,7 +5512,7 @@
         <p:spPr>
           <a:xfrm>
             <a:off x="457200" y="841248"/>
-            <a:ext cx="5760720" cy="384048"/>
+            <a:ext cx="7863840" cy="384048"/>
           </a:xfrm>
           <a:prstGeom prst="rect">
             <a:avLst/>
@@ -5671,7 +5551,7 @@
         <p:spPr>
           <a:xfrm>
             <a:off x="457200" y="1371600"/>
-            <a:ext cx="5760720" cy="1371600"/>
+            <a:ext cx="7863840" cy="1371600"/>
           </a:xfrm>
           <a:prstGeom prst="rect">
             <a:avLst/>
@@ -5694,9 +5574,9 @@
                 <a:solidFill>
                   <a:srgbClr val="FFFFFF"/>
                 </a:solidFill>
-                <a:latin typeface="Yu Gothic" pitchFamily="34" charset="0"/>
-                <a:ea typeface="Yu Gothic" pitchFamily="34" charset="-122"/>
-                <a:cs typeface="Yu Gothic" pitchFamily="34" charset="-120"/>
+                <a:latin typeface="Yu Mincho" pitchFamily="34" charset="0"/>
+                <a:ea typeface="Yu Mincho" pitchFamily="34" charset="-122"/>
+                <a:cs typeface="Yu Mincho" pitchFamily="34" charset="-120"/>
               </a:rPr>
               <a:t>自分しか、</a:t>
             </a:r>
@@ -5714,9 +5594,9 @@
                 <a:solidFill>
                   <a:srgbClr val="FFFFFF"/>
                 </a:solidFill>
-                <a:latin typeface="Yu Gothic" pitchFamily="34" charset="0"/>
-                <a:ea typeface="Yu Gothic" pitchFamily="34" charset="-122"/>
-                <a:cs typeface="Yu Gothic" pitchFamily="34" charset="-120"/>
+                <a:latin typeface="Yu Mincho" pitchFamily="34" charset="0"/>
+                <a:ea typeface="Yu Mincho" pitchFamily="34" charset="-122"/>
+                <a:cs typeface="Yu Mincho" pitchFamily="34" charset="-120"/>
               </a:rPr>
               <a:t>自分のメンタルは変えられない。</a:t>
             </a:r>
@@ -5732,24 +5612,24 @@
         </p:nvSpPr>
         <p:spPr>
           <a:xfrm>
-            <a:off x="457200" y="2880360"/>
-            <a:ext cx="5760720" cy="457200"/>
-          </a:xfrm>
-          <a:prstGeom prst="rect">
-            <a:avLst/>
-          </a:prstGeom>
-          <a:noFill/>
-          <a:ln/>
-        </p:spPr>
-        <p:txBody>
-          <a:bodyPr wrap="square" lIns="0" tIns="0" rIns="0" bIns="0" rtlCol="0" anchor="ctr"/>
-          <a:lstStyle/>
-          <a:p>
-            <a:pPr indent="0" marL="0">
-              <a:buNone/>
-            </a:pPr>
-            <a:r>
-              <a:rPr lang="en-US" sz="1800" dirty="0">
+            <a:off x="457200" y="2971800"/>
+            <a:ext cx="7863840" cy="457200"/>
+          </a:xfrm>
+          <a:prstGeom prst="rect">
+            <a:avLst/>
+          </a:prstGeom>
+          <a:noFill/>
+          <a:ln/>
+        </p:spPr>
+        <p:txBody>
+          <a:bodyPr wrap="square" lIns="0" tIns="0" rIns="0" bIns="0" rtlCol="0" anchor="ctr"/>
+          <a:lstStyle/>
+          <a:p>
+            <a:pPr indent="0" marL="0">
+              <a:buNone/>
+            </a:pPr>
+            <a:r>
+              <a:rPr lang="en-US" sz="1900" dirty="0">
                 <a:solidFill>
                   <a:srgbClr val="E8D3D7"/>
                 </a:solidFill>
@@ -5759,7 +5639,7 @@
               </a:rPr>
               <a:t>でも逆に言えば、自分で変えることができる。</a:t>
             </a:r>
-            <a:endParaRPr lang="en-US" sz="1800" dirty="0"/>
+            <a:endParaRPr lang="en-US" sz="1900" dirty="0"/>
           </a:p>
         </p:txBody>
       </p:sp>
@@ -5771,8 +5651,8 @@
         </p:nvSpPr>
         <p:spPr>
           <a:xfrm>
-            <a:off x="457200" y="3611880"/>
-            <a:ext cx="5760720" cy="822960"/>
+            <a:off x="457200" y="3703320"/>
+            <a:ext cx="7863840" cy="822960"/>
           </a:xfrm>
           <a:prstGeom prst="roundRect">
             <a:avLst>
@@ -5798,24 +5678,24 @@
         </p:nvSpPr>
         <p:spPr>
           <a:xfrm>
-            <a:off x="777240" y="3611880"/>
-            <a:ext cx="5212080" cy="822960"/>
-          </a:xfrm>
-          <a:prstGeom prst="rect">
-            <a:avLst/>
-          </a:prstGeom>
-          <a:noFill/>
-          <a:ln/>
-        </p:spPr>
-        <p:txBody>
-          <a:bodyPr wrap="square" lIns="0" tIns="0" rIns="0" bIns="0" rtlCol="0" anchor="ctr"/>
-          <a:lstStyle/>
-          <a:p>
-            <a:pPr indent="0" marL="0">
-              <a:buNone/>
-            </a:pPr>
-            <a:r>
-              <a:rPr lang="en-US" sz="1800" b="1" dirty="0">
+            <a:off x="822960" y="3703320"/>
+            <a:ext cx="7406640" cy="822960"/>
+          </a:xfrm>
+          <a:prstGeom prst="rect">
+            <a:avLst/>
+          </a:prstGeom>
+          <a:noFill/>
+          <a:ln/>
+        </p:spPr>
+        <p:txBody>
+          <a:bodyPr wrap="square" lIns="0" tIns="0" rIns="0" bIns="0" rtlCol="0" anchor="ctr"/>
+          <a:lstStyle/>
+          <a:p>
+            <a:pPr indent="0" marL="0">
+              <a:buNone/>
+            </a:pPr>
+            <a:r>
+              <a:rPr lang="en-US" sz="1900" b="1" dirty="0">
                 <a:solidFill>
                   <a:srgbClr val="FFFFFF"/>
                 </a:solidFill>
@@ -5825,34 +5705,10 @@
               </a:rPr>
               <a:t>メンタルは、トレーニングできるスキルです。</a:t>
             </a:r>
-            <a:endParaRPr lang="en-US" sz="1800" dirty="0"/>
-          </a:p>
-        </p:txBody>
-      </p:sp>
-      <p:pic>
-        <p:nvPicPr>
-          <p:cNvPr id="9" name="Image 0" descr="preencoded.png">    </p:cNvPr>
-          <p:cNvPicPr>
-            <a:picLocks noChangeAspect="1"/>
-          </p:cNvPicPr>
-          <p:nvPr/>
-        </p:nvPicPr>
-        <p:blipFill>
-          <a:blip r:embed="rId1"/>
-          <a:stretch>
-            <a:fillRect/>
-          </a:stretch>
-        </p:blipFill>
-        <p:spPr>
-          <a:xfrm>
-            <a:off x="6492240" y="1737360"/>
-            <a:ext cx="2194560" cy="2194560"/>
-          </a:xfrm>
-          <a:prstGeom prst="rect">
-            <a:avLst/>
-          </a:prstGeom>
-        </p:spPr>
-      </p:pic>
+            <a:endParaRPr lang="en-US" sz="1900" dirty="0"/>
+          </a:p>
+        </p:txBody>
+      </p:sp>
     </p:spTree>
   </p:cSld>
   <p:clrMapOvr>
@@ -5995,9 +5851,9 @@
                 <a:solidFill>
                   <a:srgbClr val="141416"/>
                 </a:solidFill>
-                <a:latin typeface="Yu Gothic" pitchFamily="34" charset="0"/>
-                <a:ea typeface="Yu Gothic" pitchFamily="34" charset="-122"/>
-                <a:cs typeface="Yu Gothic" pitchFamily="34" charset="-120"/>
+                <a:latin typeface="Yu Mincho" pitchFamily="34" charset="0"/>
+                <a:ea typeface="Yu Mincho" pitchFamily="34" charset="-122"/>
+                <a:cs typeface="Yu Mincho" pitchFamily="34" charset="-120"/>
               </a:rPr>
               <a:t>メンタルトレーニングは</a:t>
             </a:r>
@@ -6015,9 +5871,9 @@
                 <a:solidFill>
                   <a:srgbClr val="141416"/>
                 </a:solidFill>
-                <a:latin typeface="Yu Gothic" pitchFamily="34" charset="0"/>
-                <a:ea typeface="Yu Gothic" pitchFamily="34" charset="-122"/>
-                <a:cs typeface="Yu Gothic" pitchFamily="34" charset="-120"/>
+                <a:latin typeface="Yu Mincho" pitchFamily="34" charset="0"/>
+                <a:ea typeface="Yu Mincho" pitchFamily="34" charset="-122"/>
+                <a:cs typeface="Yu Mincho" pitchFamily="34" charset="-120"/>
               </a:rPr>
               <a:t>「前向きになる練習」ではない</a:t>
             </a:r>
@@ -6098,23 +5954,23 @@
         <p:spPr>
           <a:xfrm>
             <a:off x="932688" y="2103120"/>
-            <a:ext cx="4754880" cy="420624"/>
-          </a:xfrm>
-          <a:prstGeom prst="rect">
-            <a:avLst/>
-          </a:prstGeom>
-          <a:noFill/>
-          <a:ln/>
-        </p:spPr>
-        <p:txBody>
-          <a:bodyPr wrap="square" lIns="0" tIns="0" rIns="0" bIns="0" rtlCol="0" anchor="ctr"/>
-          <a:lstStyle/>
-          <a:p>
-            <a:pPr indent="0" marL="0">
-              <a:buNone/>
-            </a:pPr>
-            <a:r>
-              <a:rPr lang="en-US" sz="1700" dirty="0">
+            <a:ext cx="7132320" cy="420624"/>
+          </a:xfrm>
+          <a:prstGeom prst="rect">
+            <a:avLst/>
+          </a:prstGeom>
+          <a:noFill/>
+          <a:ln/>
+        </p:spPr>
+        <p:txBody>
+          <a:bodyPr wrap="square" lIns="0" tIns="0" rIns="0" bIns="0" rtlCol="0" anchor="ctr"/>
+          <a:lstStyle/>
+          <a:p>
+            <a:pPr indent="0" marL="0">
+              <a:buNone/>
+            </a:pPr>
+            <a:r>
+              <a:rPr lang="en-US" sz="1800" dirty="0">
                 <a:solidFill>
                   <a:srgbClr val="3B3634"/>
                 </a:solidFill>
@@ -6124,7 +5980,7 @@
               </a:rPr>
               <a:t>今の状態がわかる</a:t>
             </a:r>
-            <a:endParaRPr lang="en-US" sz="1700" dirty="0"/>
+            <a:endParaRPr lang="en-US" sz="1800" dirty="0"/>
           </a:p>
         </p:txBody>
       </p:sp>
@@ -6136,7 +5992,7 @@
         </p:nvSpPr>
         <p:spPr>
           <a:xfrm>
-            <a:off x="457200" y="2633472"/>
+            <a:off x="457200" y="2651760"/>
             <a:ext cx="310896" cy="310896"/>
           </a:xfrm>
           <a:prstGeom prst="ellipse">
@@ -6161,7 +6017,7 @@
         </p:nvSpPr>
         <p:spPr>
           <a:xfrm>
-            <a:off x="457200" y="2633472"/>
+            <a:off x="457200" y="2651760"/>
             <a:ext cx="310896" cy="310896"/>
           </a:xfrm>
           <a:prstGeom prst="rect">
@@ -6200,24 +6056,24 @@
         </p:nvSpPr>
         <p:spPr>
           <a:xfrm>
-            <a:off x="932688" y="2578608"/>
-            <a:ext cx="4754880" cy="420624"/>
-          </a:xfrm>
-          <a:prstGeom prst="rect">
-            <a:avLst/>
-          </a:prstGeom>
-          <a:noFill/>
-          <a:ln/>
-        </p:spPr>
-        <p:txBody>
-          <a:bodyPr wrap="square" lIns="0" tIns="0" rIns="0" bIns="0" rtlCol="0" anchor="ctr"/>
-          <a:lstStyle/>
-          <a:p>
-            <a:pPr indent="0" marL="0">
-              <a:buNone/>
-            </a:pPr>
-            <a:r>
-              <a:rPr lang="en-US" sz="1700" dirty="0">
+            <a:off x="932688" y="2596896"/>
+            <a:ext cx="7132320" cy="420624"/>
+          </a:xfrm>
+          <a:prstGeom prst="rect">
+            <a:avLst/>
+          </a:prstGeom>
+          <a:noFill/>
+          <a:ln/>
+        </p:spPr>
+        <p:txBody>
+          <a:bodyPr wrap="square" lIns="0" tIns="0" rIns="0" bIns="0" rtlCol="0" anchor="ctr"/>
+          <a:lstStyle/>
+          <a:p>
+            <a:pPr indent="0" marL="0">
+              <a:buNone/>
+            </a:pPr>
+            <a:r>
+              <a:rPr lang="en-US" sz="1800" dirty="0">
                 <a:solidFill>
                   <a:srgbClr val="3B3634"/>
                 </a:solidFill>
@@ -6227,7 +6083,7 @@
               </a:rPr>
               <a:t>原因がわかる</a:t>
             </a:r>
-            <a:endParaRPr lang="en-US" sz="1700" dirty="0"/>
+            <a:endParaRPr lang="en-US" sz="1800" dirty="0"/>
           </a:p>
         </p:txBody>
       </p:sp>
@@ -6239,7 +6095,7 @@
         </p:nvSpPr>
         <p:spPr>
           <a:xfrm>
-            <a:off x="457200" y="3108960"/>
+            <a:off x="457200" y="3145536"/>
             <a:ext cx="310896" cy="310896"/>
           </a:xfrm>
           <a:prstGeom prst="ellipse">
@@ -6264,7 +6120,7 @@
         </p:nvSpPr>
         <p:spPr>
           <a:xfrm>
-            <a:off x="457200" y="3108960"/>
+            <a:off x="457200" y="3145536"/>
             <a:ext cx="310896" cy="310896"/>
           </a:xfrm>
           <a:prstGeom prst="rect">
@@ -6303,24 +6159,24 @@
         </p:nvSpPr>
         <p:spPr>
           <a:xfrm>
-            <a:off x="932688" y="3054096"/>
-            <a:ext cx="4754880" cy="420624"/>
-          </a:xfrm>
-          <a:prstGeom prst="rect">
-            <a:avLst/>
-          </a:prstGeom>
-          <a:noFill/>
-          <a:ln/>
-        </p:spPr>
-        <p:txBody>
-          <a:bodyPr wrap="square" lIns="0" tIns="0" rIns="0" bIns="0" rtlCol="0" anchor="ctr"/>
-          <a:lstStyle/>
-          <a:p>
-            <a:pPr indent="0" marL="0">
-              <a:buNone/>
-            </a:pPr>
-            <a:r>
-              <a:rPr lang="en-US" sz="1700" dirty="0">
+            <a:off x="932688" y="3090672"/>
+            <a:ext cx="7132320" cy="420624"/>
+          </a:xfrm>
+          <a:prstGeom prst="rect">
+            <a:avLst/>
+          </a:prstGeom>
+          <a:noFill/>
+          <a:ln/>
+        </p:spPr>
+        <p:txBody>
+          <a:bodyPr wrap="square" lIns="0" tIns="0" rIns="0" bIns="0" rtlCol="0" anchor="ctr"/>
+          <a:lstStyle/>
+          <a:p>
+            <a:pPr indent="0" marL="0">
+              <a:buNone/>
+            </a:pPr>
+            <a:r>
+              <a:rPr lang="en-US" sz="1800" dirty="0">
                 <a:solidFill>
                   <a:srgbClr val="3B3634"/>
                 </a:solidFill>
@@ -6330,7 +6186,7 @@
               </a:rPr>
               <a:t>自分で変えられることがわかる</a:t>
             </a:r>
-            <a:endParaRPr lang="en-US" sz="1700" dirty="0"/>
+            <a:endParaRPr lang="en-US" sz="1800" dirty="0"/>
           </a:p>
         </p:txBody>
       </p:sp>
@@ -6342,7 +6198,7 @@
         </p:nvSpPr>
         <p:spPr>
           <a:xfrm>
-            <a:off x="457200" y="3584448"/>
+            <a:off x="457200" y="3639312"/>
             <a:ext cx="310896" cy="310896"/>
           </a:xfrm>
           <a:prstGeom prst="ellipse">
@@ -6367,7 +6223,7 @@
         </p:nvSpPr>
         <p:spPr>
           <a:xfrm>
-            <a:off x="457200" y="3584448"/>
+            <a:off x="457200" y="3639312"/>
             <a:ext cx="310896" cy="310896"/>
           </a:xfrm>
           <a:prstGeom prst="rect">
@@ -6406,24 +6262,24 @@
         </p:nvSpPr>
         <p:spPr>
           <a:xfrm>
-            <a:off x="932688" y="3529584"/>
-            <a:ext cx="4754880" cy="420624"/>
-          </a:xfrm>
-          <a:prstGeom prst="rect">
-            <a:avLst/>
-          </a:prstGeom>
-          <a:noFill/>
-          <a:ln/>
-        </p:spPr>
-        <p:txBody>
-          <a:bodyPr wrap="square" lIns="0" tIns="0" rIns="0" bIns="0" rtlCol="0" anchor="ctr"/>
-          <a:lstStyle/>
-          <a:p>
-            <a:pPr indent="0" marL="0">
-              <a:buNone/>
-            </a:pPr>
-            <a:r>
-              <a:rPr lang="en-US" sz="1700" dirty="0">
+            <a:off x="932688" y="3584448"/>
+            <a:ext cx="7132320" cy="420624"/>
+          </a:xfrm>
+          <a:prstGeom prst="rect">
+            <a:avLst/>
+          </a:prstGeom>
+          <a:noFill/>
+          <a:ln/>
+        </p:spPr>
+        <p:txBody>
+          <a:bodyPr wrap="square" lIns="0" tIns="0" rIns="0" bIns="0" rtlCol="0" anchor="ctr"/>
+          <a:lstStyle/>
+          <a:p>
+            <a:pPr indent="0" marL="0">
+              <a:buNone/>
+            </a:pPr>
+            <a:r>
+              <a:rPr lang="en-US" sz="1800" dirty="0">
                 <a:solidFill>
                   <a:srgbClr val="3B3634"/>
                 </a:solidFill>
@@ -6433,7 +6289,7 @@
               </a:rPr>
               <a:t>次の行動を決める</a:t>
             </a:r>
-            <a:endParaRPr lang="en-US" sz="1700" dirty="0"/>
+            <a:endParaRPr lang="en-US" sz="1800" dirty="0"/>
           </a:p>
         </p:txBody>
       </p:sp>
@@ -6445,7 +6301,7 @@
         </p:nvSpPr>
         <p:spPr>
           <a:xfrm>
-            <a:off x="457200" y="4059936"/>
+            <a:off x="457200" y="4133088"/>
             <a:ext cx="310896" cy="310896"/>
           </a:xfrm>
           <a:prstGeom prst="ellipse">
@@ -6470,7 +6326,7 @@
         </p:nvSpPr>
         <p:spPr>
           <a:xfrm>
-            <a:off x="457200" y="4059936"/>
+            <a:off x="457200" y="4133088"/>
             <a:ext cx="310896" cy="310896"/>
           </a:xfrm>
           <a:prstGeom prst="rect">
@@ -6509,24 +6365,24 @@
         </p:nvSpPr>
         <p:spPr>
           <a:xfrm>
-            <a:off x="932688" y="4005072"/>
-            <a:ext cx="4754880" cy="420624"/>
-          </a:xfrm>
-          <a:prstGeom prst="rect">
-            <a:avLst/>
-          </a:prstGeom>
-          <a:noFill/>
-          <a:ln/>
-        </p:spPr>
-        <p:txBody>
-          <a:bodyPr wrap="square" lIns="0" tIns="0" rIns="0" bIns="0" rtlCol="0" anchor="ctr"/>
-          <a:lstStyle/>
-          <a:p>
-            <a:pPr indent="0" marL="0">
-              <a:buNone/>
-            </a:pPr>
-            <a:r>
-              <a:rPr lang="en-US" sz="1700" dirty="0">
+            <a:off x="932688" y="4078224"/>
+            <a:ext cx="7132320" cy="420624"/>
+          </a:xfrm>
+          <a:prstGeom prst="rect">
+            <a:avLst/>
+          </a:prstGeom>
+          <a:noFill/>
+          <a:ln/>
+        </p:spPr>
+        <p:txBody>
+          <a:bodyPr wrap="square" lIns="0" tIns="0" rIns="0" bIns="0" rtlCol="0" anchor="ctr"/>
+          <a:lstStyle/>
+          <a:p>
+            <a:pPr indent="0" marL="0">
+              <a:buNone/>
+            </a:pPr>
+            <a:r>
+              <a:rPr lang="en-US" sz="1800" dirty="0">
                 <a:solidFill>
                   <a:srgbClr val="3B3634"/>
                 </a:solidFill>
@@ -6536,7 +6392,7 @@
               </a:rPr>
               <a:t>実際にやってみる</a:t>
             </a:r>
-            <a:endParaRPr lang="en-US" sz="1700" dirty="0"/>
+            <a:endParaRPr lang="en-US" sz="1800" dirty="0"/>
           </a:p>
         </p:txBody>
       </p:sp>
@@ -6548,8 +6404,8 @@
         </p:nvSpPr>
         <p:spPr>
           <a:xfrm>
-            <a:off x="457200" y="4526280"/>
-            <a:ext cx="4572000" cy="384048"/>
+            <a:off x="457200" y="4572000"/>
+            <a:ext cx="7863840" cy="384048"/>
           </a:xfrm>
           <a:prstGeom prst="rect">
             <a:avLst/>
@@ -6579,30 +6435,6 @@
           </a:p>
         </p:txBody>
       </p:sp>
-      <p:pic>
-        <p:nvPicPr>
-          <p:cNvPr id="21" name="Image 0" descr="preencoded.png">    </p:cNvPr>
-          <p:cNvPicPr>
-            <a:picLocks noChangeAspect="1"/>
-          </p:cNvPicPr>
-          <p:nvPr/>
-        </p:nvPicPr>
-        <p:blipFill>
-          <a:blip r:embed="rId1"/>
-          <a:stretch>
-            <a:fillRect/>
-          </a:stretch>
-        </p:blipFill>
-        <p:spPr>
-          <a:xfrm>
-            <a:off x="6400800" y="2011680"/>
-            <a:ext cx="2286000" cy="2286000"/>
-          </a:xfrm>
-          <a:prstGeom prst="rect">
-            <a:avLst/>
-          </a:prstGeom>
-        </p:spPr>
-      </p:pic>
     </p:spTree>
   </p:cSld>
   <p:clrMapOvr>
@@ -6745,9 +6577,9 @@
                 <a:solidFill>
                   <a:srgbClr val="141416"/>
                 </a:solidFill>
-                <a:latin typeface="Yu Gothic" pitchFamily="34" charset="0"/>
-                <a:ea typeface="Yu Gothic" pitchFamily="34" charset="-122"/>
-                <a:cs typeface="Yu Gothic" pitchFamily="34" charset="-120"/>
+                <a:latin typeface="Yu Mincho" pitchFamily="34" charset="0"/>
+                <a:ea typeface="Yu Mincho" pitchFamily="34" charset="-122"/>
+                <a:cs typeface="Yu Mincho" pitchFamily="34" charset="-120"/>
               </a:rPr>
               <a:t>まず、不安を分解する</a:t>
             </a:r>
@@ -6764,7 +6596,7 @@
         <p:spPr>
           <a:xfrm>
             <a:off x="457200" y="1737360"/>
-            <a:ext cx="5669280" cy="640080"/>
+            <a:ext cx="7863840" cy="548640"/>
           </a:xfrm>
           <a:prstGeom prst="rect">
             <a:avLst/>
@@ -6778,12 +6610,12 @@
           <a:p>
             <a:pPr indent="0" marL="0">
               <a:lnSpc>
-                <a:spcPts val="2600"/>
+                <a:spcPts val="2800"/>
               </a:lnSpc>
               <a:buNone/>
             </a:pPr>
             <a:r>
-              <a:rPr lang="en-US" sz="1700" dirty="0">
+              <a:rPr lang="en-US" sz="1800" dirty="0">
                 <a:solidFill>
                   <a:srgbClr val="3B3634"/>
                 </a:solidFill>
@@ -6793,7 +6625,7 @@
               </a:rPr>
               <a:t>「試合が不安」だけでは、何をしたらいいかわかりません。</a:t>
             </a:r>
-            <a:endParaRPr lang="en-US" sz="1700" dirty="0"/>
+            <a:endParaRPr lang="en-US" sz="1800" dirty="0"/>
           </a:p>
         </p:txBody>
       </p:sp>
@@ -6805,12 +6637,12 @@
         </p:nvSpPr>
         <p:spPr>
           <a:xfrm>
-            <a:off x="457200" y="2487168"/>
-            <a:ext cx="5669280" cy="685800"/>
+            <a:off x="457200" y="2468880"/>
+            <a:ext cx="7863840" cy="621792"/>
           </a:xfrm>
           <a:prstGeom prst="roundRect">
             <a:avLst>
-              <a:gd name="adj" fmla="val 8000"/>
+              <a:gd name="adj" fmla="val 8824"/>
             </a:avLst>
           </a:prstGeom>
           <a:solidFill>
@@ -6832,24 +6664,24 @@
         </p:nvSpPr>
         <p:spPr>
           <a:xfrm>
-            <a:off x="713232" y="2487168"/>
-            <a:ext cx="5212080" cy="685800"/>
-          </a:xfrm>
-          <a:prstGeom prst="rect">
-            <a:avLst/>
-          </a:prstGeom>
-          <a:noFill/>
-          <a:ln/>
-        </p:spPr>
-        <p:txBody>
-          <a:bodyPr wrap="square" lIns="0" tIns="0" rIns="0" bIns="0" rtlCol="0" anchor="ctr"/>
-          <a:lstStyle/>
-          <a:p>
-            <a:pPr indent="0" marL="0">
-              <a:buNone/>
-            </a:pPr>
-            <a:r>
-              <a:rPr lang="en-US" sz="1600" dirty="0">
+            <a:off x="713232" y="2468880"/>
+            <a:ext cx="7406640" cy="621792"/>
+          </a:xfrm>
+          <a:prstGeom prst="rect">
+            <a:avLst/>
+          </a:prstGeom>
+          <a:noFill/>
+          <a:ln/>
+        </p:spPr>
+        <p:txBody>
+          <a:bodyPr wrap="square" lIns="0" tIns="0" rIns="0" bIns="0" rtlCol="0" anchor="ctr"/>
+          <a:lstStyle/>
+          <a:p>
+            <a:pPr indent="0" marL="0">
+              <a:buNone/>
+            </a:pPr>
+            <a:r>
+              <a:rPr lang="en-US" sz="1800" dirty="0">
                 <a:solidFill>
                   <a:srgbClr val="3B3634"/>
                 </a:solidFill>
@@ -6859,7 +6691,7 @@
               </a:rPr>
               <a:t>たとえば「3本目を失敗するのが怖い」</a:t>
             </a:r>
-            <a:endParaRPr lang="en-US" sz="1600" dirty="0"/>
+            <a:endParaRPr lang="en-US" sz="1800" dirty="0"/>
           </a:p>
         </p:txBody>
       </p:sp>
@@ -6871,12 +6703,12 @@
         </p:nvSpPr>
         <p:spPr>
           <a:xfrm>
-            <a:off x="457200" y="3264408"/>
-            <a:ext cx="5669280" cy="685800"/>
+            <a:off x="457200" y="3182112"/>
+            <a:ext cx="7863840" cy="621792"/>
           </a:xfrm>
           <a:prstGeom prst="roundRect">
             <a:avLst>
-              <a:gd name="adj" fmla="val 8000"/>
+              <a:gd name="adj" fmla="val 8824"/>
             </a:avLst>
           </a:prstGeom>
           <a:solidFill>
@@ -6898,24 +6730,24 @@
         </p:nvSpPr>
         <p:spPr>
           <a:xfrm>
-            <a:off x="713232" y="3264408"/>
-            <a:ext cx="5212080" cy="685800"/>
-          </a:xfrm>
-          <a:prstGeom prst="rect">
-            <a:avLst/>
-          </a:prstGeom>
-          <a:noFill/>
-          <a:ln/>
-        </p:spPr>
-        <p:txBody>
-          <a:bodyPr wrap="square" lIns="0" tIns="0" rIns="0" bIns="0" rtlCol="0" anchor="ctr"/>
-          <a:lstStyle/>
-          <a:p>
-            <a:pPr indent="0" marL="0">
-              <a:buNone/>
-            </a:pPr>
-            <a:r>
-              <a:rPr lang="en-US" sz="1600" dirty="0">
+            <a:off x="713232" y="3182112"/>
+            <a:ext cx="7406640" cy="621792"/>
+          </a:xfrm>
+          <a:prstGeom prst="rect">
+            <a:avLst/>
+          </a:prstGeom>
+          <a:noFill/>
+          <a:ln/>
+        </p:spPr>
+        <p:txBody>
+          <a:bodyPr wrap="square" lIns="0" tIns="0" rIns="0" bIns="0" rtlCol="0" anchor="ctr"/>
+          <a:lstStyle/>
+          <a:p>
+            <a:pPr indent="0" marL="0">
+              <a:buNone/>
+            </a:pPr>
+            <a:r>
+              <a:rPr lang="en-US" sz="1800" dirty="0">
                 <a:solidFill>
                   <a:srgbClr val="3B3634"/>
                 </a:solidFill>
@@ -6925,7 +6757,7 @@
               </a:rPr>
               <a:t>さらに「その失敗で、その後まで気持ちが崩れるのが怖い」</a:t>
             </a:r>
-            <a:endParaRPr lang="en-US" sz="1600" dirty="0"/>
+            <a:endParaRPr lang="en-US" sz="1800" dirty="0"/>
           </a:p>
         </p:txBody>
       </p:sp>
@@ -6937,8 +6769,8 @@
         </p:nvSpPr>
         <p:spPr>
           <a:xfrm>
-            <a:off x="457200" y="4160520"/>
-            <a:ext cx="5669280" cy="411480"/>
+            <a:off x="457200" y="4114800"/>
+            <a:ext cx="7863840" cy="411480"/>
           </a:xfrm>
           <a:prstGeom prst="rect">
             <a:avLst/>
@@ -6968,30 +6800,6 @@
           </a:p>
         </p:txBody>
       </p:sp>
-      <p:pic>
-        <p:nvPicPr>
-          <p:cNvPr id="11" name="Image 0" descr="preencoded.png">    </p:cNvPr>
-          <p:cNvPicPr>
-            <a:picLocks noChangeAspect="1"/>
-          </p:cNvPicPr>
-          <p:nvPr/>
-        </p:nvPicPr>
-        <p:blipFill>
-          <a:blip r:embed="rId1"/>
-          <a:stretch>
-            <a:fillRect/>
-          </a:stretch>
-        </p:blipFill>
-        <p:spPr>
-          <a:xfrm>
-            <a:off x="6492240" y="2103120"/>
-            <a:ext cx="2194560" cy="2194560"/>
-          </a:xfrm>
-          <a:prstGeom prst="rect">
-            <a:avLst/>
-          </a:prstGeom>
-        </p:spPr>
-      </p:pic>
     </p:spTree>
   </p:cSld>
   <p:clrMapOvr>
@@ -7134,9 +6942,9 @@
                 <a:solidFill>
                   <a:srgbClr val="141416"/>
                 </a:solidFill>
-                <a:latin typeface="Yu Gothic" pitchFamily="34" charset="0"/>
-                <a:ea typeface="Yu Gothic" pitchFamily="34" charset="-122"/>
-                <a:cs typeface="Yu Gothic" pitchFamily="34" charset="-120"/>
+                <a:latin typeface="Yu Mincho" pitchFamily="34" charset="0"/>
+                <a:ea typeface="Yu Mincho" pitchFamily="34" charset="-122"/>
+                <a:cs typeface="Yu Mincho" pitchFamily="34" charset="-120"/>
               </a:rPr>
               <a:t>次に、変えられることを分ける</a:t>
             </a:r>
@@ -7651,9 +7459,9 @@
                 <a:solidFill>
                   <a:srgbClr val="141416"/>
                 </a:solidFill>
-                <a:latin typeface="Yu Gothic" pitchFamily="34" charset="0"/>
-                <a:ea typeface="Yu Gothic" pitchFamily="34" charset="-122"/>
-                <a:cs typeface="Yu Gothic" pitchFamily="34" charset="-120"/>
+                <a:latin typeface="Yu Mincho" pitchFamily="34" charset="0"/>
+                <a:ea typeface="Yu Mincho" pitchFamily="34" charset="-122"/>
+                <a:cs typeface="Yu Mincho" pitchFamily="34" charset="-120"/>
               </a:rPr>
               <a:t>一本失敗したら、その試合は終わり？</a:t>
             </a:r>
@@ -7670,7 +7478,7 @@
         <p:spPr>
           <a:xfrm>
             <a:off x="457200" y="1737360"/>
-            <a:ext cx="2834640" cy="1051560"/>
+            <a:ext cx="3931920" cy="1051560"/>
           </a:xfrm>
           <a:prstGeom prst="roundRect">
             <a:avLst>
@@ -7696,8 +7504,8 @@
         </p:nvSpPr>
         <p:spPr>
           <a:xfrm>
-            <a:off x="731520" y="1737360"/>
-            <a:ext cx="2468880" cy="1051560"/>
+            <a:off x="777240" y="1737360"/>
+            <a:ext cx="3657600" cy="1051560"/>
           </a:xfrm>
           <a:prstGeom prst="rect">
             <a:avLst/>
@@ -7716,7 +7524,7 @@
               <a:buNone/>
             </a:pPr>
             <a:r>
-              <a:rPr lang="en-US" sz="1700" b="1" dirty="0">
+              <a:rPr lang="en-US" sz="1800" b="1" dirty="0">
                 <a:solidFill>
                   <a:srgbClr val="7A1524"/>
                 </a:solidFill>
@@ -7726,7 +7534,7 @@
               </a:rPr>
               <a:t>「失敗した」</a:t>
             </a:r>
-            <a:endParaRPr lang="en-US" sz="1700" dirty="0"/>
+            <a:endParaRPr lang="en-US" sz="1800" dirty="0"/>
           </a:p>
           <a:p>
             <a:pPr indent="0" marL="0">
@@ -7736,7 +7544,7 @@
               <a:buNone/>
             </a:pPr>
             <a:r>
-              <a:rPr lang="en-US" sz="1700" b="1" dirty="0">
+              <a:rPr lang="en-US" sz="1800" b="1" dirty="0">
                 <a:solidFill>
                   <a:srgbClr val="7A1524"/>
                 </a:solidFill>
@@ -7746,7 +7554,7 @@
               </a:rPr>
               <a:t>これは事実。</a:t>
             </a:r>
-            <a:endParaRPr lang="en-US" sz="1700" dirty="0"/>
+            <a:endParaRPr lang="en-US" sz="1800" dirty="0"/>
           </a:p>
         </p:txBody>
       </p:sp>
@@ -7758,8 +7566,8 @@
         </p:nvSpPr>
         <p:spPr>
           <a:xfrm>
-            <a:off x="3520440" y="1737360"/>
-            <a:ext cx="2834640" cy="1051560"/>
+            <a:off x="4754880" y="1737360"/>
+            <a:ext cx="3931920" cy="1051560"/>
           </a:xfrm>
           <a:prstGeom prst="roundRect">
             <a:avLst>
@@ -7785,8 +7593,8 @@
         </p:nvSpPr>
         <p:spPr>
           <a:xfrm>
-            <a:off x="3794760" y="1737360"/>
-            <a:ext cx="2468880" cy="1051560"/>
+            <a:off x="5074920" y="1737360"/>
+            <a:ext cx="3657600" cy="1051560"/>
           </a:xfrm>
           <a:prstGeom prst="rect">
             <a:avLst/>
@@ -7805,7 +7613,7 @@
               <a:buNone/>
             </a:pPr>
             <a:r>
-              <a:rPr lang="en-US" sz="1700" b="1" dirty="0">
+              <a:rPr lang="en-US" sz="1800" b="1" dirty="0">
                 <a:solidFill>
                   <a:srgbClr val="6B6360"/>
                 </a:solidFill>
@@ -7815,7 +7623,7 @@
               </a:rPr>
               <a:t>「今日はもうダメだ」</a:t>
             </a:r>
-            <a:endParaRPr lang="en-US" sz="1700" dirty="0"/>
+            <a:endParaRPr lang="en-US" sz="1800" dirty="0"/>
           </a:p>
           <a:p>
             <a:pPr indent="0" marL="0">
@@ -7825,7 +7633,7 @@
               <a:buNone/>
             </a:pPr>
             <a:r>
-              <a:rPr lang="en-US" sz="1700" b="1" dirty="0">
+              <a:rPr lang="en-US" sz="1800" b="1" dirty="0">
                 <a:solidFill>
                   <a:srgbClr val="6B6360"/>
                 </a:solidFill>
@@ -7835,7 +7643,7 @@
               </a:rPr>
               <a:t>これは評価。</a:t>
             </a:r>
-            <a:endParaRPr lang="en-US" sz="1700" dirty="0"/>
+            <a:endParaRPr lang="en-US" sz="1800" dirty="0"/>
           </a:p>
         </p:txBody>
       </p:sp>
@@ -7847,24 +7655,24 @@
         </p:nvSpPr>
         <p:spPr>
           <a:xfrm>
-            <a:off x="457200" y="2971800"/>
-            <a:ext cx="5943600" cy="411480"/>
-          </a:xfrm>
-          <a:prstGeom prst="rect">
-            <a:avLst/>
-          </a:prstGeom>
-          <a:noFill/>
-          <a:ln/>
-        </p:spPr>
-        <p:txBody>
-          <a:bodyPr wrap="square" lIns="0" tIns="0" rIns="0" bIns="0" rtlCol="0" anchor="ctr"/>
-          <a:lstStyle/>
-          <a:p>
-            <a:pPr indent="0" marL="0">
-              <a:buNone/>
-            </a:pPr>
-            <a:r>
-              <a:rPr lang="en-US" sz="1700" dirty="0">
+            <a:off x="457200" y="3017520"/>
+            <a:ext cx="7863840" cy="411480"/>
+          </a:xfrm>
+          <a:prstGeom prst="rect">
+            <a:avLst/>
+          </a:prstGeom>
+          <a:noFill/>
+          <a:ln/>
+        </p:spPr>
+        <p:txBody>
+          <a:bodyPr wrap="square" lIns="0" tIns="0" rIns="0" bIns="0" rtlCol="0" anchor="ctr"/>
+          <a:lstStyle/>
+          <a:p>
+            <a:pPr indent="0" marL="0">
+              <a:buNone/>
+            </a:pPr>
+            <a:r>
+              <a:rPr lang="en-US" sz="1800" dirty="0">
                 <a:solidFill>
                   <a:srgbClr val="3B3634"/>
                 </a:solidFill>
@@ -7874,7 +7682,7 @@
               </a:rPr>
               <a:t>この2つを分けます。失敗した時ほど、次の3つを整理する。</a:t>
             </a:r>
-            <a:endParaRPr lang="en-US" sz="1700" dirty="0"/>
+            <a:endParaRPr lang="en-US" sz="1800" dirty="0"/>
           </a:p>
         </p:txBody>
       </p:sp>
@@ -7886,7 +7694,7 @@
         </p:nvSpPr>
         <p:spPr>
           <a:xfrm>
-            <a:off x="457200" y="3575304"/>
+            <a:off x="457200" y="3666744"/>
             <a:ext cx="310896" cy="310896"/>
           </a:xfrm>
           <a:prstGeom prst="ellipse">
@@ -7911,7 +7719,7 @@
         </p:nvSpPr>
         <p:spPr>
           <a:xfrm>
-            <a:off x="457200" y="3575304"/>
+            <a:off x="457200" y="3666744"/>
             <a:ext cx="310896" cy="310896"/>
           </a:xfrm>
           <a:prstGeom prst="rect">
@@ -7950,24 +7758,24 @@
         </p:nvSpPr>
         <p:spPr>
           <a:xfrm>
-            <a:off x="932688" y="3520440"/>
-            <a:ext cx="4754880" cy="420624"/>
-          </a:xfrm>
-          <a:prstGeom prst="rect">
-            <a:avLst/>
-          </a:prstGeom>
-          <a:noFill/>
-          <a:ln/>
-        </p:spPr>
-        <p:txBody>
-          <a:bodyPr wrap="square" lIns="0" tIns="0" rIns="0" bIns="0" rtlCol="0" anchor="ctr"/>
-          <a:lstStyle/>
-          <a:p>
-            <a:pPr indent="0" marL="0">
-              <a:buNone/>
-            </a:pPr>
-            <a:r>
-              <a:rPr lang="en-US" sz="1700" dirty="0">
+            <a:off x="932688" y="3611880"/>
+            <a:ext cx="7132320" cy="420624"/>
+          </a:xfrm>
+          <a:prstGeom prst="rect">
+            <a:avLst/>
+          </a:prstGeom>
+          <a:noFill/>
+          <a:ln/>
+        </p:spPr>
+        <p:txBody>
+          <a:bodyPr wrap="square" lIns="0" tIns="0" rIns="0" bIns="0" rtlCol="0" anchor="ctr"/>
+          <a:lstStyle/>
+          <a:p>
+            <a:pPr indent="0" marL="0">
+              <a:buNone/>
+            </a:pPr>
+            <a:r>
+              <a:rPr lang="en-US" sz="1800" dirty="0">
                 <a:solidFill>
                   <a:srgbClr val="3B3634"/>
                 </a:solidFill>
@@ -7977,7 +7785,7 @@
               </a:rPr>
               <a:t>何が起きた？</a:t>
             </a:r>
-            <a:endParaRPr lang="en-US" sz="1700" dirty="0"/>
+            <a:endParaRPr lang="en-US" sz="1800" dirty="0"/>
           </a:p>
         </p:txBody>
       </p:sp>
@@ -7989,7 +7797,7 @@
         </p:nvSpPr>
         <p:spPr>
           <a:xfrm>
-            <a:off x="457200" y="4032504"/>
+            <a:off x="457200" y="4142232"/>
             <a:ext cx="310896" cy="310896"/>
           </a:xfrm>
           <a:prstGeom prst="ellipse">
@@ -8014,7 +7822,7 @@
         </p:nvSpPr>
         <p:spPr>
           <a:xfrm>
-            <a:off x="457200" y="4032504"/>
+            <a:off x="457200" y="4142232"/>
             <a:ext cx="310896" cy="310896"/>
           </a:xfrm>
           <a:prstGeom prst="rect">
@@ -8053,24 +7861,24 @@
         </p:nvSpPr>
         <p:spPr>
           <a:xfrm>
-            <a:off x="932688" y="3977640"/>
-            <a:ext cx="4754880" cy="420624"/>
-          </a:xfrm>
-          <a:prstGeom prst="rect">
-            <a:avLst/>
-          </a:prstGeom>
-          <a:noFill/>
-          <a:ln/>
-        </p:spPr>
-        <p:txBody>
-          <a:bodyPr wrap="square" lIns="0" tIns="0" rIns="0" bIns="0" rtlCol="0" anchor="ctr"/>
-          <a:lstStyle/>
-          <a:p>
-            <a:pPr indent="0" marL="0">
-              <a:buNone/>
-            </a:pPr>
-            <a:r>
-              <a:rPr lang="en-US" sz="1700" dirty="0">
+            <a:off x="932688" y="4087368"/>
+            <a:ext cx="7132320" cy="420624"/>
+          </a:xfrm>
+          <a:prstGeom prst="rect">
+            <a:avLst/>
+          </a:prstGeom>
+          <a:noFill/>
+          <a:ln/>
+        </p:spPr>
+        <p:txBody>
+          <a:bodyPr wrap="square" lIns="0" tIns="0" rIns="0" bIns="0" rtlCol="0" anchor="ctr"/>
+          <a:lstStyle/>
+          <a:p>
+            <a:pPr indent="0" marL="0">
+              <a:buNone/>
+            </a:pPr>
+            <a:r>
+              <a:rPr lang="en-US" sz="1800" dirty="0">
                 <a:solidFill>
                   <a:srgbClr val="3B3634"/>
                 </a:solidFill>
@@ -8080,7 +7888,7 @@
               </a:rPr>
               <a:t>何を変える？</a:t>
             </a:r>
-            <a:endParaRPr lang="en-US" sz="1700" dirty="0"/>
+            <a:endParaRPr lang="en-US" sz="1800" dirty="0"/>
           </a:p>
         </p:txBody>
       </p:sp>
@@ -8092,7 +7900,7 @@
         </p:nvSpPr>
         <p:spPr>
           <a:xfrm>
-            <a:off x="457200" y="4489704"/>
+            <a:off x="457200" y="4617720"/>
             <a:ext cx="310896" cy="310896"/>
           </a:xfrm>
           <a:prstGeom prst="ellipse">
@@ -8117,7 +7925,7 @@
         </p:nvSpPr>
         <p:spPr>
           <a:xfrm>
-            <a:off x="457200" y="4489704"/>
+            <a:off x="457200" y="4617720"/>
             <a:ext cx="310896" cy="310896"/>
           </a:xfrm>
           <a:prstGeom prst="rect">
@@ -8156,24 +7964,24 @@
         </p:nvSpPr>
         <p:spPr>
           <a:xfrm>
-            <a:off x="932688" y="4434840"/>
-            <a:ext cx="4754880" cy="420624"/>
-          </a:xfrm>
-          <a:prstGeom prst="rect">
-            <a:avLst/>
-          </a:prstGeom>
-          <a:noFill/>
-          <a:ln/>
-        </p:spPr>
-        <p:txBody>
-          <a:bodyPr wrap="square" lIns="0" tIns="0" rIns="0" bIns="0" rtlCol="0" anchor="ctr"/>
-          <a:lstStyle/>
-          <a:p>
-            <a:pPr indent="0" marL="0">
-              <a:buNone/>
-            </a:pPr>
-            <a:r>
-              <a:rPr lang="en-US" sz="1700" dirty="0">
+            <a:off x="932688" y="4562856"/>
+            <a:ext cx="7132320" cy="420624"/>
+          </a:xfrm>
+          <a:prstGeom prst="rect">
+            <a:avLst/>
+          </a:prstGeom>
+          <a:noFill/>
+          <a:ln/>
+        </p:spPr>
+        <p:txBody>
+          <a:bodyPr wrap="square" lIns="0" tIns="0" rIns="0" bIns="0" rtlCol="0" anchor="ctr"/>
+          <a:lstStyle/>
+          <a:p>
+            <a:pPr indent="0" marL="0">
+              <a:buNone/>
+            </a:pPr>
+            <a:r>
+              <a:rPr lang="en-US" sz="1800" dirty="0">
                 <a:solidFill>
                   <a:srgbClr val="3B3634"/>
                 </a:solidFill>
@@ -8183,34 +7991,10 @@
               </a:rPr>
               <a:t>もう考えなくていいことは？</a:t>
             </a:r>
-            <a:endParaRPr lang="en-US" sz="1700" dirty="0"/>
-          </a:p>
-        </p:txBody>
-      </p:sp>
-      <p:pic>
-        <p:nvPicPr>
-          <p:cNvPr id="19" name="Image 0" descr="preencoded.png">    </p:cNvPr>
-          <p:cNvPicPr>
-            <a:picLocks noChangeAspect="1"/>
-          </p:cNvPicPr>
-          <p:nvPr/>
-        </p:nvPicPr>
-        <p:blipFill>
-          <a:blip r:embed="rId1"/>
-          <a:stretch>
-            <a:fillRect/>
-          </a:stretch>
-        </p:blipFill>
-        <p:spPr>
-          <a:xfrm>
-            <a:off x="6675120" y="2011680"/>
-            <a:ext cx="2011680" cy="2011680"/>
-          </a:xfrm>
-          <a:prstGeom prst="rect">
-            <a:avLst/>
-          </a:prstGeom>
-        </p:spPr>
-      </p:pic>
+            <a:endParaRPr lang="en-US" sz="1800" dirty="0"/>
+          </a:p>
+        </p:txBody>
+      </p:sp>
     </p:spTree>
   </p:cSld>
   <p:clrMapOvr>
@@ -8353,9 +8137,9 @@
                 <a:solidFill>
                   <a:srgbClr val="141416"/>
                 </a:solidFill>
-                <a:latin typeface="Yu Gothic" pitchFamily="34" charset="0"/>
-                <a:ea typeface="Yu Gothic" pitchFamily="34" charset="-122"/>
-                <a:cs typeface="Yu Gothic" pitchFamily="34" charset="-120"/>
+                <a:latin typeface="Yu Mincho" pitchFamily="34" charset="0"/>
+                <a:ea typeface="Yu Mincho" pitchFamily="34" charset="-122"/>
+                <a:cs typeface="Yu Mincho" pitchFamily="34" charset="-120"/>
               </a:rPr>
               <a:t>目標は3種類に分ける</a:t>
             </a:r>
@@ -8372,7 +8156,7 @@
         <p:spPr>
           <a:xfrm>
             <a:off x="457200" y="1783080"/>
-            <a:ext cx="5669280" cy="676656"/>
+            <a:ext cx="7863840" cy="676656"/>
           </a:xfrm>
           <a:prstGeom prst="roundRect">
             <a:avLst>
@@ -8398,24 +8182,24 @@
         </p:nvSpPr>
         <p:spPr>
           <a:xfrm>
-            <a:off x="731520" y="1783080"/>
-            <a:ext cx="2194560" cy="676656"/>
-          </a:xfrm>
-          <a:prstGeom prst="rect">
-            <a:avLst/>
-          </a:prstGeom>
-          <a:noFill/>
-          <a:ln/>
-        </p:spPr>
-        <p:txBody>
-          <a:bodyPr wrap="square" lIns="0" tIns="0" rIns="0" bIns="0" rtlCol="0" anchor="ctr"/>
-          <a:lstStyle/>
-          <a:p>
-            <a:pPr indent="0" marL="0">
-              <a:buNone/>
-            </a:pPr>
-            <a:r>
-              <a:rPr lang="en-US" sz="1500" b="1" dirty="0">
+            <a:off x="777240" y="1783080"/>
+            <a:ext cx="2377440" cy="676656"/>
+          </a:xfrm>
+          <a:prstGeom prst="rect">
+            <a:avLst/>
+          </a:prstGeom>
+          <a:noFill/>
+          <a:ln/>
+        </p:spPr>
+        <p:txBody>
+          <a:bodyPr wrap="square" lIns="0" tIns="0" rIns="0" bIns="0" rtlCol="0" anchor="ctr"/>
+          <a:lstStyle/>
+          <a:p>
+            <a:pPr indent="0" marL="0">
+              <a:buNone/>
+            </a:pPr>
+            <a:r>
+              <a:rPr lang="en-US" sz="1700" b="1" dirty="0">
                 <a:solidFill>
                   <a:srgbClr val="7A1524"/>
                 </a:solidFill>
@@ -8425,7 +8209,7 @@
               </a:rPr>
               <a:t>結果目標</a:t>
             </a:r>
-            <a:endParaRPr lang="en-US" sz="1500" dirty="0"/>
+            <a:endParaRPr lang="en-US" sz="1700" dirty="0"/>
           </a:p>
         </p:txBody>
       </p:sp>
@@ -8437,24 +8221,24 @@
         </p:nvSpPr>
         <p:spPr>
           <a:xfrm>
-            <a:off x="2971800" y="1783080"/>
-            <a:ext cx="3017520" cy="676656"/>
-          </a:xfrm>
-          <a:prstGeom prst="rect">
-            <a:avLst/>
-          </a:prstGeom>
-          <a:noFill/>
-          <a:ln/>
-        </p:spPr>
-        <p:txBody>
-          <a:bodyPr wrap="square" lIns="0" tIns="0" rIns="0" bIns="0" rtlCol="0" anchor="ctr"/>
-          <a:lstStyle/>
-          <a:p>
-            <a:pPr indent="0" marL="0">
-              <a:buNone/>
-            </a:pPr>
-            <a:r>
-              <a:rPr lang="en-US" sz="1500" dirty="0">
+            <a:off x="3246120" y="1783080"/>
+            <a:ext cx="4937760" cy="676656"/>
+          </a:xfrm>
+          <a:prstGeom prst="rect">
+            <a:avLst/>
+          </a:prstGeom>
+          <a:noFill/>
+          <a:ln/>
+        </p:spPr>
+        <p:txBody>
+          <a:bodyPr wrap="square" lIns="0" tIns="0" rIns="0" bIns="0" rtlCol="0" anchor="ctr"/>
+          <a:lstStyle/>
+          <a:p>
+            <a:pPr indent="0" marL="0">
+              <a:buNone/>
+            </a:pPr>
+            <a:r>
+              <a:rPr lang="en-US" sz="1700" dirty="0">
                 <a:solidFill>
                   <a:srgbClr val="3B3634"/>
                 </a:solidFill>
@@ -8464,7 +8248,7 @@
               </a:rPr>
               <a:t>「優勝する」「標準を取る」</a:t>
             </a:r>
-            <a:endParaRPr lang="en-US" sz="1500" dirty="0"/>
+            <a:endParaRPr lang="en-US" sz="1700" dirty="0"/>
           </a:p>
         </p:txBody>
       </p:sp>
@@ -8477,7 +8261,7 @@
         <p:spPr>
           <a:xfrm>
             <a:off x="457200" y="2569464"/>
-            <a:ext cx="5669280" cy="676656"/>
+            <a:ext cx="7863840" cy="676656"/>
           </a:xfrm>
           <a:prstGeom prst="roundRect">
             <a:avLst>
@@ -8503,24 +8287,24 @@
         </p:nvSpPr>
         <p:spPr>
           <a:xfrm>
-            <a:off x="731520" y="2569464"/>
-            <a:ext cx="2194560" cy="676656"/>
-          </a:xfrm>
-          <a:prstGeom prst="rect">
-            <a:avLst/>
-          </a:prstGeom>
-          <a:noFill/>
-          <a:ln/>
-        </p:spPr>
-        <p:txBody>
-          <a:bodyPr wrap="square" lIns="0" tIns="0" rIns="0" bIns="0" rtlCol="0" anchor="ctr"/>
-          <a:lstStyle/>
-          <a:p>
-            <a:pPr indent="0" marL="0">
-              <a:buNone/>
-            </a:pPr>
-            <a:r>
-              <a:rPr lang="en-US" sz="1500" b="1" dirty="0">
+            <a:off x="777240" y="2569464"/>
+            <a:ext cx="2377440" cy="676656"/>
+          </a:xfrm>
+          <a:prstGeom prst="rect">
+            <a:avLst/>
+          </a:prstGeom>
+          <a:noFill/>
+          <a:ln/>
+        </p:spPr>
+        <p:txBody>
+          <a:bodyPr wrap="square" lIns="0" tIns="0" rIns="0" bIns="0" rtlCol="0" anchor="ctr"/>
+          <a:lstStyle/>
+          <a:p>
+            <a:pPr indent="0" marL="0">
+              <a:buNone/>
+            </a:pPr>
+            <a:r>
+              <a:rPr lang="en-US" sz="1700" b="1" dirty="0">
                 <a:solidFill>
                   <a:srgbClr val="7A1524"/>
                 </a:solidFill>
@@ -8530,7 +8314,7 @@
               </a:rPr>
               <a:t>パフォーマンス目標</a:t>
             </a:r>
-            <a:endParaRPr lang="en-US" sz="1500" dirty="0"/>
+            <a:endParaRPr lang="en-US" sz="1700" dirty="0"/>
           </a:p>
         </p:txBody>
       </p:sp>
@@ -8542,24 +8326,24 @@
         </p:nvSpPr>
         <p:spPr>
           <a:xfrm>
-            <a:off x="2971800" y="2569464"/>
-            <a:ext cx="3017520" cy="676656"/>
-          </a:xfrm>
-          <a:prstGeom prst="rect">
-            <a:avLst/>
-          </a:prstGeom>
-          <a:noFill/>
-          <a:ln/>
-        </p:spPr>
-        <p:txBody>
-          <a:bodyPr wrap="square" lIns="0" tIns="0" rIns="0" bIns="0" rtlCol="0" anchor="ctr"/>
-          <a:lstStyle/>
-          <a:p>
-            <a:pPr indent="0" marL="0">
-              <a:buNone/>
-            </a:pPr>
-            <a:r>
-              <a:rPr lang="en-US" sz="1500" dirty="0">
+            <a:off x="3246120" y="2569464"/>
+            <a:ext cx="4937760" cy="676656"/>
+          </a:xfrm>
+          <a:prstGeom prst="rect">
+            <a:avLst/>
+          </a:prstGeom>
+          <a:noFill/>
+          <a:ln/>
+        </p:spPr>
+        <p:txBody>
+          <a:bodyPr wrap="square" lIns="0" tIns="0" rIns="0" bIns="0" rtlCol="0" anchor="ctr"/>
+          <a:lstStyle/>
+          <a:p>
+            <a:pPr indent="0" marL="0">
+              <a:buNone/>
+            </a:pPr>
+            <a:r>
+              <a:rPr lang="en-US" sz="1700" dirty="0">
                 <a:solidFill>
                   <a:srgbClr val="3B3634"/>
                 </a:solidFill>
@@ -8569,7 +8353,7 @@
               </a:rPr>
               <a:t>「○kgを成功させる」</a:t>
             </a:r>
-            <a:endParaRPr lang="en-US" sz="1500" dirty="0"/>
+            <a:endParaRPr lang="en-US" sz="1700" dirty="0"/>
           </a:p>
         </p:txBody>
       </p:sp>
@@ -8582,7 +8366,7 @@
         <p:spPr>
           <a:xfrm>
             <a:off x="457200" y="3355848"/>
-            <a:ext cx="5669280" cy="676656"/>
+            <a:ext cx="7863840" cy="676656"/>
           </a:xfrm>
           <a:prstGeom prst="roundRect">
             <a:avLst>
@@ -8608,24 +8392,24 @@
         </p:nvSpPr>
         <p:spPr>
           <a:xfrm>
-            <a:off x="731520" y="3355848"/>
-            <a:ext cx="2194560" cy="676656"/>
-          </a:xfrm>
-          <a:prstGeom prst="rect">
-            <a:avLst/>
-          </a:prstGeom>
-          <a:noFill/>
-          <a:ln/>
-        </p:spPr>
-        <p:txBody>
-          <a:bodyPr wrap="square" lIns="0" tIns="0" rIns="0" bIns="0" rtlCol="0" anchor="ctr"/>
-          <a:lstStyle/>
-          <a:p>
-            <a:pPr indent="0" marL="0">
-              <a:buNone/>
-            </a:pPr>
-            <a:r>
-              <a:rPr lang="en-US" sz="1500" b="1" dirty="0">
+            <a:off x="777240" y="3355848"/>
+            <a:ext cx="2377440" cy="676656"/>
+          </a:xfrm>
+          <a:prstGeom prst="rect">
+            <a:avLst/>
+          </a:prstGeom>
+          <a:noFill/>
+          <a:ln/>
+        </p:spPr>
+        <p:txBody>
+          <a:bodyPr wrap="square" lIns="0" tIns="0" rIns="0" bIns="0" rtlCol="0" anchor="ctr"/>
+          <a:lstStyle/>
+          <a:p>
+            <a:pPr indent="0" marL="0">
+              <a:buNone/>
+            </a:pPr>
+            <a:r>
+              <a:rPr lang="en-US" sz="1700" b="1" dirty="0">
                 <a:solidFill>
                   <a:srgbClr val="F0B9C3"/>
                 </a:solidFill>
@@ -8635,7 +8419,7 @@
               </a:rPr>
               <a:t>行動目標</a:t>
             </a:r>
-            <a:endParaRPr lang="en-US" sz="1500" dirty="0"/>
+            <a:endParaRPr lang="en-US" sz="1700" dirty="0"/>
           </a:p>
         </p:txBody>
       </p:sp>
@@ -8647,24 +8431,24 @@
         </p:nvSpPr>
         <p:spPr>
           <a:xfrm>
-            <a:off x="2971800" y="3355848"/>
-            <a:ext cx="3017520" cy="676656"/>
-          </a:xfrm>
-          <a:prstGeom prst="rect">
-            <a:avLst/>
-          </a:prstGeom>
-          <a:noFill/>
-          <a:ln/>
-        </p:spPr>
-        <p:txBody>
-          <a:bodyPr wrap="square" lIns="0" tIns="0" rIns="0" bIns="0" rtlCol="0" anchor="ctr"/>
-          <a:lstStyle/>
-          <a:p>
-            <a:pPr indent="0" marL="0">
-              <a:buNone/>
-            </a:pPr>
-            <a:r>
-              <a:rPr lang="en-US" sz="1500" dirty="0">
+            <a:off x="3246120" y="3355848"/>
+            <a:ext cx="4937760" cy="676656"/>
+          </a:xfrm>
+          <a:prstGeom prst="rect">
+            <a:avLst/>
+          </a:prstGeom>
+          <a:noFill/>
+          <a:ln/>
+        </p:spPr>
+        <p:txBody>
+          <a:bodyPr wrap="square" lIns="0" tIns="0" rIns="0" bIns="0" rtlCol="0" anchor="ctr"/>
+          <a:lstStyle/>
+          <a:p>
+            <a:pPr indent="0" marL="0">
+              <a:buNone/>
+            </a:pPr>
+            <a:r>
+              <a:rPr lang="en-US" sz="1700" dirty="0">
                 <a:solidFill>
                   <a:srgbClr val="FFFFFF"/>
                 </a:solidFill>
@@ -8674,7 +8458,7 @@
               </a:rPr>
               <a:t>「そのために今日何をする？」</a:t>
             </a:r>
-            <a:endParaRPr lang="en-US" sz="1500" dirty="0"/>
+            <a:endParaRPr lang="en-US" sz="1700" dirty="0"/>
           </a:p>
         </p:txBody>
       </p:sp>
@@ -8686,8 +8470,8 @@
         </p:nvSpPr>
         <p:spPr>
           <a:xfrm>
-            <a:off x="457200" y="4206240"/>
-            <a:ext cx="5852160" cy="411480"/>
+            <a:off x="457200" y="4251960"/>
+            <a:ext cx="7863840" cy="411480"/>
           </a:xfrm>
           <a:prstGeom prst="rect">
             <a:avLst/>
@@ -8717,30 +8501,6 @@
           </a:p>
         </p:txBody>
       </p:sp>
-      <p:pic>
-        <p:nvPicPr>
-          <p:cNvPr id="15" name="Image 0" descr="preencoded.png">    </p:cNvPr>
-          <p:cNvPicPr>
-            <a:picLocks noChangeAspect="1"/>
-          </p:cNvPicPr>
-          <p:nvPr/>
-        </p:nvPicPr>
-        <p:blipFill>
-          <a:blip r:embed="rId1"/>
-          <a:stretch>
-            <a:fillRect/>
-          </a:stretch>
-        </p:blipFill>
-        <p:spPr>
-          <a:xfrm>
-            <a:off x="6583680" y="2011680"/>
-            <a:ext cx="2103120" cy="2103120"/>
-          </a:xfrm>
-          <a:prstGeom prst="rect">
-            <a:avLst/>
-          </a:prstGeom>
-        </p:spPr>
-      </p:pic>
     </p:spTree>
   </p:cSld>
   <p:clrMapOvr>
@@ -8883,9 +8643,9 @@
                 <a:solidFill>
                   <a:srgbClr val="141416"/>
                 </a:solidFill>
-                <a:latin typeface="Yu Gothic" pitchFamily="34" charset="0"/>
-                <a:ea typeface="Yu Gothic" pitchFamily="34" charset="-122"/>
-                <a:cs typeface="Yu Gothic" pitchFamily="34" charset="-120"/>
+                <a:latin typeface="Yu Mincho" pitchFamily="34" charset="0"/>
+                <a:ea typeface="Yu Mincho" pitchFamily="34" charset="-122"/>
+                <a:cs typeface="Yu Mincho" pitchFamily="34" charset="-120"/>
               </a:rPr>
               <a:t>次の試合で目指していること</a:t>
             </a:r>
@@ -8902,7 +8662,7 @@
         <p:spPr>
           <a:xfrm>
             <a:off x="457200" y="1920240"/>
-            <a:ext cx="5394960" cy="566928"/>
+            <a:ext cx="7863840" cy="566928"/>
           </a:xfrm>
           <a:prstGeom prst="roundRect">
             <a:avLst>
@@ -8929,7 +8689,7 @@
         <p:spPr>
           <a:xfrm>
             <a:off x="713232" y="1920240"/>
-            <a:ext cx="4937760" cy="566928"/>
+            <a:ext cx="7406640" cy="566928"/>
           </a:xfrm>
           <a:prstGeom prst="rect">
             <a:avLst/>
@@ -8968,7 +8728,7 @@
         <p:spPr>
           <a:xfrm>
             <a:off x="457200" y="2578608"/>
-            <a:ext cx="5394960" cy="566928"/>
+            <a:ext cx="7863840" cy="566928"/>
           </a:xfrm>
           <a:prstGeom prst="roundRect">
             <a:avLst>
@@ -8995,7 +8755,7 @@
         <p:spPr>
           <a:xfrm>
             <a:off x="713232" y="2578608"/>
-            <a:ext cx="4937760" cy="566928"/>
+            <a:ext cx="7406640" cy="566928"/>
           </a:xfrm>
           <a:prstGeom prst="rect">
             <a:avLst/>
@@ -9034,7 +8794,7 @@
         <p:spPr>
           <a:xfrm>
             <a:off x="457200" y="3236976"/>
-            <a:ext cx="5394960" cy="566928"/>
+            <a:ext cx="7863840" cy="566928"/>
           </a:xfrm>
           <a:prstGeom prst="roundRect">
             <a:avLst>
@@ -9061,7 +8821,7 @@
         <p:spPr>
           <a:xfrm>
             <a:off x="713232" y="3236976"/>
-            <a:ext cx="4937760" cy="566928"/>
+            <a:ext cx="7406640" cy="566928"/>
           </a:xfrm>
           <a:prstGeom prst="rect">
             <a:avLst/>
@@ -9099,8 +8859,8 @@
         </p:nvSpPr>
         <p:spPr>
           <a:xfrm>
-            <a:off x="457200" y="4114800"/>
-            <a:ext cx="5486400" cy="457200"/>
+            <a:off x="457200" y="4160520"/>
+            <a:ext cx="7863840" cy="457200"/>
           </a:xfrm>
           <a:prstGeom prst="rect">
             <a:avLst/>
@@ -9130,30 +8890,6 @@
           </a:p>
         </p:txBody>
       </p:sp>
-      <p:pic>
-        <p:nvPicPr>
-          <p:cNvPr id="12" name="Image 0" descr="preencoded.png">    </p:cNvPr>
-          <p:cNvPicPr>
-            <a:picLocks noChangeAspect="1"/>
-          </p:cNvPicPr>
-          <p:nvPr/>
-        </p:nvPicPr>
-        <p:blipFill>
-          <a:blip r:embed="rId1"/>
-          <a:stretch>
-            <a:fillRect/>
-          </a:stretch>
-        </p:blipFill>
-        <p:spPr>
-          <a:xfrm>
-            <a:off x="6309360" y="1737360"/>
-            <a:ext cx="2377440" cy="2377440"/>
-          </a:xfrm>
-          <a:prstGeom prst="rect">
-            <a:avLst/>
-          </a:prstGeom>
-        </p:spPr>
-      </p:pic>
     </p:spTree>
   </p:cSld>
   <p:clrMapOvr>
@@ -9273,7 +9009,7 @@
         <p:spPr>
           <a:xfrm>
             <a:off x="457200" y="777240"/>
-            <a:ext cx="5669280" cy="1188720"/>
+            <a:ext cx="7863840" cy="1188720"/>
           </a:xfrm>
           <a:prstGeom prst="rect">
             <a:avLst/>
@@ -9287,42 +9023,42 @@
           <a:p>
             <a:pPr algn="l" indent="0" marL="0">
               <a:lnSpc>
-                <a:spcPts val="4495"/>
+                <a:spcPts val="4930"/>
               </a:lnSpc>
               <a:buNone/>
             </a:pPr>
             <a:r>
-              <a:rPr lang="en-US" sz="3100" b="1" dirty="0">
+              <a:rPr lang="en-US" sz="3400" b="1" dirty="0">
                 <a:solidFill>
                   <a:srgbClr val="141416"/>
                 </a:solidFill>
-                <a:latin typeface="Yu Gothic" pitchFamily="34" charset="0"/>
-                <a:ea typeface="Yu Gothic" pitchFamily="34" charset="-122"/>
-                <a:cs typeface="Yu Gothic" pitchFamily="34" charset="-120"/>
+                <a:latin typeface="Yu Mincho" pitchFamily="34" charset="0"/>
+                <a:ea typeface="Yu Mincho" pitchFamily="34" charset="-122"/>
+                <a:cs typeface="Yu Mincho" pitchFamily="34" charset="-120"/>
               </a:rPr>
               <a:t>目標を達成できる選手なら、</a:t>
             </a:r>
-            <a:endParaRPr lang="en-US" sz="3100" dirty="0"/>
+            <a:endParaRPr lang="en-US" sz="3400" dirty="0"/>
           </a:p>
           <a:p>
             <a:pPr algn="l" indent="0" marL="0">
               <a:lnSpc>
-                <a:spcPts val="4495"/>
+                <a:spcPts val="4930"/>
               </a:lnSpc>
               <a:buNone/>
             </a:pPr>
             <a:r>
-              <a:rPr lang="en-US" sz="3100" b="1" dirty="0">
+              <a:rPr lang="en-US" sz="3400" b="1" dirty="0">
                 <a:solidFill>
                   <a:srgbClr val="141416"/>
                 </a:solidFill>
-                <a:latin typeface="Yu Gothic" pitchFamily="34" charset="0"/>
-                <a:ea typeface="Yu Gothic" pitchFamily="34" charset="-122"/>
-                <a:cs typeface="Yu Gothic" pitchFamily="34" charset="-120"/>
+                <a:latin typeface="Yu Mincho" pitchFamily="34" charset="0"/>
+                <a:ea typeface="Yu Mincho" pitchFamily="34" charset="-122"/>
+                <a:cs typeface="Yu Mincho" pitchFamily="34" charset="-120"/>
               </a:rPr>
               <a:t>今日どうする？</a:t>
             </a:r>
-            <a:endParaRPr lang="en-US" sz="3100" dirty="0"/>
+            <a:endParaRPr lang="en-US" sz="3400" dirty="0"/>
           </a:p>
         </p:txBody>
       </p:sp>
@@ -9334,12 +9070,12 @@
         </p:nvSpPr>
         <p:spPr>
           <a:xfrm>
-            <a:off x="457200" y="2286000"/>
-            <a:ext cx="2743200" cy="566928"/>
+            <a:off x="457200" y="2331720"/>
+            <a:ext cx="3931920" cy="621792"/>
           </a:xfrm>
           <a:prstGeom prst="roundRect">
             <a:avLst>
-              <a:gd name="adj" fmla="val 9677"/>
+              <a:gd name="adj" fmla="val 8824"/>
             </a:avLst>
           </a:prstGeom>
           <a:solidFill>
@@ -9361,8 +9097,8 @@
         </p:nvSpPr>
         <p:spPr>
           <a:xfrm>
-            <a:off x="457200" y="2286000"/>
-            <a:ext cx="2743200" cy="566928"/>
+            <a:off x="457200" y="2331720"/>
+            <a:ext cx="3931920" cy="621792"/>
           </a:xfrm>
           <a:prstGeom prst="rect">
             <a:avLst/>
@@ -9378,7 +9114,7 @@
               <a:buNone/>
             </a:pPr>
             <a:r>
-              <a:rPr lang="en-US" sz="1700" b="1" dirty="0">
+              <a:rPr lang="en-US" sz="1800" b="1" dirty="0">
                 <a:solidFill>
                   <a:srgbClr val="FFFFFF"/>
                 </a:solidFill>
@@ -9388,7 +9124,7 @@
               </a:rPr>
               <a:t>やること　1つ</a:t>
             </a:r>
-            <a:endParaRPr lang="en-US" sz="1700" dirty="0"/>
+            <a:endParaRPr lang="en-US" sz="1800" dirty="0"/>
           </a:p>
         </p:txBody>
       </p:sp>
@@ -9400,12 +9136,12 @@
         </p:nvSpPr>
         <p:spPr>
           <a:xfrm>
-            <a:off x="3383280" y="2286000"/>
-            <a:ext cx="2743200" cy="566928"/>
+            <a:off x="4754880" y="2331720"/>
+            <a:ext cx="3931920" cy="621792"/>
           </a:xfrm>
           <a:prstGeom prst="roundRect">
             <a:avLst>
-              <a:gd name="adj" fmla="val 9677"/>
+              <a:gd name="adj" fmla="val 8824"/>
             </a:avLst>
           </a:prstGeom>
           <a:solidFill>
@@ -9427,8 +9163,8 @@
         </p:nvSpPr>
         <p:spPr>
           <a:xfrm>
-            <a:off x="3383280" y="2286000"/>
-            <a:ext cx="2743200" cy="566928"/>
+            <a:off x="4754880" y="2331720"/>
+            <a:ext cx="3931920" cy="621792"/>
           </a:xfrm>
           <a:prstGeom prst="rect">
             <a:avLst/>
@@ -9444,7 +9180,7 @@
               <a:buNone/>
             </a:pPr>
             <a:r>
-              <a:rPr lang="en-US" sz="1700" b="1" dirty="0">
+              <a:rPr lang="en-US" sz="1800" b="1" dirty="0">
                 <a:solidFill>
                   <a:srgbClr val="6B6360"/>
                 </a:solidFill>
@@ -9454,7 +9190,7 @@
               </a:rPr>
               <a:t>やらないこと　1つ</a:t>
             </a:r>
-            <a:endParaRPr lang="en-US" sz="1700" dirty="0"/>
+            <a:endParaRPr lang="en-US" sz="1800" dirty="0"/>
           </a:p>
         </p:txBody>
       </p:sp>
@@ -9466,8 +9202,8 @@
         </p:nvSpPr>
         <p:spPr>
           <a:xfrm>
-            <a:off x="457200" y="3063240"/>
-            <a:ext cx="5760720" cy="914400"/>
+            <a:off x="457200" y="3200400"/>
+            <a:ext cx="7863840" cy="914400"/>
           </a:xfrm>
           <a:prstGeom prst="rect">
             <a:avLst/>
@@ -9481,12 +9217,12 @@
           <a:p>
             <a:pPr indent="0" marL="0">
               <a:lnSpc>
-                <a:spcPts val="2800"/>
+                <a:spcPts val="3000"/>
               </a:lnSpc>
               <a:buNone/>
             </a:pPr>
             <a:r>
-              <a:rPr lang="en-US" sz="1700" dirty="0">
+              <a:rPr lang="en-US" sz="1800" dirty="0">
                 <a:solidFill>
                   <a:srgbClr val="3B3634"/>
                 </a:solidFill>
@@ -9496,17 +9232,17 @@
               </a:rPr>
               <a:t>たとえば、今日はフォームを大事にする。</a:t>
             </a:r>
-            <a:endParaRPr lang="en-US" sz="1700" dirty="0"/>
+            <a:endParaRPr lang="en-US" sz="1800" dirty="0"/>
           </a:p>
           <a:p>
             <a:pPr indent="0" marL="0">
               <a:lnSpc>
-                <a:spcPts val="2800"/>
+                <a:spcPts val="3000"/>
               </a:lnSpc>
               <a:buNone/>
             </a:pPr>
             <a:r>
-              <a:rPr lang="en-US" sz="1700" dirty="0">
+              <a:rPr lang="en-US" sz="1800" dirty="0">
                 <a:solidFill>
                   <a:srgbClr val="3B3634"/>
                 </a:solidFill>
@@ -9516,7 +9252,7 @@
               </a:rPr>
               <a:t>今日は追加で重い重量を持たない。今日はしっかり寝る。</a:t>
             </a:r>
-            <a:endParaRPr lang="en-US" sz="1700" dirty="0"/>
+            <a:endParaRPr lang="en-US" sz="1800" dirty="0"/>
           </a:p>
         </p:txBody>
       </p:sp>
@@ -9528,8 +9264,8 @@
         </p:nvSpPr>
         <p:spPr>
           <a:xfrm>
-            <a:off x="457200" y="4160520"/>
-            <a:ext cx="5760720" cy="411480"/>
+            <a:off x="457200" y="4297680"/>
+            <a:ext cx="7863840" cy="411480"/>
           </a:xfrm>
           <a:prstGeom prst="rect">
             <a:avLst/>
@@ -9559,30 +9295,6 @@
           </a:p>
         </p:txBody>
       </p:sp>
-      <p:pic>
-        <p:nvPicPr>
-          <p:cNvPr id="11" name="Image 0" descr="preencoded.png">    </p:cNvPr>
-          <p:cNvPicPr>
-            <a:picLocks noChangeAspect="1"/>
-          </p:cNvPicPr>
-          <p:nvPr/>
-        </p:nvPicPr>
-        <p:blipFill>
-          <a:blip r:embed="rId1"/>
-          <a:stretch>
-            <a:fillRect/>
-          </a:stretch>
-        </p:blipFill>
-        <p:spPr>
-          <a:xfrm>
-            <a:off x="6583680" y="2103120"/>
-            <a:ext cx="2103120" cy="2103120"/>
-          </a:xfrm>
-          <a:prstGeom prst="rect">
-            <a:avLst/>
-          </a:prstGeom>
-        </p:spPr>
-      </p:pic>
     </p:spTree>
   </p:cSld>
   <p:clrMapOvr>
@@ -9725,9 +9437,9 @@
                 <a:solidFill>
                   <a:srgbClr val="141416"/>
                 </a:solidFill>
-                <a:latin typeface="Yu Gothic" pitchFamily="34" charset="0"/>
-                <a:ea typeface="Yu Gothic" pitchFamily="34" charset="-122"/>
-                <a:cs typeface="Yu Gothic" pitchFamily="34" charset="-120"/>
+                <a:latin typeface="Yu Mincho" pitchFamily="34" charset="0"/>
+                <a:ea typeface="Yu Mincho" pitchFamily="34" charset="-122"/>
+                <a:cs typeface="Yu Mincho" pitchFamily="34" charset="-120"/>
               </a:rPr>
               <a:t>「もっと頑張らないと」から変わった方</a:t>
             </a:r>
@@ -10215,9 +9927,9 @@
                 <a:solidFill>
                   <a:srgbClr val="141416"/>
                 </a:solidFill>
-                <a:latin typeface="Yu Gothic" pitchFamily="34" charset="0"/>
-                <a:ea typeface="Yu Gothic" pitchFamily="34" charset="-122"/>
-                <a:cs typeface="Yu Gothic" pitchFamily="34" charset="-120"/>
+                <a:latin typeface="Yu Mincho" pitchFamily="34" charset="0"/>
+                <a:ea typeface="Yu Mincho" pitchFamily="34" charset="-122"/>
+                <a:cs typeface="Yu Mincho" pitchFamily="34" charset="-120"/>
               </a:rPr>
               <a:t>「140kg挙げたい」から変わった方</a:t>
             </a:r>
@@ -10685,9 +10397,9 @@
                 <a:solidFill>
                   <a:srgbClr val="141416"/>
                 </a:solidFill>
-                <a:latin typeface="Yu Gothic" pitchFamily="34" charset="0"/>
-                <a:ea typeface="Yu Gothic" pitchFamily="34" charset="-122"/>
-                <a:cs typeface="Yu Gothic" pitchFamily="34" charset="-120"/>
+                <a:latin typeface="Yu Mincho" pitchFamily="34" charset="0"/>
+                <a:ea typeface="Yu Mincho" pitchFamily="34" charset="-122"/>
+                <a:cs typeface="Yu Mincho" pitchFamily="34" charset="-120"/>
               </a:rPr>
               <a:t>変えたいのは「気持ち」だけではない</a:t>
             </a:r>
@@ -10704,7 +10416,7 @@
         <p:spPr>
           <a:xfrm>
             <a:off x="457200" y="1783080"/>
-            <a:ext cx="5120640" cy="548640"/>
+            <a:ext cx="7863840" cy="548640"/>
           </a:xfrm>
           <a:prstGeom prst="roundRect">
             <a:avLst>
@@ -10730,24 +10442,24 @@
         </p:nvSpPr>
         <p:spPr>
           <a:xfrm>
-            <a:off x="777240" y="1783080"/>
-            <a:ext cx="4754880" cy="548640"/>
-          </a:xfrm>
-          <a:prstGeom prst="rect">
-            <a:avLst/>
-          </a:prstGeom>
-          <a:noFill/>
-          <a:ln/>
-        </p:spPr>
-        <p:txBody>
-          <a:bodyPr wrap="square" lIns="0" tIns="0" rIns="0" bIns="0" rtlCol="0" anchor="ctr"/>
-          <a:lstStyle/>
-          <a:p>
-            <a:pPr indent="0" marL="0">
-              <a:buNone/>
-            </a:pPr>
-            <a:r>
-              <a:rPr lang="en-US" sz="1800" b="1" dirty="0">
+            <a:off x="822960" y="1783080"/>
+            <a:ext cx="7406640" cy="548640"/>
+          </a:xfrm>
+          <a:prstGeom prst="rect">
+            <a:avLst/>
+          </a:prstGeom>
+          <a:noFill/>
+          <a:ln/>
+        </p:spPr>
+        <p:txBody>
+          <a:bodyPr wrap="square" lIns="0" tIns="0" rIns="0" bIns="0" rtlCol="0" anchor="ctr"/>
+          <a:lstStyle/>
+          <a:p>
+            <a:pPr indent="0" marL="0">
+              <a:buNone/>
+            </a:pPr>
+            <a:r>
+              <a:rPr lang="en-US" sz="1900" b="1" dirty="0">
                 <a:solidFill>
                   <a:srgbClr val="7A1524"/>
                 </a:solidFill>
@@ -10757,7 +10469,7 @@
               </a:rPr>
               <a:t>考え方が変わる。</a:t>
             </a:r>
-            <a:endParaRPr lang="en-US" sz="1800" dirty="0"/>
+            <a:endParaRPr lang="en-US" sz="1900" dirty="0"/>
           </a:p>
         </p:txBody>
       </p:sp>
@@ -10809,7 +10521,7 @@
         <p:spPr>
           <a:xfrm>
             <a:off x="457200" y="2441448"/>
-            <a:ext cx="5120640" cy="548640"/>
+            <a:ext cx="7863840" cy="548640"/>
           </a:xfrm>
           <a:prstGeom prst="roundRect">
             <a:avLst>
@@ -10835,24 +10547,24 @@
         </p:nvSpPr>
         <p:spPr>
           <a:xfrm>
-            <a:off x="777240" y="2441448"/>
-            <a:ext cx="4754880" cy="548640"/>
-          </a:xfrm>
-          <a:prstGeom prst="rect">
-            <a:avLst/>
-          </a:prstGeom>
-          <a:noFill/>
-          <a:ln/>
-        </p:spPr>
-        <p:txBody>
-          <a:bodyPr wrap="square" lIns="0" tIns="0" rIns="0" bIns="0" rtlCol="0" anchor="ctr"/>
-          <a:lstStyle/>
-          <a:p>
-            <a:pPr indent="0" marL="0">
-              <a:buNone/>
-            </a:pPr>
-            <a:r>
-              <a:rPr lang="en-US" sz="1800" b="1" dirty="0">
+            <a:off x="822960" y="2441448"/>
+            <a:ext cx="7406640" cy="548640"/>
+          </a:xfrm>
+          <a:prstGeom prst="rect">
+            <a:avLst/>
+          </a:prstGeom>
+          <a:noFill/>
+          <a:ln/>
+        </p:spPr>
+        <p:txBody>
+          <a:bodyPr wrap="square" lIns="0" tIns="0" rIns="0" bIns="0" rtlCol="0" anchor="ctr"/>
+          <a:lstStyle/>
+          <a:p>
+            <a:pPr indent="0" marL="0">
+              <a:buNone/>
+            </a:pPr>
+            <a:r>
+              <a:rPr lang="en-US" sz="1900" b="1" dirty="0">
                 <a:solidFill>
                   <a:srgbClr val="7A1524"/>
                 </a:solidFill>
@@ -10862,7 +10574,7 @@
               </a:rPr>
               <a:t>選ぶ行動が変わる。</a:t>
             </a:r>
-            <a:endParaRPr lang="en-US" sz="1800" dirty="0"/>
+            <a:endParaRPr lang="en-US" sz="1900" dirty="0"/>
           </a:p>
         </p:txBody>
       </p:sp>
@@ -10914,7 +10626,7 @@
         <p:spPr>
           <a:xfrm>
             <a:off x="457200" y="3099816"/>
-            <a:ext cx="5120640" cy="548640"/>
+            <a:ext cx="7863840" cy="548640"/>
           </a:xfrm>
           <a:prstGeom prst="roundRect">
             <a:avLst>
@@ -10940,24 +10652,24 @@
         </p:nvSpPr>
         <p:spPr>
           <a:xfrm>
-            <a:off x="777240" y="3099816"/>
-            <a:ext cx="4754880" cy="548640"/>
-          </a:xfrm>
-          <a:prstGeom prst="rect">
-            <a:avLst/>
-          </a:prstGeom>
-          <a:noFill/>
-          <a:ln/>
-        </p:spPr>
-        <p:txBody>
-          <a:bodyPr wrap="square" lIns="0" tIns="0" rIns="0" bIns="0" rtlCol="0" anchor="ctr"/>
-          <a:lstStyle/>
-          <a:p>
-            <a:pPr indent="0" marL="0">
-              <a:buNone/>
-            </a:pPr>
-            <a:r>
-              <a:rPr lang="en-US" sz="1800" b="1" dirty="0">
+            <a:off x="822960" y="3099816"/>
+            <a:ext cx="7406640" cy="548640"/>
+          </a:xfrm>
+          <a:prstGeom prst="rect">
+            <a:avLst/>
+          </a:prstGeom>
+          <a:noFill/>
+          <a:ln/>
+        </p:spPr>
+        <p:txBody>
+          <a:bodyPr wrap="square" lIns="0" tIns="0" rIns="0" bIns="0" rtlCol="0" anchor="ctr"/>
+          <a:lstStyle/>
+          <a:p>
+            <a:pPr indent="0" marL="0">
+              <a:buNone/>
+            </a:pPr>
+            <a:r>
+              <a:rPr lang="en-US" sz="1900" b="1" dirty="0">
                 <a:solidFill>
                   <a:srgbClr val="7A1524"/>
                 </a:solidFill>
@@ -10967,7 +10679,7 @@
               </a:rPr>
               <a:t>積み重ねが変わる。</a:t>
             </a:r>
-            <a:endParaRPr lang="en-US" sz="1800" dirty="0"/>
+            <a:endParaRPr lang="en-US" sz="1900" dirty="0"/>
           </a:p>
         </p:txBody>
       </p:sp>
@@ -11019,7 +10731,7 @@
         <p:spPr>
           <a:xfrm>
             <a:off x="457200" y="3758184"/>
-            <a:ext cx="5120640" cy="548640"/>
+            <a:ext cx="7863840" cy="548640"/>
           </a:xfrm>
           <a:prstGeom prst="roundRect">
             <a:avLst>
@@ -11045,24 +10757,24 @@
         </p:nvSpPr>
         <p:spPr>
           <a:xfrm>
-            <a:off x="777240" y="3758184"/>
-            <a:ext cx="4754880" cy="548640"/>
-          </a:xfrm>
-          <a:prstGeom prst="rect">
-            <a:avLst/>
-          </a:prstGeom>
-          <a:noFill/>
-          <a:ln/>
-        </p:spPr>
-        <p:txBody>
-          <a:bodyPr wrap="square" lIns="0" tIns="0" rIns="0" bIns="0" rtlCol="0" anchor="ctr"/>
-          <a:lstStyle/>
-          <a:p>
-            <a:pPr indent="0" marL="0">
-              <a:buNone/>
-            </a:pPr>
-            <a:r>
-              <a:rPr lang="en-US" sz="1800" b="1" dirty="0">
+            <a:off x="822960" y="3758184"/>
+            <a:ext cx="7406640" cy="548640"/>
+          </a:xfrm>
+          <a:prstGeom prst="rect">
+            <a:avLst/>
+          </a:prstGeom>
+          <a:noFill/>
+          <a:ln/>
+        </p:spPr>
+        <p:txBody>
+          <a:bodyPr wrap="square" lIns="0" tIns="0" rIns="0" bIns="0" rtlCol="0" anchor="ctr"/>
+          <a:lstStyle/>
+          <a:p>
+            <a:pPr indent="0" marL="0">
+              <a:buNone/>
+            </a:pPr>
+            <a:r>
+              <a:rPr lang="en-US" sz="1900" b="1" dirty="0">
                 <a:solidFill>
                   <a:srgbClr val="FFFFFF"/>
                 </a:solidFill>
@@ -11072,96 +10784,49 @@
               </a:rPr>
               <a:t>自分への信頼が育つ。</a:t>
             </a:r>
+            <a:endParaRPr lang="en-US" sz="1900" dirty="0"/>
+          </a:p>
+        </p:txBody>
+      </p:sp>
+      <p:sp>
+        <p:nvSpPr>
+          <p:cNvPr id="16" name="Text 14"/>
+          <p:cNvSpPr txBox="1"/>
+          <p:nvPr/>
+        </p:nvSpPr>
+        <p:spPr>
+          <a:xfrm>
+            <a:off x="457200" y="4480560"/>
+            <a:ext cx="7863840" cy="457200"/>
+          </a:xfrm>
+          <a:prstGeom prst="rect">
+            <a:avLst/>
+          </a:prstGeom>
+          <a:noFill/>
+          <a:ln/>
+        </p:spPr>
+        <p:txBody>
+          <a:bodyPr wrap="square" lIns="0" tIns="0" rIns="0" bIns="0" rtlCol="0" anchor="ctr"/>
+          <a:lstStyle/>
+          <a:p>
+            <a:pPr indent="0" marL="0">
+              <a:buNone/>
+            </a:pPr>
+            <a:r>
+              <a:rPr lang="en-US" sz="1800" dirty="0">
+                <a:solidFill>
+                  <a:srgbClr val="3B3634"/>
+                </a:solidFill>
+                <a:latin typeface="Yu Gothic" pitchFamily="34" charset="0"/>
+                <a:ea typeface="Yu Gothic" pitchFamily="34" charset="-122"/>
+                <a:cs typeface="Yu Gothic" pitchFamily="34" charset="-120"/>
+              </a:rPr>
+              <a:t>メンタルトレーニングは、その積み重ねをつくるものです。</a:t>
+            </a:r>
             <a:endParaRPr lang="en-US" sz="1800" dirty="0"/>
           </a:p>
         </p:txBody>
       </p:sp>
-      <p:sp>
-        <p:nvSpPr>
-          <p:cNvPr id="16" name="Text 14"/>
-          <p:cNvSpPr txBox="1"/>
-          <p:nvPr/>
-        </p:nvSpPr>
-        <p:spPr>
-          <a:xfrm>
-            <a:off x="5943600" y="2377440"/>
-            <a:ext cx="2743200" cy="1097280"/>
-          </a:xfrm>
-          <a:prstGeom prst="rect">
-            <a:avLst/>
-          </a:prstGeom>
-          <a:noFill/>
-          <a:ln/>
-        </p:spPr>
-        <p:txBody>
-          <a:bodyPr wrap="square" lIns="0" tIns="0" rIns="0" bIns="0" rtlCol="0" anchor="ctr"/>
-          <a:lstStyle/>
-          <a:p>
-            <a:pPr indent="0" marL="0">
-              <a:lnSpc>
-                <a:spcPts val="2800"/>
-              </a:lnSpc>
-              <a:buNone/>
-            </a:pPr>
-            <a:r>
-              <a:rPr lang="en-US" sz="1700" dirty="0">
-                <a:solidFill>
-                  <a:srgbClr val="3B3634"/>
-                </a:solidFill>
-                <a:latin typeface="Yu Gothic" pitchFamily="34" charset="0"/>
-                <a:ea typeface="Yu Gothic" pitchFamily="34" charset="-122"/>
-                <a:cs typeface="Yu Gothic" pitchFamily="34" charset="-120"/>
-              </a:rPr>
-              <a:t>メンタルトレーニングは、</a:t>
-            </a:r>
-            <a:endParaRPr lang="en-US" sz="1700" dirty="0"/>
-          </a:p>
-          <a:p>
-            <a:pPr indent="0" marL="0">
-              <a:lnSpc>
-                <a:spcPts val="2800"/>
-              </a:lnSpc>
-              <a:buNone/>
-            </a:pPr>
-            <a:r>
-              <a:rPr lang="en-US" sz="1700" dirty="0">
-                <a:solidFill>
-                  <a:srgbClr val="3B3634"/>
-                </a:solidFill>
-                <a:latin typeface="Yu Gothic" pitchFamily="34" charset="0"/>
-                <a:ea typeface="Yu Gothic" pitchFamily="34" charset="-122"/>
-                <a:cs typeface="Yu Gothic" pitchFamily="34" charset="-120"/>
-              </a:rPr>
-              <a:t>その積み重ねをつくるものです。</a:t>
-            </a:r>
-            <a:endParaRPr lang="en-US" sz="1700" dirty="0"/>
-          </a:p>
-        </p:txBody>
-      </p:sp>
-      <p:pic>
-        <p:nvPicPr>
-          <p:cNvPr id="17" name="Image 0" descr="preencoded.png">    </p:cNvPr>
-          <p:cNvPicPr>
-            <a:picLocks noChangeAspect="1"/>
-          </p:cNvPicPr>
-          <p:nvPr/>
-        </p:nvPicPr>
-        <p:blipFill>
-          <a:blip r:embed="rId1"/>
-          <a:stretch>
-            <a:fillRect/>
-          </a:stretch>
-        </p:blipFill>
-        <p:spPr>
-          <a:xfrm>
-            <a:off x="6400800" y="1097280"/>
-            <a:ext cx="1463040" cy="1463040"/>
-          </a:xfrm>
-          <a:prstGeom prst="rect">
-            <a:avLst/>
-          </a:prstGeom>
-        </p:spPr>
-      </p:pic>
     </p:spTree>
   </p:cSld>
   <p:clrMapOvr>
@@ -11304,9 +10969,9 @@
                 <a:solidFill>
                   <a:srgbClr val="141416"/>
                 </a:solidFill>
-                <a:latin typeface="Yu Gothic" pitchFamily="34" charset="0"/>
-                <a:ea typeface="Yu Gothic" pitchFamily="34" charset="-122"/>
-                <a:cs typeface="Yu Gothic" pitchFamily="34" charset="-120"/>
+                <a:latin typeface="Yu Mincho" pitchFamily="34" charset="0"/>
+                <a:ea typeface="Yu Mincho" pitchFamily="34" charset="-122"/>
+                <a:cs typeface="Yu Mincho" pitchFamily="34" charset="-120"/>
               </a:rPr>
               <a:t>あなたの場合は、何を身につけたい？</a:t>
             </a:r>
@@ -11361,12 +11026,12 @@
         </p:nvSpPr>
         <p:spPr>
           <a:xfrm>
-            <a:off x="457200" y="2331720"/>
-            <a:ext cx="2743200" cy="603504"/>
+            <a:off x="457200" y="2377440"/>
+            <a:ext cx="3931920" cy="621792"/>
           </a:xfrm>
           <a:prstGeom prst="roundRect">
             <a:avLst>
-              <a:gd name="adj" fmla="val 10606"/>
+              <a:gd name="adj" fmla="val 10294"/>
             </a:avLst>
           </a:prstGeom>
           <a:solidFill>
@@ -11388,24 +11053,24 @@
         </p:nvSpPr>
         <p:spPr>
           <a:xfrm>
-            <a:off x="640080" y="2331720"/>
-            <a:ext cx="2514600" cy="603504"/>
-          </a:xfrm>
-          <a:prstGeom prst="rect">
-            <a:avLst/>
-          </a:prstGeom>
-          <a:noFill/>
-          <a:ln/>
-        </p:spPr>
-        <p:txBody>
-          <a:bodyPr wrap="square" lIns="0" tIns="0" rIns="0" bIns="0" rtlCol="0" anchor="ctr"/>
-          <a:lstStyle/>
-          <a:p>
-            <a:pPr indent="0" marL="0">
-              <a:buNone/>
-            </a:pPr>
-            <a:r>
-              <a:rPr lang="en-US" sz="1500" b="1" dirty="0">
+            <a:off x="731520" y="2377440"/>
+            <a:ext cx="3657600" cy="621792"/>
+          </a:xfrm>
+          <a:prstGeom prst="rect">
+            <a:avLst/>
+          </a:prstGeom>
+          <a:noFill/>
+          <a:ln/>
+        </p:spPr>
+        <p:txBody>
+          <a:bodyPr wrap="square" lIns="0" tIns="0" rIns="0" bIns="0" rtlCol="0" anchor="ctr"/>
+          <a:lstStyle/>
+          <a:p>
+            <a:pPr indent="0" marL="0">
+              <a:buNone/>
+            </a:pPr>
+            <a:r>
+              <a:rPr lang="en-US" sz="1800" b="1" dirty="0">
                 <a:solidFill>
                   <a:srgbClr val="7A1524"/>
                 </a:solidFill>
@@ -11415,7 +11080,7 @@
               </a:rPr>
               <a:t>不安の整理</a:t>
             </a:r>
-            <a:endParaRPr lang="en-US" sz="1500" dirty="0"/>
+            <a:endParaRPr lang="en-US" sz="1800" dirty="0"/>
           </a:p>
         </p:txBody>
       </p:sp>
@@ -11427,12 +11092,12 @@
         </p:nvSpPr>
         <p:spPr>
           <a:xfrm>
-            <a:off x="3383280" y="2331720"/>
-            <a:ext cx="2743200" cy="603504"/>
+            <a:off x="4572000" y="2377440"/>
+            <a:ext cx="3931920" cy="621792"/>
           </a:xfrm>
           <a:prstGeom prst="roundRect">
             <a:avLst>
-              <a:gd name="adj" fmla="val 10606"/>
+              <a:gd name="adj" fmla="val 10294"/>
             </a:avLst>
           </a:prstGeom>
           <a:solidFill>
@@ -11454,24 +11119,24 @@
         </p:nvSpPr>
         <p:spPr>
           <a:xfrm>
-            <a:off x="3566160" y="2331720"/>
-            <a:ext cx="2514600" cy="603504"/>
-          </a:xfrm>
-          <a:prstGeom prst="rect">
-            <a:avLst/>
-          </a:prstGeom>
-          <a:noFill/>
-          <a:ln/>
-        </p:spPr>
-        <p:txBody>
-          <a:bodyPr wrap="square" lIns="0" tIns="0" rIns="0" bIns="0" rtlCol="0" anchor="ctr"/>
-          <a:lstStyle/>
-          <a:p>
-            <a:pPr indent="0" marL="0">
-              <a:buNone/>
-            </a:pPr>
-            <a:r>
-              <a:rPr lang="en-US" sz="1500" b="1" dirty="0">
+            <a:off x="4846320" y="2377440"/>
+            <a:ext cx="3657600" cy="621792"/>
+          </a:xfrm>
+          <a:prstGeom prst="rect">
+            <a:avLst/>
+          </a:prstGeom>
+          <a:noFill/>
+          <a:ln/>
+        </p:spPr>
+        <p:txBody>
+          <a:bodyPr wrap="square" lIns="0" tIns="0" rIns="0" bIns="0" rtlCol="0" anchor="ctr"/>
+          <a:lstStyle/>
+          <a:p>
+            <a:pPr indent="0" marL="0">
+              <a:buNone/>
+            </a:pPr>
+            <a:r>
+              <a:rPr lang="en-US" sz="1800" b="1" dirty="0">
                 <a:solidFill>
                   <a:srgbClr val="7A1524"/>
                 </a:solidFill>
@@ -11481,7 +11146,7 @@
               </a:rPr>
               <a:t>一本前のルーティン</a:t>
             </a:r>
-            <a:endParaRPr lang="en-US" sz="1500" dirty="0"/>
+            <a:endParaRPr lang="en-US" sz="1800" dirty="0"/>
           </a:p>
         </p:txBody>
       </p:sp>
@@ -11493,12 +11158,12 @@
         </p:nvSpPr>
         <p:spPr>
           <a:xfrm>
-            <a:off x="457200" y="3044952"/>
-            <a:ext cx="2743200" cy="603504"/>
+            <a:off x="457200" y="3108960"/>
+            <a:ext cx="3931920" cy="621792"/>
           </a:xfrm>
           <a:prstGeom prst="roundRect">
             <a:avLst>
-              <a:gd name="adj" fmla="val 10606"/>
+              <a:gd name="adj" fmla="val 10294"/>
             </a:avLst>
           </a:prstGeom>
           <a:solidFill>
@@ -11520,24 +11185,24 @@
         </p:nvSpPr>
         <p:spPr>
           <a:xfrm>
-            <a:off x="640080" y="3044952"/>
-            <a:ext cx="2514600" cy="603504"/>
-          </a:xfrm>
-          <a:prstGeom prst="rect">
-            <a:avLst/>
-          </a:prstGeom>
-          <a:noFill/>
-          <a:ln/>
-        </p:spPr>
-        <p:txBody>
-          <a:bodyPr wrap="square" lIns="0" tIns="0" rIns="0" bIns="0" rtlCol="0" anchor="ctr"/>
-          <a:lstStyle/>
-          <a:p>
-            <a:pPr indent="0" marL="0">
-              <a:buNone/>
-            </a:pPr>
-            <a:r>
-              <a:rPr lang="en-US" sz="1500" b="1" dirty="0">
+            <a:off x="731520" y="3108960"/>
+            <a:ext cx="3657600" cy="621792"/>
+          </a:xfrm>
+          <a:prstGeom prst="rect">
+            <a:avLst/>
+          </a:prstGeom>
+          <a:noFill/>
+          <a:ln/>
+        </p:spPr>
+        <p:txBody>
+          <a:bodyPr wrap="square" lIns="0" tIns="0" rIns="0" bIns="0" rtlCol="0" anchor="ctr"/>
+          <a:lstStyle/>
+          <a:p>
+            <a:pPr indent="0" marL="0">
+              <a:buNone/>
+            </a:pPr>
+            <a:r>
+              <a:rPr lang="en-US" sz="1800" b="1" dirty="0">
                 <a:solidFill>
                   <a:srgbClr val="7A1524"/>
                 </a:solidFill>
@@ -11547,7 +11212,7 @@
               </a:rPr>
               <a:t>失敗後の切り替え</a:t>
             </a:r>
-            <a:endParaRPr lang="en-US" sz="1500" dirty="0"/>
+            <a:endParaRPr lang="en-US" sz="1800" dirty="0"/>
           </a:p>
         </p:txBody>
       </p:sp>
@@ -11559,12 +11224,12 @@
         </p:nvSpPr>
         <p:spPr>
           <a:xfrm>
-            <a:off x="3383280" y="3044952"/>
-            <a:ext cx="2743200" cy="603504"/>
+            <a:off x="4572000" y="3108960"/>
+            <a:ext cx="3931920" cy="621792"/>
           </a:xfrm>
           <a:prstGeom prst="roundRect">
             <a:avLst>
-              <a:gd name="adj" fmla="val 10606"/>
+              <a:gd name="adj" fmla="val 10294"/>
             </a:avLst>
           </a:prstGeom>
           <a:solidFill>
@@ -11586,24 +11251,24 @@
         </p:nvSpPr>
         <p:spPr>
           <a:xfrm>
-            <a:off x="3566160" y="3044952"/>
-            <a:ext cx="2514600" cy="603504"/>
-          </a:xfrm>
-          <a:prstGeom prst="rect">
-            <a:avLst/>
-          </a:prstGeom>
-          <a:noFill/>
-          <a:ln/>
-        </p:spPr>
-        <p:txBody>
-          <a:bodyPr wrap="square" lIns="0" tIns="0" rIns="0" bIns="0" rtlCol="0" anchor="ctr"/>
-          <a:lstStyle/>
-          <a:p>
-            <a:pPr indent="0" marL="0">
-              <a:buNone/>
-            </a:pPr>
-            <a:r>
-              <a:rPr lang="en-US" sz="1500" b="1" dirty="0">
+            <a:off x="4846320" y="3108960"/>
+            <a:ext cx="3657600" cy="621792"/>
+          </a:xfrm>
+          <a:prstGeom prst="rect">
+            <a:avLst/>
+          </a:prstGeom>
+          <a:noFill/>
+          <a:ln/>
+        </p:spPr>
+        <p:txBody>
+          <a:bodyPr wrap="square" lIns="0" tIns="0" rIns="0" bIns="0" rtlCol="0" anchor="ctr"/>
+          <a:lstStyle/>
+          <a:p>
+            <a:pPr indent="0" marL="0">
+              <a:buNone/>
+            </a:pPr>
+            <a:r>
+              <a:rPr lang="en-US" sz="1800" b="1" dirty="0">
                 <a:solidFill>
                   <a:srgbClr val="7A1524"/>
                 </a:solidFill>
@@ -11613,7 +11278,7 @@
               </a:rPr>
               <a:t>比較への対処</a:t>
             </a:r>
-            <a:endParaRPr lang="en-US" sz="1500" dirty="0"/>
+            <a:endParaRPr lang="en-US" sz="1800" dirty="0"/>
           </a:p>
         </p:txBody>
       </p:sp>
@@ -11625,12 +11290,12 @@
         </p:nvSpPr>
         <p:spPr>
           <a:xfrm>
-            <a:off x="457200" y="3758184"/>
-            <a:ext cx="2743200" cy="603504"/>
+            <a:off x="457200" y="3840480"/>
+            <a:ext cx="3931920" cy="621792"/>
           </a:xfrm>
           <a:prstGeom prst="roundRect">
             <a:avLst>
-              <a:gd name="adj" fmla="val 10606"/>
+              <a:gd name="adj" fmla="val 10294"/>
             </a:avLst>
           </a:prstGeom>
           <a:solidFill>
@@ -11652,24 +11317,24 @@
         </p:nvSpPr>
         <p:spPr>
           <a:xfrm>
-            <a:off x="640080" y="3758184"/>
-            <a:ext cx="2514600" cy="603504"/>
-          </a:xfrm>
-          <a:prstGeom prst="rect">
-            <a:avLst/>
-          </a:prstGeom>
-          <a:noFill/>
-          <a:ln/>
-        </p:spPr>
-        <p:txBody>
-          <a:bodyPr wrap="square" lIns="0" tIns="0" rIns="0" bIns="0" rtlCol="0" anchor="ctr"/>
-          <a:lstStyle/>
-          <a:p>
-            <a:pPr indent="0" marL="0">
-              <a:buNone/>
-            </a:pPr>
-            <a:r>
-              <a:rPr lang="en-US" sz="1500" b="1" dirty="0">
+            <a:off x="731520" y="3840480"/>
+            <a:ext cx="3657600" cy="621792"/>
+          </a:xfrm>
+          <a:prstGeom prst="rect">
+            <a:avLst/>
+          </a:prstGeom>
+          <a:noFill/>
+          <a:ln/>
+        </p:spPr>
+        <p:txBody>
+          <a:bodyPr wrap="square" lIns="0" tIns="0" rIns="0" bIns="0" rtlCol="0" anchor="ctr"/>
+          <a:lstStyle/>
+          <a:p>
+            <a:pPr indent="0" marL="0">
+              <a:buNone/>
+            </a:pPr>
+            <a:r>
+              <a:rPr lang="en-US" sz="1800" b="1" dirty="0">
                 <a:solidFill>
                   <a:srgbClr val="7A1524"/>
                 </a:solidFill>
@@ -11679,7 +11344,7 @@
               </a:rPr>
               <a:t>休む／頑張るの判断</a:t>
             </a:r>
-            <a:endParaRPr lang="en-US" sz="1500" dirty="0"/>
+            <a:endParaRPr lang="en-US" sz="1800" dirty="0"/>
           </a:p>
         </p:txBody>
       </p:sp>
@@ -11691,12 +11356,12 @@
         </p:nvSpPr>
         <p:spPr>
           <a:xfrm>
-            <a:off x="3383280" y="3758184"/>
-            <a:ext cx="2743200" cy="603504"/>
+            <a:off x="4572000" y="3840480"/>
+            <a:ext cx="3931920" cy="621792"/>
           </a:xfrm>
           <a:prstGeom prst="roundRect">
             <a:avLst>
-              <a:gd name="adj" fmla="val 10606"/>
+              <a:gd name="adj" fmla="val 10294"/>
             </a:avLst>
           </a:prstGeom>
           <a:solidFill>
@@ -11718,24 +11383,24 @@
         </p:nvSpPr>
         <p:spPr>
           <a:xfrm>
-            <a:off x="3566160" y="3758184"/>
-            <a:ext cx="2514600" cy="603504"/>
-          </a:xfrm>
-          <a:prstGeom prst="rect">
-            <a:avLst/>
-          </a:prstGeom>
-          <a:noFill/>
-          <a:ln/>
-        </p:spPr>
-        <p:txBody>
-          <a:bodyPr wrap="square" lIns="0" tIns="0" rIns="0" bIns="0" rtlCol="0" anchor="ctr"/>
-          <a:lstStyle/>
-          <a:p>
-            <a:pPr indent="0" marL="0">
-              <a:buNone/>
-            </a:pPr>
-            <a:r>
-              <a:rPr lang="en-US" sz="1500" b="1" dirty="0">
+            <a:off x="4846320" y="3840480"/>
+            <a:ext cx="3657600" cy="621792"/>
+          </a:xfrm>
+          <a:prstGeom prst="rect">
+            <a:avLst/>
+          </a:prstGeom>
+          <a:noFill/>
+          <a:ln/>
+        </p:spPr>
+        <p:txBody>
+          <a:bodyPr wrap="square" lIns="0" tIns="0" rIns="0" bIns="0" rtlCol="0" anchor="ctr"/>
+          <a:lstStyle/>
+          <a:p>
+            <a:pPr indent="0" marL="0">
+              <a:buNone/>
+            </a:pPr>
+            <a:r>
+              <a:rPr lang="en-US" sz="1800" b="1" dirty="0">
                 <a:solidFill>
                   <a:srgbClr val="7A1524"/>
                 </a:solidFill>
@@ -11745,34 +11410,10 @@
               </a:rPr>
               <a:t>目標を行動に落とし込む</a:t>
             </a:r>
-            <a:endParaRPr lang="en-US" sz="1500" dirty="0"/>
-          </a:p>
-        </p:txBody>
-      </p:sp>
-      <p:pic>
-        <p:nvPicPr>
-          <p:cNvPr id="18" name="Image 0" descr="preencoded.png">    </p:cNvPr>
-          <p:cNvPicPr>
-            <a:picLocks noChangeAspect="1"/>
-          </p:cNvPicPr>
-          <p:nvPr/>
-        </p:nvPicPr>
-        <p:blipFill>
-          <a:blip r:embed="rId1"/>
-          <a:stretch>
-            <a:fillRect/>
-          </a:stretch>
-        </p:blipFill>
-        <p:spPr>
-          <a:xfrm>
-            <a:off x="6583680" y="2286000"/>
-            <a:ext cx="2103120" cy="2103120"/>
-          </a:xfrm>
-          <a:prstGeom prst="rect">
-            <a:avLst/>
-          </a:prstGeom>
-        </p:spPr>
-      </p:pic>
+            <a:endParaRPr lang="en-US" sz="1800" dirty="0"/>
+          </a:p>
+        </p:txBody>
+      </p:sp>
     </p:spTree>
   </p:cSld>
   <p:clrMapOvr>
@@ -12041,9 +11682,9 @@
                 <a:solidFill>
                   <a:srgbClr val="FFFFFF"/>
                 </a:solidFill>
-                <a:latin typeface="Yu Gothic" pitchFamily="34" charset="0"/>
-                <a:ea typeface="Yu Gothic" pitchFamily="34" charset="-122"/>
-                <a:cs typeface="Yu Gothic" pitchFamily="34" charset="-120"/>
+                <a:latin typeface="Yu Mincho" pitchFamily="34" charset="0"/>
+                <a:ea typeface="Yu Mincho" pitchFamily="34" charset="-122"/>
+                <a:cs typeface="Yu Mincho" pitchFamily="34" charset="-120"/>
               </a:rPr>
               <a:t>パワーリフターのための</a:t>
             </a:r>
@@ -12061,9 +11702,9 @@
                 <a:solidFill>
                   <a:srgbClr val="FFFFFF"/>
                 </a:solidFill>
-                <a:latin typeface="Yu Gothic" pitchFamily="34" charset="0"/>
-                <a:ea typeface="Yu Gothic" pitchFamily="34" charset="-122"/>
-                <a:cs typeface="Yu Gothic" pitchFamily="34" charset="-120"/>
+                <a:latin typeface="Yu Mincho" pitchFamily="34" charset="0"/>
+                <a:ea typeface="Yu Mincho" pitchFamily="34" charset="-122"/>
+                <a:cs typeface="Yu Mincho" pitchFamily="34" charset="-120"/>
               </a:rPr>
               <a:t>実践メンタルトレーニング</a:t>
             </a:r>
@@ -12314,9 +11955,9 @@
                 <a:solidFill>
                   <a:srgbClr val="141416"/>
                 </a:solidFill>
-                <a:latin typeface="Yu Gothic" pitchFamily="34" charset="0"/>
-                <a:ea typeface="Yu Gothic" pitchFamily="34" charset="-122"/>
-                <a:cs typeface="Yu Gothic" pitchFamily="34" charset="-120"/>
+                <a:latin typeface="Yu Mincho" pitchFamily="34" charset="0"/>
+                <a:ea typeface="Yu Mincho" pitchFamily="34" charset="-122"/>
+                <a:cs typeface="Yu Mincho" pitchFamily="34" charset="-120"/>
               </a:rPr>
               <a:t>1対1で、自分の試合に落とし込む</a:t>
             </a:r>
@@ -12333,7 +11974,7 @@
         <p:spPr>
           <a:xfrm>
             <a:off x="457200" y="1783080"/>
-            <a:ext cx="5486400" cy="548640"/>
+            <a:ext cx="7863840" cy="548640"/>
           </a:xfrm>
           <a:prstGeom prst="roundRect">
             <a:avLst>
@@ -12359,24 +12000,24 @@
         </p:nvSpPr>
         <p:spPr>
           <a:xfrm>
-            <a:off x="731520" y="1783080"/>
-            <a:ext cx="1371600" cy="548640"/>
-          </a:xfrm>
-          <a:prstGeom prst="rect">
-            <a:avLst/>
-          </a:prstGeom>
-          <a:noFill/>
-          <a:ln/>
-        </p:spPr>
-        <p:txBody>
-          <a:bodyPr wrap="square" lIns="0" tIns="0" rIns="0" bIns="0" rtlCol="0" anchor="ctr"/>
-          <a:lstStyle/>
-          <a:p>
-            <a:pPr indent="0" marL="0">
-              <a:buNone/>
-            </a:pPr>
-            <a:r>
-              <a:rPr lang="en-US" sz="1600" b="1" dirty="0">
+            <a:off x="777240" y="1783080"/>
+            <a:ext cx="1554480" cy="548640"/>
+          </a:xfrm>
+          <a:prstGeom prst="rect">
+            <a:avLst/>
+          </a:prstGeom>
+          <a:noFill/>
+          <a:ln/>
+        </p:spPr>
+        <p:txBody>
+          <a:bodyPr wrap="square" lIns="0" tIns="0" rIns="0" bIns="0" rtlCol="0" anchor="ctr"/>
+          <a:lstStyle/>
+          <a:p>
+            <a:pPr indent="0" marL="0">
+              <a:buNone/>
+            </a:pPr>
+            <a:r>
+              <a:rPr lang="en-US" sz="1700" b="1" dirty="0">
                 <a:solidFill>
                   <a:srgbClr val="7A1524"/>
                 </a:solidFill>
@@ -12386,7 +12027,7 @@
               </a:rPr>
               <a:t>形式</a:t>
             </a:r>
-            <a:endParaRPr lang="en-US" sz="1600" dirty="0"/>
+            <a:endParaRPr lang="en-US" sz="1700" dirty="0"/>
           </a:p>
         </p:txBody>
       </p:sp>
@@ -12398,24 +12039,24 @@
         </p:nvSpPr>
         <p:spPr>
           <a:xfrm>
-            <a:off x="2103120" y="1783080"/>
-            <a:ext cx="3657600" cy="548640"/>
-          </a:xfrm>
-          <a:prstGeom prst="rect">
-            <a:avLst/>
-          </a:prstGeom>
-          <a:noFill/>
-          <a:ln/>
-        </p:spPr>
-        <p:txBody>
-          <a:bodyPr wrap="square" lIns="0" tIns="0" rIns="0" bIns="0" rtlCol="0" anchor="ctr"/>
-          <a:lstStyle/>
-          <a:p>
-            <a:pPr indent="0" marL="0">
-              <a:buNone/>
-            </a:pPr>
-            <a:r>
-              <a:rPr lang="en-US" sz="1700" dirty="0">
+            <a:off x="2377440" y="1783080"/>
+            <a:ext cx="5760720" cy="548640"/>
+          </a:xfrm>
+          <a:prstGeom prst="rect">
+            <a:avLst/>
+          </a:prstGeom>
+          <a:noFill/>
+          <a:ln/>
+        </p:spPr>
+        <p:txBody>
+          <a:bodyPr wrap="square" lIns="0" tIns="0" rIns="0" bIns="0" rtlCol="0" anchor="ctr"/>
+          <a:lstStyle/>
+          <a:p>
+            <a:pPr indent="0" marL="0">
+              <a:buNone/>
+            </a:pPr>
+            <a:r>
+              <a:rPr lang="en-US" sz="1800" dirty="0">
                 <a:solidFill>
                   <a:srgbClr val="3B3634"/>
                 </a:solidFill>
@@ -12425,7 +12066,7 @@
               </a:rPr>
               <a:t>完全1対1／Zoom</a:t>
             </a:r>
-            <a:endParaRPr lang="en-US" sz="1700" dirty="0"/>
+            <a:endParaRPr lang="en-US" sz="1800" dirty="0"/>
           </a:p>
         </p:txBody>
       </p:sp>
@@ -12438,7 +12079,7 @@
         <p:spPr>
           <a:xfrm>
             <a:off x="457200" y="2423160"/>
-            <a:ext cx="5486400" cy="548640"/>
+            <a:ext cx="7863840" cy="548640"/>
           </a:xfrm>
           <a:prstGeom prst="roundRect">
             <a:avLst>
@@ -12464,24 +12105,24 @@
         </p:nvSpPr>
         <p:spPr>
           <a:xfrm>
-            <a:off x="731520" y="2423160"/>
-            <a:ext cx="1371600" cy="548640"/>
-          </a:xfrm>
-          <a:prstGeom prst="rect">
-            <a:avLst/>
-          </a:prstGeom>
-          <a:noFill/>
-          <a:ln/>
-        </p:spPr>
-        <p:txBody>
-          <a:bodyPr wrap="square" lIns="0" tIns="0" rIns="0" bIns="0" rtlCol="0" anchor="ctr"/>
-          <a:lstStyle/>
-          <a:p>
-            <a:pPr indent="0" marL="0">
-              <a:buNone/>
-            </a:pPr>
-            <a:r>
-              <a:rPr lang="en-US" sz="1600" b="1" dirty="0">
+            <a:off x="777240" y="2423160"/>
+            <a:ext cx="1554480" cy="548640"/>
+          </a:xfrm>
+          <a:prstGeom prst="rect">
+            <a:avLst/>
+          </a:prstGeom>
+          <a:noFill/>
+          <a:ln/>
+        </p:spPr>
+        <p:txBody>
+          <a:bodyPr wrap="square" lIns="0" tIns="0" rIns="0" bIns="0" rtlCol="0" anchor="ctr"/>
+          <a:lstStyle/>
+          <a:p>
+            <a:pPr indent="0" marL="0">
+              <a:buNone/>
+            </a:pPr>
+            <a:r>
+              <a:rPr lang="en-US" sz="1700" b="1" dirty="0">
                 <a:solidFill>
                   <a:srgbClr val="7A1524"/>
                 </a:solidFill>
@@ -12491,7 +12132,7 @@
               </a:rPr>
               <a:t>回数</a:t>
             </a:r>
-            <a:endParaRPr lang="en-US" sz="1600" dirty="0"/>
+            <a:endParaRPr lang="en-US" sz="1700" dirty="0"/>
           </a:p>
         </p:txBody>
       </p:sp>
@@ -12503,24 +12144,24 @@
         </p:nvSpPr>
         <p:spPr>
           <a:xfrm>
-            <a:off x="2103120" y="2423160"/>
-            <a:ext cx="3657600" cy="548640"/>
-          </a:xfrm>
-          <a:prstGeom prst="rect">
-            <a:avLst/>
-          </a:prstGeom>
-          <a:noFill/>
-          <a:ln/>
-        </p:spPr>
-        <p:txBody>
-          <a:bodyPr wrap="square" lIns="0" tIns="0" rIns="0" bIns="0" rtlCol="0" anchor="ctr"/>
-          <a:lstStyle/>
-          <a:p>
-            <a:pPr indent="0" marL="0">
-              <a:buNone/>
-            </a:pPr>
-            <a:r>
-              <a:rPr lang="en-US" sz="1700" dirty="0">
+            <a:off x="2377440" y="2423160"/>
+            <a:ext cx="5760720" cy="548640"/>
+          </a:xfrm>
+          <a:prstGeom prst="rect">
+            <a:avLst/>
+          </a:prstGeom>
+          <a:noFill/>
+          <a:ln/>
+        </p:spPr>
+        <p:txBody>
+          <a:bodyPr wrap="square" lIns="0" tIns="0" rIns="0" bIns="0" rtlCol="0" anchor="ctr"/>
+          <a:lstStyle/>
+          <a:p>
+            <a:pPr indent="0" marL="0">
+              <a:buNone/>
+            </a:pPr>
+            <a:r>
+              <a:rPr lang="en-US" sz="1800" dirty="0">
                 <a:solidFill>
                   <a:srgbClr val="3B3634"/>
                 </a:solidFill>
@@ -12530,7 +12171,7 @@
               </a:rPr>
               <a:t>全10回（1回60分）</a:t>
             </a:r>
-            <a:endParaRPr lang="en-US" sz="1700" dirty="0"/>
+            <a:endParaRPr lang="en-US" sz="1800" dirty="0"/>
           </a:p>
         </p:txBody>
       </p:sp>
@@ -12543,7 +12184,7 @@
         <p:spPr>
           <a:xfrm>
             <a:off x="457200" y="3063240"/>
-            <a:ext cx="5486400" cy="548640"/>
+            <a:ext cx="7863840" cy="548640"/>
           </a:xfrm>
           <a:prstGeom prst="roundRect">
             <a:avLst>
@@ -12569,24 +12210,24 @@
         </p:nvSpPr>
         <p:spPr>
           <a:xfrm>
-            <a:off x="731520" y="3063240"/>
-            <a:ext cx="1371600" cy="548640"/>
-          </a:xfrm>
-          <a:prstGeom prst="rect">
-            <a:avLst/>
-          </a:prstGeom>
-          <a:noFill/>
-          <a:ln/>
-        </p:spPr>
-        <p:txBody>
-          <a:bodyPr wrap="square" lIns="0" tIns="0" rIns="0" bIns="0" rtlCol="0" anchor="ctr"/>
-          <a:lstStyle/>
-          <a:p>
-            <a:pPr indent="0" marL="0">
-              <a:buNone/>
-            </a:pPr>
-            <a:r>
-              <a:rPr lang="en-US" sz="1600" b="1" dirty="0">
+            <a:off x="777240" y="3063240"/>
+            <a:ext cx="1554480" cy="548640"/>
+          </a:xfrm>
+          <a:prstGeom prst="rect">
+            <a:avLst/>
+          </a:prstGeom>
+          <a:noFill/>
+          <a:ln/>
+        </p:spPr>
+        <p:txBody>
+          <a:bodyPr wrap="square" lIns="0" tIns="0" rIns="0" bIns="0" rtlCol="0" anchor="ctr"/>
+          <a:lstStyle/>
+          <a:p>
+            <a:pPr indent="0" marL="0">
+              <a:buNone/>
+            </a:pPr>
+            <a:r>
+              <a:rPr lang="en-US" sz="1700" b="1" dirty="0">
                 <a:solidFill>
                   <a:srgbClr val="7A1524"/>
                 </a:solidFill>
@@ -12596,7 +12237,7 @@
               </a:rPr>
               <a:t>期間</a:t>
             </a:r>
-            <a:endParaRPr lang="en-US" sz="1600" dirty="0"/>
+            <a:endParaRPr lang="en-US" sz="1700" dirty="0"/>
           </a:p>
         </p:txBody>
       </p:sp>
@@ -12608,24 +12249,24 @@
         </p:nvSpPr>
         <p:spPr>
           <a:xfrm>
-            <a:off x="2103120" y="3063240"/>
-            <a:ext cx="3657600" cy="548640"/>
-          </a:xfrm>
-          <a:prstGeom prst="rect">
-            <a:avLst/>
-          </a:prstGeom>
-          <a:noFill/>
-          <a:ln/>
-        </p:spPr>
-        <p:txBody>
-          <a:bodyPr wrap="square" lIns="0" tIns="0" rIns="0" bIns="0" rtlCol="0" anchor="ctr"/>
-          <a:lstStyle/>
-          <a:p>
-            <a:pPr indent="0" marL="0">
-              <a:buNone/>
-            </a:pPr>
-            <a:r>
-              <a:rPr lang="en-US" sz="1700" dirty="0">
+            <a:off x="2377440" y="3063240"/>
+            <a:ext cx="5760720" cy="548640"/>
+          </a:xfrm>
+          <a:prstGeom prst="rect">
+            <a:avLst/>
+          </a:prstGeom>
+          <a:noFill/>
+          <a:ln/>
+        </p:spPr>
+        <p:txBody>
+          <a:bodyPr wrap="square" lIns="0" tIns="0" rIns="0" bIns="0" rtlCol="0" anchor="ctr"/>
+          <a:lstStyle/>
+          <a:p>
+            <a:pPr indent="0" marL="0">
+              <a:buNone/>
+            </a:pPr>
+            <a:r>
+              <a:rPr lang="en-US" sz="1800" dirty="0">
                 <a:solidFill>
                   <a:srgbClr val="3B3634"/>
                 </a:solidFill>
@@ -12635,7 +12276,7 @@
               </a:rPr>
               <a:t>最長3か月</a:t>
             </a:r>
-            <a:endParaRPr lang="en-US" sz="1700" dirty="0"/>
+            <a:endParaRPr lang="en-US" sz="1800" dirty="0"/>
           </a:p>
         </p:txBody>
       </p:sp>
@@ -12648,7 +12289,7 @@
         <p:spPr>
           <a:xfrm>
             <a:off x="457200" y="3703320"/>
-            <a:ext cx="5486400" cy="548640"/>
+            <a:ext cx="7863840" cy="548640"/>
           </a:xfrm>
           <a:prstGeom prst="roundRect">
             <a:avLst>
@@ -12674,24 +12315,24 @@
         </p:nvSpPr>
         <p:spPr>
           <a:xfrm>
-            <a:off x="731520" y="3703320"/>
-            <a:ext cx="1371600" cy="548640"/>
-          </a:xfrm>
-          <a:prstGeom prst="rect">
-            <a:avLst/>
-          </a:prstGeom>
-          <a:noFill/>
-          <a:ln/>
-        </p:spPr>
-        <p:txBody>
-          <a:bodyPr wrap="square" lIns="0" tIns="0" rIns="0" bIns="0" rtlCol="0" anchor="ctr"/>
-          <a:lstStyle/>
-          <a:p>
-            <a:pPr indent="0" marL="0">
-              <a:buNone/>
-            </a:pPr>
-            <a:r>
-              <a:rPr lang="en-US" sz="1600" b="1" dirty="0">
+            <a:off x="777240" y="3703320"/>
+            <a:ext cx="1554480" cy="548640"/>
+          </a:xfrm>
+          <a:prstGeom prst="rect">
+            <a:avLst/>
+          </a:prstGeom>
+          <a:noFill/>
+          <a:ln/>
+        </p:spPr>
+        <p:txBody>
+          <a:bodyPr wrap="square" lIns="0" tIns="0" rIns="0" bIns="0" rtlCol="0" anchor="ctr"/>
+          <a:lstStyle/>
+          <a:p>
+            <a:pPr indent="0" marL="0">
+              <a:buNone/>
+            </a:pPr>
+            <a:r>
+              <a:rPr lang="en-US" sz="1700" b="1" dirty="0">
                 <a:solidFill>
                   <a:srgbClr val="7A1524"/>
                 </a:solidFill>
@@ -12701,7 +12342,7 @@
               </a:rPr>
               <a:t>ペース</a:t>
             </a:r>
-            <a:endParaRPr lang="en-US" sz="1600" dirty="0"/>
+            <a:endParaRPr lang="en-US" sz="1700" dirty="0"/>
           </a:p>
         </p:txBody>
       </p:sp>
@@ -12713,24 +12354,24 @@
         </p:nvSpPr>
         <p:spPr>
           <a:xfrm>
-            <a:off x="2103120" y="3703320"/>
-            <a:ext cx="3657600" cy="548640"/>
-          </a:xfrm>
-          <a:prstGeom prst="rect">
-            <a:avLst/>
-          </a:prstGeom>
-          <a:noFill/>
-          <a:ln/>
-        </p:spPr>
-        <p:txBody>
-          <a:bodyPr wrap="square" lIns="0" tIns="0" rIns="0" bIns="0" rtlCol="0" anchor="ctr"/>
-          <a:lstStyle/>
-          <a:p>
-            <a:pPr indent="0" marL="0">
-              <a:buNone/>
-            </a:pPr>
-            <a:r>
-              <a:rPr lang="en-US" sz="1700" dirty="0">
+            <a:off x="2377440" y="3703320"/>
+            <a:ext cx="5760720" cy="548640"/>
+          </a:xfrm>
+          <a:prstGeom prst="rect">
+            <a:avLst/>
+          </a:prstGeom>
+          <a:noFill/>
+          <a:ln/>
+        </p:spPr>
+        <p:txBody>
+          <a:bodyPr wrap="square" lIns="0" tIns="0" rIns="0" bIns="0" rtlCol="0" anchor="ctr"/>
+          <a:lstStyle/>
+          <a:p>
+            <a:pPr indent="0" marL="0">
+              <a:buNone/>
+            </a:pPr>
+            <a:r>
+              <a:rPr lang="en-US" sz="1800" dirty="0">
                 <a:solidFill>
                   <a:srgbClr val="3B3634"/>
                 </a:solidFill>
@@ -12740,7 +12381,7 @@
               </a:rPr>
               <a:t>試合日程に合わせて調整</a:t>
             </a:r>
-            <a:endParaRPr lang="en-US" sz="1700" dirty="0"/>
+            <a:endParaRPr lang="en-US" sz="1800" dirty="0"/>
           </a:p>
         </p:txBody>
       </p:sp>
@@ -12752,27 +12393,24 @@
         </p:nvSpPr>
         <p:spPr>
           <a:xfrm>
-            <a:off x="457200" y="4297680"/>
-            <a:ext cx="5852160" cy="640080"/>
-          </a:xfrm>
-          <a:prstGeom prst="rect">
-            <a:avLst/>
-          </a:prstGeom>
-          <a:noFill/>
-          <a:ln/>
-        </p:spPr>
-        <p:txBody>
-          <a:bodyPr wrap="square" lIns="0" tIns="0" rIns="0" bIns="0" rtlCol="0" anchor="ctr"/>
-          <a:lstStyle/>
-          <a:p>
-            <a:pPr indent="0" marL="0">
-              <a:lnSpc>
-                <a:spcPts val="2400"/>
-              </a:lnSpc>
-              <a:buNone/>
-            </a:pPr>
-            <a:r>
-              <a:rPr lang="en-US" sz="1600" b="1" dirty="0">
+            <a:off x="457200" y="4389120"/>
+            <a:ext cx="7863840" cy="548640"/>
+          </a:xfrm>
+          <a:prstGeom prst="rect">
+            <a:avLst/>
+          </a:prstGeom>
+          <a:noFill/>
+          <a:ln/>
+        </p:spPr>
+        <p:txBody>
+          <a:bodyPr wrap="square" lIns="0" tIns="0" rIns="0" bIns="0" rtlCol="0" anchor="ctr"/>
+          <a:lstStyle/>
+          <a:p>
+            <a:pPr indent="0" marL="0">
+              <a:buNone/>
+            </a:pPr>
+            <a:r>
+              <a:rPr lang="en-US" sz="1800" b="1" dirty="0">
                 <a:solidFill>
                   <a:srgbClr val="7A1524"/>
                 </a:solidFill>
@@ -12782,17 +12420,14 @@
               </a:rPr>
               <a:t>知識を聞くだけではなく、</a:t>
             </a:r>
-            <a:endParaRPr lang="en-US" sz="1600" dirty="0"/>
-          </a:p>
-          <a:p>
-            <a:pPr indent="0" marL="0">
-              <a:lnSpc>
-                <a:spcPts val="2400"/>
-              </a:lnSpc>
-              <a:buNone/>
-            </a:pPr>
-            <a:r>
-              <a:rPr lang="en-US" sz="1600" b="1" dirty="0">
+            <a:endParaRPr lang="en-US" sz="1800" dirty="0"/>
+          </a:p>
+          <a:p>
+            <a:pPr indent="0" marL="0">
+              <a:buNone/>
+            </a:pPr>
+            <a:r>
+              <a:rPr lang="en-US" sz="1800" b="1" dirty="0">
                 <a:solidFill>
                   <a:srgbClr val="7A1524"/>
                 </a:solidFill>
@@ -12802,34 +12437,10 @@
               </a:rPr>
               <a:t>「あなたならどうする？」まで一緒につくります。</a:t>
             </a:r>
-            <a:endParaRPr lang="en-US" sz="1600" dirty="0"/>
-          </a:p>
-        </p:txBody>
-      </p:sp>
-      <p:pic>
-        <p:nvPicPr>
-          <p:cNvPr id="18" name="Image 0" descr="preencoded.png">    </p:cNvPr>
-          <p:cNvPicPr>
-            <a:picLocks noChangeAspect="1"/>
-          </p:cNvPicPr>
-          <p:nvPr/>
-        </p:nvPicPr>
-        <p:blipFill>
-          <a:blip r:embed="rId1"/>
-          <a:stretch>
-            <a:fillRect/>
-          </a:stretch>
-        </p:blipFill>
-        <p:spPr>
-          <a:xfrm>
-            <a:off x="6492240" y="2011680"/>
-            <a:ext cx="2194560" cy="2194560"/>
-          </a:xfrm>
-          <a:prstGeom prst="rect">
-            <a:avLst/>
-          </a:prstGeom>
-        </p:spPr>
-      </p:pic>
+            <a:endParaRPr lang="en-US" sz="1800" dirty="0"/>
+          </a:p>
+        </p:txBody>
+      </p:sp>
     </p:spTree>
   </p:cSld>
   <p:clrMapOvr>
@@ -12972,9 +12583,9 @@
                 <a:solidFill>
                   <a:srgbClr val="141416"/>
                 </a:solidFill>
-                <a:latin typeface="Yu Gothic" pitchFamily="34" charset="0"/>
-                <a:ea typeface="Yu Gothic" pitchFamily="34" charset="-122"/>
-                <a:cs typeface="Yu Gothic" pitchFamily="34" charset="-120"/>
+                <a:latin typeface="Yu Mincho" pitchFamily="34" charset="0"/>
+                <a:ea typeface="Yu Mincho" pitchFamily="34" charset="-122"/>
+                <a:cs typeface="Yu Mincho" pitchFamily="34" charset="-120"/>
               </a:rPr>
               <a:t>10回で扱うこと</a:t>
             </a:r>
@@ -14154,9 +13765,9 @@
                 <a:solidFill>
                   <a:srgbClr val="F0B9C3"/>
                 </a:solidFill>
-                <a:latin typeface="Yu Gothic" pitchFamily="34" charset="0"/>
-                <a:ea typeface="Yu Gothic" pitchFamily="34" charset="-122"/>
-                <a:cs typeface="Yu Gothic" pitchFamily="34" charset="-120"/>
+                <a:latin typeface="Yu Mincho" pitchFamily="34" charset="0"/>
+                <a:ea typeface="Yu Mincho" pitchFamily="34" charset="-122"/>
+                <a:cs typeface="Yu Mincho" pitchFamily="34" charset="-120"/>
               </a:rPr>
               <a:t>最終的に目指すのは</a:t>
             </a:r>
@@ -14173,7 +13784,7 @@
         <p:spPr>
           <a:xfrm>
             <a:off x="457200" y="1371600"/>
-            <a:ext cx="5669280" cy="548640"/>
+            <a:ext cx="7863840" cy="548640"/>
           </a:xfrm>
           <a:prstGeom prst="rect">
             <a:avLst/>
@@ -14212,7 +13823,7 @@
         <p:spPr>
           <a:xfrm>
             <a:off x="457200" y="2057400"/>
-            <a:ext cx="5669280" cy="1188720"/>
+            <a:ext cx="7863840" cy="1188720"/>
           </a:xfrm>
           <a:prstGeom prst="rect">
             <a:avLst/>
@@ -14235,9 +13846,9 @@
                 <a:solidFill>
                   <a:srgbClr val="FFFFFF"/>
                 </a:solidFill>
-                <a:latin typeface="Yu Gothic" pitchFamily="34" charset="0"/>
-                <a:ea typeface="Yu Gothic" pitchFamily="34" charset="-122"/>
-                <a:cs typeface="Yu Gothic" pitchFamily="34" charset="-120"/>
+                <a:latin typeface="Yu Mincho" pitchFamily="34" charset="0"/>
+                <a:ea typeface="Yu Mincho" pitchFamily="34" charset="-122"/>
+                <a:cs typeface="Yu Mincho" pitchFamily="34" charset="-120"/>
               </a:rPr>
               <a:t>何が起きても、</a:t>
             </a:r>
@@ -14255,9 +13866,9 @@
                 <a:solidFill>
                   <a:srgbClr val="FFFFFF"/>
                 </a:solidFill>
-                <a:latin typeface="Yu Gothic" pitchFamily="34" charset="0"/>
-                <a:ea typeface="Yu Gothic" pitchFamily="34" charset="-122"/>
-                <a:cs typeface="Yu Gothic" pitchFamily="34" charset="-120"/>
+                <a:latin typeface="Yu Mincho" pitchFamily="34" charset="0"/>
+                <a:ea typeface="Yu Mincho" pitchFamily="34" charset="-122"/>
+                <a:cs typeface="Yu Mincho" pitchFamily="34" charset="-120"/>
               </a:rPr>
               <a:t>「自分が何をすればいいかわかる」</a:t>
             </a:r>
@@ -14273,8 +13884,8 @@
         </p:nvSpPr>
         <p:spPr>
           <a:xfrm>
-            <a:off x="457200" y="3566160"/>
-            <a:ext cx="5669280" cy="868680"/>
+            <a:off x="457200" y="3611880"/>
+            <a:ext cx="7863840" cy="868680"/>
           </a:xfrm>
           <a:prstGeom prst="roundRect">
             <a:avLst>
@@ -14300,24 +13911,24 @@
         </p:nvSpPr>
         <p:spPr>
           <a:xfrm>
-            <a:off x="777240" y="3566160"/>
-            <a:ext cx="5120640" cy="868680"/>
-          </a:xfrm>
-          <a:prstGeom prst="rect">
-            <a:avLst/>
-          </a:prstGeom>
-          <a:noFill/>
-          <a:ln/>
-        </p:spPr>
-        <p:txBody>
-          <a:bodyPr wrap="square" lIns="0" tIns="0" rIns="0" bIns="0" rtlCol="0" anchor="ctr"/>
-          <a:lstStyle/>
-          <a:p>
-            <a:pPr indent="0" marL="0">
-              <a:buNone/>
-            </a:pPr>
-            <a:r>
-              <a:rPr lang="en-US" sz="1900" b="1" dirty="0">
+            <a:off x="822960" y="3611880"/>
+            <a:ext cx="7406640" cy="868680"/>
+          </a:xfrm>
+          <a:prstGeom prst="rect">
+            <a:avLst/>
+          </a:prstGeom>
+          <a:noFill/>
+          <a:ln/>
+        </p:spPr>
+        <p:txBody>
+          <a:bodyPr wrap="square" lIns="0" tIns="0" rIns="0" bIns="0" rtlCol="0" anchor="ctr"/>
+          <a:lstStyle/>
+          <a:p>
+            <a:pPr indent="0" marL="0">
+              <a:buNone/>
+            </a:pPr>
+            <a:r>
+              <a:rPr lang="en-US" sz="2000" b="1" dirty="0">
                 <a:solidFill>
                   <a:srgbClr val="FFFFFF"/>
                 </a:solidFill>
@@ -14327,34 +13938,10 @@
               </a:rPr>
               <a:t>そして「試合が楽しみです」と言える選手へ。</a:t>
             </a:r>
-            <a:endParaRPr lang="en-US" sz="1900" dirty="0"/>
-          </a:p>
-        </p:txBody>
-      </p:sp>
-      <p:pic>
-        <p:nvPicPr>
-          <p:cNvPr id="9" name="Image 0" descr="preencoded.png">    </p:cNvPr>
-          <p:cNvPicPr>
-            <a:picLocks noChangeAspect="1"/>
-          </p:cNvPicPr>
-          <p:nvPr/>
-        </p:nvPicPr>
-        <p:blipFill>
-          <a:blip r:embed="rId1"/>
-          <a:stretch>
-            <a:fillRect/>
-          </a:stretch>
-        </p:blipFill>
-        <p:spPr>
-          <a:xfrm>
-            <a:off x="6492240" y="1645920"/>
-            <a:ext cx="2286000" cy="2286000"/>
-          </a:xfrm>
-          <a:prstGeom prst="rect">
-            <a:avLst/>
-          </a:prstGeom>
-        </p:spPr>
-      </p:pic>
+            <a:endParaRPr lang="en-US" sz="2000" dirty="0"/>
+          </a:p>
+        </p:txBody>
+      </p:sp>
     </p:spTree>
   </p:cSld>
   <p:clrMapOvr>
@@ -14497,9 +14084,9 @@
                 <a:solidFill>
                   <a:srgbClr val="6B6360"/>
                 </a:solidFill>
-                <a:latin typeface="Yu Gothic" pitchFamily="34" charset="0"/>
-                <a:ea typeface="Yu Gothic" pitchFamily="34" charset="-122"/>
-                <a:cs typeface="Yu Gothic" pitchFamily="34" charset="-120"/>
+                <a:latin typeface="Yu Mincho" pitchFamily="34" charset="0"/>
+                <a:ea typeface="Yu Mincho" pitchFamily="34" charset="-122"/>
+                <a:cs typeface="Yu Mincho" pitchFamily="34" charset="-120"/>
               </a:rPr>
               <a:t>受講料</a:t>
             </a:r>
@@ -14515,17 +14102,17 @@
         </p:nvSpPr>
         <p:spPr>
           <a:xfrm>
-            <a:off x="457200" y="1371600"/>
-            <a:ext cx="4754880" cy="1371600"/>
-          </a:xfrm>
-          <a:prstGeom prst="rect">
-            <a:avLst/>
-          </a:prstGeom>
-          <a:noFill/>
-          <a:ln/>
-        </p:spPr>
-        <p:txBody>
-          <a:bodyPr wrap="square" lIns="0" tIns="0" rIns="0" bIns="0" rtlCol="0" anchor="ctr"/>
+            <a:off x="457200" y="1463040"/>
+            <a:ext cx="7863840" cy="1371600"/>
+          </a:xfrm>
+          <a:prstGeom prst="rect">
+            <a:avLst/>
+          </a:prstGeom>
+          <a:noFill/>
+          <a:ln/>
+        </p:spPr>
+        <p:txBody>
+          <a:bodyPr wrap="square" lIns="0" tIns="0" rIns="0" bIns="0" rtlCol="0" anchor="b"/>
           <a:lstStyle/>
           <a:p>
             <a:pPr indent="0" marL="0">
@@ -14536,58 +14123,33 @@
                 <a:solidFill>
                   <a:srgbClr val="7A1524"/>
                 </a:solidFill>
-                <a:latin typeface="Yu Gothic" pitchFamily="34" charset="0"/>
-                <a:ea typeface="Yu Gothic" pitchFamily="34" charset="-122"/>
-                <a:cs typeface="Yu Gothic" pitchFamily="34" charset="-120"/>
+                <a:latin typeface="Yu Mincho" pitchFamily="34" charset="0"/>
+                <a:ea typeface="Yu Mincho" pitchFamily="34" charset="-122"/>
+                <a:cs typeface="Yu Mincho" pitchFamily="34" charset="-120"/>
               </a:rPr>
               <a:t>98,000</a:t>
             </a:r>
+            <a:pPr indent="0" marL="0">
+              <a:buNone/>
+            </a:pPr>
+            <a:r>
+              <a:rPr lang="en-US" sz="2400" b="1" dirty="0">
+                <a:solidFill>
+                  <a:srgbClr val="7A1524"/>
+                </a:solidFill>
+                <a:latin typeface="Yu Mincho" pitchFamily="34" charset="0"/>
+                <a:ea typeface="Yu Mincho" pitchFamily="34" charset="-122"/>
+                <a:cs typeface="Yu Mincho" pitchFamily="34" charset="-120"/>
+              </a:rPr>
+              <a:t>　円（税込）</a:t>
+            </a:r>
             <a:endParaRPr lang="en-US" sz="8200" dirty="0"/>
           </a:p>
         </p:txBody>
       </p:sp>
       <p:sp>
         <p:nvSpPr>
-          <p:cNvPr id="6" name="Text 4"/>
-          <p:cNvSpPr txBox="1"/>
-          <p:nvPr/>
-        </p:nvSpPr>
-        <p:spPr>
-          <a:xfrm>
-            <a:off x="4617720" y="2148840"/>
-            <a:ext cx="1828800" cy="548640"/>
-          </a:xfrm>
-          <a:prstGeom prst="rect">
-            <a:avLst/>
-          </a:prstGeom>
-          <a:noFill/>
-          <a:ln/>
-        </p:spPr>
-        <p:txBody>
-          <a:bodyPr wrap="square" lIns="0" tIns="0" rIns="0" bIns="0" rtlCol="0" anchor="ctr"/>
-          <a:lstStyle/>
-          <a:p>
-            <a:pPr indent="0" marL="0">
-              <a:buNone/>
-            </a:pPr>
-            <a:r>
-              <a:rPr lang="en-US" sz="2400" b="1" dirty="0">
-                <a:solidFill>
-                  <a:srgbClr val="7A1524"/>
-                </a:solidFill>
-                <a:latin typeface="Yu Gothic" pitchFamily="34" charset="0"/>
-                <a:ea typeface="Yu Gothic" pitchFamily="34" charset="-122"/>
-                <a:cs typeface="Yu Gothic" pitchFamily="34" charset="-120"/>
-              </a:rPr>
-              <a:t>円（税込）</a:t>
-            </a:r>
-            <a:endParaRPr lang="en-US" sz="2400" dirty="0"/>
-          </a:p>
-        </p:txBody>
-      </p:sp>
-      <p:sp>
-        <p:nvSpPr>
-          <p:cNvPr id="7" name="Shape 5"/>
+          <p:cNvPr id="6" name="Shape 4"/>
           <p:cNvSpPr/>
           <p:nvPr/>
         </p:nvSpPr>
@@ -14614,7 +14176,7 @@
       </p:sp>
       <p:sp>
         <p:nvSpPr>
-          <p:cNvPr id="8" name="Text 6"/>
+          <p:cNvPr id="7" name="Text 5"/>
           <p:cNvSpPr txBox="1"/>
           <p:nvPr/>
         </p:nvSpPr>
@@ -14653,7 +14215,7 @@
       </p:sp>
       <p:sp>
         <p:nvSpPr>
-          <p:cNvPr id="9" name="Shape 7"/>
+          <p:cNvPr id="8" name="Shape 6"/>
           <p:cNvSpPr/>
           <p:nvPr/>
         </p:nvSpPr>
@@ -14680,7 +14242,7 @@
       </p:sp>
       <p:sp>
         <p:nvSpPr>
-          <p:cNvPr id="10" name="Text 8"/>
+          <p:cNvPr id="9" name="Text 7"/>
           <p:cNvSpPr txBox="1"/>
           <p:nvPr/>
         </p:nvSpPr>
@@ -14719,7 +14281,7 @@
       </p:sp>
       <p:sp>
         <p:nvSpPr>
-          <p:cNvPr id="11" name="Shape 9"/>
+          <p:cNvPr id="10" name="Shape 8"/>
           <p:cNvSpPr/>
           <p:nvPr/>
         </p:nvSpPr>
@@ -14746,7 +14308,7 @@
       </p:sp>
       <p:sp>
         <p:nvSpPr>
-          <p:cNvPr id="12" name="Text 10"/>
+          <p:cNvPr id="11" name="Text 9"/>
           <p:cNvSpPr txBox="1"/>
           <p:nvPr/>
         </p:nvSpPr>
@@ -14785,7 +14347,7 @@
       </p:sp>
       <p:sp>
         <p:nvSpPr>
-          <p:cNvPr id="13" name="Shape 11"/>
+          <p:cNvPr id="12" name="Shape 10"/>
           <p:cNvSpPr/>
           <p:nvPr/>
         </p:nvSpPr>
@@ -14812,7 +14374,7 @@
       </p:sp>
       <p:sp>
         <p:nvSpPr>
-          <p:cNvPr id="14" name="Text 12"/>
+          <p:cNvPr id="13" name="Text 11"/>
           <p:cNvSpPr txBox="1"/>
           <p:nvPr/>
         </p:nvSpPr>
@@ -14967,8 +14529,8 @@
         </p:nvSpPr>
         <p:spPr>
           <a:xfrm>
-            <a:off x="457200" y="914400"/>
-            <a:ext cx="5303520" cy="1188720"/>
+            <a:off x="457200" y="960120"/>
+            <a:ext cx="7863840" cy="1188720"/>
           </a:xfrm>
           <a:prstGeom prst="rect">
             <a:avLst/>
@@ -14982,42 +14544,42 @@
           <a:p>
             <a:pPr algn="l" indent="0" marL="0">
               <a:lnSpc>
-                <a:spcPts val="4640"/>
+                <a:spcPts val="4930"/>
               </a:lnSpc>
               <a:buNone/>
             </a:pPr>
             <a:r>
-              <a:rPr lang="en-US" sz="3200" b="1" dirty="0">
+              <a:rPr lang="en-US" sz="3400" b="1" dirty="0">
                 <a:solidFill>
                   <a:srgbClr val="141416"/>
                 </a:solidFill>
-                <a:latin typeface="Yu Gothic" pitchFamily="34" charset="0"/>
-                <a:ea typeface="Yu Gothic" pitchFamily="34" charset="-122"/>
-                <a:cs typeface="Yu Gothic" pitchFamily="34" charset="-120"/>
+                <a:latin typeface="Yu Mincho" pitchFamily="34" charset="0"/>
+                <a:ea typeface="Yu Mincho" pitchFamily="34" charset="-122"/>
+                <a:cs typeface="Yu Mincho" pitchFamily="34" charset="-120"/>
               </a:rPr>
               <a:t>その目標を考えた時、</a:t>
             </a:r>
-            <a:endParaRPr lang="en-US" sz="3200" dirty="0"/>
+            <a:endParaRPr lang="en-US" sz="3400" dirty="0"/>
           </a:p>
           <a:p>
             <a:pPr algn="l" indent="0" marL="0">
               <a:lnSpc>
-                <a:spcPts val="4640"/>
+                <a:spcPts val="4930"/>
               </a:lnSpc>
               <a:buNone/>
             </a:pPr>
             <a:r>
-              <a:rPr lang="en-US" sz="3200" b="1" dirty="0">
+              <a:rPr lang="en-US" sz="3400" b="1" dirty="0">
                 <a:solidFill>
                   <a:srgbClr val="141416"/>
                 </a:solidFill>
-                <a:latin typeface="Yu Gothic" pitchFamily="34" charset="0"/>
-                <a:ea typeface="Yu Gothic" pitchFamily="34" charset="-122"/>
-                <a:cs typeface="Yu Gothic" pitchFamily="34" charset="-120"/>
+                <a:latin typeface="Yu Mincho" pitchFamily="34" charset="0"/>
+                <a:ea typeface="Yu Mincho" pitchFamily="34" charset="-122"/>
+                <a:cs typeface="Yu Mincho" pitchFamily="34" charset="-120"/>
               </a:rPr>
               <a:t>どんな気持ちになりますか？</a:t>
             </a:r>
-            <a:endParaRPr lang="en-US" sz="3200" dirty="0"/>
+            <a:endParaRPr lang="en-US" sz="3400" dirty="0"/>
           </a:p>
         </p:txBody>
       </p:sp>
@@ -15029,12 +14591,12 @@
         </p:nvSpPr>
         <p:spPr>
           <a:xfrm>
-            <a:off x="457200" y="2651760"/>
-            <a:ext cx="5303520" cy="475488"/>
+            <a:off x="457200" y="2697480"/>
+            <a:ext cx="7863840" cy="530352"/>
           </a:xfrm>
           <a:prstGeom prst="roundRect">
             <a:avLst>
-              <a:gd name="adj" fmla="val 11538"/>
+              <a:gd name="adj" fmla="val 10345"/>
             </a:avLst>
           </a:prstGeom>
           <a:solidFill>
@@ -15056,24 +14618,24 @@
         </p:nvSpPr>
         <p:spPr>
           <a:xfrm>
-            <a:off x="713232" y="2651760"/>
-            <a:ext cx="4846320" cy="475488"/>
-          </a:xfrm>
-          <a:prstGeom prst="rect">
-            <a:avLst/>
-          </a:prstGeom>
-          <a:noFill/>
-          <a:ln/>
-        </p:spPr>
-        <p:txBody>
-          <a:bodyPr wrap="square" lIns="0" tIns="0" rIns="0" bIns="0" rtlCol="0" anchor="ctr"/>
-          <a:lstStyle/>
-          <a:p>
-            <a:pPr indent="0" marL="0">
-              <a:buNone/>
-            </a:pPr>
-            <a:r>
-              <a:rPr lang="en-US" sz="1900" dirty="0">
+            <a:off x="713232" y="2697480"/>
+            <a:ext cx="7406640" cy="530352"/>
+          </a:xfrm>
+          <a:prstGeom prst="rect">
+            <a:avLst/>
+          </a:prstGeom>
+          <a:noFill/>
+          <a:ln/>
+        </p:spPr>
+        <p:txBody>
+          <a:bodyPr wrap="square" lIns="0" tIns="0" rIns="0" bIns="0" rtlCol="0" anchor="ctr"/>
+          <a:lstStyle/>
+          <a:p>
+            <a:pPr indent="0" marL="0">
+              <a:buNone/>
+            </a:pPr>
+            <a:r>
+              <a:rPr lang="en-US" sz="2000" dirty="0">
                 <a:solidFill>
                   <a:srgbClr val="3B3634"/>
                 </a:solidFill>
@@ -15083,7 +14645,7 @@
               </a:rPr>
               <a:t>楽しみ</a:t>
             </a:r>
-            <a:endParaRPr lang="en-US" sz="1900" dirty="0"/>
+            <a:endParaRPr lang="en-US" sz="2000" dirty="0"/>
           </a:p>
         </p:txBody>
       </p:sp>
@@ -15095,12 +14657,12 @@
         </p:nvSpPr>
         <p:spPr>
           <a:xfrm>
-            <a:off x="457200" y="3218688"/>
-            <a:ext cx="5303520" cy="475488"/>
+            <a:off x="457200" y="3319272"/>
+            <a:ext cx="7863840" cy="530352"/>
           </a:xfrm>
           <a:prstGeom prst="roundRect">
             <a:avLst>
-              <a:gd name="adj" fmla="val 11538"/>
+              <a:gd name="adj" fmla="val 10345"/>
             </a:avLst>
           </a:prstGeom>
           <a:solidFill>
@@ -15122,24 +14684,24 @@
         </p:nvSpPr>
         <p:spPr>
           <a:xfrm>
-            <a:off x="713232" y="3218688"/>
-            <a:ext cx="4846320" cy="475488"/>
-          </a:xfrm>
-          <a:prstGeom prst="rect">
-            <a:avLst/>
-          </a:prstGeom>
-          <a:noFill/>
-          <a:ln/>
-        </p:spPr>
-        <p:txBody>
-          <a:bodyPr wrap="square" lIns="0" tIns="0" rIns="0" bIns="0" rtlCol="0" anchor="ctr"/>
-          <a:lstStyle/>
-          <a:p>
-            <a:pPr indent="0" marL="0">
-              <a:buNone/>
-            </a:pPr>
-            <a:r>
-              <a:rPr lang="en-US" sz="1900" dirty="0">
+            <a:off x="713232" y="3319272"/>
+            <a:ext cx="7406640" cy="530352"/>
+          </a:xfrm>
+          <a:prstGeom prst="rect">
+            <a:avLst/>
+          </a:prstGeom>
+          <a:noFill/>
+          <a:ln/>
+        </p:spPr>
+        <p:txBody>
+          <a:bodyPr wrap="square" lIns="0" tIns="0" rIns="0" bIns="0" rtlCol="0" anchor="ctr"/>
+          <a:lstStyle/>
+          <a:p>
+            <a:pPr indent="0" marL="0">
+              <a:buNone/>
+            </a:pPr>
+            <a:r>
+              <a:rPr lang="en-US" sz="2000" dirty="0">
                 <a:solidFill>
                   <a:srgbClr val="3B3634"/>
                 </a:solidFill>
@@ -15149,7 +14711,7 @@
               </a:rPr>
               <a:t>「できるかな」という不安</a:t>
             </a:r>
-            <a:endParaRPr lang="en-US" sz="1900" dirty="0"/>
+            <a:endParaRPr lang="en-US" sz="2000" dirty="0"/>
           </a:p>
         </p:txBody>
       </p:sp>
@@ -15161,12 +14723,12 @@
         </p:nvSpPr>
         <p:spPr>
           <a:xfrm>
-            <a:off x="457200" y="3785616"/>
-            <a:ext cx="5303520" cy="475488"/>
+            <a:off x="457200" y="3941064"/>
+            <a:ext cx="7863840" cy="530352"/>
           </a:xfrm>
           <a:prstGeom prst="roundRect">
             <a:avLst>
-              <a:gd name="adj" fmla="val 11538"/>
+              <a:gd name="adj" fmla="val 10345"/>
             </a:avLst>
           </a:prstGeom>
           <a:solidFill>
@@ -15188,24 +14750,24 @@
         </p:nvSpPr>
         <p:spPr>
           <a:xfrm>
-            <a:off x="713232" y="3785616"/>
-            <a:ext cx="4846320" cy="475488"/>
-          </a:xfrm>
-          <a:prstGeom prst="rect">
-            <a:avLst/>
-          </a:prstGeom>
-          <a:noFill/>
-          <a:ln/>
-        </p:spPr>
-        <p:txBody>
-          <a:bodyPr wrap="square" lIns="0" tIns="0" rIns="0" bIns="0" rtlCol="0" anchor="ctr"/>
-          <a:lstStyle/>
-          <a:p>
-            <a:pPr indent="0" marL="0">
-              <a:buNone/>
-            </a:pPr>
-            <a:r>
-              <a:rPr lang="en-US" sz="1900" dirty="0">
+            <a:off x="713232" y="3941064"/>
+            <a:ext cx="7406640" cy="530352"/>
+          </a:xfrm>
+          <a:prstGeom prst="rect">
+            <a:avLst/>
+          </a:prstGeom>
+          <a:noFill/>
+          <a:ln/>
+        </p:spPr>
+        <p:txBody>
+          <a:bodyPr wrap="square" lIns="0" tIns="0" rIns="0" bIns="0" rtlCol="0" anchor="ctr"/>
+          <a:lstStyle/>
+          <a:p>
+            <a:pPr indent="0" marL="0">
+              <a:buNone/>
+            </a:pPr>
+            <a:r>
+              <a:rPr lang="en-US" sz="2000" dirty="0">
                 <a:solidFill>
                   <a:srgbClr val="3B3634"/>
                 </a:solidFill>
@@ -15215,34 +14777,10 @@
               </a:rPr>
               <a:t>「失敗したらどうしよう」という不安</a:t>
             </a:r>
-            <a:endParaRPr lang="en-US" sz="1900" dirty="0"/>
-          </a:p>
-        </p:txBody>
-      </p:sp>
-      <p:pic>
-        <p:nvPicPr>
-          <p:cNvPr id="11" name="Image 0" descr="preencoded.png">    </p:cNvPr>
-          <p:cNvPicPr>
-            <a:picLocks noChangeAspect="1"/>
-          </p:cNvPicPr>
-          <p:nvPr/>
-        </p:nvPicPr>
-        <p:blipFill>
-          <a:blip r:embed="rId1"/>
-          <a:stretch>
-            <a:fillRect/>
-          </a:stretch>
-        </p:blipFill>
-        <p:spPr>
-          <a:xfrm>
-            <a:off x="6217920" y="1645920"/>
-            <a:ext cx="2468880" cy="2468880"/>
-          </a:xfrm>
-          <a:prstGeom prst="rect">
-            <a:avLst/>
-          </a:prstGeom>
-        </p:spPr>
-      </p:pic>
+            <a:endParaRPr lang="en-US" sz="2000" dirty="0"/>
+          </a:p>
+        </p:txBody>
+      </p:sp>
     </p:spTree>
   </p:cSld>
   <p:clrMapOvr>
@@ -15385,9 +14923,9 @@
                 <a:solidFill>
                   <a:srgbClr val="141416"/>
                 </a:solidFill>
-                <a:latin typeface="Yu Gothic" pitchFamily="34" charset="0"/>
-                <a:ea typeface="Yu Gothic" pitchFamily="34" charset="-122"/>
-                <a:cs typeface="Yu Gothic" pitchFamily="34" charset="-120"/>
+                <a:latin typeface="Yu Mincho" pitchFamily="34" charset="0"/>
+                <a:ea typeface="Yu Mincho" pitchFamily="34" charset="-122"/>
+                <a:cs typeface="Yu Mincho" pitchFamily="34" charset="-120"/>
               </a:rPr>
               <a:t>今回は5名限定です</a:t>
             </a:r>
@@ -15404,23 +14942,23 @@
         <p:spPr>
           <a:xfrm>
             <a:off x="457200" y="1737360"/>
-            <a:ext cx="5669280" cy="411480"/>
-          </a:xfrm>
-          <a:prstGeom prst="rect">
-            <a:avLst/>
-          </a:prstGeom>
-          <a:noFill/>
-          <a:ln/>
-        </p:spPr>
-        <p:txBody>
-          <a:bodyPr wrap="square" lIns="0" tIns="0" rIns="0" bIns="0" rtlCol="0" anchor="ctr"/>
-          <a:lstStyle/>
-          <a:p>
-            <a:pPr indent="0" marL="0">
-              <a:buNone/>
-            </a:pPr>
-            <a:r>
-              <a:rPr lang="en-US" sz="1700" dirty="0">
+            <a:ext cx="7863840" cy="411480"/>
+          </a:xfrm>
+          <a:prstGeom prst="rect">
+            <a:avLst/>
+          </a:prstGeom>
+          <a:noFill/>
+          <a:ln/>
+        </p:spPr>
+        <p:txBody>
+          <a:bodyPr wrap="square" lIns="0" tIns="0" rIns="0" bIns="0" rtlCol="0" anchor="ctr"/>
+          <a:lstStyle/>
+          <a:p>
+            <a:pPr indent="0" marL="0">
+              <a:buNone/>
+            </a:pPr>
+            <a:r>
+              <a:rPr lang="en-US" sz="1800" dirty="0">
                 <a:solidFill>
                   <a:srgbClr val="3B3634"/>
                 </a:solidFill>
@@ -15430,7 +14968,7 @@
               </a:rPr>
               <a:t>たくさんの方へ一斉に教える講座ではありません。</a:t>
             </a:r>
-            <a:endParaRPr lang="en-US" sz="1700" dirty="0"/>
+            <a:endParaRPr lang="en-US" sz="1800" dirty="0"/>
           </a:p>
         </p:txBody>
       </p:sp>
@@ -15442,8 +14980,8 @@
         </p:nvSpPr>
         <p:spPr>
           <a:xfrm>
-            <a:off x="594360" y="2240280"/>
-            <a:ext cx="5486400" cy="1554480"/>
+            <a:off x="640080" y="2240280"/>
+            <a:ext cx="7680960" cy="1554480"/>
           </a:xfrm>
           <a:prstGeom prst="rect">
             <a:avLst/>
@@ -15463,7 +15001,7 @@
               <a:buChar char="•"/>
             </a:pPr>
             <a:r>
-              <a:rPr lang="en-US" sz="1700" dirty="0">
+              <a:rPr lang="en-US" sz="1800" dirty="0">
                 <a:solidFill>
                   <a:srgbClr val="3B3634"/>
                 </a:solidFill>
@@ -15473,7 +15011,7 @@
               </a:rPr>
               <a:t>次の大会</a:t>
             </a:r>
-            <a:endParaRPr lang="en-US" sz="1700" dirty="0"/>
+            <a:endParaRPr lang="en-US" sz="1800" dirty="0"/>
           </a:p>
           <a:p>
             <a:pPr marL="342900" indent="-342900">
@@ -15484,7 +15022,7 @@
               <a:buChar char="•"/>
             </a:pPr>
             <a:r>
-              <a:rPr lang="en-US" sz="1700" dirty="0">
+              <a:rPr lang="en-US" sz="1800" dirty="0">
                 <a:solidFill>
                   <a:srgbClr val="3B3634"/>
                 </a:solidFill>
@@ -15494,7 +15032,7 @@
               </a:rPr>
               <a:t>取りたい記録</a:t>
             </a:r>
-            <a:endParaRPr lang="en-US" sz="1700" dirty="0"/>
+            <a:endParaRPr lang="en-US" sz="1800" dirty="0"/>
           </a:p>
           <a:p>
             <a:pPr marL="342900" indent="-342900">
@@ -15505,7 +15043,7 @@
               <a:buChar char="•"/>
             </a:pPr>
             <a:r>
-              <a:rPr lang="en-US" sz="1700" dirty="0">
+              <a:rPr lang="en-US" sz="1800" dirty="0">
                 <a:solidFill>
                   <a:srgbClr val="3B3634"/>
                 </a:solidFill>
@@ -15515,7 +15053,7 @@
               </a:rPr>
               <a:t>過去の試合</a:t>
             </a:r>
-            <a:endParaRPr lang="en-US" sz="1700" dirty="0"/>
+            <a:endParaRPr lang="en-US" sz="1800" dirty="0"/>
           </a:p>
           <a:p>
             <a:pPr marL="342900" indent="-342900">
@@ -15526,7 +15064,7 @@
               <a:buChar char="•"/>
             </a:pPr>
             <a:r>
-              <a:rPr lang="en-US" sz="1700" dirty="0">
+              <a:rPr lang="en-US" sz="1800" dirty="0">
                 <a:solidFill>
                   <a:srgbClr val="3B3634"/>
                 </a:solidFill>
@@ -15536,7 +15074,7 @@
               </a:rPr>
               <a:t>考え方の特徴</a:t>
             </a:r>
-            <a:endParaRPr lang="en-US" sz="1700" dirty="0"/>
+            <a:endParaRPr lang="en-US" sz="1800" dirty="0"/>
           </a:p>
           <a:p>
             <a:pPr marL="342900" indent="-342900">
@@ -15547,7 +15085,7 @@
               <a:buChar char="•"/>
             </a:pPr>
             <a:r>
-              <a:rPr lang="en-US" sz="1700" dirty="0">
+              <a:rPr lang="en-US" sz="1800" dirty="0">
                 <a:solidFill>
                   <a:srgbClr val="3B3634"/>
                 </a:solidFill>
@@ -15557,7 +15095,7 @@
               </a:rPr>
               <a:t>その人に必要なメンタルスキル</a:t>
             </a:r>
-            <a:endParaRPr lang="en-US" sz="1700" dirty="0"/>
+            <a:endParaRPr lang="en-US" sz="1800" dirty="0"/>
           </a:p>
         </p:txBody>
       </p:sp>
@@ -15569,12 +15107,12 @@
         </p:nvSpPr>
         <p:spPr>
           <a:xfrm>
-            <a:off x="457200" y="3977640"/>
-            <a:ext cx="5669280" cy="731520"/>
+            <a:off x="457200" y="3931920"/>
+            <a:ext cx="7863840" cy="685800"/>
           </a:xfrm>
           <a:prstGeom prst="roundRect">
             <a:avLst>
-              <a:gd name="adj" fmla="val 10000"/>
+              <a:gd name="adj" fmla="val 10667"/>
             </a:avLst>
           </a:prstGeom>
           <a:solidFill>
@@ -15596,24 +15134,24 @@
         </p:nvSpPr>
         <p:spPr>
           <a:xfrm>
-            <a:off x="777240" y="3977640"/>
-            <a:ext cx="5120640" cy="731520"/>
-          </a:xfrm>
-          <a:prstGeom prst="rect">
-            <a:avLst/>
-          </a:prstGeom>
-          <a:noFill/>
-          <a:ln/>
-        </p:spPr>
-        <p:txBody>
-          <a:bodyPr wrap="square" lIns="0" tIns="0" rIns="0" bIns="0" rtlCol="0" anchor="ctr"/>
-          <a:lstStyle/>
-          <a:p>
-            <a:pPr indent="0" marL="0">
-              <a:buNone/>
-            </a:pPr>
-            <a:r>
-              <a:rPr lang="en-US" sz="1700" b="1" dirty="0">
+            <a:off x="822960" y="3931920"/>
+            <a:ext cx="7406640" cy="685800"/>
+          </a:xfrm>
+          <a:prstGeom prst="rect">
+            <a:avLst/>
+          </a:prstGeom>
+          <a:noFill/>
+          <a:ln/>
+        </p:spPr>
+        <p:txBody>
+          <a:bodyPr wrap="square" lIns="0" tIns="0" rIns="0" bIns="0" rtlCol="0" anchor="ctr"/>
+          <a:lstStyle/>
+          <a:p>
+            <a:pPr indent="0" marL="0">
+              <a:buNone/>
+            </a:pPr>
+            <a:r>
+              <a:rPr lang="en-US" sz="1800" b="1" dirty="0">
                 <a:solidFill>
                   <a:srgbClr val="FFFFFF"/>
                 </a:solidFill>
@@ -15623,63 +15161,36 @@
               </a:rPr>
               <a:t>一人ひとりを把握し、じっくり関わりたいから。</a:t>
             </a:r>
-            <a:endParaRPr lang="en-US" sz="1700" dirty="0"/>
-          </a:p>
-        </p:txBody>
-      </p:sp>
-      <p:pic>
-        <p:nvPicPr>
-          <p:cNvPr id="9" name="Image 0" descr="preencoded.png">    </p:cNvPr>
-          <p:cNvPicPr>
-            <a:picLocks noChangeAspect="1"/>
-          </p:cNvPicPr>
-          <p:nvPr/>
-        </p:nvPicPr>
-        <p:blipFill>
-          <a:blip r:embed="rId1"/>
-          <a:stretch>
-            <a:fillRect/>
-          </a:stretch>
-        </p:blipFill>
-        <p:spPr>
-          <a:xfrm>
-            <a:off x="6492240" y="1737360"/>
-            <a:ext cx="2194560" cy="2194560"/>
-          </a:xfrm>
-          <a:prstGeom prst="rect">
-            <a:avLst/>
-          </a:prstGeom>
-        </p:spPr>
-      </p:pic>
-      <p:sp>
-        <p:nvSpPr>
-          <p:cNvPr id="10" name="Text 7"/>
-          <p:cNvSpPr txBox="1"/>
-          <p:nvPr/>
-        </p:nvSpPr>
-        <p:spPr>
-          <a:xfrm>
-            <a:off x="6309360" y="4069080"/>
-            <a:ext cx="2468880" cy="548640"/>
-          </a:xfrm>
-          <a:prstGeom prst="rect">
-            <a:avLst/>
-          </a:prstGeom>
-          <a:noFill/>
-          <a:ln/>
-        </p:spPr>
-        <p:txBody>
-          <a:bodyPr wrap="square" lIns="0" tIns="0" rIns="0" bIns="0" rtlCol="0" anchor="ctr"/>
-          <a:lstStyle/>
-          <a:p>
-            <a:pPr indent="0" marL="0">
-              <a:lnSpc>
-                <a:spcPts val="2000"/>
-              </a:lnSpc>
-              <a:buNone/>
-            </a:pPr>
-            <a:r>
-              <a:rPr lang="en-US" sz="1300" dirty="0">
+            <a:endParaRPr lang="en-US" sz="1800" dirty="0"/>
+          </a:p>
+        </p:txBody>
+      </p:sp>
+      <p:sp>
+        <p:nvSpPr>
+          <p:cNvPr id="9" name="Text 7"/>
+          <p:cNvSpPr txBox="1"/>
+          <p:nvPr/>
+        </p:nvSpPr>
+        <p:spPr>
+          <a:xfrm>
+            <a:off x="457200" y="4709160"/>
+            <a:ext cx="7863840" cy="320040"/>
+          </a:xfrm>
+          <a:prstGeom prst="rect">
+            <a:avLst/>
+          </a:prstGeom>
+          <a:noFill/>
+          <a:ln/>
+        </p:spPr>
+        <p:txBody>
+          <a:bodyPr wrap="square" lIns="0" tIns="0" rIns="0" bIns="0" rtlCol="0" anchor="ctr"/>
+          <a:lstStyle/>
+          <a:p>
+            <a:pPr indent="0" marL="0">
+              <a:buNone/>
+            </a:pPr>
+            <a:r>
+              <a:rPr lang="en-US" sz="1400" dirty="0">
                 <a:solidFill>
                   <a:srgbClr val="6B6360"/>
                 </a:solidFill>
@@ -15689,7 +15200,7 @@
               </a:rPr>
               <a:t>5名に達した時点で、今回の受付は終了します。</a:t>
             </a:r>
-            <a:endParaRPr lang="en-US" sz="1300" dirty="0"/>
+            <a:endParaRPr lang="en-US" sz="1400" dirty="0"/>
           </a:p>
         </p:txBody>
       </p:sp>
@@ -15812,7 +15323,7 @@
         <p:spPr>
           <a:xfrm>
             <a:off x="457200" y="914400"/>
-            <a:ext cx="5669280" cy="1188720"/>
+            <a:ext cx="7863840" cy="1188720"/>
           </a:xfrm>
           <a:prstGeom prst="rect">
             <a:avLst/>
@@ -15826,42 +15337,42 @@
           <a:p>
             <a:pPr algn="l" indent="0" marL="0">
               <a:lnSpc>
-                <a:spcPts val="4495"/>
+                <a:spcPts val="4930"/>
               </a:lnSpc>
               <a:buNone/>
             </a:pPr>
             <a:r>
-              <a:rPr lang="en-US" sz="3100" b="1" dirty="0">
+              <a:rPr lang="en-US" sz="3400" b="1" dirty="0">
                 <a:solidFill>
                   <a:srgbClr val="141416"/>
                 </a:solidFill>
-                <a:latin typeface="Yu Gothic" pitchFamily="34" charset="0"/>
-                <a:ea typeface="Yu Gothic" pitchFamily="34" charset="-122"/>
-                <a:cs typeface="Yu Gothic" pitchFamily="34" charset="-120"/>
+                <a:latin typeface="Yu Mincho" pitchFamily="34" charset="0"/>
+                <a:ea typeface="Yu Mincho" pitchFamily="34" charset="-122"/>
+                <a:cs typeface="Yu Mincho" pitchFamily="34" charset="-120"/>
               </a:rPr>
               <a:t>今日話してみて、</a:t>
             </a:r>
-            <a:endParaRPr lang="en-US" sz="3100" dirty="0"/>
+            <a:endParaRPr lang="en-US" sz="3400" dirty="0"/>
           </a:p>
           <a:p>
             <a:pPr algn="l" indent="0" marL="0">
               <a:lnSpc>
-                <a:spcPts val="4495"/>
+                <a:spcPts val="4930"/>
               </a:lnSpc>
               <a:buNone/>
             </a:pPr>
             <a:r>
-              <a:rPr lang="en-US" sz="3100" b="1" dirty="0">
+              <a:rPr lang="en-US" sz="3400" b="1" dirty="0">
                 <a:solidFill>
                   <a:srgbClr val="141416"/>
                 </a:solidFill>
-                <a:latin typeface="Yu Gothic" pitchFamily="34" charset="0"/>
-                <a:ea typeface="Yu Gothic" pitchFamily="34" charset="-122"/>
-                <a:cs typeface="Yu Gothic" pitchFamily="34" charset="-120"/>
+                <a:latin typeface="Yu Mincho" pitchFamily="34" charset="0"/>
+                <a:ea typeface="Yu Mincho" pitchFamily="34" charset="-122"/>
+                <a:cs typeface="Yu Mincho" pitchFamily="34" charset="-120"/>
               </a:rPr>
               <a:t>何が一番印象に残りましたか？</a:t>
             </a:r>
-            <a:endParaRPr lang="en-US" sz="3100" dirty="0"/>
+            <a:endParaRPr lang="en-US" sz="3400" dirty="0"/>
           </a:p>
         </p:txBody>
       </p:sp>
@@ -15873,12 +15384,12 @@
         </p:nvSpPr>
         <p:spPr>
           <a:xfrm>
-            <a:off x="457200" y="2560320"/>
-            <a:ext cx="5669280" cy="475488"/>
+            <a:off x="457200" y="2651760"/>
+            <a:ext cx="7863840" cy="512064"/>
           </a:xfrm>
           <a:prstGeom prst="roundRect">
             <a:avLst>
-              <a:gd name="adj" fmla="val 11538"/>
+              <a:gd name="adj" fmla="val 10714"/>
             </a:avLst>
           </a:prstGeom>
           <a:solidFill>
@@ -15900,24 +15411,24 @@
         </p:nvSpPr>
         <p:spPr>
           <a:xfrm>
-            <a:off x="713232" y="2560320"/>
-            <a:ext cx="5212080" cy="475488"/>
-          </a:xfrm>
-          <a:prstGeom prst="rect">
-            <a:avLst/>
-          </a:prstGeom>
-          <a:noFill/>
-          <a:ln/>
-        </p:spPr>
-        <p:txBody>
-          <a:bodyPr wrap="square" lIns="0" tIns="0" rIns="0" bIns="0" rtlCol="0" anchor="ctr"/>
-          <a:lstStyle/>
-          <a:p>
-            <a:pPr indent="0" marL="0">
-              <a:buNone/>
-            </a:pPr>
-            <a:r>
-              <a:rPr lang="en-US" sz="1800" dirty="0">
+            <a:off x="713232" y="2651760"/>
+            <a:ext cx="7406640" cy="512064"/>
+          </a:xfrm>
+          <a:prstGeom prst="rect">
+            <a:avLst/>
+          </a:prstGeom>
+          <a:noFill/>
+          <a:ln/>
+        </p:spPr>
+        <p:txBody>
+          <a:bodyPr wrap="square" lIns="0" tIns="0" rIns="0" bIns="0" rtlCol="0" anchor="ctr"/>
+          <a:lstStyle/>
+          <a:p>
+            <a:pPr indent="0" marL="0">
+              <a:buNone/>
+            </a:pPr>
+            <a:r>
+              <a:rPr lang="en-US" sz="1900" dirty="0">
                 <a:solidFill>
                   <a:srgbClr val="3B3634"/>
                 </a:solidFill>
@@ -15927,7 +15438,7 @@
               </a:rPr>
               <a:t>今の自分に必要だと思ったこと</a:t>
             </a:r>
-            <a:endParaRPr lang="en-US" sz="1800" dirty="0"/>
+            <a:endParaRPr lang="en-US" sz="1900" dirty="0"/>
           </a:p>
         </p:txBody>
       </p:sp>
@@ -15939,12 +15450,12 @@
         </p:nvSpPr>
         <p:spPr>
           <a:xfrm>
-            <a:off x="457200" y="3127248"/>
-            <a:ext cx="5669280" cy="475488"/>
+            <a:off x="457200" y="3255264"/>
+            <a:ext cx="7863840" cy="512064"/>
           </a:xfrm>
           <a:prstGeom prst="roundRect">
             <a:avLst>
-              <a:gd name="adj" fmla="val 11538"/>
+              <a:gd name="adj" fmla="val 10714"/>
             </a:avLst>
           </a:prstGeom>
           <a:solidFill>
@@ -15966,24 +15477,24 @@
         </p:nvSpPr>
         <p:spPr>
           <a:xfrm>
-            <a:off x="713232" y="3127248"/>
-            <a:ext cx="5212080" cy="475488"/>
-          </a:xfrm>
-          <a:prstGeom prst="rect">
-            <a:avLst/>
-          </a:prstGeom>
-          <a:noFill/>
-          <a:ln/>
-        </p:spPr>
-        <p:txBody>
-          <a:bodyPr wrap="square" lIns="0" tIns="0" rIns="0" bIns="0" rtlCol="0" anchor="ctr"/>
-          <a:lstStyle/>
-          <a:p>
-            <a:pPr indent="0" marL="0">
-              <a:buNone/>
-            </a:pPr>
-            <a:r>
-              <a:rPr lang="en-US" sz="1800" dirty="0">
+            <a:off x="713232" y="3255264"/>
+            <a:ext cx="7406640" cy="512064"/>
+          </a:xfrm>
+          <a:prstGeom prst="rect">
+            <a:avLst/>
+          </a:prstGeom>
+          <a:noFill/>
+          <a:ln/>
+        </p:spPr>
+        <p:txBody>
+          <a:bodyPr wrap="square" lIns="0" tIns="0" rIns="0" bIns="0" rtlCol="0" anchor="ctr"/>
+          <a:lstStyle/>
+          <a:p>
+            <a:pPr indent="0" marL="0">
+              <a:buNone/>
+            </a:pPr>
+            <a:r>
+              <a:rPr lang="en-US" sz="1900" dirty="0">
                 <a:solidFill>
                   <a:srgbClr val="3B3634"/>
                 </a:solidFill>
@@ -15993,7 +15504,7 @@
               </a:rPr>
               <a:t>次の試合までに変えたいこと</a:t>
             </a:r>
-            <a:endParaRPr lang="en-US" sz="1800" dirty="0"/>
+            <a:endParaRPr lang="en-US" sz="1900" dirty="0"/>
           </a:p>
         </p:txBody>
       </p:sp>
@@ -16005,12 +15516,12 @@
         </p:nvSpPr>
         <p:spPr>
           <a:xfrm>
-            <a:off x="457200" y="3694176"/>
-            <a:ext cx="5669280" cy="475488"/>
+            <a:off x="457200" y="3858768"/>
+            <a:ext cx="7863840" cy="512064"/>
           </a:xfrm>
           <a:prstGeom prst="roundRect">
             <a:avLst>
-              <a:gd name="adj" fmla="val 11538"/>
+              <a:gd name="adj" fmla="val 10714"/>
             </a:avLst>
           </a:prstGeom>
           <a:solidFill>
@@ -16032,24 +15543,24 @@
         </p:nvSpPr>
         <p:spPr>
           <a:xfrm>
-            <a:off x="713232" y="3694176"/>
-            <a:ext cx="5212080" cy="475488"/>
-          </a:xfrm>
-          <a:prstGeom prst="rect">
-            <a:avLst/>
-          </a:prstGeom>
-          <a:noFill/>
-          <a:ln/>
-        </p:spPr>
-        <p:txBody>
-          <a:bodyPr wrap="square" lIns="0" tIns="0" rIns="0" bIns="0" rtlCol="0" anchor="ctr"/>
-          <a:lstStyle/>
-          <a:p>
-            <a:pPr indent="0" marL="0">
-              <a:buNone/>
-            </a:pPr>
-            <a:r>
-              <a:rPr lang="en-US" sz="1800" dirty="0">
+            <a:off x="713232" y="3858768"/>
+            <a:ext cx="7406640" cy="512064"/>
+          </a:xfrm>
+          <a:prstGeom prst="rect">
+            <a:avLst/>
+          </a:prstGeom>
+          <a:noFill/>
+          <a:ln/>
+        </p:spPr>
+        <p:txBody>
+          <a:bodyPr wrap="square" lIns="0" tIns="0" rIns="0" bIns="0" rtlCol="0" anchor="ctr"/>
+          <a:lstStyle/>
+          <a:p>
+            <a:pPr indent="0" marL="0">
+              <a:buNone/>
+            </a:pPr>
+            <a:r>
+              <a:rPr lang="en-US" sz="1900" dirty="0">
                 <a:solidFill>
                   <a:srgbClr val="3B3634"/>
                 </a:solidFill>
@@ -16059,73 +15570,49 @@
               </a:rPr>
               <a:t>聞いておきたいこと</a:t>
             </a:r>
+            <a:endParaRPr lang="en-US" sz="1900" dirty="0"/>
+          </a:p>
+        </p:txBody>
+      </p:sp>
+      <p:sp>
+        <p:nvSpPr>
+          <p:cNvPr id="11" name="Text 9"/>
+          <p:cNvSpPr txBox="1"/>
+          <p:nvPr/>
+        </p:nvSpPr>
+        <p:spPr>
+          <a:xfrm>
+            <a:off x="457200" y="4572000"/>
+            <a:ext cx="7863840" cy="411480"/>
+          </a:xfrm>
+          <a:prstGeom prst="rect">
+            <a:avLst/>
+          </a:prstGeom>
+          <a:noFill/>
+          <a:ln/>
+        </p:spPr>
+        <p:txBody>
+          <a:bodyPr wrap="square" lIns="0" tIns="0" rIns="0" bIns="0" rtlCol="0" anchor="ctr"/>
+          <a:lstStyle/>
+          <a:p>
+            <a:pPr indent="0" marL="0">
+              <a:buNone/>
+            </a:pPr>
+            <a:r>
+              <a:rPr lang="en-US" sz="1800" b="1" dirty="0">
+                <a:solidFill>
+                  <a:srgbClr val="7A1524"/>
+                </a:solidFill>
+                <a:latin typeface="Yu Gothic" pitchFamily="34" charset="0"/>
+                <a:ea typeface="Yu Gothic" pitchFamily="34" charset="-122"/>
+                <a:cs typeface="Yu Gothic" pitchFamily="34" charset="-120"/>
+              </a:rPr>
+              <a:t>まず、あなたの感想を聞かせてください。</a:t>
+            </a:r>
             <a:endParaRPr lang="en-US" sz="1800" dirty="0"/>
           </a:p>
         </p:txBody>
       </p:sp>
-      <p:sp>
-        <p:nvSpPr>
-          <p:cNvPr id="11" name="Text 9"/>
-          <p:cNvSpPr txBox="1"/>
-          <p:nvPr/>
-        </p:nvSpPr>
-        <p:spPr>
-          <a:xfrm>
-            <a:off x="457200" y="4389120"/>
-            <a:ext cx="5669280" cy="411480"/>
-          </a:xfrm>
-          <a:prstGeom prst="rect">
-            <a:avLst/>
-          </a:prstGeom>
-          <a:noFill/>
-          <a:ln/>
-        </p:spPr>
-        <p:txBody>
-          <a:bodyPr wrap="square" lIns="0" tIns="0" rIns="0" bIns="0" rtlCol="0" anchor="ctr"/>
-          <a:lstStyle/>
-          <a:p>
-            <a:pPr indent="0" marL="0">
-              <a:buNone/>
-            </a:pPr>
-            <a:r>
-              <a:rPr lang="en-US" sz="1800" b="1" dirty="0">
-                <a:solidFill>
-                  <a:srgbClr val="7A1524"/>
-                </a:solidFill>
-                <a:latin typeface="Yu Gothic" pitchFamily="34" charset="0"/>
-                <a:ea typeface="Yu Gothic" pitchFamily="34" charset="-122"/>
-                <a:cs typeface="Yu Gothic" pitchFamily="34" charset="-120"/>
-              </a:rPr>
-              <a:t>まず、あなたの感想を聞かせてください。</a:t>
-            </a:r>
-            <a:endParaRPr lang="en-US" sz="1800" dirty="0"/>
-          </a:p>
-        </p:txBody>
-      </p:sp>
-      <p:pic>
-        <p:nvPicPr>
-          <p:cNvPr id="12" name="Image 0" descr="preencoded.png">    </p:cNvPr>
-          <p:cNvPicPr>
-            <a:picLocks noChangeAspect="1"/>
-          </p:cNvPicPr>
-          <p:nvPr/>
-        </p:nvPicPr>
-        <p:blipFill>
-          <a:blip r:embed="rId1"/>
-          <a:stretch>
-            <a:fillRect/>
-          </a:stretch>
-        </p:blipFill>
-        <p:spPr>
-          <a:xfrm>
-            <a:off x="6492240" y="2011680"/>
-            <a:ext cx="2194560" cy="2194560"/>
-          </a:xfrm>
-          <a:prstGeom prst="rect">
-            <a:avLst/>
-          </a:prstGeom>
-        </p:spPr>
-      </p:pic>
     </p:spTree>
   </p:cSld>
   <p:clrMapOvr>
@@ -16252,9 +15739,9 @@
                 <a:solidFill>
                   <a:srgbClr val="FFFFFF"/>
                 </a:solidFill>
-                <a:latin typeface="Yu Gothic" pitchFamily="34" charset="0"/>
-                <a:ea typeface="Yu Gothic" pitchFamily="34" charset="-122"/>
-                <a:cs typeface="Yu Gothic" pitchFamily="34" charset="-120"/>
+                <a:latin typeface="Yu Mincho" pitchFamily="34" charset="0"/>
+                <a:ea typeface="Yu Mincho" pitchFamily="34" charset="-122"/>
+                <a:cs typeface="Yu Mincho" pitchFamily="34" charset="-120"/>
               </a:rPr>
               <a:t>次の試合で変えたいのは、</a:t>
             </a:r>
@@ -16272,9 +15759,9 @@
                 <a:solidFill>
                   <a:srgbClr val="FFFFFF"/>
                 </a:solidFill>
-                <a:latin typeface="Yu Gothic" pitchFamily="34" charset="0"/>
-                <a:ea typeface="Yu Gothic" pitchFamily="34" charset="-122"/>
-                <a:cs typeface="Yu Gothic" pitchFamily="34" charset="-120"/>
+                <a:latin typeface="Yu Mincho" pitchFamily="34" charset="0"/>
+                <a:ea typeface="Yu Mincho" pitchFamily="34" charset="-122"/>
+                <a:cs typeface="Yu Mincho" pitchFamily="34" charset="-120"/>
               </a:rPr>
               <a:t>重量だけでしょうか。</a:t>
             </a:r>
@@ -16552,9 +16039,9 @@
                 <a:solidFill>
                   <a:srgbClr val="141416"/>
                 </a:solidFill>
-                <a:latin typeface="Yu Gothic" pitchFamily="34" charset="0"/>
-                <a:ea typeface="Yu Gothic" pitchFamily="34" charset="-122"/>
-                <a:cs typeface="Yu Gothic" pitchFamily="34" charset="-120"/>
+                <a:latin typeface="Yu Mincho" pitchFamily="34" charset="0"/>
+                <a:ea typeface="Yu Mincho" pitchFamily="34" charset="-122"/>
+                <a:cs typeface="Yu Mincho" pitchFamily="34" charset="-120"/>
               </a:rPr>
               <a:t>今、一番気になっていることは？</a:t>
             </a:r>
@@ -16571,11 +16058,11 @@
         <p:spPr>
           <a:xfrm>
             <a:off x="457200" y="1783080"/>
-            <a:ext cx="5669280" cy="420624"/>
+            <a:ext cx="7863840" cy="438912"/>
           </a:xfrm>
           <a:prstGeom prst="roundRect">
             <a:avLst>
-              <a:gd name="adj" fmla="val 13043"/>
+              <a:gd name="adj" fmla="val 12500"/>
             </a:avLst>
           </a:prstGeom>
           <a:solidFill>
@@ -16598,23 +16085,23 @@
         <p:spPr>
           <a:xfrm>
             <a:off x="713232" y="1783080"/>
-            <a:ext cx="5212080" cy="420624"/>
-          </a:xfrm>
-          <a:prstGeom prst="rect">
-            <a:avLst/>
-          </a:prstGeom>
-          <a:noFill/>
-          <a:ln/>
-        </p:spPr>
-        <p:txBody>
-          <a:bodyPr wrap="square" lIns="0" tIns="0" rIns="0" bIns="0" rtlCol="0" anchor="ctr"/>
-          <a:lstStyle/>
-          <a:p>
-            <a:pPr indent="0" marL="0">
-              <a:buNone/>
-            </a:pPr>
-            <a:r>
-              <a:rPr lang="en-US" sz="1800" dirty="0">
+            <a:ext cx="7406640" cy="438912"/>
+          </a:xfrm>
+          <a:prstGeom prst="rect">
+            <a:avLst/>
+          </a:prstGeom>
+          <a:noFill/>
+          <a:ln/>
+        </p:spPr>
+        <p:txBody>
+          <a:bodyPr wrap="square" lIns="0" tIns="0" rIns="0" bIns="0" rtlCol="0" anchor="ctr"/>
+          <a:lstStyle/>
+          <a:p>
+            <a:pPr indent="0" marL="0">
+              <a:buNone/>
+            </a:pPr>
+            <a:r>
+              <a:rPr lang="en-US" sz="1900" dirty="0">
                 <a:solidFill>
                   <a:srgbClr val="3B3634"/>
                 </a:solidFill>
@@ -16624,7 +16111,7 @@
               </a:rPr>
               <a:t>大事な重量になると怖い</a:t>
             </a:r>
-            <a:endParaRPr lang="en-US" sz="1800" dirty="0"/>
+            <a:endParaRPr lang="en-US" sz="1900" dirty="0"/>
           </a:p>
         </p:txBody>
       </p:sp>
@@ -16636,12 +16123,12 @@
         </p:nvSpPr>
         <p:spPr>
           <a:xfrm>
-            <a:off x="457200" y="2295144"/>
-            <a:ext cx="5669280" cy="420624"/>
+            <a:off x="457200" y="2313432"/>
+            <a:ext cx="7863840" cy="438912"/>
           </a:xfrm>
           <a:prstGeom prst="roundRect">
             <a:avLst>
-              <a:gd name="adj" fmla="val 13043"/>
+              <a:gd name="adj" fmla="val 12500"/>
             </a:avLst>
           </a:prstGeom>
           <a:solidFill>
@@ -16663,24 +16150,24 @@
         </p:nvSpPr>
         <p:spPr>
           <a:xfrm>
-            <a:off x="713232" y="2295144"/>
-            <a:ext cx="5212080" cy="420624"/>
-          </a:xfrm>
-          <a:prstGeom prst="rect">
-            <a:avLst/>
-          </a:prstGeom>
-          <a:noFill/>
-          <a:ln/>
-        </p:spPr>
-        <p:txBody>
-          <a:bodyPr wrap="square" lIns="0" tIns="0" rIns="0" bIns="0" rtlCol="0" anchor="ctr"/>
-          <a:lstStyle/>
-          <a:p>
-            <a:pPr indent="0" marL="0">
-              <a:buNone/>
-            </a:pPr>
-            <a:r>
-              <a:rPr lang="en-US" sz="1800" dirty="0">
+            <a:off x="713232" y="2313432"/>
+            <a:ext cx="7406640" cy="438912"/>
+          </a:xfrm>
+          <a:prstGeom prst="rect">
+            <a:avLst/>
+          </a:prstGeom>
+          <a:noFill/>
+          <a:ln/>
+        </p:spPr>
+        <p:txBody>
+          <a:bodyPr wrap="square" lIns="0" tIns="0" rIns="0" bIns="0" rtlCol="0" anchor="ctr"/>
+          <a:lstStyle/>
+          <a:p>
+            <a:pPr indent="0" marL="0">
+              <a:buNone/>
+            </a:pPr>
+            <a:r>
+              <a:rPr lang="en-US" sz="1900" dirty="0">
                 <a:solidFill>
                   <a:srgbClr val="3B3634"/>
                 </a:solidFill>
@@ -16690,7 +16177,7 @@
               </a:rPr>
               <a:t>練習ではできるのに試合で出せない</a:t>
             </a:r>
-            <a:endParaRPr lang="en-US" sz="1800" dirty="0"/>
+            <a:endParaRPr lang="en-US" sz="1900" dirty="0"/>
           </a:p>
         </p:txBody>
       </p:sp>
@@ -16702,12 +16189,12 @@
         </p:nvSpPr>
         <p:spPr>
           <a:xfrm>
-            <a:off x="457200" y="2807208"/>
-            <a:ext cx="5669280" cy="420624"/>
+            <a:off x="457200" y="2843784"/>
+            <a:ext cx="7863840" cy="438912"/>
           </a:xfrm>
           <a:prstGeom prst="roundRect">
             <a:avLst>
-              <a:gd name="adj" fmla="val 13043"/>
+              <a:gd name="adj" fmla="val 12500"/>
             </a:avLst>
           </a:prstGeom>
           <a:solidFill>
@@ -16729,24 +16216,24 @@
         </p:nvSpPr>
         <p:spPr>
           <a:xfrm>
-            <a:off x="713232" y="2807208"/>
-            <a:ext cx="5212080" cy="420624"/>
-          </a:xfrm>
-          <a:prstGeom prst="rect">
-            <a:avLst/>
-          </a:prstGeom>
-          <a:noFill/>
-          <a:ln/>
-        </p:spPr>
-        <p:txBody>
-          <a:bodyPr wrap="square" lIns="0" tIns="0" rIns="0" bIns="0" rtlCol="0" anchor="ctr"/>
-          <a:lstStyle/>
-          <a:p>
-            <a:pPr indent="0" marL="0">
-              <a:buNone/>
-            </a:pPr>
-            <a:r>
-              <a:rPr lang="en-US" sz="1800" dirty="0">
+            <a:off x="713232" y="2843784"/>
+            <a:ext cx="7406640" cy="438912"/>
+          </a:xfrm>
+          <a:prstGeom prst="rect">
+            <a:avLst/>
+          </a:prstGeom>
+          <a:noFill/>
+          <a:ln/>
+        </p:spPr>
+        <p:txBody>
+          <a:bodyPr wrap="square" lIns="0" tIns="0" rIns="0" bIns="0" rtlCol="0" anchor="ctr"/>
+          <a:lstStyle/>
+          <a:p>
+            <a:pPr indent="0" marL="0">
+              <a:buNone/>
+            </a:pPr>
+            <a:r>
+              <a:rPr lang="en-US" sz="1900" dirty="0">
                 <a:solidFill>
                   <a:srgbClr val="3B3634"/>
                 </a:solidFill>
@@ -16756,7 +16243,7 @@
               </a:rPr>
               <a:t>一本失敗すると、その後も影響する</a:t>
             </a:r>
-            <a:endParaRPr lang="en-US" sz="1800" dirty="0"/>
+            <a:endParaRPr lang="en-US" sz="1900" dirty="0"/>
           </a:p>
         </p:txBody>
       </p:sp>
@@ -16768,12 +16255,12 @@
         </p:nvSpPr>
         <p:spPr>
           <a:xfrm>
-            <a:off x="457200" y="3319272"/>
-            <a:ext cx="5669280" cy="420624"/>
+            <a:off x="457200" y="3374136"/>
+            <a:ext cx="7863840" cy="438912"/>
           </a:xfrm>
           <a:prstGeom prst="roundRect">
             <a:avLst>
-              <a:gd name="adj" fmla="val 13043"/>
+              <a:gd name="adj" fmla="val 12500"/>
             </a:avLst>
           </a:prstGeom>
           <a:solidFill>
@@ -16795,24 +16282,24 @@
         </p:nvSpPr>
         <p:spPr>
           <a:xfrm>
-            <a:off x="713232" y="3319272"/>
-            <a:ext cx="5212080" cy="420624"/>
-          </a:xfrm>
-          <a:prstGeom prst="rect">
-            <a:avLst/>
-          </a:prstGeom>
-          <a:noFill/>
-          <a:ln/>
-        </p:spPr>
-        <p:txBody>
-          <a:bodyPr wrap="square" lIns="0" tIns="0" rIns="0" bIns="0" rtlCol="0" anchor="ctr"/>
-          <a:lstStyle/>
-          <a:p>
-            <a:pPr indent="0" marL="0">
-              <a:buNone/>
-            </a:pPr>
-            <a:r>
-              <a:rPr lang="en-US" sz="1800" dirty="0">
+            <a:off x="713232" y="3374136"/>
+            <a:ext cx="7406640" cy="438912"/>
+          </a:xfrm>
+          <a:prstGeom prst="rect">
+            <a:avLst/>
+          </a:prstGeom>
+          <a:noFill/>
+          <a:ln/>
+        </p:spPr>
+        <p:txBody>
+          <a:bodyPr wrap="square" lIns="0" tIns="0" rIns="0" bIns="0" rtlCol="0" anchor="ctr"/>
+          <a:lstStyle/>
+          <a:p>
+            <a:pPr indent="0" marL="0">
+              <a:buNone/>
+            </a:pPr>
+            <a:r>
+              <a:rPr lang="en-US" sz="1900" dirty="0">
                 <a:solidFill>
                   <a:srgbClr val="3B3634"/>
                 </a:solidFill>
@@ -16822,7 +16309,7 @@
               </a:rPr>
               <a:t>順位や相手が気になる</a:t>
             </a:r>
-            <a:endParaRPr lang="en-US" sz="1800" dirty="0"/>
+            <a:endParaRPr lang="en-US" sz="1900" dirty="0"/>
           </a:p>
         </p:txBody>
       </p:sp>
@@ -16834,12 +16321,12 @@
         </p:nvSpPr>
         <p:spPr>
           <a:xfrm>
-            <a:off x="457200" y="3831336"/>
-            <a:ext cx="5669280" cy="420624"/>
+            <a:off x="457200" y="3904488"/>
+            <a:ext cx="7863840" cy="438912"/>
           </a:xfrm>
           <a:prstGeom prst="roundRect">
             <a:avLst>
-              <a:gd name="adj" fmla="val 13043"/>
+              <a:gd name="adj" fmla="val 12500"/>
             </a:avLst>
           </a:prstGeom>
           <a:solidFill>
@@ -16861,24 +16348,24 @@
         </p:nvSpPr>
         <p:spPr>
           <a:xfrm>
-            <a:off x="713232" y="3831336"/>
-            <a:ext cx="5212080" cy="420624"/>
-          </a:xfrm>
-          <a:prstGeom prst="rect">
-            <a:avLst/>
-          </a:prstGeom>
-          <a:noFill/>
-          <a:ln/>
-        </p:spPr>
-        <p:txBody>
-          <a:bodyPr wrap="square" lIns="0" tIns="0" rIns="0" bIns="0" rtlCol="0" anchor="ctr"/>
-          <a:lstStyle/>
-          <a:p>
-            <a:pPr indent="0" marL="0">
-              <a:buNone/>
-            </a:pPr>
-            <a:r>
-              <a:rPr lang="en-US" sz="1800" dirty="0">
+            <a:off x="713232" y="3904488"/>
+            <a:ext cx="7406640" cy="438912"/>
+          </a:xfrm>
+          <a:prstGeom prst="rect">
+            <a:avLst/>
+          </a:prstGeom>
+          <a:noFill/>
+          <a:ln/>
+        </p:spPr>
+        <p:txBody>
+          <a:bodyPr wrap="square" lIns="0" tIns="0" rIns="0" bIns="0" rtlCol="0" anchor="ctr"/>
+          <a:lstStyle/>
+          <a:p>
+            <a:pPr indent="0" marL="0">
+              <a:buNone/>
+            </a:pPr>
+            <a:r>
+              <a:rPr lang="en-US" sz="1900" dirty="0">
                 <a:solidFill>
                   <a:srgbClr val="3B3634"/>
                 </a:solidFill>
@@ -16888,73 +16375,49 @@
               </a:rPr>
               <a:t>自分を信じて試技に入りたい</a:t>
             </a:r>
+            <a:endParaRPr lang="en-US" sz="1900" dirty="0"/>
+          </a:p>
+        </p:txBody>
+      </p:sp>
+      <p:sp>
+        <p:nvSpPr>
+          <p:cNvPr id="15" name="Text 13"/>
+          <p:cNvSpPr txBox="1"/>
+          <p:nvPr/>
+        </p:nvSpPr>
+        <p:spPr>
+          <a:xfrm>
+            <a:off x="457200" y="4526280"/>
+            <a:ext cx="7863840" cy="411480"/>
+          </a:xfrm>
+          <a:prstGeom prst="rect">
+            <a:avLst/>
+          </a:prstGeom>
+          <a:noFill/>
+          <a:ln/>
+        </p:spPr>
+        <p:txBody>
+          <a:bodyPr wrap="square" lIns="0" tIns="0" rIns="0" bIns="0" rtlCol="0" anchor="ctr"/>
+          <a:lstStyle/>
+          <a:p>
+            <a:pPr indent="0" marL="0">
+              <a:buNone/>
+            </a:pPr>
+            <a:r>
+              <a:rPr lang="en-US" sz="1800" b="1" dirty="0">
+                <a:solidFill>
+                  <a:srgbClr val="7A1524"/>
+                </a:solidFill>
+                <a:latin typeface="Yu Gothic" pitchFamily="34" charset="0"/>
+                <a:ea typeface="Yu Gothic" pitchFamily="34" charset="-122"/>
+                <a:cs typeface="Yu Gothic" pitchFamily="34" charset="-120"/>
+              </a:rPr>
+              <a:t>今日、一番整理したいことを教えてください。</a:t>
+            </a:r>
             <a:endParaRPr lang="en-US" sz="1800" dirty="0"/>
           </a:p>
         </p:txBody>
       </p:sp>
-      <p:sp>
-        <p:nvSpPr>
-          <p:cNvPr id="15" name="Text 13"/>
-          <p:cNvSpPr txBox="1"/>
-          <p:nvPr/>
-        </p:nvSpPr>
-        <p:spPr>
-          <a:xfrm>
-            <a:off x="457200" y="4434840"/>
-            <a:ext cx="5852160" cy="411480"/>
-          </a:xfrm>
-          <a:prstGeom prst="rect">
-            <a:avLst/>
-          </a:prstGeom>
-          <a:noFill/>
-          <a:ln/>
-        </p:spPr>
-        <p:txBody>
-          <a:bodyPr wrap="square" lIns="0" tIns="0" rIns="0" bIns="0" rtlCol="0" anchor="ctr"/>
-          <a:lstStyle/>
-          <a:p>
-            <a:pPr indent="0" marL="0">
-              <a:buNone/>
-            </a:pPr>
-            <a:r>
-              <a:rPr lang="en-US" sz="1700" b="1" dirty="0">
-                <a:solidFill>
-                  <a:srgbClr val="7A1524"/>
-                </a:solidFill>
-                <a:latin typeface="Yu Gothic" pitchFamily="34" charset="0"/>
-                <a:ea typeface="Yu Gothic" pitchFamily="34" charset="-122"/>
-                <a:cs typeface="Yu Gothic" pitchFamily="34" charset="-120"/>
-              </a:rPr>
-              <a:t>今日、一番整理したいことを教えてください。</a:t>
-            </a:r>
-            <a:endParaRPr lang="en-US" sz="1700" dirty="0"/>
-          </a:p>
-        </p:txBody>
-      </p:sp>
-      <p:pic>
-        <p:nvPicPr>
-          <p:cNvPr id="16" name="Image 0" descr="preencoded.png">    </p:cNvPr>
-          <p:cNvPicPr>
-            <a:picLocks noChangeAspect="1"/>
-          </p:cNvPicPr>
-          <p:nvPr/>
-        </p:nvPicPr>
-        <p:blipFill>
-          <a:blip r:embed="rId1"/>
-          <a:stretch>
-            <a:fillRect/>
-          </a:stretch>
-        </p:blipFill>
-        <p:spPr>
-          <a:xfrm>
-            <a:off x="6492240" y="1920240"/>
-            <a:ext cx="2194560" cy="2194560"/>
-          </a:xfrm>
-          <a:prstGeom prst="rect">
-            <a:avLst/>
-          </a:prstGeom>
-        </p:spPr>
-      </p:pic>
     </p:spTree>
   </p:cSld>
   <p:clrMapOvr>
@@ -17065,40 +16528,16 @@
           </a:p>
         </p:txBody>
       </p:sp>
-      <p:pic>
-        <p:nvPicPr>
-          <p:cNvPr id="4" name="Image 0" descr="preencoded.png">    </p:cNvPr>
-          <p:cNvPicPr>
-            <a:picLocks noChangeAspect="1"/>
-          </p:cNvPicPr>
-          <p:nvPr/>
-        </p:nvPicPr>
-        <p:blipFill>
-          <a:blip r:embed="rId1"/>
-          <a:stretch>
-            <a:fillRect/>
-          </a:stretch>
-        </p:blipFill>
-        <p:spPr>
-          <a:xfrm>
-            <a:off x="640080" y="1371600"/>
-            <a:ext cx="2651760" cy="2651760"/>
-          </a:xfrm>
-          <a:prstGeom prst="rect">
-            <a:avLst/>
-          </a:prstGeom>
-        </p:spPr>
-      </p:pic>
-      <p:sp>
-        <p:nvSpPr>
-          <p:cNvPr id="5" name="Text 2"/>
-          <p:cNvSpPr txBox="1"/>
-          <p:nvPr/>
-        </p:nvSpPr>
-        <p:spPr>
-          <a:xfrm>
-            <a:off x="3749040" y="914400"/>
-            <a:ext cx="4937760" cy="1188720"/>
+      <p:sp>
+        <p:nvSpPr>
+          <p:cNvPr id="4" name="Text 2"/>
+          <p:cNvSpPr txBox="1"/>
+          <p:nvPr/>
+        </p:nvSpPr>
+        <p:spPr>
+          <a:xfrm>
+            <a:off x="457200" y="914400"/>
+            <a:ext cx="7863840" cy="1188720"/>
           </a:xfrm>
           <a:prstGeom prst="rect">
             <a:avLst/>
@@ -17112,75 +16551,75 @@
           <a:p>
             <a:pPr algn="l" indent="0" marL="0">
               <a:lnSpc>
-                <a:spcPts val="4205"/>
+                <a:spcPts val="4785"/>
               </a:lnSpc>
               <a:buNone/>
             </a:pPr>
             <a:r>
-              <a:rPr lang="en-US" sz="2900" b="1" dirty="0">
+              <a:rPr lang="en-US" sz="3300" b="1" dirty="0">
                 <a:solidFill>
                   <a:srgbClr val="141416"/>
                 </a:solidFill>
-                <a:latin typeface="Yu Gothic" pitchFamily="34" charset="0"/>
-                <a:ea typeface="Yu Gothic" pitchFamily="34" charset="-122"/>
-                <a:cs typeface="Yu Gothic" pitchFamily="34" charset="-120"/>
+                <a:latin typeface="Yu Mincho" pitchFamily="34" charset="0"/>
+                <a:ea typeface="Yu Mincho" pitchFamily="34" charset="-122"/>
+                <a:cs typeface="Yu Mincho" pitchFamily="34" charset="-120"/>
               </a:rPr>
               <a:t>私も昔は、</a:t>
             </a:r>
-            <a:endParaRPr lang="en-US" sz="2900" dirty="0"/>
+            <a:endParaRPr lang="en-US" sz="3300" dirty="0"/>
           </a:p>
           <a:p>
             <a:pPr algn="l" indent="0" marL="0">
               <a:lnSpc>
-                <a:spcPts val="4205"/>
+                <a:spcPts val="4785"/>
               </a:lnSpc>
               <a:buNone/>
             </a:pPr>
             <a:r>
-              <a:rPr lang="en-US" sz="2900" b="1" dirty="0">
+              <a:rPr lang="en-US" sz="3300" b="1" dirty="0">
                 <a:solidFill>
                   <a:srgbClr val="141416"/>
                 </a:solidFill>
-                <a:latin typeface="Yu Gothic" pitchFamily="34" charset="0"/>
-                <a:ea typeface="Yu Gothic" pitchFamily="34" charset="-122"/>
-                <a:cs typeface="Yu Gothic" pitchFamily="34" charset="-120"/>
+                <a:latin typeface="Yu Mincho" pitchFamily="34" charset="0"/>
+                <a:ea typeface="Yu Mincho" pitchFamily="34" charset="-122"/>
+                <a:cs typeface="Yu Mincho" pitchFamily="34" charset="-120"/>
               </a:rPr>
               <a:t>「メンタルが強い人が勝つ」</a:t>
             </a:r>
-            <a:endParaRPr lang="en-US" sz="2900" dirty="0"/>
+            <a:endParaRPr lang="en-US" sz="3300" dirty="0"/>
           </a:p>
           <a:p>
             <a:pPr algn="l" indent="0" marL="0">
               <a:lnSpc>
-                <a:spcPts val="4205"/>
+                <a:spcPts val="4785"/>
               </a:lnSpc>
               <a:buNone/>
             </a:pPr>
             <a:r>
-              <a:rPr lang="en-US" sz="2900" b="1" dirty="0">
+              <a:rPr lang="en-US" sz="3300" b="1" dirty="0">
                 <a:solidFill>
                   <a:srgbClr val="141416"/>
                 </a:solidFill>
-                <a:latin typeface="Yu Gothic" pitchFamily="34" charset="0"/>
-                <a:ea typeface="Yu Gothic" pitchFamily="34" charset="-122"/>
-                <a:cs typeface="Yu Gothic" pitchFamily="34" charset="-120"/>
+                <a:latin typeface="Yu Mincho" pitchFamily="34" charset="0"/>
+                <a:ea typeface="Yu Mincho" pitchFamily="34" charset="-122"/>
+                <a:cs typeface="Yu Mincho" pitchFamily="34" charset="-120"/>
               </a:rPr>
               <a:t>と思っていました</a:t>
             </a:r>
-            <a:endParaRPr lang="en-US" sz="2900" dirty="0"/>
-          </a:p>
-        </p:txBody>
-      </p:sp>
-      <p:sp>
-        <p:nvSpPr>
-          <p:cNvPr id="6" name="Text 3"/>
-          <p:cNvSpPr txBox="1"/>
-          <p:nvPr/>
-        </p:nvSpPr>
-        <p:spPr>
-          <a:xfrm>
-            <a:off x="3749040" y="2880360"/>
-            <a:ext cx="4937760" cy="1737360"/>
+            <a:endParaRPr lang="en-US" sz="3300" dirty="0"/>
+          </a:p>
+        </p:txBody>
+      </p:sp>
+      <p:sp>
+        <p:nvSpPr>
+          <p:cNvPr id="5" name="Text 3"/>
+          <p:cNvSpPr txBox="1"/>
+          <p:nvPr/>
+        </p:nvSpPr>
+        <p:spPr>
+          <a:xfrm>
+            <a:off x="457200" y="3063240"/>
+            <a:ext cx="7863840" cy="1645920"/>
           </a:xfrm>
           <a:prstGeom prst="rect">
             <a:avLst/>
@@ -17194,12 +16633,12 @@
           <a:p>
             <a:pPr indent="0" marL="0">
               <a:lnSpc>
-                <a:spcPts val="2600"/>
+                <a:spcPts val="3000"/>
               </a:lnSpc>
               <a:buNone/>
             </a:pPr>
             <a:r>
-              <a:rPr lang="en-US" sz="1600" dirty="0">
+              <a:rPr lang="en-US" sz="1800" dirty="0">
                 <a:solidFill>
                   <a:srgbClr val="3B3634"/>
                 </a:solidFill>
@@ -17209,17 +16648,17 @@
               </a:rPr>
               <a:t>試合1か月前から、頭の中は試合のことでいっぱい。</a:t>
             </a:r>
-            <a:endParaRPr lang="en-US" sz="1600" dirty="0"/>
+            <a:endParaRPr lang="en-US" sz="1800" dirty="0"/>
           </a:p>
           <a:p>
             <a:pPr indent="0" marL="0">
               <a:lnSpc>
-                <a:spcPts val="2600"/>
+                <a:spcPts val="3000"/>
               </a:lnSpc>
               <a:buNone/>
             </a:pPr>
             <a:r>
-              <a:rPr lang="en-US" sz="1600" dirty="0">
+              <a:rPr lang="en-US" sz="1800" dirty="0">
                 <a:solidFill>
                   <a:srgbClr val="3B3634"/>
                 </a:solidFill>
@@ -17229,17 +16668,17 @@
               </a:rPr>
               <a:t>「失敗したらどうしよう」</a:t>
             </a:r>
-            <a:endParaRPr lang="en-US" sz="1600" dirty="0"/>
+            <a:endParaRPr lang="en-US" sz="1800" dirty="0"/>
           </a:p>
           <a:p>
             <a:pPr indent="0" marL="0">
               <a:lnSpc>
-                <a:spcPts val="2600"/>
+                <a:spcPts val="3000"/>
               </a:lnSpc>
               <a:buNone/>
             </a:pPr>
             <a:r>
-              <a:rPr lang="en-US" sz="1600" dirty="0">
+              <a:rPr lang="en-US" sz="1800" dirty="0">
                 <a:solidFill>
                   <a:srgbClr val="3B3634"/>
                 </a:solidFill>
@@ -17249,17 +16688,17 @@
               </a:rPr>
               <a:t>そんな不安が出るたびに、「できる、できる」と</a:t>
             </a:r>
-            <a:endParaRPr lang="en-US" sz="1600" dirty="0"/>
+            <a:endParaRPr lang="en-US" sz="1800" dirty="0"/>
           </a:p>
           <a:p>
             <a:pPr indent="0" marL="0">
               <a:lnSpc>
-                <a:spcPts val="2600"/>
+                <a:spcPts val="3000"/>
               </a:lnSpc>
               <a:buNone/>
             </a:pPr>
             <a:r>
-              <a:rPr lang="en-US" sz="1600" dirty="0">
+              <a:rPr lang="en-US" sz="1800" dirty="0">
                 <a:solidFill>
                   <a:srgbClr val="3B3634"/>
                 </a:solidFill>
@@ -17269,7 +16708,7 @@
               </a:rPr>
               <a:t>必死に塗り替えていました。</a:t>
             </a:r>
-            <a:endParaRPr lang="en-US" sz="1600" dirty="0"/>
+            <a:endParaRPr lang="en-US" sz="1800" dirty="0"/>
           </a:p>
         </p:txBody>
       </p:sp>
@@ -17415,9 +16854,9 @@
                 <a:solidFill>
                   <a:srgbClr val="141416"/>
                 </a:solidFill>
-                <a:latin typeface="Yu Gothic" pitchFamily="34" charset="0"/>
-                <a:ea typeface="Yu Gothic" pitchFamily="34" charset="-122"/>
-                <a:cs typeface="Yu Gothic" pitchFamily="34" charset="-120"/>
+                <a:latin typeface="Yu Mincho" pitchFamily="34" charset="0"/>
+                <a:ea typeface="Yu Mincho" pitchFamily="34" charset="-122"/>
+                <a:cs typeface="Yu Mincho" pitchFamily="34" charset="-120"/>
               </a:rPr>
               <a:t>でも、不安は消えなかった</a:t>
             </a:r>
@@ -17434,7 +16873,7 @@
         <p:spPr>
           <a:xfrm>
             <a:off x="457200" y="1783080"/>
-            <a:ext cx="5212080" cy="1051560"/>
+            <a:ext cx="7863840" cy="1051560"/>
           </a:xfrm>
           <a:prstGeom prst="roundRect">
             <a:avLst>
@@ -17460,8 +16899,8 @@
         </p:nvSpPr>
         <p:spPr>
           <a:xfrm>
-            <a:off x="731520" y="1783080"/>
-            <a:ext cx="4754880" cy="1051560"/>
+            <a:off x="822960" y="1783080"/>
+            <a:ext cx="7406640" cy="1051560"/>
           </a:xfrm>
           <a:prstGeom prst="rect">
             <a:avLst/>
@@ -17480,17 +16919,17 @@
               <a:buNone/>
             </a:pPr>
             <a:r>
-              <a:rPr lang="en-US" sz="2100" b="1" dirty="0">
+              <a:rPr lang="en-US" sz="2200" b="1" dirty="0">
                 <a:solidFill>
                   <a:srgbClr val="FFFFFF"/>
                 </a:solidFill>
-                <a:latin typeface="Yu Gothic" pitchFamily="34" charset="0"/>
-                <a:ea typeface="Yu Gothic" pitchFamily="34" charset="-122"/>
-                <a:cs typeface="Yu Gothic" pitchFamily="34" charset="-120"/>
+                <a:latin typeface="Yu Mincho" pitchFamily="34" charset="0"/>
+                <a:ea typeface="Yu Mincho" pitchFamily="34" charset="-122"/>
+                <a:cs typeface="Yu Mincho" pitchFamily="34" charset="-120"/>
               </a:rPr>
               <a:t>「こんなことを考えたら、</a:t>
             </a:r>
-            <a:endParaRPr lang="en-US" sz="2100" dirty="0"/>
+            <a:endParaRPr lang="en-US" sz="2200" dirty="0"/>
           </a:p>
           <a:p>
             <a:pPr indent="0" marL="0">
@@ -17500,17 +16939,17 @@
               <a:buNone/>
             </a:pPr>
             <a:r>
-              <a:rPr lang="en-US" sz="2100" b="1" dirty="0">
+              <a:rPr lang="en-US" sz="2200" b="1" dirty="0">
                 <a:solidFill>
                   <a:srgbClr val="FFFFFF"/>
                 </a:solidFill>
-                <a:latin typeface="Yu Gothic" pitchFamily="34" charset="0"/>
-                <a:ea typeface="Yu Gothic" pitchFamily="34" charset="-122"/>
-                <a:cs typeface="Yu Gothic" pitchFamily="34" charset="-120"/>
+                <a:latin typeface="Yu Mincho" pitchFamily="34" charset="0"/>
+                <a:ea typeface="Yu Mincho" pitchFamily="34" charset="-122"/>
+                <a:cs typeface="Yu Mincho" pitchFamily="34" charset="-120"/>
               </a:rPr>
               <a:t>本当に失敗するかも」</a:t>
             </a:r>
-            <a:endParaRPr lang="en-US" sz="2100" dirty="0"/>
+            <a:endParaRPr lang="en-US" sz="2200" dirty="0"/>
           </a:p>
         </p:txBody>
       </p:sp>
@@ -17522,8 +16961,8 @@
         </p:nvSpPr>
         <p:spPr>
           <a:xfrm>
-            <a:off x="457200" y="3017520"/>
-            <a:ext cx="5394960" cy="1645920"/>
+            <a:off x="457200" y="3108960"/>
+            <a:ext cx="7863840" cy="1645920"/>
           </a:xfrm>
           <a:prstGeom prst="rect">
             <a:avLst/>
@@ -17537,12 +16976,12 @@
           <a:p>
             <a:pPr indent="0" marL="0">
               <a:lnSpc>
-                <a:spcPts val="2600"/>
+                <a:spcPts val="3000"/>
               </a:lnSpc>
               <a:buNone/>
             </a:pPr>
             <a:r>
-              <a:rPr lang="en-US" sz="1600" dirty="0">
+              <a:rPr lang="en-US" sz="1800" dirty="0">
                 <a:solidFill>
                   <a:srgbClr val="3B3634"/>
                 </a:solidFill>
@@ -17552,17 +16991,17 @@
               </a:rPr>
               <a:t>不安そのものだけでなく、不安になっている自分まで</a:t>
             </a:r>
-            <a:endParaRPr lang="en-US" sz="1600" dirty="0"/>
+            <a:endParaRPr lang="en-US" sz="1800" dirty="0"/>
           </a:p>
           <a:p>
             <a:pPr indent="0" marL="0">
               <a:lnSpc>
-                <a:spcPts val="2600"/>
+                <a:spcPts val="3000"/>
               </a:lnSpc>
               <a:buNone/>
             </a:pPr>
             <a:r>
-              <a:rPr lang="en-US" sz="1600" dirty="0">
+              <a:rPr lang="en-US" sz="1800" dirty="0">
                 <a:solidFill>
                   <a:srgbClr val="3B3634"/>
                 </a:solidFill>
@@ -17572,26 +17011,26 @@
               </a:rPr>
               <a:t>怖くなっていました。</a:t>
             </a:r>
-            <a:endParaRPr lang="en-US" sz="1600" dirty="0"/>
+            <a:endParaRPr lang="en-US" sz="1800" dirty="0"/>
           </a:p>
           <a:p>
             <a:pPr indent="0" marL="0">
               <a:lnSpc>
-                <a:spcPts val="2600"/>
+                <a:spcPts val="3000"/>
               </a:lnSpc>
               <a:buNone/>
             </a:pPr>
-            <a:endParaRPr lang="en-US" sz="1600" dirty="0"/>
+            <a:endParaRPr lang="en-US" sz="1800" dirty="0"/>
           </a:p>
           <a:p>
             <a:pPr indent="0" marL="0">
               <a:lnSpc>
-                <a:spcPts val="2600"/>
+                <a:spcPts val="3000"/>
               </a:lnSpc>
               <a:buNone/>
             </a:pPr>
             <a:r>
-              <a:rPr lang="en-US" sz="1600" dirty="0">
+              <a:rPr lang="en-US" sz="1800" dirty="0">
                 <a:solidFill>
                   <a:srgbClr val="3B3634"/>
                 </a:solidFill>
@@ -17601,34 +17040,10 @@
               </a:rPr>
               <a:t>そして実際に、想像していたような結果になったことも。</a:t>
             </a:r>
-            <a:endParaRPr lang="en-US" sz="1600" dirty="0"/>
-          </a:p>
-        </p:txBody>
-      </p:sp>
-      <p:pic>
-        <p:nvPicPr>
-          <p:cNvPr id="8" name="Image 0" descr="preencoded.png">    </p:cNvPr>
-          <p:cNvPicPr>
-            <a:picLocks noChangeAspect="1"/>
-          </p:cNvPicPr>
-          <p:nvPr/>
-        </p:nvPicPr>
-        <p:blipFill>
-          <a:blip r:embed="rId1"/>
-          <a:stretch>
-            <a:fillRect/>
-          </a:stretch>
-        </p:blipFill>
-        <p:spPr>
-          <a:xfrm>
-            <a:off x="6217920" y="1645920"/>
-            <a:ext cx="2468880" cy="2468880"/>
-          </a:xfrm>
-          <a:prstGeom prst="rect">
-            <a:avLst/>
-          </a:prstGeom>
-        </p:spPr>
-      </p:pic>
+            <a:endParaRPr lang="en-US" sz="1800" dirty="0"/>
+          </a:p>
+        </p:txBody>
+      </p:sp>
     </p:spTree>
   </p:cSld>
   <p:clrMapOvr>
@@ -17794,9 +17209,9 @@
                 <a:solidFill>
                   <a:srgbClr val="141416"/>
                 </a:solidFill>
-                <a:latin typeface="Yu Gothic" pitchFamily="34" charset="0"/>
-                <a:ea typeface="Yu Gothic" pitchFamily="34" charset="-122"/>
-                <a:cs typeface="Yu Gothic" pitchFamily="34" charset="-120"/>
+                <a:latin typeface="Yu Mincho" pitchFamily="34" charset="0"/>
+                <a:ea typeface="Yu Mincho" pitchFamily="34" charset="-122"/>
+                <a:cs typeface="Yu Mincho" pitchFamily="34" charset="-120"/>
               </a:rPr>
               <a:t>2023年度</a:t>
             </a:r>
@@ -17814,9 +17229,9 @@
                 <a:solidFill>
                   <a:srgbClr val="141416"/>
                 </a:solidFill>
-                <a:latin typeface="Yu Gothic" pitchFamily="34" charset="0"/>
-                <a:ea typeface="Yu Gothic" pitchFamily="34" charset="-122"/>
-                <a:cs typeface="Yu Gothic" pitchFamily="34" charset="-120"/>
+                <a:latin typeface="Yu Mincho" pitchFamily="34" charset="0"/>
+                <a:ea typeface="Yu Mincho" pitchFamily="34" charset="-122"/>
+                <a:cs typeface="Yu Mincho" pitchFamily="34" charset="-120"/>
               </a:rPr>
               <a:t>日本グランプリ</a:t>
             </a:r>
@@ -18139,9 +17554,9 @@
                 <a:solidFill>
                   <a:srgbClr val="141416"/>
                 </a:solidFill>
-                <a:latin typeface="Yu Gothic" pitchFamily="34" charset="0"/>
-                <a:ea typeface="Yu Gothic" pitchFamily="34" charset="-122"/>
-                <a:cs typeface="Yu Gothic" pitchFamily="34" charset="-120"/>
+                <a:latin typeface="Yu Mincho" pitchFamily="34" charset="0"/>
+                <a:ea typeface="Yu Mincho" pitchFamily="34" charset="-122"/>
+                <a:cs typeface="Yu Mincho" pitchFamily="34" charset="-120"/>
               </a:rPr>
               <a:t>でも、その試合で</a:t>
             </a:r>
@@ -18159,9 +17574,9 @@
                 <a:solidFill>
                   <a:srgbClr val="141416"/>
                 </a:solidFill>
-                <a:latin typeface="Yu Gothic" pitchFamily="34" charset="0"/>
-                <a:ea typeface="Yu Gothic" pitchFamily="34" charset="-122"/>
-                <a:cs typeface="Yu Gothic" pitchFamily="34" charset="-120"/>
+                <a:latin typeface="Yu Mincho" pitchFamily="34" charset="0"/>
+                <a:ea typeface="Yu Mincho" pitchFamily="34" charset="-122"/>
+                <a:cs typeface="Yu Mincho" pitchFamily="34" charset="-120"/>
               </a:rPr>
               <a:t>全部が決まった</a:t>
             </a:r>
@@ -18179,9 +17594,9 @@
                 <a:solidFill>
                   <a:srgbClr val="141416"/>
                 </a:solidFill>
-                <a:latin typeface="Yu Gothic" pitchFamily="34" charset="0"/>
-                <a:ea typeface="Yu Gothic" pitchFamily="34" charset="-122"/>
-                <a:cs typeface="Yu Gothic" pitchFamily="34" charset="-120"/>
+                <a:latin typeface="Yu Mincho" pitchFamily="34" charset="0"/>
+                <a:ea typeface="Yu Mincho" pitchFamily="34" charset="-122"/>
+                <a:cs typeface="Yu Mincho" pitchFamily="34" charset="-120"/>
               </a:rPr>
               <a:t>わけではなかった</a:t>
             </a:r>
@@ -18484,9 +17899,9 @@
                 <a:solidFill>
                   <a:srgbClr val="141416"/>
                 </a:solidFill>
-                <a:latin typeface="Yu Gothic" pitchFamily="34" charset="0"/>
-                <a:ea typeface="Yu Gothic" pitchFamily="34" charset="-122"/>
-                <a:cs typeface="Yu Gothic" pitchFamily="34" charset="-120"/>
+                <a:latin typeface="Yu Mincho" pitchFamily="34" charset="0"/>
+                <a:ea typeface="Yu Mincho" pitchFamily="34" charset="-122"/>
+                <a:cs typeface="Yu Mincho" pitchFamily="34" charset="-120"/>
               </a:rPr>
               <a:t>今は、世界大会さえ</a:t>
             </a:r>
@@ -18504,9 +17919,9 @@
                 <a:solidFill>
                   <a:srgbClr val="141416"/>
                 </a:solidFill>
-                <a:latin typeface="Yu Gothic" pitchFamily="34" charset="0"/>
-                <a:ea typeface="Yu Gothic" pitchFamily="34" charset="-122"/>
-                <a:cs typeface="Yu Gothic" pitchFamily="34" charset="-120"/>
+                <a:latin typeface="Yu Mincho" pitchFamily="34" charset="0"/>
+                <a:ea typeface="Yu Mincho" pitchFamily="34" charset="-122"/>
+                <a:cs typeface="Yu Mincho" pitchFamily="34" charset="-120"/>
               </a:rPr>
               <a:t>「楽しい」</a:t>
             </a:r>

--- a/deck/consultation-deck.pptx
+++ b/deck/consultation-deck.pptx
@@ -17123,7 +17123,7 @@
         </p:nvSpPr>
         <p:spPr>
           <a:xfrm>
-            <a:off x="457200" y="4576572"/>
+            <a:off x="8138160" y="4576572"/>
             <a:ext cx="548640" cy="274320"/>
           </a:xfrm>
           <a:prstGeom prst="rect">
@@ -17136,7 +17136,7 @@
           <a:bodyPr wrap="square" lIns="0" tIns="0" rIns="0" bIns="0" rtlCol="0" anchor="ctr"/>
           <a:lstStyle/>
           <a:p>
-            <a:pPr algn="l" indent="0" marL="0">
+            <a:pPr algn="r" indent="0" marL="0">
               <a:buNone/>
             </a:pPr>
             <a:r>
@@ -17154,39 +17154,16 @@
           </a:p>
         </p:txBody>
       </p:sp>
-      <p:pic>
-        <p:nvPicPr>
-          <p:cNvPr id="4" name="Image 0" descr="../note/images/01-squat.jpg">    </p:cNvPr>
-          <p:cNvPicPr>
-            <a:picLocks noChangeAspect="1"/>
-          </p:cNvPicPr>
-          <p:nvPr/>
-        </p:nvPicPr>
-        <p:blipFill>
-          <a:blip r:embed="rId1"/>
-          <a:srcRect l="0" r="0" t="0" b="0"/>
-          <a:stretch/>
-        </p:blipFill>
-        <p:spPr>
-          <a:xfrm>
-            <a:off x="5029200" y="0"/>
-            <a:ext cx="4114800" cy="5143500"/>
-          </a:xfrm>
-          <a:prstGeom prst="rect">
-            <a:avLst/>
-          </a:prstGeom>
-        </p:spPr>
-      </p:pic>
-      <p:sp>
-        <p:nvSpPr>
-          <p:cNvPr id="5" name="Text 2"/>
-          <p:cNvSpPr txBox="1"/>
-          <p:nvPr/>
-        </p:nvSpPr>
-        <p:spPr>
-          <a:xfrm>
-            <a:off x="457200" y="822960"/>
-            <a:ext cx="4206240" cy="1188720"/>
+      <p:sp>
+        <p:nvSpPr>
+          <p:cNvPr id="4" name="Text 2"/>
+          <p:cNvSpPr txBox="1"/>
+          <p:nvPr/>
+        </p:nvSpPr>
+        <p:spPr>
+          <a:xfrm>
+            <a:off x="457200" y="868680"/>
+            <a:ext cx="7863840" cy="1188720"/>
           </a:xfrm>
           <a:prstGeom prst="rect">
             <a:avLst/>
@@ -17200,12 +17177,12 @@
           <a:p>
             <a:pPr algn="l" indent="0" marL="0">
               <a:lnSpc>
-                <a:spcPts val="4785"/>
+                <a:spcPts val="5220"/>
               </a:lnSpc>
               <a:buNone/>
             </a:pPr>
             <a:r>
-              <a:rPr lang="en-US" sz="3300" b="1" dirty="0">
+              <a:rPr lang="en-US" sz="3600" b="1" dirty="0">
                 <a:solidFill>
                   <a:srgbClr val="141416"/>
                 </a:solidFill>
@@ -17213,179 +17190,186 @@
                 <a:ea typeface="Yu Mincho" pitchFamily="34" charset="-122"/>
                 <a:cs typeface="Yu Mincho" pitchFamily="34" charset="-120"/>
               </a:rPr>
-              <a:t>2023年度</a:t>
-            </a:r>
-            <a:endParaRPr lang="en-US" sz="3300" dirty="0"/>
-          </a:p>
-          <a:p>
-            <a:pPr algn="l" indent="0" marL="0">
+              <a:t>2023年度 日本グランプリ</a:t>
+            </a:r>
+            <a:endParaRPr lang="en-US" sz="3600" dirty="0"/>
+          </a:p>
+        </p:txBody>
+      </p:sp>
+      <p:sp>
+        <p:nvSpPr>
+          <p:cNvPr id="5" name="Text 3"/>
+          <p:cNvSpPr txBox="1"/>
+          <p:nvPr/>
+        </p:nvSpPr>
+        <p:spPr>
+          <a:xfrm>
+            <a:off x="457200" y="1920240"/>
+            <a:ext cx="7863840" cy="1920240"/>
+          </a:xfrm>
+          <a:prstGeom prst="rect">
+            <a:avLst/>
+          </a:prstGeom>
+          <a:noFill/>
+          <a:ln/>
+        </p:spPr>
+        <p:txBody>
+          <a:bodyPr wrap="square" lIns="0" tIns="0" rIns="0" bIns="0" rtlCol="0" anchor="ctr"/>
+          <a:lstStyle/>
+          <a:p>
+            <a:pPr indent="0" marL="0">
               <a:lnSpc>
-                <a:spcPts val="4785"/>
+                <a:spcPts val="3000"/>
               </a:lnSpc>
               <a:buNone/>
             </a:pPr>
             <a:r>
-              <a:rPr lang="en-US" sz="3300" b="1" dirty="0">
-                <a:solidFill>
-                  <a:srgbClr val="141416"/>
+              <a:rPr lang="en-US" sz="1900" dirty="0">
+                <a:solidFill>
+                  <a:srgbClr val="3B3634"/>
+                </a:solidFill>
+                <a:latin typeface="Yu Gothic" pitchFamily="34" charset="0"/>
+                <a:ea typeface="Yu Gothic" pitchFamily="34" charset="-122"/>
+                <a:cs typeface="Yu Gothic" pitchFamily="34" charset="-120"/>
+              </a:rPr>
+              <a:t>練習は、とても順調。</a:t>
+            </a:r>
+            <a:endParaRPr lang="en-US" sz="1900" dirty="0"/>
+          </a:p>
+          <a:p>
+            <a:pPr indent="0" marL="0">
+              <a:lnSpc>
+                <a:spcPts val="3000"/>
+              </a:lnSpc>
+              <a:buNone/>
+            </a:pPr>
+            <a:r>
+              <a:rPr lang="en-US" sz="1900" dirty="0">
+                <a:solidFill>
+                  <a:srgbClr val="3B3634"/>
+                </a:solidFill>
+                <a:latin typeface="Yu Gothic" pitchFamily="34" charset="0"/>
+                <a:ea typeface="Yu Gothic" pitchFamily="34" charset="-122"/>
+                <a:cs typeface="Yu Gothic" pitchFamily="34" charset="-120"/>
+              </a:rPr>
+              <a:t>ところが試合直前に体調不良。</a:t>
+            </a:r>
+            <a:endParaRPr lang="en-US" sz="1900" dirty="0"/>
+          </a:p>
+          <a:p>
+            <a:pPr indent="0" marL="0">
+              <a:lnSpc>
+                <a:spcPts val="3000"/>
+              </a:lnSpc>
+              <a:buNone/>
+            </a:pPr>
+            <a:endParaRPr lang="en-US" sz="1900" dirty="0"/>
+          </a:p>
+          <a:p>
+            <a:pPr indent="0" marL="0">
+              <a:lnSpc>
+                <a:spcPts val="3000"/>
+              </a:lnSpc>
+              <a:buNone/>
+            </a:pPr>
+            <a:r>
+              <a:rPr lang="en-US" sz="1900" dirty="0">
+                <a:solidFill>
+                  <a:srgbClr val="3B3634"/>
+                </a:solidFill>
+                <a:latin typeface="Yu Gothic" pitchFamily="34" charset="0"/>
+                <a:ea typeface="Yu Gothic" pitchFamily="34" charset="-122"/>
+                <a:cs typeface="Yu Gothic" pitchFamily="34" charset="-120"/>
+              </a:rPr>
+              <a:t>点滴を打ち、なんとか出場できたものの、</a:t>
+            </a:r>
+            <a:endParaRPr lang="en-US" sz="1900" dirty="0"/>
+          </a:p>
+          <a:p>
+            <a:pPr indent="0" marL="0">
+              <a:lnSpc>
+                <a:spcPts val="3000"/>
+              </a:lnSpc>
+              <a:buNone/>
+            </a:pPr>
+            <a:r>
+              <a:rPr lang="en-US" sz="1900" dirty="0">
+                <a:solidFill>
+                  <a:srgbClr val="3B3634"/>
+                </a:solidFill>
+                <a:latin typeface="Yu Gothic" pitchFamily="34" charset="0"/>
+                <a:ea typeface="Yu Gothic" pitchFamily="34" charset="-122"/>
+                <a:cs typeface="Yu Gothic" pitchFamily="34" charset="-120"/>
+              </a:rPr>
+              <a:t>予定していた重量から大幅に下げることに。</a:t>
+            </a:r>
+            <a:endParaRPr lang="en-US" sz="1900" dirty="0"/>
+          </a:p>
+        </p:txBody>
+      </p:sp>
+      <p:sp>
+        <p:nvSpPr>
+          <p:cNvPr id="6" name="Shape 4"/>
+          <p:cNvSpPr/>
+          <p:nvPr/>
+        </p:nvSpPr>
+        <p:spPr>
+          <a:xfrm>
+            <a:off x="457200" y="4069080"/>
+            <a:ext cx="7863840" cy="777240"/>
+          </a:xfrm>
+          <a:prstGeom prst="roundRect">
+            <a:avLst>
+              <a:gd name="adj" fmla="val 9412"/>
+            </a:avLst>
+          </a:prstGeom>
+          <a:solidFill>
+            <a:srgbClr val="540E19"/>
+          </a:solidFill>
+          <a:ln w="12700">
+            <a:solidFill>
+              <a:srgbClr val="540E19"/>
+            </a:solidFill>
+            <a:prstDash val="solid"/>
+          </a:ln>
+        </p:spPr>
+      </p:sp>
+      <p:sp>
+        <p:nvSpPr>
+          <p:cNvPr id="7" name="Text 5"/>
+          <p:cNvSpPr txBox="1"/>
+          <p:nvPr/>
+        </p:nvSpPr>
+        <p:spPr>
+          <a:xfrm>
+            <a:off x="822960" y="4069080"/>
+            <a:ext cx="7406640" cy="777240"/>
+          </a:xfrm>
+          <a:prstGeom prst="rect">
+            <a:avLst/>
+          </a:prstGeom>
+          <a:noFill/>
+          <a:ln/>
+        </p:spPr>
+        <p:txBody>
+          <a:bodyPr wrap="square" lIns="0" tIns="0" rIns="0" bIns="0" rtlCol="0" anchor="ctr"/>
+          <a:lstStyle/>
+          <a:p>
+            <a:pPr indent="0" marL="0">
+              <a:buNone/>
+            </a:pPr>
+            <a:r>
+              <a:rPr lang="en-US" sz="2100" b="1" dirty="0">
+                <a:solidFill>
+                  <a:srgbClr val="FFFFFF"/>
                 </a:solidFill>
                 <a:latin typeface="Yu Mincho" pitchFamily="34" charset="0"/>
                 <a:ea typeface="Yu Mincho" pitchFamily="34" charset="-122"/>
                 <a:cs typeface="Yu Mincho" pitchFamily="34" charset="-120"/>
               </a:rPr>
-              <a:t>日本グランプリ</a:t>
-            </a:r>
-            <a:endParaRPr lang="en-US" sz="3300" dirty="0"/>
-          </a:p>
-        </p:txBody>
-      </p:sp>
-      <p:sp>
-        <p:nvSpPr>
-          <p:cNvPr id="6" name="Text 3"/>
-          <p:cNvSpPr txBox="1"/>
-          <p:nvPr/>
-        </p:nvSpPr>
-        <p:spPr>
-          <a:xfrm>
-            <a:off x="457200" y="2240280"/>
-            <a:ext cx="4297680" cy="1828800"/>
-          </a:xfrm>
-          <a:prstGeom prst="rect">
-            <a:avLst/>
-          </a:prstGeom>
-          <a:noFill/>
-          <a:ln/>
-        </p:spPr>
-        <p:txBody>
-          <a:bodyPr wrap="square" lIns="0" tIns="0" rIns="0" bIns="0" rtlCol="0" anchor="ctr"/>
-          <a:lstStyle/>
-          <a:p>
-            <a:pPr indent="0" marL="0">
-              <a:lnSpc>
-                <a:spcPts val="2800"/>
-              </a:lnSpc>
-              <a:buNone/>
-            </a:pPr>
-            <a:r>
-              <a:rPr lang="en-US" sz="1700" dirty="0">
-                <a:solidFill>
-                  <a:srgbClr val="3B3634"/>
-                </a:solidFill>
-                <a:latin typeface="Yu Gothic" pitchFamily="34" charset="0"/>
-                <a:ea typeface="Yu Gothic" pitchFamily="34" charset="-122"/>
-                <a:cs typeface="Yu Gothic" pitchFamily="34" charset="-120"/>
-              </a:rPr>
-              <a:t>練習は、とても順調。</a:t>
-            </a:r>
-            <a:endParaRPr lang="en-US" sz="1700" dirty="0"/>
-          </a:p>
-          <a:p>
-            <a:pPr indent="0" marL="0">
-              <a:lnSpc>
-                <a:spcPts val="2800"/>
-              </a:lnSpc>
-              <a:buNone/>
-            </a:pPr>
-            <a:r>
-              <a:rPr lang="en-US" sz="1700" dirty="0">
-                <a:solidFill>
-                  <a:srgbClr val="3B3634"/>
-                </a:solidFill>
-                <a:latin typeface="Yu Gothic" pitchFamily="34" charset="0"/>
-                <a:ea typeface="Yu Gothic" pitchFamily="34" charset="-122"/>
-                <a:cs typeface="Yu Gothic" pitchFamily="34" charset="-120"/>
-              </a:rPr>
-              <a:t>ところが試合直前に体調不良。</a:t>
-            </a:r>
-            <a:endParaRPr lang="en-US" sz="1700" dirty="0"/>
-          </a:p>
-          <a:p>
-            <a:pPr indent="0" marL="0">
-              <a:lnSpc>
-                <a:spcPts val="2800"/>
-              </a:lnSpc>
-              <a:buNone/>
-            </a:pPr>
-            <a:endParaRPr lang="en-US" sz="1700" dirty="0"/>
-          </a:p>
-          <a:p>
-            <a:pPr indent="0" marL="0">
-              <a:lnSpc>
-                <a:spcPts val="2800"/>
-              </a:lnSpc>
-              <a:buNone/>
-            </a:pPr>
-            <a:r>
-              <a:rPr lang="en-US" sz="1700" dirty="0">
-                <a:solidFill>
-                  <a:srgbClr val="3B3634"/>
-                </a:solidFill>
-                <a:latin typeface="Yu Gothic" pitchFamily="34" charset="0"/>
-                <a:ea typeface="Yu Gothic" pitchFamily="34" charset="-122"/>
-                <a:cs typeface="Yu Gothic" pitchFamily="34" charset="-120"/>
-              </a:rPr>
-              <a:t>点滴を打ち、なんとか出場できたものの、</a:t>
-            </a:r>
-            <a:endParaRPr lang="en-US" sz="1700" dirty="0"/>
-          </a:p>
-          <a:p>
-            <a:pPr indent="0" marL="0">
-              <a:lnSpc>
-                <a:spcPts val="2800"/>
-              </a:lnSpc>
-              <a:buNone/>
-            </a:pPr>
-            <a:r>
-              <a:rPr lang="en-US" sz="1700" dirty="0">
-                <a:solidFill>
-                  <a:srgbClr val="3B3634"/>
-                </a:solidFill>
-                <a:latin typeface="Yu Gothic" pitchFamily="34" charset="0"/>
-                <a:ea typeface="Yu Gothic" pitchFamily="34" charset="-122"/>
-                <a:cs typeface="Yu Gothic" pitchFamily="34" charset="-120"/>
-              </a:rPr>
-              <a:t>予定していた重量から大幅に下げることに。</a:t>
-            </a:r>
-            <a:endParaRPr lang="en-US" sz="1700" dirty="0"/>
-          </a:p>
-        </p:txBody>
-      </p:sp>
-      <p:sp>
-        <p:nvSpPr>
-          <p:cNvPr id="7" name="Text 4"/>
-          <p:cNvSpPr txBox="1"/>
-          <p:nvPr/>
-        </p:nvSpPr>
-        <p:spPr>
-          <a:xfrm>
-            <a:off x="457200" y="4114800"/>
-            <a:ext cx="4297680" cy="457200"/>
-          </a:xfrm>
-          <a:prstGeom prst="rect">
-            <a:avLst/>
-          </a:prstGeom>
-          <a:noFill/>
-          <a:ln/>
-        </p:spPr>
-        <p:txBody>
-          <a:bodyPr wrap="square" lIns="0" tIns="0" rIns="0" bIns="0" rtlCol="0" anchor="ctr"/>
-          <a:lstStyle/>
-          <a:p>
-            <a:pPr indent="0" marL="0">
-              <a:buNone/>
-            </a:pPr>
-            <a:r>
-              <a:rPr lang="en-US" sz="1900" b="1" dirty="0">
-                <a:solidFill>
-                  <a:srgbClr val="7A1524"/>
-                </a:solidFill>
-                <a:latin typeface="Yu Gothic" pitchFamily="34" charset="0"/>
-                <a:ea typeface="Yu Gothic" pitchFamily="34" charset="-122"/>
-                <a:cs typeface="Yu Gothic" pitchFamily="34" charset="-120"/>
-              </a:rPr>
               <a:t>「しょうがない。今じゃなかった。」</a:t>
             </a:r>
-            <a:endParaRPr lang="en-US" sz="1900" dirty="0"/>
+            <a:endParaRPr lang="en-US" sz="2100" dirty="0"/>
           </a:p>
         </p:txBody>
       </p:sp>

--- a/deck/consultation-deck.pptx
+++ b/deck/consultation-deck.pptx
@@ -17162,7 +17162,7 @@
         </p:nvSpPr>
         <p:spPr>
           <a:xfrm>
-            <a:off x="457200" y="868680"/>
+            <a:off x="457200" y="822960"/>
             <a:ext cx="7863840" cy="1188720"/>
           </a:xfrm>
           <a:prstGeom prst="rect">
@@ -17204,8 +17204,8 @@
         </p:nvSpPr>
         <p:spPr>
           <a:xfrm>
-            <a:off x="457200" y="1920240"/>
-            <a:ext cx="7863840" cy="1920240"/>
+            <a:off x="457200" y="1691640"/>
+            <a:ext cx="7863840" cy="2377440"/>
           </a:xfrm>
           <a:prstGeom prst="rect">
             <a:avLst/>
@@ -17219,12 +17219,12 @@
           <a:p>
             <a:pPr indent="0" marL="0">
               <a:lnSpc>
-                <a:spcPts val="3000"/>
+                <a:spcPts val="2800"/>
               </a:lnSpc>
               <a:buNone/>
             </a:pPr>
             <a:r>
-              <a:rPr lang="en-US" sz="1900" dirty="0">
+              <a:rPr lang="en-US" sz="1800" dirty="0">
                 <a:solidFill>
                   <a:srgbClr val="3B3634"/>
                 </a:solidFill>
@@ -17232,19 +17232,28 @@
                 <a:ea typeface="Yu Gothic" pitchFamily="34" charset="-122"/>
                 <a:cs typeface="Yu Gothic" pitchFamily="34" charset="-120"/>
               </a:rPr>
-              <a:t>練習は、とても順調。</a:t>
-            </a:r>
-            <a:endParaRPr lang="en-US" sz="1900" dirty="0"/>
+              <a:t>ここで、スクワットの日本記録を取るつもりでした。</a:t>
+            </a:r>
+            <a:endParaRPr lang="en-US" sz="1800" dirty="0"/>
           </a:p>
           <a:p>
             <a:pPr indent="0" marL="0">
               <a:lnSpc>
-                <a:spcPts val="3000"/>
+                <a:spcPts val="2800"/>
               </a:lnSpc>
               <a:buNone/>
             </a:pPr>
-            <a:r>
-              <a:rPr lang="en-US" sz="1900" dirty="0">
+            <a:endParaRPr lang="en-US" sz="1800" dirty="0"/>
+          </a:p>
+          <a:p>
+            <a:pPr indent="0" marL="0">
+              <a:lnSpc>
+                <a:spcPts val="2800"/>
+              </a:lnSpc>
+              <a:buNone/>
+            </a:pPr>
+            <a:r>
+              <a:rPr lang="en-US" sz="1800" dirty="0">
                 <a:solidFill>
                   <a:srgbClr val="3B3634"/>
                 </a:solidFill>
@@ -17252,28 +17261,48 @@
                 <a:ea typeface="Yu Gothic" pitchFamily="34" charset="-122"/>
                 <a:cs typeface="Yu Gothic" pitchFamily="34" charset="-120"/>
               </a:rPr>
-              <a:t>ところが試合直前に体調不良。</a:t>
-            </a:r>
-            <a:endParaRPr lang="en-US" sz="1900" dirty="0"/>
+              <a:t>練習はとても順調。ところが試合直前に体調不良。</a:t>
+            </a:r>
+            <a:endParaRPr lang="en-US" sz="1800" dirty="0"/>
           </a:p>
           <a:p>
             <a:pPr indent="0" marL="0">
               <a:lnSpc>
-                <a:spcPts val="3000"/>
+                <a:spcPts val="2800"/>
               </a:lnSpc>
               <a:buNone/>
             </a:pPr>
-            <a:endParaRPr lang="en-US" sz="1900" dirty="0"/>
+            <a:r>
+              <a:rPr lang="en-US" sz="1800" dirty="0">
+                <a:solidFill>
+                  <a:srgbClr val="3B3634"/>
+                </a:solidFill>
+                <a:latin typeface="Yu Gothic" pitchFamily="34" charset="0"/>
+                <a:ea typeface="Yu Gothic" pitchFamily="34" charset="-122"/>
+                <a:cs typeface="Yu Gothic" pitchFamily="34" charset="-120"/>
+              </a:rPr>
+              <a:t>点滴を打ち、なんとか出場。でも予定していた重量から大幅に下げることに。</a:t>
+            </a:r>
+            <a:endParaRPr lang="en-US" sz="1800" dirty="0"/>
           </a:p>
           <a:p>
             <a:pPr indent="0" marL="0">
               <a:lnSpc>
-                <a:spcPts val="3000"/>
+                <a:spcPts val="2800"/>
               </a:lnSpc>
               <a:buNone/>
             </a:pPr>
-            <a:r>
-              <a:rPr lang="en-US" sz="1900" dirty="0">
+            <a:endParaRPr lang="en-US" sz="1800" dirty="0"/>
+          </a:p>
+          <a:p>
+            <a:pPr indent="0" marL="0">
+              <a:lnSpc>
+                <a:spcPts val="2800"/>
+              </a:lnSpc>
+              <a:buNone/>
+            </a:pPr>
+            <a:r>
+              <a:rPr lang="en-US" sz="1800" dirty="0">
                 <a:solidFill>
                   <a:srgbClr val="3B3634"/>
                 </a:solidFill>
@@ -17281,29 +17310,9 @@
                 <a:ea typeface="Yu Gothic" pitchFamily="34" charset="-122"/>
                 <a:cs typeface="Yu Gothic" pitchFamily="34" charset="-120"/>
               </a:rPr>
-              <a:t>点滴を打ち、なんとか出場できたものの、</a:t>
-            </a:r>
-            <a:endParaRPr lang="en-US" sz="1900" dirty="0"/>
-          </a:p>
-          <a:p>
-            <a:pPr indent="0" marL="0">
-              <a:lnSpc>
-                <a:spcPts val="3000"/>
-              </a:lnSpc>
-              <a:buNone/>
-            </a:pPr>
-            <a:r>
-              <a:rPr lang="en-US" sz="1900" dirty="0">
-                <a:solidFill>
-                  <a:srgbClr val="3B3634"/>
-                </a:solidFill>
-                <a:latin typeface="Yu Gothic" pitchFamily="34" charset="0"/>
-                <a:ea typeface="Yu Gothic" pitchFamily="34" charset="-122"/>
-                <a:cs typeface="Yu Gothic" pitchFamily="34" charset="-120"/>
-              </a:rPr>
-              <a:t>予定していた重量から大幅に下げることに。</a:t>
-            </a:r>
-            <a:endParaRPr lang="en-US" sz="1900" dirty="0"/>
+              <a:t>日本一にはなれました。でも、狙っていた記録は取れませんでした。</a:t>
+            </a:r>
+            <a:endParaRPr lang="en-US" sz="1800" dirty="0"/>
           </a:p>
         </p:txBody>
       </p:sp>
@@ -17315,12 +17324,12 @@
         </p:nvSpPr>
         <p:spPr>
           <a:xfrm>
-            <a:off x="457200" y="4069080"/>
-            <a:ext cx="7863840" cy="777240"/>
+            <a:off x="457200" y="4160520"/>
+            <a:ext cx="7863840" cy="731520"/>
           </a:xfrm>
           <a:prstGeom prst="roundRect">
             <a:avLst>
-              <a:gd name="adj" fmla="val 9412"/>
+              <a:gd name="adj" fmla="val 10000"/>
             </a:avLst>
           </a:prstGeom>
           <a:solidFill>
@@ -17342,8 +17351,8 @@
         </p:nvSpPr>
         <p:spPr>
           <a:xfrm>
-            <a:off x="822960" y="4069080"/>
-            <a:ext cx="7406640" cy="777240"/>
+            <a:off x="822960" y="4160520"/>
+            <a:ext cx="7406640" cy="731520"/>
           </a:xfrm>
           <a:prstGeom prst="rect">
             <a:avLst/>
@@ -17514,7 +17523,7 @@
         </p:nvSpPr>
         <p:spPr>
           <a:xfrm>
-            <a:off x="457200" y="777240"/>
+            <a:off x="457200" y="731520"/>
             <a:ext cx="4297680" cy="1188720"/>
           </a:xfrm>
           <a:prstGeom prst="rect">
@@ -17596,8 +17605,8 @@
         </p:nvSpPr>
         <p:spPr>
           <a:xfrm>
-            <a:off x="457200" y="2560320"/>
-            <a:ext cx="4297680" cy="1371600"/>
+            <a:off x="457200" y="2468880"/>
+            <a:ext cx="4297680" cy="1188720"/>
           </a:xfrm>
           <a:prstGeom prst="rect">
             <a:avLst/>
@@ -17655,8 +17664,41 @@
               </a:lnSpc>
               <a:buNone/>
             </a:pPr>
+            <a:r>
+              <a:rPr lang="en-US" sz="1700" dirty="0">
+                <a:solidFill>
+                  <a:srgbClr val="3B3634"/>
+                </a:solidFill>
+                <a:latin typeface="Yu Gothic" pitchFamily="34" charset="0"/>
+                <a:ea typeface="Yu Gothic" pitchFamily="34" charset="-122"/>
+                <a:cs typeface="Yu Gothic" pitchFamily="34" charset="-120"/>
+              </a:rPr>
+              <a:t>また自分にできることを続ける。</a:t>
+            </a:r>
             <a:endParaRPr lang="en-US" sz="1700" dirty="0"/>
           </a:p>
+        </p:txBody>
+      </p:sp>
+      <p:sp>
+        <p:nvSpPr>
+          <p:cNvPr id="7" name="Text 4"/>
+          <p:cNvSpPr txBox="1"/>
+          <p:nvPr/>
+        </p:nvSpPr>
+        <p:spPr>
+          <a:xfrm>
+            <a:off x="457200" y="3794760"/>
+            <a:ext cx="4297680" cy="914400"/>
+          </a:xfrm>
+          <a:prstGeom prst="rect">
+            <a:avLst/>
+          </a:prstGeom>
+          <a:noFill/>
+          <a:ln/>
+        </p:spPr>
+        <p:txBody>
+          <a:bodyPr wrap="square" lIns="0" tIns="0" rIns="0" bIns="0" rtlCol="0" anchor="ctr"/>
+          <a:lstStyle/>
           <a:p>
             <a:pPr indent="0" marL="0">
               <a:lnSpc>
@@ -17665,46 +17707,7 @@
               <a:buNone/>
             </a:pPr>
             <a:r>
-              <a:rPr lang="en-US" sz="1700" dirty="0">
-                <a:solidFill>
-                  <a:srgbClr val="3B3634"/>
-                </a:solidFill>
-                <a:latin typeface="Yu Gothic" pitchFamily="34" charset="0"/>
-                <a:ea typeface="Yu Gothic" pitchFamily="34" charset="-122"/>
-                <a:cs typeface="Yu Gothic" pitchFamily="34" charset="-120"/>
-              </a:rPr>
-              <a:t>また自分にできることを続ける。</a:t>
-            </a:r>
-            <a:endParaRPr lang="en-US" sz="1700" dirty="0"/>
-          </a:p>
-        </p:txBody>
-      </p:sp>
-      <p:sp>
-        <p:nvSpPr>
-          <p:cNvPr id="7" name="Text 4"/>
-          <p:cNvSpPr txBox="1"/>
-          <p:nvPr/>
-        </p:nvSpPr>
-        <p:spPr>
-          <a:xfrm>
-            <a:off x="457200" y="4023360"/>
-            <a:ext cx="4297680" cy="457200"/>
-          </a:xfrm>
-          <a:prstGeom prst="rect">
-            <a:avLst/>
-          </a:prstGeom>
-          <a:noFill/>
-          <a:ln/>
-        </p:spPr>
-        <p:txBody>
-          <a:bodyPr wrap="square" lIns="0" tIns="0" rIns="0" bIns="0" rtlCol="0" anchor="ctr"/>
-          <a:lstStyle/>
-          <a:p>
-            <a:pPr indent="0" marL="0">
-              <a:buNone/>
-            </a:pPr>
-            <a:r>
-              <a:rPr lang="en-US" sz="2000" b="1" dirty="0">
+              <a:rPr lang="en-US" sz="1800" b="1" dirty="0">
                 <a:solidFill>
                   <a:srgbClr val="7A1524"/>
                 </a:solidFill>
@@ -17712,9 +17715,95 @@
                 <a:ea typeface="Yu Gothic" pitchFamily="34" charset="-122"/>
                 <a:cs typeface="Yu Gothic" pitchFamily="34" charset="-120"/>
               </a:rPr>
-              <a:t>そして同じ2023年度、日本一に。</a:t>
-            </a:r>
-            <a:endParaRPr lang="en-US" sz="2000" dirty="0"/>
+              <a:t>同じ2023年度のJCPでも日本一に。</a:t>
+            </a:r>
+            <a:endParaRPr lang="en-US" sz="1800" dirty="0"/>
+          </a:p>
+          <a:p>
+            <a:pPr indent="0" marL="0">
+              <a:lnSpc>
+                <a:spcPts val="2800"/>
+              </a:lnSpc>
+              <a:buNone/>
+            </a:pPr>
+            <a:r>
+              <a:rPr lang="en-US" sz="1800" b="1" dirty="0">
+                <a:solidFill>
+                  <a:srgbClr val="7A1524"/>
+                </a:solidFill>
+                <a:latin typeface="Yu Gothic" pitchFamily="34" charset="0"/>
+                <a:ea typeface="Yu Gothic" pitchFamily="34" charset="-122"/>
+                <a:cs typeface="Yu Gothic" pitchFamily="34" charset="-120"/>
+              </a:rPr>
+              <a:t>そして翌年、狙っていた日本記録も。</a:t>
+            </a:r>
+            <a:endParaRPr lang="en-US" sz="1800" dirty="0"/>
+          </a:p>
+        </p:txBody>
+      </p:sp>
+      <p:sp>
+        <p:nvSpPr>
+          <p:cNvPr id="8" name="Shape 5"/>
+          <p:cNvSpPr/>
+          <p:nvPr/>
+        </p:nvSpPr>
+        <p:spPr>
+          <a:xfrm>
+            <a:off x="5257800" y="4434840"/>
+            <a:ext cx="1920240" cy="384048"/>
+          </a:xfrm>
+          <a:prstGeom prst="roundRect">
+            <a:avLst>
+              <a:gd name="adj" fmla="val 14286"/>
+            </a:avLst>
+          </a:prstGeom>
+          <a:solidFill>
+            <a:srgbClr val="540E19"/>
+          </a:solidFill>
+          <a:ln w="12700">
+            <a:solidFill>
+              <a:srgbClr val="540E19"/>
+            </a:solidFill>
+            <a:prstDash val="solid"/>
+          </a:ln>
+        </p:spPr>
+      </p:sp>
+      <p:sp>
+        <p:nvSpPr>
+          <p:cNvPr id="9" name="Text 6"/>
+          <p:cNvSpPr txBox="1"/>
+          <p:nvPr/>
+        </p:nvSpPr>
+        <p:spPr>
+          <a:xfrm>
+            <a:off x="5257800" y="4434840"/>
+            <a:ext cx="1920240" cy="384048"/>
+          </a:xfrm>
+          <a:prstGeom prst="rect">
+            <a:avLst/>
+          </a:prstGeom>
+          <a:noFill/>
+          <a:ln/>
+        </p:spPr>
+        <p:txBody>
+          <a:bodyPr wrap="square" lIns="0" tIns="0" rIns="0" bIns="0" rtlCol="0" anchor="ctr"/>
+          <a:lstStyle/>
+          <a:p>
+            <a:pPr algn="ctr" indent="0" marL="0">
+              <a:buNone/>
+            </a:pPr>
+            <a:r>
+              <a:rPr lang="en-US" sz="1200" b="1" dirty="0">
+                <a:solidFill>
+                  <a:srgbClr val="FFFFFF"/>
+                </a:solidFill>
+                <a:latin typeface="Yu Gothic" pitchFamily="34" charset="0"/>
+                <a:ea typeface="Yu Gothic" pitchFamily="34" charset="-122"/>
+                <a:cs typeface="Yu Gothic" pitchFamily="34" charset="-120"/>
+              </a:rPr>
+              <a:t>2023年度 JCP</a:t>
+            </a:r>
+            <a:endParaRPr lang="en-US" sz="1200" dirty="0"/>
           </a:p>
         </p:txBody>
       </p:sp>
@@ -17797,7 +17886,7 @@
         </p:nvSpPr>
         <p:spPr>
           <a:xfrm>
-            <a:off x="457200" y="4576572"/>
+            <a:off x="8138160" y="4576572"/>
             <a:ext cx="548640" cy="274320"/>
           </a:xfrm>
           <a:prstGeom prst="rect">
@@ -17810,7 +17899,7 @@
           <a:bodyPr wrap="square" lIns="0" tIns="0" rIns="0" bIns="0" rtlCol="0" anchor="ctr"/>
           <a:lstStyle/>
           <a:p>
-            <a:pPr algn="l" indent="0" marL="0">
+            <a:pPr algn="r" indent="0" marL="0">
               <a:buNone/>
             </a:pPr>
             <a:r>
@@ -17828,39 +17917,16 @@
           </a:p>
         </p:txBody>
       </p:sp>
-      <p:pic>
-        <p:nvPicPr>
-          <p:cNvPr id="4" name="Image 0" descr="../note/images/03-deadlift.jpg">    </p:cNvPr>
-          <p:cNvPicPr>
-            <a:picLocks noChangeAspect="1"/>
-          </p:cNvPicPr>
-          <p:nvPr/>
-        </p:nvPicPr>
-        <p:blipFill>
-          <a:blip r:embed="rId1"/>
-          <a:srcRect l="0" r="0" t="0" b="0"/>
-          <a:stretch/>
-        </p:blipFill>
-        <p:spPr>
-          <a:xfrm>
-            <a:off x="5029200" y="0"/>
-            <a:ext cx="4114800" cy="5143500"/>
-          </a:xfrm>
-          <a:prstGeom prst="rect">
-            <a:avLst/>
-          </a:prstGeom>
-        </p:spPr>
-      </p:pic>
-      <p:sp>
-        <p:nvSpPr>
-          <p:cNvPr id="5" name="Text 2"/>
-          <p:cNvSpPr txBox="1"/>
-          <p:nvPr/>
-        </p:nvSpPr>
-        <p:spPr>
-          <a:xfrm>
-            <a:off x="457200" y="822960"/>
-            <a:ext cx="4297680" cy="1188720"/>
+      <p:sp>
+        <p:nvSpPr>
+          <p:cNvPr id="4" name="Text 2"/>
+          <p:cNvSpPr txBox="1"/>
+          <p:nvPr/>
+        </p:nvSpPr>
+        <p:spPr>
+          <a:xfrm>
+            <a:off x="457200" y="868680"/>
+            <a:ext cx="7863840" cy="1188720"/>
           </a:xfrm>
           <a:prstGeom prst="rect">
             <a:avLst/>
@@ -17874,12 +17940,12 @@
           <a:p>
             <a:pPr algn="l" indent="0" marL="0">
               <a:lnSpc>
-                <a:spcPts val="4640"/>
+                <a:spcPts val="4930"/>
               </a:lnSpc>
               <a:buNone/>
             </a:pPr>
             <a:r>
-              <a:rPr lang="en-US" sz="3200" b="1" dirty="0">
+              <a:rPr lang="en-US" sz="3400" b="1" dirty="0">
                 <a:solidFill>
                   <a:srgbClr val="141416"/>
                 </a:solidFill>
@@ -17887,61 +17953,70 @@
                 <a:ea typeface="Yu Mincho" pitchFamily="34" charset="-122"/>
                 <a:cs typeface="Yu Mincho" pitchFamily="34" charset="-120"/>
               </a:rPr>
-              <a:t>今は、世界大会さえ</a:t>
-            </a:r>
-            <a:endParaRPr lang="en-US" sz="3200" dirty="0"/>
-          </a:p>
-          <a:p>
-            <a:pPr algn="l" indent="0" marL="0">
+              <a:t>今は、世界大会さえ「楽しい」</a:t>
+            </a:r>
+            <a:endParaRPr lang="en-US" sz="3400" dirty="0"/>
+          </a:p>
+        </p:txBody>
+      </p:sp>
+      <p:sp>
+        <p:nvSpPr>
+          <p:cNvPr id="5" name="Text 3"/>
+          <p:cNvSpPr txBox="1"/>
+          <p:nvPr/>
+        </p:nvSpPr>
+        <p:spPr>
+          <a:xfrm>
+            <a:off x="457200" y="1783080"/>
+            <a:ext cx="7863840" cy="2926080"/>
+          </a:xfrm>
+          <a:prstGeom prst="rect">
+            <a:avLst/>
+          </a:prstGeom>
+          <a:noFill/>
+          <a:ln/>
+        </p:spPr>
+        <p:txBody>
+          <a:bodyPr wrap="square" lIns="0" tIns="0" rIns="0" bIns="0" rtlCol="0" anchor="ctr"/>
+          <a:lstStyle/>
+          <a:p>
+            <a:pPr indent="0" marL="0">
               <a:lnSpc>
-                <a:spcPts val="4640"/>
+                <a:spcPts val="2800"/>
               </a:lnSpc>
               <a:buNone/>
             </a:pPr>
             <a:r>
-              <a:rPr lang="en-US" sz="3200" b="1" dirty="0">
-                <a:solidFill>
-                  <a:srgbClr val="141416"/>
-                </a:solidFill>
-                <a:latin typeface="Yu Mincho" pitchFamily="34" charset="0"/>
-                <a:ea typeface="Yu Mincho" pitchFamily="34" charset="-122"/>
-                <a:cs typeface="Yu Mincho" pitchFamily="34" charset="-120"/>
-              </a:rPr>
-              <a:t>「楽しい」</a:t>
-            </a:r>
-            <a:endParaRPr lang="en-US" sz="3200" dirty="0"/>
-          </a:p>
-        </p:txBody>
-      </p:sp>
-      <p:sp>
-        <p:nvSpPr>
-          <p:cNvPr id="6" name="Text 3"/>
-          <p:cNvSpPr txBox="1"/>
-          <p:nvPr/>
-        </p:nvSpPr>
-        <p:spPr>
-          <a:xfrm>
-            <a:off x="457200" y="2148840"/>
-            <a:ext cx="4297680" cy="2468880"/>
-          </a:xfrm>
-          <a:prstGeom prst="rect">
-            <a:avLst/>
-          </a:prstGeom>
-          <a:noFill/>
-          <a:ln/>
-        </p:spPr>
-        <p:txBody>
-          <a:bodyPr wrap="square" lIns="0" tIns="0" rIns="0" bIns="0" rtlCol="0" anchor="ctr"/>
-          <a:lstStyle/>
+              <a:rPr lang="en-US" sz="1800" dirty="0">
+                <a:solidFill>
+                  <a:srgbClr val="3B3634"/>
+                </a:solidFill>
+                <a:latin typeface="Yu Gothic" pitchFamily="34" charset="0"/>
+                <a:ea typeface="Yu Gothic" pitchFamily="34" charset="-122"/>
+                <a:cs typeface="Yu Gothic" pitchFamily="34" charset="-120"/>
+              </a:rPr>
+              <a:t>2024年、世界大会に出場しました。</a:t>
+            </a:r>
+            <a:endParaRPr lang="en-US" sz="1800" dirty="0"/>
+          </a:p>
           <a:p>
             <a:pPr indent="0" marL="0">
               <a:lnSpc>
-                <a:spcPts val="2600"/>
+                <a:spcPts val="2800"/>
               </a:lnSpc>
               <a:buNone/>
             </a:pPr>
-            <a:r>
-              <a:rPr lang="en-US" sz="1600" dirty="0">
+            <a:endParaRPr lang="en-US" sz="1800" dirty="0"/>
+          </a:p>
+          <a:p>
+            <a:pPr indent="0" marL="0">
+              <a:lnSpc>
+                <a:spcPts val="2800"/>
+              </a:lnSpc>
+              <a:buNone/>
+            </a:pPr>
+            <a:r>
+              <a:rPr lang="en-US" sz="1800" dirty="0">
                 <a:solidFill>
                   <a:srgbClr val="3B3634"/>
                 </a:solidFill>
@@ -17951,17 +18026,17 @@
               </a:rPr>
               <a:t>「私は今、この舞台に立っているんだ」</a:t>
             </a:r>
-            <a:endParaRPr lang="en-US" sz="1600" dirty="0"/>
+            <a:endParaRPr lang="en-US" sz="1800" dirty="0"/>
           </a:p>
           <a:p>
             <a:pPr indent="0" marL="0">
               <a:lnSpc>
-                <a:spcPts val="2600"/>
+                <a:spcPts val="2800"/>
               </a:lnSpc>
               <a:buNone/>
             </a:pPr>
             <a:r>
-              <a:rPr lang="en-US" sz="1600" dirty="0">
+              <a:rPr lang="en-US" sz="1800" dirty="0">
                 <a:solidFill>
                   <a:srgbClr val="3B3634"/>
                 </a:solidFill>
@@ -17971,26 +18046,26 @@
               </a:rPr>
               <a:t>と思うと、緊張以上にワクワクしていました。</a:t>
             </a:r>
-            <a:endParaRPr lang="en-US" sz="1600" dirty="0"/>
+            <a:endParaRPr lang="en-US" sz="1800" dirty="0"/>
           </a:p>
           <a:p>
             <a:pPr indent="0" marL="0">
               <a:lnSpc>
-                <a:spcPts val="2600"/>
+                <a:spcPts val="2800"/>
               </a:lnSpc>
               <a:buNone/>
             </a:pPr>
-            <a:endParaRPr lang="en-US" sz="1600" dirty="0"/>
+            <a:endParaRPr lang="en-US" sz="1800" dirty="0"/>
           </a:p>
           <a:p>
             <a:pPr indent="0" marL="0">
               <a:lnSpc>
-                <a:spcPts val="2600"/>
+                <a:spcPts val="2800"/>
               </a:lnSpc>
               <a:buNone/>
             </a:pPr>
             <a:r>
-              <a:rPr lang="en-US" sz="1600" dirty="0">
+              <a:rPr lang="en-US" sz="1800" dirty="0">
                 <a:solidFill>
                   <a:srgbClr val="3B3634"/>
                 </a:solidFill>
@@ -18000,17 +18075,17 @@
               </a:rPr>
               <a:t>不安がゼロになったからではありません。</a:t>
             </a:r>
-            <a:endParaRPr lang="en-US" sz="1600" dirty="0"/>
+            <a:endParaRPr lang="en-US" sz="1800" dirty="0"/>
           </a:p>
           <a:p>
             <a:pPr indent="0" marL="0">
               <a:lnSpc>
-                <a:spcPts val="2600"/>
+                <a:spcPts val="2800"/>
               </a:lnSpc>
               <a:buNone/>
             </a:pPr>
             <a:r>
-              <a:rPr lang="en-US" sz="1600" dirty="0">
+              <a:rPr lang="en-US" sz="1800" dirty="0">
                 <a:solidFill>
                   <a:srgbClr val="3B3634"/>
                 </a:solidFill>
@@ -18020,17 +18095,17 @@
               </a:rPr>
               <a:t>その時、自分に何ができるのかが</a:t>
             </a:r>
-            <a:endParaRPr lang="en-US" sz="1600" dirty="0"/>
+            <a:endParaRPr lang="en-US" sz="1800" dirty="0"/>
           </a:p>
           <a:p>
             <a:pPr indent="0" marL="0">
               <a:lnSpc>
-                <a:spcPts val="2600"/>
+                <a:spcPts val="2800"/>
               </a:lnSpc>
               <a:buNone/>
             </a:pPr>
             <a:r>
-              <a:rPr lang="en-US" sz="1600" dirty="0">
+              <a:rPr lang="en-US" sz="1800" dirty="0">
                 <a:solidFill>
                   <a:srgbClr val="3B3634"/>
                 </a:solidFill>
@@ -18040,7 +18115,7 @@
               </a:rPr>
               <a:t>わかるようになったからです。</a:t>
             </a:r>
-            <a:endParaRPr lang="en-US" sz="1600" dirty="0"/>
+            <a:endParaRPr lang="en-US" sz="1800" dirty="0"/>
           </a:p>
         </p:txBody>
       </p:sp>

--- a/deck/consultation-deck.pptx
+++ b/deck/consultation-deck.pptx
@@ -42,9 +42,11 @@
     <p:sldId id="290" r:id="rId36"/>
     <p:sldId id="291" r:id="rId37"/>
     <p:sldId id="292" r:id="rId38"/>
+    <p:sldId id="293" r:id="rId39"/>
+    <p:sldId id="294" r:id="rId40"/>
   </p:sldIdLst>
   <p:notesMasterIdLst>
-    <p:notesMasterId r:id="rId39"/>
+    <p:notesMasterId r:id="rId41"/>
   </p:notesMasterIdLst>
   <p:sldSz cx="9144000" cy="5143500"/>
   <p:notesSz cx="5143500" cy="9144000"/>
@@ -3202,6 +3204,182 @@
             <a:fld id="{F7021451-1387-4CA6-816F-3879F97B5CBC}" type="slidenum">
               <a:rPr lang="en-US"/>
               <a:t>37</a:t>
+            </a:fld>
+            <a:endParaRPr lang="en-US"/>
+          </a:p>
+        </p:txBody>
+      </p:sp>
+    </p:spTree>
+    <p:extLst>
+      <p:ext uri="{BB962C8B-B14F-4D97-AF65-F5344CB8AC3E}">
+        <p14:creationId xmlns:p14="http://schemas.microsoft.com/office/powerpoint/2010/main" val="1024086991"/>
+      </p:ext>
+    </p:extLst>
+  </p:cSld>
+  <p:clrMapOvr>
+    <a:masterClrMapping/>
+  </p:clrMapOvr>
+</p:notes>
+</file>
+
+<file path=ppt/notesSlides/notesSlide38.xml><?xml version="1.0" encoding="utf-8"?>
+<p:notes xmlns:a="http://schemas.openxmlformats.org/drawingml/2006/main" xmlns:r="http://schemas.openxmlformats.org/officeDocument/2006/relationships" xmlns:p="http://schemas.openxmlformats.org/presentationml/2006/main">
+  <p:cSld>
+    <p:spTree>
+      <p:nvGrpSpPr>
+        <p:cNvPr id="1" name=""/>
+        <p:cNvGrpSpPr/>
+        <p:nvPr/>
+      </p:nvGrpSpPr>
+      <p:grpSpPr>
+        <a:xfrm>
+          <a:off x="0" y="0"/>
+          <a:ext cx="0" cy="0"/>
+          <a:chOff x="0" y="0"/>
+          <a:chExt cx="0" cy="0"/>
+        </a:xfrm>
+      </p:grpSpPr>
+      <p:sp>
+        <p:nvSpPr>
+          <p:cNvPr id="2" name="Slide Image Placeholder 1"/>
+          <p:cNvSpPr>
+            <a:spLocks noGrp="1" noRot="1" noChangeAspect="1"/>
+          </p:cNvSpPr>
+          <p:nvPr>
+            <p:ph type="sldImg"/>
+          </p:nvPr>
+        </p:nvSpPr>
+        <p:spPr/>
+      </p:sp>
+      <p:sp>
+        <p:nvSpPr>
+          <p:cNvPr id="3" name="Notes Placeholder 2"/>
+          <p:cNvSpPr>
+            <a:spLocks noGrp="1"/>
+          </p:cNvSpPr>
+          <p:nvPr>
+            <p:ph type="body" idx="1"/>
+          </p:nvPr>
+        </p:nvSpPr>
+        <p:spPr/>
+        <p:txBody>
+          <a:bodyPr/>
+          <a:lstStyle/>
+          <a:p>
+            <a:r>
+              <a:rPr lang="en-US" dirty="0"/>
+              <a:t/>
+            </a:r>
+            <a:endParaRPr lang="en-US" dirty="0"/>
+          </a:p>
+        </p:txBody>
+      </p:sp>
+      <p:sp>
+        <p:nvSpPr>
+          <p:cNvPr id="4" name="Slide Number Placeholder 3"/>
+          <p:cNvSpPr>
+            <a:spLocks noGrp="1"/>
+          </p:cNvSpPr>
+          <p:nvPr>
+            <p:ph type="sldNum" sz="quarter" idx="10"/>
+          </p:nvPr>
+        </p:nvSpPr>
+        <p:spPr/>
+        <p:txBody>
+          <a:bodyPr/>
+          <a:lstStyle/>
+          <a:p>
+            <a:fld id="{F7021451-1387-4CA6-816F-3879F97B5CBC}" type="slidenum">
+              <a:rPr lang="en-US"/>
+              <a:t>38</a:t>
+            </a:fld>
+            <a:endParaRPr lang="en-US"/>
+          </a:p>
+        </p:txBody>
+      </p:sp>
+    </p:spTree>
+    <p:extLst>
+      <p:ext uri="{BB962C8B-B14F-4D97-AF65-F5344CB8AC3E}">
+        <p14:creationId xmlns:p14="http://schemas.microsoft.com/office/powerpoint/2010/main" val="1024086991"/>
+      </p:ext>
+    </p:extLst>
+  </p:cSld>
+  <p:clrMapOvr>
+    <a:masterClrMapping/>
+  </p:clrMapOvr>
+</p:notes>
+</file>
+
+<file path=ppt/notesSlides/notesSlide39.xml><?xml version="1.0" encoding="utf-8"?>
+<p:notes xmlns:a="http://schemas.openxmlformats.org/drawingml/2006/main" xmlns:r="http://schemas.openxmlformats.org/officeDocument/2006/relationships" xmlns:p="http://schemas.openxmlformats.org/presentationml/2006/main">
+  <p:cSld>
+    <p:spTree>
+      <p:nvGrpSpPr>
+        <p:cNvPr id="1" name=""/>
+        <p:cNvGrpSpPr/>
+        <p:nvPr/>
+      </p:nvGrpSpPr>
+      <p:grpSpPr>
+        <a:xfrm>
+          <a:off x="0" y="0"/>
+          <a:ext cx="0" cy="0"/>
+          <a:chOff x="0" y="0"/>
+          <a:chExt cx="0" cy="0"/>
+        </a:xfrm>
+      </p:grpSpPr>
+      <p:sp>
+        <p:nvSpPr>
+          <p:cNvPr id="2" name="Slide Image Placeholder 1"/>
+          <p:cNvSpPr>
+            <a:spLocks noGrp="1" noRot="1" noChangeAspect="1"/>
+          </p:cNvSpPr>
+          <p:nvPr>
+            <p:ph type="sldImg"/>
+          </p:nvPr>
+        </p:nvSpPr>
+        <p:spPr/>
+      </p:sp>
+      <p:sp>
+        <p:nvSpPr>
+          <p:cNvPr id="3" name="Notes Placeholder 2"/>
+          <p:cNvSpPr>
+            <a:spLocks noGrp="1"/>
+          </p:cNvSpPr>
+          <p:nvPr>
+            <p:ph type="body" idx="1"/>
+          </p:nvPr>
+        </p:nvSpPr>
+        <p:spPr/>
+        <p:txBody>
+          <a:bodyPr/>
+          <a:lstStyle/>
+          <a:p>
+            <a:r>
+              <a:rPr lang="en-US" dirty="0"/>
+              <a:t/>
+            </a:r>
+            <a:endParaRPr lang="en-US" dirty="0"/>
+          </a:p>
+        </p:txBody>
+      </p:sp>
+      <p:sp>
+        <p:nvSpPr>
+          <p:cNvPr id="4" name="Slide Number Placeholder 3"/>
+          <p:cNvSpPr>
+            <a:spLocks noGrp="1"/>
+          </p:cNvSpPr>
+          <p:nvPr>
+            <p:ph type="sldNum" sz="quarter" idx="10"/>
+          </p:nvPr>
+        </p:nvSpPr>
+        <p:spPr/>
+        <p:txBody>
+          <a:bodyPr/>
+          <a:lstStyle/>
+          <a:p>
+            <a:fld id="{F7021451-1387-4CA6-816F-3879F97B5CBC}" type="slidenum">
+              <a:rPr lang="en-US"/>
+              <a:t>39</a:t>
             </a:fld>
             <a:endParaRPr lang="en-US"/>
           </a:p>
@@ -14045,6 +14223,446 @@
     <p:bg>
       <p:bgPr>
         <a:solidFill>
+          <a:srgbClr val="FFFFFF"/>
+        </a:solidFill>
+      </p:bgPr>
+    </p:bg>
+    <p:spTree>
+      <p:nvGrpSpPr>
+        <p:cNvPr id="1" name=""/>
+        <p:cNvGrpSpPr/>
+        <p:nvPr/>
+      </p:nvGrpSpPr>
+      <p:grpSpPr>
+        <a:xfrm>
+          <a:off x="0" y="0"/>
+          <a:ext cx="0" cy="0"/>
+          <a:chOff x="0" y="0"/>
+          <a:chExt cx="0" cy="0"/>
+        </a:xfrm>
+      </p:grpSpPr>
+      <p:sp>
+        <p:nvSpPr>
+          <p:cNvPr id="2" name="Text 0"/>
+          <p:cNvSpPr txBox="1"/>
+          <p:nvPr/>
+        </p:nvSpPr>
+        <p:spPr>
+          <a:xfrm>
+            <a:off x="457200" y="237744"/>
+            <a:ext cx="5486400" cy="274320"/>
+          </a:xfrm>
+          <a:prstGeom prst="rect">
+            <a:avLst/>
+          </a:prstGeom>
+          <a:noFill/>
+          <a:ln/>
+        </p:spPr>
+        <p:txBody>
+          <a:bodyPr wrap="square" lIns="0" tIns="0" rIns="0" bIns="0" rtlCol="0" anchor="ctr"/>
+          <a:lstStyle/>
+          <a:p>
+            <a:pPr indent="0" marL="0">
+              <a:buNone/>
+            </a:pPr>
+            <a:r>
+              <a:rPr lang="en-US" sz="1200" b="1" spc="200" kern="0" dirty="0">
+                <a:solidFill>
+                  <a:srgbClr val="7A1524"/>
+                </a:solidFill>
+                <a:latin typeface="Yu Gothic" pitchFamily="34" charset="0"/>
+                <a:ea typeface="Yu Gothic" pitchFamily="34" charset="-122"/>
+                <a:cs typeface="Yu Gothic" pitchFamily="34" charset="-120"/>
+              </a:rPr>
+              <a:t>PHASE 6　あなたの場合を整理する</a:t>
+            </a:r>
+            <a:endParaRPr lang="en-US" sz="1200" dirty="0"/>
+          </a:p>
+        </p:txBody>
+      </p:sp>
+      <p:sp>
+        <p:nvSpPr>
+          <p:cNvPr id="3" name="Text 1"/>
+          <p:cNvSpPr txBox="1"/>
+          <p:nvPr/>
+        </p:nvSpPr>
+        <p:spPr>
+          <a:xfrm>
+            <a:off x="8138160" y="4576572"/>
+            <a:ext cx="548640" cy="274320"/>
+          </a:xfrm>
+          <a:prstGeom prst="rect">
+            <a:avLst/>
+          </a:prstGeom>
+          <a:noFill/>
+          <a:ln/>
+        </p:spPr>
+        <p:txBody>
+          <a:bodyPr wrap="square" lIns="0" tIns="0" rIns="0" bIns="0" rtlCol="0" anchor="ctr"/>
+          <a:lstStyle/>
+          <a:p>
+            <a:pPr algn="r" indent="0" marL="0">
+              <a:buNone/>
+            </a:pPr>
+            <a:r>
+              <a:rPr lang="en-US" sz="1100" dirty="0">
+                <a:solidFill>
+                  <a:srgbClr val="6B6360"/>
+                </a:solidFill>
+                <a:latin typeface="Yu Gothic" pitchFamily="34" charset="0"/>
+                <a:ea typeface="Yu Gothic" pitchFamily="34" charset="-122"/>
+                <a:cs typeface="Yu Gothic" pitchFamily="34" charset="-120"/>
+              </a:rPr>
+              <a:t>30</a:t>
+            </a:r>
+            <a:endParaRPr lang="en-US" sz="1100" dirty="0"/>
+          </a:p>
+        </p:txBody>
+      </p:sp>
+      <p:sp>
+        <p:nvSpPr>
+          <p:cNvPr id="4" name="Text 2"/>
+          <p:cNvSpPr txBox="1"/>
+          <p:nvPr/>
+        </p:nvSpPr>
+        <p:spPr>
+          <a:xfrm>
+            <a:off x="457200" y="777240"/>
+            <a:ext cx="8229600" cy="1188720"/>
+          </a:xfrm>
+          <a:prstGeom prst="rect">
+            <a:avLst/>
+          </a:prstGeom>
+          <a:noFill/>
+          <a:ln/>
+        </p:spPr>
+        <p:txBody>
+          <a:bodyPr wrap="square" lIns="0" tIns="0" rIns="0" bIns="0" rtlCol="0" anchor="t"/>
+          <a:lstStyle/>
+          <a:p>
+            <a:pPr algn="l" indent="0" marL="0">
+              <a:lnSpc>
+                <a:spcPts val="4350"/>
+              </a:lnSpc>
+              <a:buNone/>
+            </a:pPr>
+            <a:r>
+              <a:rPr lang="en-US" sz="3000" b="1" dirty="0">
+                <a:solidFill>
+                  <a:srgbClr val="141416"/>
+                </a:solidFill>
+                <a:latin typeface="Yu Mincho" pitchFamily="34" charset="0"/>
+                <a:ea typeface="Yu Mincho" pitchFamily="34" charset="-122"/>
+                <a:cs typeface="Yu Mincho" pitchFamily="34" charset="-120"/>
+              </a:rPr>
+              <a:t>今日、持ち帰るものを1つ決めましょう</a:t>
+            </a:r>
+            <a:endParaRPr lang="en-US" sz="3000" dirty="0"/>
+          </a:p>
+        </p:txBody>
+      </p:sp>
+      <p:sp>
+        <p:nvSpPr>
+          <p:cNvPr id="5" name="Text 3"/>
+          <p:cNvSpPr txBox="1"/>
+          <p:nvPr/>
+        </p:nvSpPr>
+        <p:spPr>
+          <a:xfrm>
+            <a:off x="457200" y="1719072"/>
+            <a:ext cx="8229600" cy="411480"/>
+          </a:xfrm>
+          <a:prstGeom prst="rect">
+            <a:avLst/>
+          </a:prstGeom>
+          <a:noFill/>
+          <a:ln/>
+        </p:spPr>
+        <p:txBody>
+          <a:bodyPr wrap="square" lIns="0" tIns="0" rIns="0" bIns="0" rtlCol="0" anchor="ctr"/>
+          <a:lstStyle/>
+          <a:p>
+            <a:pPr indent="0" marL="0">
+              <a:buNone/>
+            </a:pPr>
+            <a:r>
+              <a:rPr lang="en-US" sz="1700" dirty="0">
+                <a:solidFill>
+                  <a:srgbClr val="3B3634"/>
+                </a:solidFill>
+                <a:latin typeface="Yu Gothic" pitchFamily="34" charset="0"/>
+                <a:ea typeface="Yu Gothic" pitchFamily="34" charset="-122"/>
+                <a:cs typeface="Yu Gothic" pitchFamily="34" charset="-120"/>
+              </a:rPr>
+              <a:t>講座を受けても、受けなくても。次の試合まで、これはやってみてください。</a:t>
+            </a:r>
+            <a:endParaRPr lang="en-US" sz="1700" dirty="0"/>
+          </a:p>
+        </p:txBody>
+      </p:sp>
+      <p:sp>
+        <p:nvSpPr>
+          <p:cNvPr id="6" name="Shape 4"/>
+          <p:cNvSpPr/>
+          <p:nvPr/>
+        </p:nvSpPr>
+        <p:spPr>
+          <a:xfrm>
+            <a:off x="457200" y="2286000"/>
+            <a:ext cx="3931920" cy="1463040"/>
+          </a:xfrm>
+          <a:prstGeom prst="roundRect">
+            <a:avLst>
+              <a:gd name="adj" fmla="val 5000"/>
+            </a:avLst>
+          </a:prstGeom>
+          <a:solidFill>
+            <a:srgbClr val="7A1524"/>
+          </a:solidFill>
+          <a:ln w="12700">
+            <a:solidFill>
+              <a:srgbClr val="7A1524"/>
+            </a:solidFill>
+            <a:prstDash val="solid"/>
+          </a:ln>
+        </p:spPr>
+      </p:sp>
+      <p:sp>
+        <p:nvSpPr>
+          <p:cNvPr id="7" name="Text 5"/>
+          <p:cNvSpPr txBox="1"/>
+          <p:nvPr/>
+        </p:nvSpPr>
+        <p:spPr>
+          <a:xfrm>
+            <a:off x="457200" y="2487168"/>
+            <a:ext cx="3931920" cy="457200"/>
+          </a:xfrm>
+          <a:prstGeom prst="rect">
+            <a:avLst/>
+          </a:prstGeom>
+          <a:noFill/>
+          <a:ln/>
+        </p:spPr>
+        <p:txBody>
+          <a:bodyPr wrap="square" lIns="0" tIns="0" rIns="0" bIns="0" rtlCol="0" anchor="ctr"/>
+          <a:lstStyle/>
+          <a:p>
+            <a:pPr algn="ctr" indent="0" marL="0">
+              <a:buNone/>
+            </a:pPr>
+            <a:r>
+              <a:rPr lang="en-US" sz="2100" b="1" dirty="0">
+                <a:solidFill>
+                  <a:srgbClr val="FFFFFF"/>
+                </a:solidFill>
+                <a:latin typeface="Yu Gothic" pitchFamily="34" charset="0"/>
+                <a:ea typeface="Yu Gothic" pitchFamily="34" charset="-122"/>
+                <a:cs typeface="Yu Gothic" pitchFamily="34" charset="-120"/>
+              </a:rPr>
+              <a:t>やること　1つ</a:t>
+            </a:r>
+            <a:endParaRPr lang="en-US" sz="2100" dirty="0"/>
+          </a:p>
+        </p:txBody>
+      </p:sp>
+      <p:sp>
+        <p:nvSpPr>
+          <p:cNvPr id="8" name="Text 6"/>
+          <p:cNvSpPr txBox="1"/>
+          <p:nvPr/>
+        </p:nvSpPr>
+        <p:spPr>
+          <a:xfrm>
+            <a:off x="640080" y="3017520"/>
+            <a:ext cx="3566160" cy="548640"/>
+          </a:xfrm>
+          <a:prstGeom prst="rect">
+            <a:avLst/>
+          </a:prstGeom>
+          <a:noFill/>
+          <a:ln/>
+        </p:spPr>
+        <p:txBody>
+          <a:bodyPr wrap="square" lIns="0" tIns="0" rIns="0" bIns="0" rtlCol="0" anchor="ctr"/>
+          <a:lstStyle/>
+          <a:p>
+            <a:pPr algn="ctr" indent="0" marL="0">
+              <a:buNone/>
+            </a:pPr>
+            <a:r>
+              <a:rPr lang="en-US" sz="1500" dirty="0">
+                <a:solidFill>
+                  <a:srgbClr val="F2C9D0"/>
+                </a:solidFill>
+                <a:latin typeface="Yu Gothic" pitchFamily="34" charset="0"/>
+                <a:ea typeface="Yu Gothic" pitchFamily="34" charset="-122"/>
+                <a:cs typeface="Yu Gothic" pitchFamily="34" charset="-120"/>
+              </a:rPr>
+              <a:t>例）3本目の前に、呼吸を3回</a:t>
+            </a:r>
+            <a:endParaRPr lang="en-US" sz="1500" dirty="0"/>
+          </a:p>
+        </p:txBody>
+      </p:sp>
+      <p:sp>
+        <p:nvSpPr>
+          <p:cNvPr id="9" name="Shape 7"/>
+          <p:cNvSpPr/>
+          <p:nvPr/>
+        </p:nvSpPr>
+        <p:spPr>
+          <a:xfrm>
+            <a:off x="4754880" y="2286000"/>
+            <a:ext cx="3931920" cy="1463040"/>
+          </a:xfrm>
+          <a:prstGeom prst="roundRect">
+            <a:avLst>
+              <a:gd name="adj" fmla="val 5000"/>
+            </a:avLst>
+          </a:prstGeom>
+          <a:solidFill>
+            <a:srgbClr val="F5F1F0"/>
+          </a:solidFill>
+          <a:ln w="12700">
+            <a:solidFill>
+              <a:srgbClr val="E1D9D9"/>
+            </a:solidFill>
+            <a:prstDash val="solid"/>
+          </a:ln>
+        </p:spPr>
+      </p:sp>
+      <p:sp>
+        <p:nvSpPr>
+          <p:cNvPr id="10" name="Text 8"/>
+          <p:cNvSpPr txBox="1"/>
+          <p:nvPr/>
+        </p:nvSpPr>
+        <p:spPr>
+          <a:xfrm>
+            <a:off x="4754880" y="2487168"/>
+            <a:ext cx="3931920" cy="457200"/>
+          </a:xfrm>
+          <a:prstGeom prst="rect">
+            <a:avLst/>
+          </a:prstGeom>
+          <a:noFill/>
+          <a:ln/>
+        </p:spPr>
+        <p:txBody>
+          <a:bodyPr wrap="square" lIns="0" tIns="0" rIns="0" bIns="0" rtlCol="0" anchor="ctr"/>
+          <a:lstStyle/>
+          <a:p>
+            <a:pPr algn="ctr" indent="0" marL="0">
+              <a:buNone/>
+            </a:pPr>
+            <a:r>
+              <a:rPr lang="en-US" sz="2100" b="1" dirty="0">
+                <a:solidFill>
+                  <a:srgbClr val="3B3634"/>
+                </a:solidFill>
+                <a:latin typeface="Yu Gothic" pitchFamily="34" charset="0"/>
+                <a:ea typeface="Yu Gothic" pitchFamily="34" charset="-122"/>
+                <a:cs typeface="Yu Gothic" pitchFamily="34" charset="-120"/>
+              </a:rPr>
+              <a:t>やらないこと　1つ</a:t>
+            </a:r>
+            <a:endParaRPr lang="en-US" sz="2100" dirty="0"/>
+          </a:p>
+        </p:txBody>
+      </p:sp>
+      <p:sp>
+        <p:nvSpPr>
+          <p:cNvPr id="11" name="Text 9"/>
+          <p:cNvSpPr txBox="1"/>
+          <p:nvPr/>
+        </p:nvSpPr>
+        <p:spPr>
+          <a:xfrm>
+            <a:off x="4892040" y="3017520"/>
+            <a:ext cx="3657600" cy="548640"/>
+          </a:xfrm>
+          <a:prstGeom prst="rect">
+            <a:avLst/>
+          </a:prstGeom>
+          <a:noFill/>
+          <a:ln/>
+        </p:spPr>
+        <p:txBody>
+          <a:bodyPr wrap="square" lIns="0" tIns="0" rIns="0" bIns="0" rtlCol="0" anchor="ctr"/>
+          <a:lstStyle/>
+          <a:p>
+            <a:pPr algn="ctr" indent="0" marL="0">
+              <a:buNone/>
+            </a:pPr>
+            <a:r>
+              <a:rPr lang="en-US" sz="1500" dirty="0">
+                <a:solidFill>
+                  <a:srgbClr val="6B6360"/>
+                </a:solidFill>
+                <a:latin typeface="Yu Gothic" pitchFamily="34" charset="0"/>
+                <a:ea typeface="Yu Gothic" pitchFamily="34" charset="-122"/>
+                <a:cs typeface="Yu Gothic" pitchFamily="34" charset="-120"/>
+              </a:rPr>
+              <a:t>例）他の選手の重量を見にいかない</a:t>
+            </a:r>
+            <a:endParaRPr lang="en-US" sz="1500" dirty="0"/>
+          </a:p>
+        </p:txBody>
+      </p:sp>
+      <p:sp>
+        <p:nvSpPr>
+          <p:cNvPr id="12" name="Text 10"/>
+          <p:cNvSpPr txBox="1"/>
+          <p:nvPr/>
+        </p:nvSpPr>
+        <p:spPr>
+          <a:xfrm>
+            <a:off x="457200" y="4069080"/>
+            <a:ext cx="8229600" cy="457200"/>
+          </a:xfrm>
+          <a:prstGeom prst="rect">
+            <a:avLst/>
+          </a:prstGeom>
+          <a:noFill/>
+          <a:ln/>
+        </p:spPr>
+        <p:txBody>
+          <a:bodyPr wrap="square" lIns="0" tIns="0" rIns="0" bIns="0" rtlCol="0" anchor="ctr"/>
+          <a:lstStyle/>
+          <a:p>
+            <a:pPr indent="0" marL="0">
+              <a:buNone/>
+            </a:pPr>
+            <a:r>
+              <a:rPr lang="en-US" sz="1800" b="1" dirty="0">
+                <a:solidFill>
+                  <a:srgbClr val="7A1524"/>
+                </a:solidFill>
+                <a:latin typeface="Yu Gothic" pitchFamily="34" charset="0"/>
+                <a:ea typeface="Yu Gothic" pitchFamily="34" charset="-122"/>
+                <a:cs typeface="Yu Gothic" pitchFamily="34" charset="-120"/>
+              </a:rPr>
+              <a:t>小さく1つで十分です。続けられることが、一番大事です。</a:t>
+            </a:r>
+            <a:endParaRPr lang="en-US" sz="1800" dirty="0"/>
+          </a:p>
+        </p:txBody>
+      </p:sp>
+    </p:spTree>
+  </p:cSld>
+  <p:clrMapOvr>
+    <a:masterClrMapping/>
+  </p:clrMapOvr>
+</p:sld>
+</file>
+
+<file path=ppt/slides/slide31.xml><?xml version="1.0" encoding="utf-8"?>
+<p:sld xmlns:a="http://schemas.openxmlformats.org/drawingml/2006/main" xmlns:r="http://schemas.openxmlformats.org/officeDocument/2006/relationships" xmlns:p="http://schemas.openxmlformats.org/presentationml/2006/main">
+  <p:cSld name="Slide 31">
+    <p:bg>
+      <p:bgPr>
+        <a:solidFill>
           <a:srgbClr val="540E19"/>
         </a:solidFill>
       </p:bgPr>
@@ -14135,7 +14753,7 @@
                 <a:ea typeface="Yu Gothic" pitchFamily="34" charset="-122"/>
                 <a:cs typeface="Yu Gothic" pitchFamily="34" charset="-120"/>
               </a:rPr>
-              <a:t>30</a:t>
+              <a:t>31</a:t>
             </a:r>
             <a:endParaRPr lang="en-US" sz="1100" dirty="0"/>
           </a:p>
@@ -14222,7 +14840,7 @@
                 <a:ea typeface="Yu Gothic" pitchFamily="34" charset="-122"/>
                 <a:cs typeface="Yu Gothic" pitchFamily="34" charset="-120"/>
               </a:rPr>
-              <a:t>25</a:t>
+              <a:t>31</a:t>
             </a:r>
             <a:endParaRPr lang="en-US" sz="1100" dirty="0"/>
           </a:p>
@@ -14425,634 +15043,6 @@
                 <a:cs typeface="Yu Gothic" pitchFamily="34" charset="-120"/>
               </a:rPr>
               <a:t>自分がやるべきことがわかり、実践できる選手になる。</a:t>
-            </a:r>
-            <a:endParaRPr lang="en-US" sz="1800" dirty="0"/>
-          </a:p>
-        </p:txBody>
-      </p:sp>
-    </p:spTree>
-  </p:cSld>
-  <p:clrMapOvr>
-    <a:masterClrMapping/>
-  </p:clrMapOvr>
-</p:sld>
-</file>
-
-<file path=ppt/slides/slide31.xml><?xml version="1.0" encoding="utf-8"?>
-<p:sld xmlns:a="http://schemas.openxmlformats.org/drawingml/2006/main" xmlns:r="http://schemas.openxmlformats.org/officeDocument/2006/relationships" xmlns:p="http://schemas.openxmlformats.org/presentationml/2006/main">
-  <p:cSld name="Slide 31">
-    <p:bg>
-      <p:bgPr>
-        <a:solidFill>
-          <a:srgbClr val="FFFFFF"/>
-        </a:solidFill>
-      </p:bgPr>
-    </p:bg>
-    <p:spTree>
-      <p:nvGrpSpPr>
-        <p:cNvPr id="1" name=""/>
-        <p:cNvGrpSpPr/>
-        <p:nvPr/>
-      </p:nvGrpSpPr>
-      <p:grpSpPr>
-        <a:xfrm>
-          <a:off x="0" y="0"/>
-          <a:ext cx="0" cy="0"/>
-          <a:chOff x="0" y="0"/>
-          <a:chExt cx="0" cy="0"/>
-        </a:xfrm>
-      </p:grpSpPr>
-      <p:sp>
-        <p:nvSpPr>
-          <p:cNvPr id="2" name="Text 0"/>
-          <p:cNvSpPr txBox="1"/>
-          <p:nvPr/>
-        </p:nvSpPr>
-        <p:spPr>
-          <a:xfrm>
-            <a:off x="457200" y="237744"/>
-            <a:ext cx="5486400" cy="274320"/>
-          </a:xfrm>
-          <a:prstGeom prst="rect">
-            <a:avLst/>
-          </a:prstGeom>
-          <a:noFill/>
-          <a:ln/>
-        </p:spPr>
-        <p:txBody>
-          <a:bodyPr wrap="square" lIns="0" tIns="0" rIns="0" bIns="0" rtlCol="0" anchor="ctr"/>
-          <a:lstStyle/>
-          <a:p>
-            <a:pPr indent="0" marL="0">
-              <a:buNone/>
-            </a:pPr>
-            <a:r>
-              <a:rPr lang="en-US" sz="1200" b="1" spc="200" kern="0" dirty="0">
-                <a:solidFill>
-                  <a:srgbClr val="7A1524"/>
-                </a:solidFill>
-                <a:latin typeface="Yu Gothic" pitchFamily="34" charset="0"/>
-                <a:ea typeface="Yu Gothic" pitchFamily="34" charset="-122"/>
-                <a:cs typeface="Yu Gothic" pitchFamily="34" charset="-120"/>
-              </a:rPr>
-              <a:t>PHASE 7　講座のご案内</a:t>
-            </a:r>
-            <a:endParaRPr lang="en-US" sz="1200" dirty="0"/>
-          </a:p>
-        </p:txBody>
-      </p:sp>
-      <p:sp>
-        <p:nvSpPr>
-          <p:cNvPr id="3" name="Text 1"/>
-          <p:cNvSpPr txBox="1"/>
-          <p:nvPr/>
-        </p:nvSpPr>
-        <p:spPr>
-          <a:xfrm>
-            <a:off x="8138160" y="4576572"/>
-            <a:ext cx="548640" cy="274320"/>
-          </a:xfrm>
-          <a:prstGeom prst="rect">
-            <a:avLst/>
-          </a:prstGeom>
-          <a:noFill/>
-          <a:ln/>
-        </p:spPr>
-        <p:txBody>
-          <a:bodyPr wrap="square" lIns="0" tIns="0" rIns="0" bIns="0" rtlCol="0" anchor="ctr"/>
-          <a:lstStyle/>
-          <a:p>
-            <a:pPr algn="r" indent="0" marL="0">
-              <a:buNone/>
-            </a:pPr>
-            <a:r>
-              <a:rPr lang="en-US" sz="1100" dirty="0">
-                <a:solidFill>
-                  <a:srgbClr val="6B6360"/>
-                </a:solidFill>
-                <a:latin typeface="Yu Gothic" pitchFamily="34" charset="0"/>
-                <a:ea typeface="Yu Gothic" pitchFamily="34" charset="-122"/>
-                <a:cs typeface="Yu Gothic" pitchFamily="34" charset="-120"/>
-              </a:rPr>
-              <a:t>31</a:t>
-            </a:r>
-            <a:endParaRPr lang="en-US" sz="1100" dirty="0"/>
-          </a:p>
-        </p:txBody>
-      </p:sp>
-      <p:sp>
-        <p:nvSpPr>
-          <p:cNvPr id="4" name="Text 2"/>
-          <p:cNvSpPr txBox="1"/>
-          <p:nvPr/>
-        </p:nvSpPr>
-        <p:spPr>
-          <a:xfrm>
-            <a:off x="457200" y="777240"/>
-            <a:ext cx="8229600" cy="1188720"/>
-          </a:xfrm>
-          <a:prstGeom prst="rect">
-            <a:avLst/>
-          </a:prstGeom>
-          <a:noFill/>
-          <a:ln/>
-        </p:spPr>
-        <p:txBody>
-          <a:bodyPr wrap="square" lIns="0" tIns="0" rIns="0" bIns="0" rtlCol="0" anchor="t"/>
-          <a:lstStyle/>
-          <a:p>
-            <a:pPr algn="l" indent="0" marL="0">
-              <a:lnSpc>
-                <a:spcPts val="4350"/>
-              </a:lnSpc>
-              <a:buNone/>
-            </a:pPr>
-            <a:r>
-              <a:rPr lang="en-US" sz="3000" b="1" dirty="0">
-                <a:solidFill>
-                  <a:srgbClr val="141416"/>
-                </a:solidFill>
-                <a:latin typeface="Yu Mincho" pitchFamily="34" charset="0"/>
-                <a:ea typeface="Yu Mincho" pitchFamily="34" charset="-122"/>
-                <a:cs typeface="Yu Mincho" pitchFamily="34" charset="-120"/>
-              </a:rPr>
-              <a:t>1対1で、自分の試合に落とし込む</a:t>
-            </a:r>
-            <a:endParaRPr lang="en-US" sz="3000" dirty="0"/>
-          </a:p>
-        </p:txBody>
-      </p:sp>
-      <p:sp>
-        <p:nvSpPr>
-          <p:cNvPr id="5" name="Shape 3"/>
-          <p:cNvSpPr/>
-          <p:nvPr/>
-        </p:nvSpPr>
-        <p:spPr>
-          <a:xfrm>
-            <a:off x="457200" y="1783080"/>
-            <a:ext cx="7863840" cy="548640"/>
-          </a:xfrm>
-          <a:prstGeom prst="roundRect">
-            <a:avLst>
-              <a:gd name="adj" fmla="val 10000"/>
-            </a:avLst>
-          </a:prstGeom>
-          <a:solidFill>
-            <a:srgbClr val="FAF3F4"/>
-          </a:solidFill>
-          <a:ln w="12700">
-            <a:solidFill>
-              <a:srgbClr val="FAF3F4"/>
-            </a:solidFill>
-            <a:prstDash val="solid"/>
-          </a:ln>
-        </p:spPr>
-      </p:sp>
-      <p:sp>
-        <p:nvSpPr>
-          <p:cNvPr id="6" name="Text 4"/>
-          <p:cNvSpPr txBox="1"/>
-          <p:nvPr/>
-        </p:nvSpPr>
-        <p:spPr>
-          <a:xfrm>
-            <a:off x="777240" y="1783080"/>
-            <a:ext cx="1554480" cy="548640"/>
-          </a:xfrm>
-          <a:prstGeom prst="rect">
-            <a:avLst/>
-          </a:prstGeom>
-          <a:noFill/>
-          <a:ln/>
-        </p:spPr>
-        <p:txBody>
-          <a:bodyPr wrap="square" lIns="0" tIns="0" rIns="0" bIns="0" rtlCol="0" anchor="ctr"/>
-          <a:lstStyle/>
-          <a:p>
-            <a:pPr indent="0" marL="0">
-              <a:buNone/>
-            </a:pPr>
-            <a:r>
-              <a:rPr lang="en-US" sz="1700" b="1" dirty="0">
-                <a:solidFill>
-                  <a:srgbClr val="7A1524"/>
-                </a:solidFill>
-                <a:latin typeface="Yu Gothic" pitchFamily="34" charset="0"/>
-                <a:ea typeface="Yu Gothic" pitchFamily="34" charset="-122"/>
-                <a:cs typeface="Yu Gothic" pitchFamily="34" charset="-120"/>
-              </a:rPr>
-              <a:t>形式</a:t>
-            </a:r>
-            <a:endParaRPr lang="en-US" sz="1700" dirty="0"/>
-          </a:p>
-        </p:txBody>
-      </p:sp>
-      <p:sp>
-        <p:nvSpPr>
-          <p:cNvPr id="7" name="Text 5"/>
-          <p:cNvSpPr txBox="1"/>
-          <p:nvPr/>
-        </p:nvSpPr>
-        <p:spPr>
-          <a:xfrm>
-            <a:off x="2377440" y="1783080"/>
-            <a:ext cx="5760720" cy="548640"/>
-          </a:xfrm>
-          <a:prstGeom prst="rect">
-            <a:avLst/>
-          </a:prstGeom>
-          <a:noFill/>
-          <a:ln/>
-        </p:spPr>
-        <p:txBody>
-          <a:bodyPr wrap="square" lIns="0" tIns="0" rIns="0" bIns="0" rtlCol="0" anchor="ctr"/>
-          <a:lstStyle/>
-          <a:p>
-            <a:pPr indent="0" marL="0">
-              <a:buNone/>
-            </a:pPr>
-            <a:r>
-              <a:rPr lang="en-US" sz="1800" dirty="0">
-                <a:solidFill>
-                  <a:srgbClr val="3B3634"/>
-                </a:solidFill>
-                <a:latin typeface="Yu Gothic" pitchFamily="34" charset="0"/>
-                <a:ea typeface="Yu Gothic" pitchFamily="34" charset="-122"/>
-                <a:cs typeface="Yu Gothic" pitchFamily="34" charset="-120"/>
-              </a:rPr>
-              <a:t>完全1対1／Zoom</a:t>
-            </a:r>
-            <a:endParaRPr lang="en-US" sz="1800" dirty="0"/>
-          </a:p>
-        </p:txBody>
-      </p:sp>
-      <p:sp>
-        <p:nvSpPr>
-          <p:cNvPr id="8" name="Shape 6"/>
-          <p:cNvSpPr/>
-          <p:nvPr/>
-        </p:nvSpPr>
-        <p:spPr>
-          <a:xfrm>
-            <a:off x="457200" y="2423160"/>
-            <a:ext cx="7863840" cy="548640"/>
-          </a:xfrm>
-          <a:prstGeom prst="roundRect">
-            <a:avLst>
-              <a:gd name="adj" fmla="val 10000"/>
-            </a:avLst>
-          </a:prstGeom>
-          <a:solidFill>
-            <a:srgbClr val="FAF3F4"/>
-          </a:solidFill>
-          <a:ln w="12700">
-            <a:solidFill>
-              <a:srgbClr val="FAF3F4"/>
-            </a:solidFill>
-            <a:prstDash val="solid"/>
-          </a:ln>
-        </p:spPr>
-      </p:sp>
-      <p:sp>
-        <p:nvSpPr>
-          <p:cNvPr id="9" name="Text 7"/>
-          <p:cNvSpPr txBox="1"/>
-          <p:nvPr/>
-        </p:nvSpPr>
-        <p:spPr>
-          <a:xfrm>
-            <a:off x="777240" y="2423160"/>
-            <a:ext cx="1554480" cy="548640"/>
-          </a:xfrm>
-          <a:prstGeom prst="rect">
-            <a:avLst/>
-          </a:prstGeom>
-          <a:noFill/>
-          <a:ln/>
-        </p:spPr>
-        <p:txBody>
-          <a:bodyPr wrap="square" lIns="0" tIns="0" rIns="0" bIns="0" rtlCol="0" anchor="ctr"/>
-          <a:lstStyle/>
-          <a:p>
-            <a:pPr indent="0" marL="0">
-              <a:buNone/>
-            </a:pPr>
-            <a:r>
-              <a:rPr lang="en-US" sz="1700" b="1" dirty="0">
-                <a:solidFill>
-                  <a:srgbClr val="7A1524"/>
-                </a:solidFill>
-                <a:latin typeface="Yu Gothic" pitchFamily="34" charset="0"/>
-                <a:ea typeface="Yu Gothic" pitchFamily="34" charset="-122"/>
-                <a:cs typeface="Yu Gothic" pitchFamily="34" charset="-120"/>
-              </a:rPr>
-              <a:t>回数</a:t>
-            </a:r>
-            <a:endParaRPr lang="en-US" sz="1700" dirty="0"/>
-          </a:p>
-        </p:txBody>
-      </p:sp>
-      <p:sp>
-        <p:nvSpPr>
-          <p:cNvPr id="10" name="Text 8"/>
-          <p:cNvSpPr txBox="1"/>
-          <p:nvPr/>
-        </p:nvSpPr>
-        <p:spPr>
-          <a:xfrm>
-            <a:off x="2377440" y="2423160"/>
-            <a:ext cx="5760720" cy="548640"/>
-          </a:xfrm>
-          <a:prstGeom prst="rect">
-            <a:avLst/>
-          </a:prstGeom>
-          <a:noFill/>
-          <a:ln/>
-        </p:spPr>
-        <p:txBody>
-          <a:bodyPr wrap="square" lIns="0" tIns="0" rIns="0" bIns="0" rtlCol="0" anchor="ctr"/>
-          <a:lstStyle/>
-          <a:p>
-            <a:pPr indent="0" marL="0">
-              <a:buNone/>
-            </a:pPr>
-            <a:r>
-              <a:rPr lang="en-US" sz="1800" dirty="0">
-                <a:solidFill>
-                  <a:srgbClr val="3B3634"/>
-                </a:solidFill>
-                <a:latin typeface="Yu Gothic" pitchFamily="34" charset="0"/>
-                <a:ea typeface="Yu Gothic" pitchFamily="34" charset="-122"/>
-                <a:cs typeface="Yu Gothic" pitchFamily="34" charset="-120"/>
-              </a:rPr>
-              <a:t>全10回（1回60分）</a:t>
-            </a:r>
-            <a:endParaRPr lang="en-US" sz="1800" dirty="0"/>
-          </a:p>
-        </p:txBody>
-      </p:sp>
-      <p:sp>
-        <p:nvSpPr>
-          <p:cNvPr id="11" name="Shape 9"/>
-          <p:cNvSpPr/>
-          <p:nvPr/>
-        </p:nvSpPr>
-        <p:spPr>
-          <a:xfrm>
-            <a:off x="457200" y="3063240"/>
-            <a:ext cx="7863840" cy="548640"/>
-          </a:xfrm>
-          <a:prstGeom prst="roundRect">
-            <a:avLst>
-              <a:gd name="adj" fmla="val 10000"/>
-            </a:avLst>
-          </a:prstGeom>
-          <a:solidFill>
-            <a:srgbClr val="FAF3F4"/>
-          </a:solidFill>
-          <a:ln w="12700">
-            <a:solidFill>
-              <a:srgbClr val="FAF3F4"/>
-            </a:solidFill>
-            <a:prstDash val="solid"/>
-          </a:ln>
-        </p:spPr>
-      </p:sp>
-      <p:sp>
-        <p:nvSpPr>
-          <p:cNvPr id="12" name="Text 10"/>
-          <p:cNvSpPr txBox="1"/>
-          <p:nvPr/>
-        </p:nvSpPr>
-        <p:spPr>
-          <a:xfrm>
-            <a:off x="777240" y="3063240"/>
-            <a:ext cx="1554480" cy="548640"/>
-          </a:xfrm>
-          <a:prstGeom prst="rect">
-            <a:avLst/>
-          </a:prstGeom>
-          <a:noFill/>
-          <a:ln/>
-        </p:spPr>
-        <p:txBody>
-          <a:bodyPr wrap="square" lIns="0" tIns="0" rIns="0" bIns="0" rtlCol="0" anchor="ctr"/>
-          <a:lstStyle/>
-          <a:p>
-            <a:pPr indent="0" marL="0">
-              <a:buNone/>
-            </a:pPr>
-            <a:r>
-              <a:rPr lang="en-US" sz="1700" b="1" dirty="0">
-                <a:solidFill>
-                  <a:srgbClr val="7A1524"/>
-                </a:solidFill>
-                <a:latin typeface="Yu Gothic" pitchFamily="34" charset="0"/>
-                <a:ea typeface="Yu Gothic" pitchFamily="34" charset="-122"/>
-                <a:cs typeface="Yu Gothic" pitchFamily="34" charset="-120"/>
-              </a:rPr>
-              <a:t>期間</a:t>
-            </a:r>
-            <a:endParaRPr lang="en-US" sz="1700" dirty="0"/>
-          </a:p>
-        </p:txBody>
-      </p:sp>
-      <p:sp>
-        <p:nvSpPr>
-          <p:cNvPr id="13" name="Text 11"/>
-          <p:cNvSpPr txBox="1"/>
-          <p:nvPr/>
-        </p:nvSpPr>
-        <p:spPr>
-          <a:xfrm>
-            <a:off x="2377440" y="3063240"/>
-            <a:ext cx="5760720" cy="548640"/>
-          </a:xfrm>
-          <a:prstGeom prst="rect">
-            <a:avLst/>
-          </a:prstGeom>
-          <a:noFill/>
-          <a:ln/>
-        </p:spPr>
-        <p:txBody>
-          <a:bodyPr wrap="square" lIns="0" tIns="0" rIns="0" bIns="0" rtlCol="0" anchor="ctr"/>
-          <a:lstStyle/>
-          <a:p>
-            <a:pPr indent="0" marL="0">
-              <a:buNone/>
-            </a:pPr>
-            <a:r>
-              <a:rPr lang="en-US" sz="1800" dirty="0">
-                <a:solidFill>
-                  <a:srgbClr val="3B3634"/>
-                </a:solidFill>
-                <a:latin typeface="Yu Gothic" pitchFamily="34" charset="0"/>
-                <a:ea typeface="Yu Gothic" pitchFamily="34" charset="-122"/>
-                <a:cs typeface="Yu Gothic" pitchFamily="34" charset="-120"/>
-              </a:rPr>
-              <a:t>最長3か月</a:t>
-            </a:r>
-            <a:endParaRPr lang="en-US" sz="1800" dirty="0"/>
-          </a:p>
-        </p:txBody>
-      </p:sp>
-      <p:sp>
-        <p:nvSpPr>
-          <p:cNvPr id="14" name="Shape 12"/>
-          <p:cNvSpPr/>
-          <p:nvPr/>
-        </p:nvSpPr>
-        <p:spPr>
-          <a:xfrm>
-            <a:off x="457200" y="3703320"/>
-            <a:ext cx="7863840" cy="548640"/>
-          </a:xfrm>
-          <a:prstGeom prst="roundRect">
-            <a:avLst>
-              <a:gd name="adj" fmla="val 10000"/>
-            </a:avLst>
-          </a:prstGeom>
-          <a:solidFill>
-            <a:srgbClr val="FAF3F4"/>
-          </a:solidFill>
-          <a:ln w="12700">
-            <a:solidFill>
-              <a:srgbClr val="FAF3F4"/>
-            </a:solidFill>
-            <a:prstDash val="solid"/>
-          </a:ln>
-        </p:spPr>
-      </p:sp>
-      <p:sp>
-        <p:nvSpPr>
-          <p:cNvPr id="15" name="Text 13"/>
-          <p:cNvSpPr txBox="1"/>
-          <p:nvPr/>
-        </p:nvSpPr>
-        <p:spPr>
-          <a:xfrm>
-            <a:off x="777240" y="3703320"/>
-            <a:ext cx="1554480" cy="548640"/>
-          </a:xfrm>
-          <a:prstGeom prst="rect">
-            <a:avLst/>
-          </a:prstGeom>
-          <a:noFill/>
-          <a:ln/>
-        </p:spPr>
-        <p:txBody>
-          <a:bodyPr wrap="square" lIns="0" tIns="0" rIns="0" bIns="0" rtlCol="0" anchor="ctr"/>
-          <a:lstStyle/>
-          <a:p>
-            <a:pPr indent="0" marL="0">
-              <a:buNone/>
-            </a:pPr>
-            <a:r>
-              <a:rPr lang="en-US" sz="1700" b="1" dirty="0">
-                <a:solidFill>
-                  <a:srgbClr val="7A1524"/>
-                </a:solidFill>
-                <a:latin typeface="Yu Gothic" pitchFamily="34" charset="0"/>
-                <a:ea typeface="Yu Gothic" pitchFamily="34" charset="-122"/>
-                <a:cs typeface="Yu Gothic" pitchFamily="34" charset="-120"/>
-              </a:rPr>
-              <a:t>ペース</a:t>
-            </a:r>
-            <a:endParaRPr lang="en-US" sz="1700" dirty="0"/>
-          </a:p>
-        </p:txBody>
-      </p:sp>
-      <p:sp>
-        <p:nvSpPr>
-          <p:cNvPr id="16" name="Text 14"/>
-          <p:cNvSpPr txBox="1"/>
-          <p:nvPr/>
-        </p:nvSpPr>
-        <p:spPr>
-          <a:xfrm>
-            <a:off x="2377440" y="3703320"/>
-            <a:ext cx="5760720" cy="548640"/>
-          </a:xfrm>
-          <a:prstGeom prst="rect">
-            <a:avLst/>
-          </a:prstGeom>
-          <a:noFill/>
-          <a:ln/>
-        </p:spPr>
-        <p:txBody>
-          <a:bodyPr wrap="square" lIns="0" tIns="0" rIns="0" bIns="0" rtlCol="0" anchor="ctr"/>
-          <a:lstStyle/>
-          <a:p>
-            <a:pPr indent="0" marL="0">
-              <a:buNone/>
-            </a:pPr>
-            <a:r>
-              <a:rPr lang="en-US" sz="1800" dirty="0">
-                <a:solidFill>
-                  <a:srgbClr val="3B3634"/>
-                </a:solidFill>
-                <a:latin typeface="Yu Gothic" pitchFamily="34" charset="0"/>
-                <a:ea typeface="Yu Gothic" pitchFamily="34" charset="-122"/>
-                <a:cs typeface="Yu Gothic" pitchFamily="34" charset="-120"/>
-              </a:rPr>
-              <a:t>試合日程に合わせて調整</a:t>
-            </a:r>
-            <a:endParaRPr lang="en-US" sz="1800" dirty="0"/>
-          </a:p>
-        </p:txBody>
-      </p:sp>
-      <p:sp>
-        <p:nvSpPr>
-          <p:cNvPr id="17" name="Text 15"/>
-          <p:cNvSpPr txBox="1"/>
-          <p:nvPr/>
-        </p:nvSpPr>
-        <p:spPr>
-          <a:xfrm>
-            <a:off x="457200" y="4389120"/>
-            <a:ext cx="7863840" cy="548640"/>
-          </a:xfrm>
-          <a:prstGeom prst="rect">
-            <a:avLst/>
-          </a:prstGeom>
-          <a:noFill/>
-          <a:ln/>
-        </p:spPr>
-        <p:txBody>
-          <a:bodyPr wrap="square" lIns="0" tIns="0" rIns="0" bIns="0" rtlCol="0" anchor="ctr"/>
-          <a:lstStyle/>
-          <a:p>
-            <a:pPr indent="0" marL="0">
-              <a:buNone/>
-            </a:pPr>
-            <a:r>
-              <a:rPr lang="en-US" sz="1800" b="1" dirty="0">
-                <a:solidFill>
-                  <a:srgbClr val="7A1524"/>
-                </a:solidFill>
-                <a:latin typeface="Yu Gothic" pitchFamily="34" charset="0"/>
-                <a:ea typeface="Yu Gothic" pitchFamily="34" charset="-122"/>
-                <a:cs typeface="Yu Gothic" pitchFamily="34" charset="-120"/>
-              </a:rPr>
-              <a:t>知識を聞くだけではなく、</a:t>
-            </a:r>
-            <a:endParaRPr lang="en-US" sz="1800" dirty="0"/>
-          </a:p>
-          <a:p>
-            <a:pPr indent="0" marL="0">
-              <a:buNone/>
-            </a:pPr>
-            <a:r>
-              <a:rPr lang="en-US" sz="1800" b="1" dirty="0">
-                <a:solidFill>
-                  <a:srgbClr val="7A1524"/>
-                </a:solidFill>
-                <a:latin typeface="Yu Gothic" pitchFamily="34" charset="0"/>
-                <a:ea typeface="Yu Gothic" pitchFamily="34" charset="-122"/>
-                <a:cs typeface="Yu Gothic" pitchFamily="34" charset="-120"/>
-              </a:rPr>
-              <a:t>「あなたならどうする？」まで一緒につくります。</a:t>
             </a:r>
             <a:endParaRPr lang="en-US" sz="1800" dirty="0"/>
           </a:p>
@@ -15177,7 +15167,7 @@
         <p:spPr>
           <a:xfrm>
             <a:off x="457200" y="777240"/>
-            <a:ext cx="8138160" cy="1188720"/>
+            <a:ext cx="8229600" cy="1188720"/>
           </a:xfrm>
           <a:prstGeom prst="rect">
             <a:avLst/>
@@ -15191,12 +15181,12 @@
           <a:p>
             <a:pPr algn="l" indent="0" marL="0">
               <a:lnSpc>
-                <a:spcPts val="4785"/>
+                <a:spcPts val="4350"/>
               </a:lnSpc>
               <a:buNone/>
             </a:pPr>
             <a:r>
-              <a:rPr lang="en-US" sz="3300" b="1" dirty="0">
+              <a:rPr lang="en-US" sz="3000" b="1" dirty="0">
                 <a:solidFill>
                   <a:srgbClr val="141416"/>
                 </a:solidFill>
@@ -15204,9 +15194,9 @@
                 <a:ea typeface="Yu Mincho" pitchFamily="34" charset="-122"/>
                 <a:cs typeface="Yu Mincho" pitchFamily="34" charset="-120"/>
               </a:rPr>
-              <a:t>10回で扱うこと</a:t>
-            </a:r>
-            <a:endParaRPr lang="en-US" sz="3300" dirty="0"/>
+              <a:t>1対1で、自分の試合に落とし込む</a:t>
+            </a:r>
+            <a:endParaRPr lang="en-US" sz="3000" dirty="0"/>
           </a:p>
         </p:txBody>
       </p:sp>
@@ -15218,18 +15208,20 @@
         </p:nvSpPr>
         <p:spPr>
           <a:xfrm>
-            <a:off x="457200" y="1847088"/>
-            <a:ext cx="329184" cy="329184"/>
-          </a:xfrm>
-          <a:prstGeom prst="ellipse">
-            <a:avLst/>
+            <a:off x="457200" y="1783080"/>
+            <a:ext cx="7863840" cy="548640"/>
+          </a:xfrm>
+          <a:prstGeom prst="roundRect">
+            <a:avLst>
+              <a:gd name="adj" fmla="val 10000"/>
+            </a:avLst>
           </a:prstGeom>
           <a:solidFill>
-            <a:srgbClr val="7A1524"/>
+            <a:srgbClr val="FAF3F4"/>
           </a:solidFill>
           <a:ln w="12700">
             <a:solidFill>
-              <a:srgbClr val="7A1524"/>
+              <a:srgbClr val="FAF3F4"/>
             </a:solidFill>
             <a:prstDash val="solid"/>
           </a:ln>
@@ -15243,34 +15235,34 @@
         </p:nvSpPr>
         <p:spPr>
           <a:xfrm>
-            <a:off x="457200" y="1847088"/>
-            <a:ext cx="329184" cy="329184"/>
-          </a:xfrm>
-          <a:prstGeom prst="rect">
-            <a:avLst/>
-          </a:prstGeom>
-          <a:noFill/>
-          <a:ln/>
-        </p:spPr>
-        <p:txBody>
-          <a:bodyPr wrap="square" lIns="0" tIns="0" rIns="0" bIns="0" rtlCol="0" anchor="ctr"/>
-          <a:lstStyle/>
-          <a:p>
-            <a:pPr algn="ctr" indent="0" marL="0">
-              <a:buNone/>
-            </a:pPr>
-            <a:r>
-              <a:rPr lang="en-US" sz="1300" b="1" dirty="0">
-                <a:solidFill>
-                  <a:srgbClr val="FFFFFF"/>
-                </a:solidFill>
-                <a:latin typeface="Yu Gothic" pitchFamily="34" charset="0"/>
-                <a:ea typeface="Yu Gothic" pitchFamily="34" charset="-122"/>
-                <a:cs typeface="Yu Gothic" pitchFamily="34" charset="-120"/>
-              </a:rPr>
-              <a:t>1</a:t>
-            </a:r>
-            <a:endParaRPr lang="en-US" sz="1300" dirty="0"/>
+            <a:off x="777240" y="1783080"/>
+            <a:ext cx="1554480" cy="548640"/>
+          </a:xfrm>
+          <a:prstGeom prst="rect">
+            <a:avLst/>
+          </a:prstGeom>
+          <a:noFill/>
+          <a:ln/>
+        </p:spPr>
+        <p:txBody>
+          <a:bodyPr wrap="square" lIns="0" tIns="0" rIns="0" bIns="0" rtlCol="0" anchor="ctr"/>
+          <a:lstStyle/>
+          <a:p>
+            <a:pPr indent="0" marL="0">
+              <a:buNone/>
+            </a:pPr>
+            <a:r>
+              <a:rPr lang="en-US" sz="1700" b="1" dirty="0">
+                <a:solidFill>
+                  <a:srgbClr val="7A1524"/>
+                </a:solidFill>
+                <a:latin typeface="Yu Gothic" pitchFamily="34" charset="0"/>
+                <a:ea typeface="Yu Gothic" pitchFamily="34" charset="-122"/>
+                <a:cs typeface="Yu Gothic" pitchFamily="34" charset="-120"/>
+              </a:rPr>
+              <a:t>形式</a:t>
+            </a:r>
+            <a:endParaRPr lang="en-US" sz="1700" dirty="0"/>
           </a:p>
         </p:txBody>
       </p:sp>
@@ -15282,24 +15274,24 @@
         </p:nvSpPr>
         <p:spPr>
           <a:xfrm>
-            <a:off x="914400" y="1783080"/>
-            <a:ext cx="3657600" cy="457200"/>
-          </a:xfrm>
-          <a:prstGeom prst="rect">
-            <a:avLst/>
-          </a:prstGeom>
-          <a:noFill/>
-          <a:ln/>
-        </p:spPr>
-        <p:txBody>
-          <a:bodyPr wrap="square" lIns="0" tIns="0" rIns="0" bIns="0" rtlCol="0" anchor="ctr"/>
-          <a:lstStyle/>
-          <a:p>
-            <a:pPr indent="0" marL="0">
-              <a:buNone/>
-            </a:pPr>
-            <a:r>
-              <a:rPr lang="en-US" sz="1700" dirty="0">
+            <a:off x="2377440" y="1783080"/>
+            <a:ext cx="5760720" cy="548640"/>
+          </a:xfrm>
+          <a:prstGeom prst="rect">
+            <a:avLst/>
+          </a:prstGeom>
+          <a:noFill/>
+          <a:ln/>
+        </p:spPr>
+        <p:txBody>
+          <a:bodyPr wrap="square" lIns="0" tIns="0" rIns="0" bIns="0" rtlCol="0" anchor="ctr"/>
+          <a:lstStyle/>
+          <a:p>
+            <a:pPr indent="0" marL="0">
+              <a:buNone/>
+            </a:pPr>
+            <a:r>
+              <a:rPr lang="en-US" sz="1800" dirty="0">
                 <a:solidFill>
                   <a:srgbClr val="3B3634"/>
                 </a:solidFill>
@@ -15307,9 +15299,9 @@
                 <a:ea typeface="Yu Gothic" pitchFamily="34" charset="-122"/>
                 <a:cs typeface="Yu Gothic" pitchFamily="34" charset="-120"/>
               </a:rPr>
-              <a:t>自分の崩れ方を知る</a:t>
-            </a:r>
-            <a:endParaRPr lang="en-US" sz="1700" dirty="0"/>
+              <a:t>完全1対1／Zoom</a:t>
+            </a:r>
+            <a:endParaRPr lang="en-US" sz="1800" dirty="0"/>
           </a:p>
         </p:txBody>
       </p:sp>
@@ -15321,18 +15313,20 @@
         </p:nvSpPr>
         <p:spPr>
           <a:xfrm>
-            <a:off x="457200" y="2450592"/>
-            <a:ext cx="329184" cy="329184"/>
-          </a:xfrm>
-          <a:prstGeom prst="ellipse">
-            <a:avLst/>
+            <a:off x="457200" y="2423160"/>
+            <a:ext cx="7863840" cy="548640"/>
+          </a:xfrm>
+          <a:prstGeom prst="roundRect">
+            <a:avLst>
+              <a:gd name="adj" fmla="val 10000"/>
+            </a:avLst>
           </a:prstGeom>
           <a:solidFill>
-            <a:srgbClr val="7A1524"/>
+            <a:srgbClr val="FAF3F4"/>
           </a:solidFill>
           <a:ln w="12700">
             <a:solidFill>
-              <a:srgbClr val="7A1524"/>
+              <a:srgbClr val="FAF3F4"/>
             </a:solidFill>
             <a:prstDash val="solid"/>
           </a:ln>
@@ -15346,34 +15340,34 @@
         </p:nvSpPr>
         <p:spPr>
           <a:xfrm>
-            <a:off x="457200" y="2450592"/>
-            <a:ext cx="329184" cy="329184"/>
-          </a:xfrm>
-          <a:prstGeom prst="rect">
-            <a:avLst/>
-          </a:prstGeom>
-          <a:noFill/>
-          <a:ln/>
-        </p:spPr>
-        <p:txBody>
-          <a:bodyPr wrap="square" lIns="0" tIns="0" rIns="0" bIns="0" rtlCol="0" anchor="ctr"/>
-          <a:lstStyle/>
-          <a:p>
-            <a:pPr algn="ctr" indent="0" marL="0">
-              <a:buNone/>
-            </a:pPr>
-            <a:r>
-              <a:rPr lang="en-US" sz="1300" b="1" dirty="0">
-                <a:solidFill>
-                  <a:srgbClr val="FFFFFF"/>
-                </a:solidFill>
-                <a:latin typeface="Yu Gothic" pitchFamily="34" charset="0"/>
-                <a:ea typeface="Yu Gothic" pitchFamily="34" charset="-122"/>
-                <a:cs typeface="Yu Gothic" pitchFamily="34" charset="-120"/>
-              </a:rPr>
-              <a:t>2</a:t>
-            </a:r>
-            <a:endParaRPr lang="en-US" sz="1300" dirty="0"/>
+            <a:off x="777240" y="2423160"/>
+            <a:ext cx="1554480" cy="548640"/>
+          </a:xfrm>
+          <a:prstGeom prst="rect">
+            <a:avLst/>
+          </a:prstGeom>
+          <a:noFill/>
+          <a:ln/>
+        </p:spPr>
+        <p:txBody>
+          <a:bodyPr wrap="square" lIns="0" tIns="0" rIns="0" bIns="0" rtlCol="0" anchor="ctr"/>
+          <a:lstStyle/>
+          <a:p>
+            <a:pPr indent="0" marL="0">
+              <a:buNone/>
+            </a:pPr>
+            <a:r>
+              <a:rPr lang="en-US" sz="1700" b="1" dirty="0">
+                <a:solidFill>
+                  <a:srgbClr val="7A1524"/>
+                </a:solidFill>
+                <a:latin typeface="Yu Gothic" pitchFamily="34" charset="0"/>
+                <a:ea typeface="Yu Gothic" pitchFamily="34" charset="-122"/>
+                <a:cs typeface="Yu Gothic" pitchFamily="34" charset="-120"/>
+              </a:rPr>
+              <a:t>回数</a:t>
+            </a:r>
+            <a:endParaRPr lang="en-US" sz="1700" dirty="0"/>
           </a:p>
         </p:txBody>
       </p:sp>
@@ -15385,24 +15379,24 @@
         </p:nvSpPr>
         <p:spPr>
           <a:xfrm>
-            <a:off x="914400" y="2386584"/>
-            <a:ext cx="3657600" cy="457200"/>
-          </a:xfrm>
-          <a:prstGeom prst="rect">
-            <a:avLst/>
-          </a:prstGeom>
-          <a:noFill/>
-          <a:ln/>
-        </p:spPr>
-        <p:txBody>
-          <a:bodyPr wrap="square" lIns="0" tIns="0" rIns="0" bIns="0" rtlCol="0" anchor="ctr"/>
-          <a:lstStyle/>
-          <a:p>
-            <a:pPr indent="0" marL="0">
-              <a:buNone/>
-            </a:pPr>
-            <a:r>
-              <a:rPr lang="en-US" sz="1700" dirty="0">
+            <a:off x="2377440" y="2423160"/>
+            <a:ext cx="5760720" cy="548640"/>
+          </a:xfrm>
+          <a:prstGeom prst="rect">
+            <a:avLst/>
+          </a:prstGeom>
+          <a:noFill/>
+          <a:ln/>
+        </p:spPr>
+        <p:txBody>
+          <a:bodyPr wrap="square" lIns="0" tIns="0" rIns="0" bIns="0" rtlCol="0" anchor="ctr"/>
+          <a:lstStyle/>
+          <a:p>
+            <a:pPr indent="0" marL="0">
+              <a:buNone/>
+            </a:pPr>
+            <a:r>
+              <a:rPr lang="en-US" sz="1800" dirty="0">
                 <a:solidFill>
                   <a:srgbClr val="3B3634"/>
                 </a:solidFill>
@@ -15410,9 +15404,9 @@
                 <a:ea typeface="Yu Gothic" pitchFamily="34" charset="-122"/>
                 <a:cs typeface="Yu Gothic" pitchFamily="34" charset="-120"/>
               </a:rPr>
-              <a:t>取りたい記録から逆算する</a:t>
-            </a:r>
-            <a:endParaRPr lang="en-US" sz="1700" dirty="0"/>
+              <a:t>全10回（1回60分）</a:t>
+            </a:r>
+            <a:endParaRPr lang="en-US" sz="1800" dirty="0"/>
           </a:p>
         </p:txBody>
       </p:sp>
@@ -15424,18 +15418,20 @@
         </p:nvSpPr>
         <p:spPr>
           <a:xfrm>
-            <a:off x="457200" y="3054096"/>
-            <a:ext cx="329184" cy="329184"/>
-          </a:xfrm>
-          <a:prstGeom prst="ellipse">
-            <a:avLst/>
+            <a:off x="457200" y="3063240"/>
+            <a:ext cx="7863840" cy="548640"/>
+          </a:xfrm>
+          <a:prstGeom prst="roundRect">
+            <a:avLst>
+              <a:gd name="adj" fmla="val 10000"/>
+            </a:avLst>
           </a:prstGeom>
           <a:solidFill>
-            <a:srgbClr val="7A1524"/>
+            <a:srgbClr val="FAF3F4"/>
           </a:solidFill>
           <a:ln w="12700">
             <a:solidFill>
-              <a:srgbClr val="7A1524"/>
+              <a:srgbClr val="FAF3F4"/>
             </a:solidFill>
             <a:prstDash val="solid"/>
           </a:ln>
@@ -15449,34 +15445,34 @@
         </p:nvSpPr>
         <p:spPr>
           <a:xfrm>
-            <a:off x="457200" y="3054096"/>
-            <a:ext cx="329184" cy="329184"/>
-          </a:xfrm>
-          <a:prstGeom prst="rect">
-            <a:avLst/>
-          </a:prstGeom>
-          <a:noFill/>
-          <a:ln/>
-        </p:spPr>
-        <p:txBody>
-          <a:bodyPr wrap="square" lIns="0" tIns="0" rIns="0" bIns="0" rtlCol="0" anchor="ctr"/>
-          <a:lstStyle/>
-          <a:p>
-            <a:pPr algn="ctr" indent="0" marL="0">
-              <a:buNone/>
-            </a:pPr>
-            <a:r>
-              <a:rPr lang="en-US" sz="1300" b="1" dirty="0">
-                <a:solidFill>
-                  <a:srgbClr val="FFFFFF"/>
-                </a:solidFill>
-                <a:latin typeface="Yu Gothic" pitchFamily="34" charset="0"/>
-                <a:ea typeface="Yu Gothic" pitchFamily="34" charset="-122"/>
-                <a:cs typeface="Yu Gothic" pitchFamily="34" charset="-120"/>
-              </a:rPr>
-              <a:t>3</a:t>
-            </a:r>
-            <a:endParaRPr lang="en-US" sz="1300" dirty="0"/>
+            <a:off x="777240" y="3063240"/>
+            <a:ext cx="1554480" cy="548640"/>
+          </a:xfrm>
+          <a:prstGeom prst="rect">
+            <a:avLst/>
+          </a:prstGeom>
+          <a:noFill/>
+          <a:ln/>
+        </p:spPr>
+        <p:txBody>
+          <a:bodyPr wrap="square" lIns="0" tIns="0" rIns="0" bIns="0" rtlCol="0" anchor="ctr"/>
+          <a:lstStyle/>
+          <a:p>
+            <a:pPr indent="0" marL="0">
+              <a:buNone/>
+            </a:pPr>
+            <a:r>
+              <a:rPr lang="en-US" sz="1700" b="1" dirty="0">
+                <a:solidFill>
+                  <a:srgbClr val="7A1524"/>
+                </a:solidFill>
+                <a:latin typeface="Yu Gothic" pitchFamily="34" charset="0"/>
+                <a:ea typeface="Yu Gothic" pitchFamily="34" charset="-122"/>
+                <a:cs typeface="Yu Gothic" pitchFamily="34" charset="-120"/>
+              </a:rPr>
+              <a:t>期間</a:t>
+            </a:r>
+            <a:endParaRPr lang="en-US" sz="1700" dirty="0"/>
           </a:p>
         </p:txBody>
       </p:sp>
@@ -15488,24 +15484,24 @@
         </p:nvSpPr>
         <p:spPr>
           <a:xfrm>
-            <a:off x="914400" y="2990088"/>
-            <a:ext cx="3657600" cy="457200"/>
-          </a:xfrm>
-          <a:prstGeom prst="rect">
-            <a:avLst/>
-          </a:prstGeom>
-          <a:noFill/>
-          <a:ln/>
-        </p:spPr>
-        <p:txBody>
-          <a:bodyPr wrap="square" lIns="0" tIns="0" rIns="0" bIns="0" rtlCol="0" anchor="ctr"/>
-          <a:lstStyle/>
-          <a:p>
-            <a:pPr indent="0" marL="0">
-              <a:buNone/>
-            </a:pPr>
-            <a:r>
-              <a:rPr lang="en-US" sz="1700" dirty="0">
+            <a:off x="2377440" y="3063240"/>
+            <a:ext cx="5760720" cy="548640"/>
+          </a:xfrm>
+          <a:prstGeom prst="rect">
+            <a:avLst/>
+          </a:prstGeom>
+          <a:noFill/>
+          <a:ln/>
+        </p:spPr>
+        <p:txBody>
+          <a:bodyPr wrap="square" lIns="0" tIns="0" rIns="0" bIns="0" rtlCol="0" anchor="ctr"/>
+          <a:lstStyle/>
+          <a:p>
+            <a:pPr indent="0" marL="0">
+              <a:buNone/>
+            </a:pPr>
+            <a:r>
+              <a:rPr lang="en-US" sz="1800" dirty="0">
                 <a:solidFill>
                   <a:srgbClr val="3B3634"/>
                 </a:solidFill>
@@ -15513,9 +15509,9 @@
                 <a:ea typeface="Yu Gothic" pitchFamily="34" charset="-122"/>
                 <a:cs typeface="Yu Gothic" pitchFamily="34" charset="-120"/>
               </a:rPr>
-              <a:t>プレッシャーを理解する</a:t>
-            </a:r>
-            <a:endParaRPr lang="en-US" sz="1700" dirty="0"/>
+              <a:t>最長3か月</a:t>
+            </a:r>
+            <a:endParaRPr lang="en-US" sz="1800" dirty="0"/>
           </a:p>
         </p:txBody>
       </p:sp>
@@ -15527,18 +15523,20 @@
         </p:nvSpPr>
         <p:spPr>
           <a:xfrm>
-            <a:off x="457200" y="3657600"/>
-            <a:ext cx="329184" cy="329184"/>
-          </a:xfrm>
-          <a:prstGeom prst="ellipse">
-            <a:avLst/>
+            <a:off x="457200" y="3703320"/>
+            <a:ext cx="7863840" cy="548640"/>
+          </a:xfrm>
+          <a:prstGeom prst="roundRect">
+            <a:avLst>
+              <a:gd name="adj" fmla="val 10000"/>
+            </a:avLst>
           </a:prstGeom>
           <a:solidFill>
-            <a:srgbClr val="7A1524"/>
+            <a:srgbClr val="FAF3F4"/>
           </a:solidFill>
           <a:ln w="12700">
             <a:solidFill>
-              <a:srgbClr val="7A1524"/>
+              <a:srgbClr val="FAF3F4"/>
             </a:solidFill>
             <a:prstDash val="solid"/>
           </a:ln>
@@ -15552,34 +15550,34 @@
         </p:nvSpPr>
         <p:spPr>
           <a:xfrm>
-            <a:off x="457200" y="3657600"/>
-            <a:ext cx="329184" cy="329184"/>
-          </a:xfrm>
-          <a:prstGeom prst="rect">
-            <a:avLst/>
-          </a:prstGeom>
-          <a:noFill/>
-          <a:ln/>
-        </p:spPr>
-        <p:txBody>
-          <a:bodyPr wrap="square" lIns="0" tIns="0" rIns="0" bIns="0" rtlCol="0" anchor="ctr"/>
-          <a:lstStyle/>
-          <a:p>
-            <a:pPr algn="ctr" indent="0" marL="0">
-              <a:buNone/>
-            </a:pPr>
-            <a:r>
-              <a:rPr lang="en-US" sz="1300" b="1" dirty="0">
-                <a:solidFill>
-                  <a:srgbClr val="FFFFFF"/>
-                </a:solidFill>
-                <a:latin typeface="Yu Gothic" pitchFamily="34" charset="0"/>
-                <a:ea typeface="Yu Gothic" pitchFamily="34" charset="-122"/>
-                <a:cs typeface="Yu Gothic" pitchFamily="34" charset="-120"/>
-              </a:rPr>
-              <a:t>4</a:t>
-            </a:r>
-            <a:endParaRPr lang="en-US" sz="1300" dirty="0"/>
+            <a:off x="777240" y="3703320"/>
+            <a:ext cx="1554480" cy="548640"/>
+          </a:xfrm>
+          <a:prstGeom prst="rect">
+            <a:avLst/>
+          </a:prstGeom>
+          <a:noFill/>
+          <a:ln/>
+        </p:spPr>
+        <p:txBody>
+          <a:bodyPr wrap="square" lIns="0" tIns="0" rIns="0" bIns="0" rtlCol="0" anchor="ctr"/>
+          <a:lstStyle/>
+          <a:p>
+            <a:pPr indent="0" marL="0">
+              <a:buNone/>
+            </a:pPr>
+            <a:r>
+              <a:rPr lang="en-US" sz="1700" b="1" dirty="0">
+                <a:solidFill>
+                  <a:srgbClr val="7A1524"/>
+                </a:solidFill>
+                <a:latin typeface="Yu Gothic" pitchFamily="34" charset="0"/>
+                <a:ea typeface="Yu Gothic" pitchFamily="34" charset="-122"/>
+                <a:cs typeface="Yu Gothic" pitchFamily="34" charset="-120"/>
+              </a:rPr>
+              <a:t>ペース</a:t>
+            </a:r>
+            <a:endParaRPr lang="en-US" sz="1700" dirty="0"/>
           </a:p>
         </p:txBody>
       </p:sp>
@@ -15591,24 +15589,24 @@
         </p:nvSpPr>
         <p:spPr>
           <a:xfrm>
-            <a:off x="914400" y="3593592"/>
-            <a:ext cx="3657600" cy="457200"/>
-          </a:xfrm>
-          <a:prstGeom prst="rect">
-            <a:avLst/>
-          </a:prstGeom>
-          <a:noFill/>
-          <a:ln/>
-        </p:spPr>
-        <p:txBody>
-          <a:bodyPr wrap="square" lIns="0" tIns="0" rIns="0" bIns="0" rtlCol="0" anchor="ctr"/>
-          <a:lstStyle/>
-          <a:p>
-            <a:pPr indent="0" marL="0">
-              <a:buNone/>
-            </a:pPr>
-            <a:r>
-              <a:rPr lang="en-US" sz="1700" dirty="0">
+            <a:off x="2377440" y="3703320"/>
+            <a:ext cx="5760720" cy="548640"/>
+          </a:xfrm>
+          <a:prstGeom prst="rect">
+            <a:avLst/>
+          </a:prstGeom>
+          <a:noFill/>
+          <a:ln/>
+        </p:spPr>
+        <p:txBody>
+          <a:bodyPr wrap="square" lIns="0" tIns="0" rIns="0" bIns="0" rtlCol="0" anchor="ctr"/>
+          <a:lstStyle/>
+          <a:p>
+            <a:pPr indent="0" marL="0">
+              <a:buNone/>
+            </a:pPr>
+            <a:r>
+              <a:rPr lang="en-US" sz="1800" dirty="0">
                 <a:solidFill>
                   <a:srgbClr val="3B3634"/>
                 </a:solidFill>
@@ -15616,627 +15614,65 @@
                 <a:ea typeface="Yu Gothic" pitchFamily="34" charset="-122"/>
                 <a:cs typeface="Yu Gothic" pitchFamily="34" charset="-120"/>
               </a:rPr>
-              <a:t>自分だけのルーティン</a:t>
-            </a:r>
-            <a:endParaRPr lang="en-US" sz="1700" dirty="0"/>
-          </a:p>
-        </p:txBody>
-      </p:sp>
-      <p:sp>
-        <p:nvSpPr>
-          <p:cNvPr id="17" name="Shape 15"/>
-          <p:cNvSpPr/>
-          <p:nvPr/>
-        </p:nvSpPr>
-        <p:spPr>
-          <a:xfrm>
-            <a:off x="457200" y="4261104"/>
-            <a:ext cx="329184" cy="329184"/>
-          </a:xfrm>
-          <a:prstGeom prst="ellipse">
-            <a:avLst/>
-          </a:prstGeom>
-          <a:solidFill>
-            <a:srgbClr val="7A1524"/>
-          </a:solidFill>
-          <a:ln w="12700">
-            <a:solidFill>
-              <a:srgbClr val="7A1524"/>
-            </a:solidFill>
-            <a:prstDash val="solid"/>
-          </a:ln>
-        </p:spPr>
-      </p:sp>
-      <p:sp>
-        <p:nvSpPr>
-          <p:cNvPr id="18" name="Text 16"/>
-          <p:cNvSpPr txBox="1"/>
-          <p:nvPr/>
-        </p:nvSpPr>
-        <p:spPr>
-          <a:xfrm>
-            <a:off x="457200" y="4261104"/>
-            <a:ext cx="329184" cy="329184"/>
-          </a:xfrm>
-          <a:prstGeom prst="rect">
-            <a:avLst/>
-          </a:prstGeom>
-          <a:noFill/>
-          <a:ln/>
-        </p:spPr>
-        <p:txBody>
-          <a:bodyPr wrap="square" lIns="0" tIns="0" rIns="0" bIns="0" rtlCol="0" anchor="ctr"/>
-          <a:lstStyle/>
-          <a:p>
-            <a:pPr algn="ctr" indent="0" marL="0">
-              <a:buNone/>
-            </a:pPr>
-            <a:r>
-              <a:rPr lang="en-US" sz="1300" b="1" dirty="0">
-                <a:solidFill>
-                  <a:srgbClr val="FFFFFF"/>
-                </a:solidFill>
-                <a:latin typeface="Yu Gothic" pitchFamily="34" charset="0"/>
-                <a:ea typeface="Yu Gothic" pitchFamily="34" charset="-122"/>
-                <a:cs typeface="Yu Gothic" pitchFamily="34" charset="-120"/>
-              </a:rPr>
-              <a:t>5</a:t>
-            </a:r>
-            <a:endParaRPr lang="en-US" sz="1300" dirty="0"/>
-          </a:p>
-        </p:txBody>
-      </p:sp>
-      <p:sp>
-        <p:nvSpPr>
-          <p:cNvPr id="19" name="Text 17"/>
-          <p:cNvSpPr txBox="1"/>
-          <p:nvPr/>
-        </p:nvSpPr>
-        <p:spPr>
-          <a:xfrm>
-            <a:off x="914400" y="4197096"/>
-            <a:ext cx="3657600" cy="457200"/>
-          </a:xfrm>
-          <a:prstGeom prst="rect">
-            <a:avLst/>
-          </a:prstGeom>
-          <a:noFill/>
-          <a:ln/>
-        </p:spPr>
-        <p:txBody>
-          <a:bodyPr wrap="square" lIns="0" tIns="0" rIns="0" bIns="0" rtlCol="0" anchor="ctr"/>
-          <a:lstStyle/>
-          <a:p>
-            <a:pPr indent="0" marL="0">
-              <a:buNone/>
-            </a:pPr>
-            <a:r>
-              <a:rPr lang="en-US" sz="1700" dirty="0">
-                <a:solidFill>
-                  <a:srgbClr val="3B3634"/>
-                </a:solidFill>
-                <a:latin typeface="Yu Gothic" pitchFamily="34" charset="0"/>
-                <a:ea typeface="Yu Gothic" pitchFamily="34" charset="-122"/>
-                <a:cs typeface="Yu Gothic" pitchFamily="34" charset="-120"/>
-              </a:rPr>
-              <a:t>失敗しても崩れない</a:t>
-            </a:r>
-            <a:endParaRPr lang="en-US" sz="1700" dirty="0"/>
-          </a:p>
-        </p:txBody>
-      </p:sp>
-      <p:sp>
-        <p:nvSpPr>
-          <p:cNvPr id="20" name="Shape 18"/>
-          <p:cNvSpPr/>
-          <p:nvPr/>
-        </p:nvSpPr>
-        <p:spPr>
-          <a:xfrm>
-            <a:off x="4800600" y="1847088"/>
-            <a:ext cx="329184" cy="329184"/>
-          </a:xfrm>
-          <a:prstGeom prst="ellipse">
-            <a:avLst/>
-          </a:prstGeom>
-          <a:solidFill>
-            <a:srgbClr val="7A1524"/>
-          </a:solidFill>
-          <a:ln w="12700">
-            <a:solidFill>
-              <a:srgbClr val="7A1524"/>
-            </a:solidFill>
-            <a:prstDash val="solid"/>
-          </a:ln>
-        </p:spPr>
-      </p:sp>
-      <p:sp>
-        <p:nvSpPr>
-          <p:cNvPr id="21" name="Text 19"/>
-          <p:cNvSpPr txBox="1"/>
-          <p:nvPr/>
-        </p:nvSpPr>
-        <p:spPr>
-          <a:xfrm>
-            <a:off x="4800600" y="1847088"/>
-            <a:ext cx="329184" cy="329184"/>
-          </a:xfrm>
-          <a:prstGeom prst="rect">
-            <a:avLst/>
-          </a:prstGeom>
-          <a:noFill/>
-          <a:ln/>
-        </p:spPr>
-        <p:txBody>
-          <a:bodyPr wrap="square" lIns="0" tIns="0" rIns="0" bIns="0" rtlCol="0" anchor="ctr"/>
-          <a:lstStyle/>
-          <a:p>
-            <a:pPr algn="ctr" indent="0" marL="0">
-              <a:buNone/>
-            </a:pPr>
-            <a:r>
-              <a:rPr lang="en-US" sz="1300" b="1" dirty="0">
-                <a:solidFill>
-                  <a:srgbClr val="FFFFFF"/>
-                </a:solidFill>
-                <a:latin typeface="Yu Gothic" pitchFamily="34" charset="0"/>
-                <a:ea typeface="Yu Gothic" pitchFamily="34" charset="-122"/>
-                <a:cs typeface="Yu Gothic" pitchFamily="34" charset="-120"/>
-              </a:rPr>
-              <a:t>6</a:t>
-            </a:r>
-            <a:endParaRPr lang="en-US" sz="1300" dirty="0"/>
-          </a:p>
-        </p:txBody>
-      </p:sp>
-      <p:sp>
-        <p:nvSpPr>
-          <p:cNvPr id="22" name="Text 20"/>
-          <p:cNvSpPr txBox="1"/>
-          <p:nvPr/>
-        </p:nvSpPr>
-        <p:spPr>
-          <a:xfrm>
-            <a:off x="5257800" y="1783080"/>
-            <a:ext cx="3657600" cy="457200"/>
-          </a:xfrm>
-          <a:prstGeom prst="rect">
-            <a:avLst/>
-          </a:prstGeom>
-          <a:noFill/>
-          <a:ln/>
-        </p:spPr>
-        <p:txBody>
-          <a:bodyPr wrap="square" lIns="0" tIns="0" rIns="0" bIns="0" rtlCol="0" anchor="ctr"/>
-          <a:lstStyle/>
-          <a:p>
-            <a:pPr indent="0" marL="0">
-              <a:buNone/>
-            </a:pPr>
-            <a:r>
-              <a:rPr lang="en-US" sz="1700" dirty="0">
-                <a:solidFill>
-                  <a:srgbClr val="3B3634"/>
-                </a:solidFill>
-                <a:latin typeface="Yu Gothic" pitchFamily="34" charset="0"/>
-                <a:ea typeface="Yu Gothic" pitchFamily="34" charset="-122"/>
-                <a:cs typeface="Yu Gothic" pitchFamily="34" charset="-120"/>
-              </a:rPr>
-              <a:t>自分の試合に集中する</a:t>
-            </a:r>
-            <a:endParaRPr lang="en-US" sz="1700" dirty="0"/>
-          </a:p>
-        </p:txBody>
-      </p:sp>
-      <p:sp>
-        <p:nvSpPr>
-          <p:cNvPr id="23" name="Shape 21"/>
-          <p:cNvSpPr/>
-          <p:nvPr/>
-        </p:nvSpPr>
-        <p:spPr>
-          <a:xfrm>
-            <a:off x="4800600" y="2450592"/>
-            <a:ext cx="329184" cy="329184"/>
-          </a:xfrm>
-          <a:prstGeom prst="ellipse">
-            <a:avLst/>
-          </a:prstGeom>
-          <a:solidFill>
-            <a:srgbClr val="7A1524"/>
-          </a:solidFill>
-          <a:ln w="12700">
-            <a:solidFill>
-              <a:srgbClr val="7A1524"/>
-            </a:solidFill>
-            <a:prstDash val="solid"/>
-          </a:ln>
-        </p:spPr>
-      </p:sp>
-      <p:sp>
-        <p:nvSpPr>
-          <p:cNvPr id="24" name="Text 22"/>
-          <p:cNvSpPr txBox="1"/>
-          <p:nvPr/>
-        </p:nvSpPr>
-        <p:spPr>
-          <a:xfrm>
-            <a:off x="4800600" y="2450592"/>
-            <a:ext cx="329184" cy="329184"/>
-          </a:xfrm>
-          <a:prstGeom prst="rect">
-            <a:avLst/>
-          </a:prstGeom>
-          <a:noFill/>
-          <a:ln/>
-        </p:spPr>
-        <p:txBody>
-          <a:bodyPr wrap="square" lIns="0" tIns="0" rIns="0" bIns="0" rtlCol="0" anchor="ctr"/>
-          <a:lstStyle/>
-          <a:p>
-            <a:pPr algn="ctr" indent="0" marL="0">
-              <a:buNone/>
-            </a:pPr>
-            <a:r>
-              <a:rPr lang="en-US" sz="1300" b="1" dirty="0">
-                <a:solidFill>
-                  <a:srgbClr val="FFFFFF"/>
-                </a:solidFill>
-                <a:latin typeface="Yu Gothic" pitchFamily="34" charset="0"/>
-                <a:ea typeface="Yu Gothic" pitchFamily="34" charset="-122"/>
-                <a:cs typeface="Yu Gothic" pitchFamily="34" charset="-120"/>
-              </a:rPr>
-              <a:t>7</a:t>
-            </a:r>
-            <a:endParaRPr lang="en-US" sz="1300" dirty="0"/>
-          </a:p>
-        </p:txBody>
-      </p:sp>
-      <p:sp>
-        <p:nvSpPr>
-          <p:cNvPr id="25" name="Text 23"/>
-          <p:cNvSpPr txBox="1"/>
-          <p:nvPr/>
-        </p:nvSpPr>
-        <p:spPr>
-          <a:xfrm>
-            <a:off x="5257800" y="2386584"/>
-            <a:ext cx="3657600" cy="457200"/>
-          </a:xfrm>
-          <a:prstGeom prst="rect">
-            <a:avLst/>
-          </a:prstGeom>
-          <a:noFill/>
-          <a:ln/>
-        </p:spPr>
-        <p:txBody>
-          <a:bodyPr wrap="square" lIns="0" tIns="0" rIns="0" bIns="0" rtlCol="0" anchor="ctr"/>
-          <a:lstStyle/>
-          <a:p>
-            <a:pPr indent="0" marL="0">
-              <a:buNone/>
-            </a:pPr>
-            <a:r>
-              <a:rPr lang="en-US" sz="1700" dirty="0">
-                <a:solidFill>
-                  <a:srgbClr val="3B3634"/>
-                </a:solidFill>
-                <a:latin typeface="Yu Gothic" pitchFamily="34" charset="0"/>
-                <a:ea typeface="Yu Gothic" pitchFamily="34" charset="-122"/>
-                <a:cs typeface="Yu Gothic" pitchFamily="34" charset="-120"/>
-              </a:rPr>
-              <a:t>頑張る・休むを選ぶ</a:t>
-            </a:r>
-            <a:endParaRPr lang="en-US" sz="1700" dirty="0"/>
-          </a:p>
-        </p:txBody>
-      </p:sp>
-      <p:sp>
-        <p:nvSpPr>
-          <p:cNvPr id="26" name="Shape 24"/>
-          <p:cNvSpPr/>
-          <p:nvPr/>
-        </p:nvSpPr>
-        <p:spPr>
-          <a:xfrm>
-            <a:off x="4800600" y="3054096"/>
-            <a:ext cx="329184" cy="329184"/>
-          </a:xfrm>
-          <a:prstGeom prst="ellipse">
-            <a:avLst/>
-          </a:prstGeom>
-          <a:solidFill>
-            <a:srgbClr val="7A1524"/>
-          </a:solidFill>
-          <a:ln w="12700">
-            <a:solidFill>
-              <a:srgbClr val="7A1524"/>
-            </a:solidFill>
-            <a:prstDash val="solid"/>
-          </a:ln>
-        </p:spPr>
-      </p:sp>
-      <p:sp>
-        <p:nvSpPr>
-          <p:cNvPr id="27" name="Text 25"/>
-          <p:cNvSpPr txBox="1"/>
-          <p:nvPr/>
-        </p:nvSpPr>
-        <p:spPr>
-          <a:xfrm>
-            <a:off x="4800600" y="3054096"/>
-            <a:ext cx="329184" cy="329184"/>
-          </a:xfrm>
-          <a:prstGeom prst="rect">
-            <a:avLst/>
-          </a:prstGeom>
-          <a:noFill/>
-          <a:ln/>
-        </p:spPr>
-        <p:txBody>
-          <a:bodyPr wrap="square" lIns="0" tIns="0" rIns="0" bIns="0" rtlCol="0" anchor="ctr"/>
-          <a:lstStyle/>
-          <a:p>
-            <a:pPr algn="ctr" indent="0" marL="0">
-              <a:buNone/>
-            </a:pPr>
-            <a:r>
-              <a:rPr lang="en-US" sz="1300" b="1" dirty="0">
-                <a:solidFill>
-                  <a:srgbClr val="FFFFFF"/>
-                </a:solidFill>
-                <a:latin typeface="Yu Gothic" pitchFamily="34" charset="0"/>
-                <a:ea typeface="Yu Gothic" pitchFamily="34" charset="-122"/>
-                <a:cs typeface="Yu Gothic" pitchFamily="34" charset="-120"/>
-              </a:rPr>
-              <a:t>8</a:t>
-            </a:r>
-            <a:endParaRPr lang="en-US" sz="1300" dirty="0"/>
-          </a:p>
-        </p:txBody>
-      </p:sp>
-      <p:sp>
-        <p:nvSpPr>
-          <p:cNvPr id="28" name="Text 26"/>
-          <p:cNvSpPr txBox="1"/>
-          <p:nvPr/>
-        </p:nvSpPr>
-        <p:spPr>
-          <a:xfrm>
-            <a:off x="5257800" y="2990088"/>
-            <a:ext cx="3657600" cy="457200"/>
-          </a:xfrm>
-          <a:prstGeom prst="rect">
-            <a:avLst/>
-          </a:prstGeom>
-          <a:noFill/>
-          <a:ln/>
-        </p:spPr>
-        <p:txBody>
-          <a:bodyPr wrap="square" lIns="0" tIns="0" rIns="0" bIns="0" rtlCol="0" anchor="ctr"/>
-          <a:lstStyle/>
-          <a:p>
-            <a:pPr indent="0" marL="0">
-              <a:buNone/>
-            </a:pPr>
-            <a:r>
-              <a:rPr lang="en-US" sz="1700" dirty="0">
-                <a:solidFill>
-                  <a:srgbClr val="3B3634"/>
-                </a:solidFill>
-                <a:latin typeface="Yu Gothic" pitchFamily="34" charset="0"/>
-                <a:ea typeface="Yu Gothic" pitchFamily="34" charset="-122"/>
-                <a:cs typeface="Yu Gothic" pitchFamily="34" charset="-120"/>
-              </a:rPr>
-              <a:t>自己信頼を育てる</a:t>
-            </a:r>
-            <a:endParaRPr lang="en-US" sz="1700" dirty="0"/>
-          </a:p>
-        </p:txBody>
-      </p:sp>
-      <p:sp>
-        <p:nvSpPr>
-          <p:cNvPr id="29" name="Shape 27"/>
-          <p:cNvSpPr/>
-          <p:nvPr/>
-        </p:nvSpPr>
-        <p:spPr>
-          <a:xfrm>
-            <a:off x="4800600" y="3657600"/>
-            <a:ext cx="329184" cy="329184"/>
-          </a:xfrm>
-          <a:prstGeom prst="ellipse">
-            <a:avLst/>
-          </a:prstGeom>
-          <a:solidFill>
-            <a:srgbClr val="7A1524"/>
-          </a:solidFill>
-          <a:ln w="12700">
-            <a:solidFill>
-              <a:srgbClr val="7A1524"/>
-            </a:solidFill>
-            <a:prstDash val="solid"/>
-          </a:ln>
-        </p:spPr>
-      </p:sp>
-      <p:sp>
-        <p:nvSpPr>
-          <p:cNvPr id="30" name="Text 28"/>
-          <p:cNvSpPr txBox="1"/>
-          <p:nvPr/>
-        </p:nvSpPr>
-        <p:spPr>
-          <a:xfrm>
-            <a:off x="4800600" y="3657600"/>
-            <a:ext cx="329184" cy="329184"/>
-          </a:xfrm>
-          <a:prstGeom prst="rect">
-            <a:avLst/>
-          </a:prstGeom>
-          <a:noFill/>
-          <a:ln/>
-        </p:spPr>
-        <p:txBody>
-          <a:bodyPr wrap="square" lIns="0" tIns="0" rIns="0" bIns="0" rtlCol="0" anchor="ctr"/>
-          <a:lstStyle/>
-          <a:p>
-            <a:pPr algn="ctr" indent="0" marL="0">
-              <a:buNone/>
-            </a:pPr>
-            <a:r>
-              <a:rPr lang="en-US" sz="1300" b="1" dirty="0">
-                <a:solidFill>
-                  <a:srgbClr val="FFFFFF"/>
-                </a:solidFill>
-                <a:latin typeface="Yu Gothic" pitchFamily="34" charset="0"/>
-                <a:ea typeface="Yu Gothic" pitchFamily="34" charset="-122"/>
-                <a:cs typeface="Yu Gothic" pitchFamily="34" charset="-120"/>
-              </a:rPr>
-              <a:t>9</a:t>
-            </a:r>
-            <a:endParaRPr lang="en-US" sz="1300" dirty="0"/>
-          </a:p>
-        </p:txBody>
-      </p:sp>
-      <p:sp>
-        <p:nvSpPr>
-          <p:cNvPr id="31" name="Text 29"/>
-          <p:cNvSpPr txBox="1"/>
-          <p:nvPr/>
-        </p:nvSpPr>
-        <p:spPr>
-          <a:xfrm>
-            <a:off x="5257800" y="3593592"/>
-            <a:ext cx="3657600" cy="457200"/>
-          </a:xfrm>
-          <a:prstGeom prst="rect">
-            <a:avLst/>
-          </a:prstGeom>
-          <a:noFill/>
-          <a:ln/>
-        </p:spPr>
-        <p:txBody>
-          <a:bodyPr wrap="square" lIns="0" tIns="0" rIns="0" bIns="0" rtlCol="0" anchor="ctr"/>
-          <a:lstStyle/>
-          <a:p>
-            <a:pPr indent="0" marL="0">
-              <a:buNone/>
-            </a:pPr>
-            <a:r>
-              <a:rPr lang="en-US" sz="1700" dirty="0">
-                <a:solidFill>
-                  <a:srgbClr val="3B3634"/>
-                </a:solidFill>
-                <a:latin typeface="Yu Gothic" pitchFamily="34" charset="0"/>
-                <a:ea typeface="Yu Gothic" pitchFamily="34" charset="-122"/>
-                <a:cs typeface="Yu Gothic" pitchFamily="34" charset="-120"/>
-              </a:rPr>
-              <a:t>プランBを持つ</a:t>
-            </a:r>
-            <a:endParaRPr lang="en-US" sz="1700" dirty="0"/>
-          </a:p>
-        </p:txBody>
-      </p:sp>
-      <p:sp>
-        <p:nvSpPr>
-          <p:cNvPr id="32" name="Shape 30"/>
-          <p:cNvSpPr/>
-          <p:nvPr/>
-        </p:nvSpPr>
-        <p:spPr>
-          <a:xfrm>
-            <a:off x="4800600" y="4261104"/>
-            <a:ext cx="329184" cy="329184"/>
-          </a:xfrm>
-          <a:prstGeom prst="ellipse">
-            <a:avLst/>
-          </a:prstGeom>
-          <a:solidFill>
-            <a:srgbClr val="7A1524"/>
-          </a:solidFill>
-          <a:ln w="12700">
-            <a:solidFill>
-              <a:srgbClr val="7A1524"/>
-            </a:solidFill>
-            <a:prstDash val="solid"/>
-          </a:ln>
-        </p:spPr>
-      </p:sp>
-      <p:sp>
-        <p:nvSpPr>
-          <p:cNvPr id="33" name="Text 31"/>
-          <p:cNvSpPr txBox="1"/>
-          <p:nvPr/>
-        </p:nvSpPr>
-        <p:spPr>
-          <a:xfrm>
-            <a:off x="4800600" y="4261104"/>
-            <a:ext cx="329184" cy="329184"/>
-          </a:xfrm>
-          <a:prstGeom prst="rect">
-            <a:avLst/>
-          </a:prstGeom>
-          <a:noFill/>
-          <a:ln/>
-        </p:spPr>
-        <p:txBody>
-          <a:bodyPr wrap="square" lIns="0" tIns="0" rIns="0" bIns="0" rtlCol="0" anchor="ctr"/>
-          <a:lstStyle/>
-          <a:p>
-            <a:pPr algn="ctr" indent="0" marL="0">
-              <a:buNone/>
-            </a:pPr>
-            <a:r>
-              <a:rPr lang="en-US" sz="1300" b="1" dirty="0">
-                <a:solidFill>
-                  <a:srgbClr val="FFFFFF"/>
-                </a:solidFill>
-                <a:latin typeface="Yu Gothic" pitchFamily="34" charset="0"/>
-                <a:ea typeface="Yu Gothic" pitchFamily="34" charset="-122"/>
-                <a:cs typeface="Yu Gothic" pitchFamily="34" charset="-120"/>
-              </a:rPr>
-              <a:t>10</a:t>
-            </a:r>
-            <a:endParaRPr lang="en-US" sz="1300" dirty="0"/>
-          </a:p>
-        </p:txBody>
-      </p:sp>
-      <p:sp>
-        <p:nvSpPr>
-          <p:cNvPr id="34" name="Text 32"/>
-          <p:cNvSpPr txBox="1"/>
-          <p:nvPr/>
-        </p:nvSpPr>
-        <p:spPr>
-          <a:xfrm>
-            <a:off x="5257800" y="4197096"/>
-            <a:ext cx="3657600" cy="457200"/>
-          </a:xfrm>
-          <a:prstGeom prst="rect">
-            <a:avLst/>
-          </a:prstGeom>
-          <a:noFill/>
-          <a:ln/>
-        </p:spPr>
-        <p:txBody>
-          <a:bodyPr wrap="square" lIns="0" tIns="0" rIns="0" bIns="0" rtlCol="0" anchor="ctr"/>
-          <a:lstStyle/>
-          <a:p>
-            <a:pPr indent="0" marL="0">
-              <a:buNone/>
-            </a:pPr>
-            <a:r>
-              <a:rPr lang="en-US" sz="1700" dirty="0">
-                <a:solidFill>
-                  <a:srgbClr val="3B3634"/>
-                </a:solidFill>
-                <a:latin typeface="Yu Gothic" pitchFamily="34" charset="0"/>
-                <a:ea typeface="Yu Gothic" pitchFamily="34" charset="-122"/>
-                <a:cs typeface="Yu Gothic" pitchFamily="34" charset="-120"/>
-              </a:rPr>
-              <a:t>自分だけの大会メンタルプラン</a:t>
-            </a:r>
-            <a:endParaRPr lang="en-US" sz="1700" dirty="0"/>
+              <a:t>試合日程に合わせて調整</a:t>
+            </a:r>
+            <a:endParaRPr lang="en-US" sz="1800" dirty="0"/>
+          </a:p>
+        </p:txBody>
+      </p:sp>
+      <p:sp>
+        <p:nvSpPr>
+          <p:cNvPr id="17" name="Text 15"/>
+          <p:cNvSpPr txBox="1"/>
+          <p:nvPr/>
+        </p:nvSpPr>
+        <p:spPr>
+          <a:xfrm>
+            <a:off x="457200" y="4389120"/>
+            <a:ext cx="7863840" cy="548640"/>
+          </a:xfrm>
+          <a:prstGeom prst="rect">
+            <a:avLst/>
+          </a:prstGeom>
+          <a:noFill/>
+          <a:ln/>
+        </p:spPr>
+        <p:txBody>
+          <a:bodyPr wrap="square" lIns="0" tIns="0" rIns="0" bIns="0" rtlCol="0" anchor="ctr"/>
+          <a:lstStyle/>
+          <a:p>
+            <a:pPr indent="0" marL="0">
+              <a:buNone/>
+            </a:pPr>
+            <a:r>
+              <a:rPr lang="en-US" sz="1800" b="1" dirty="0">
+                <a:solidFill>
+                  <a:srgbClr val="7A1524"/>
+                </a:solidFill>
+                <a:latin typeface="Yu Gothic" pitchFamily="34" charset="0"/>
+                <a:ea typeface="Yu Gothic" pitchFamily="34" charset="-122"/>
+                <a:cs typeface="Yu Gothic" pitchFamily="34" charset="-120"/>
+              </a:rPr>
+              <a:t>知識を聞くだけではなく、</a:t>
+            </a:r>
+            <a:endParaRPr lang="en-US" sz="1800" dirty="0"/>
+          </a:p>
+          <a:p>
+            <a:pPr indent="0" marL="0">
+              <a:buNone/>
+            </a:pPr>
+            <a:r>
+              <a:rPr lang="en-US" sz="1800" b="1" dirty="0">
+                <a:solidFill>
+                  <a:srgbClr val="7A1524"/>
+                </a:solidFill>
+                <a:latin typeface="Yu Gothic" pitchFamily="34" charset="0"/>
+                <a:ea typeface="Yu Gothic" pitchFamily="34" charset="-122"/>
+                <a:cs typeface="Yu Gothic" pitchFamily="34" charset="-120"/>
+              </a:rPr>
+              <a:t>「あなたならどうする？」まで一緒につくります。</a:t>
+            </a:r>
+            <a:endParaRPr lang="en-US" sz="1800" dirty="0"/>
           </a:p>
         </p:txBody>
       </p:sp>
@@ -16251,6 +15687,1188 @@
 <file path=ppt/slides/slide33.xml><?xml version="1.0" encoding="utf-8"?>
 <p:sld xmlns:a="http://schemas.openxmlformats.org/drawingml/2006/main" xmlns:r="http://schemas.openxmlformats.org/officeDocument/2006/relationships" xmlns:p="http://schemas.openxmlformats.org/presentationml/2006/main">
   <p:cSld name="Slide 33">
+    <p:bg>
+      <p:bgPr>
+        <a:solidFill>
+          <a:srgbClr val="FFFFFF"/>
+        </a:solidFill>
+      </p:bgPr>
+    </p:bg>
+    <p:spTree>
+      <p:nvGrpSpPr>
+        <p:cNvPr id="1" name=""/>
+        <p:cNvGrpSpPr/>
+        <p:nvPr/>
+      </p:nvGrpSpPr>
+      <p:grpSpPr>
+        <a:xfrm>
+          <a:off x="0" y="0"/>
+          <a:ext cx="0" cy="0"/>
+          <a:chOff x="0" y="0"/>
+          <a:chExt cx="0" cy="0"/>
+        </a:xfrm>
+      </p:grpSpPr>
+      <p:sp>
+        <p:nvSpPr>
+          <p:cNvPr id="2" name="Text 0"/>
+          <p:cNvSpPr txBox="1"/>
+          <p:nvPr/>
+        </p:nvSpPr>
+        <p:spPr>
+          <a:xfrm>
+            <a:off x="457200" y="237744"/>
+            <a:ext cx="5486400" cy="274320"/>
+          </a:xfrm>
+          <a:prstGeom prst="rect">
+            <a:avLst/>
+          </a:prstGeom>
+          <a:noFill/>
+          <a:ln/>
+        </p:spPr>
+        <p:txBody>
+          <a:bodyPr wrap="square" lIns="0" tIns="0" rIns="0" bIns="0" rtlCol="0" anchor="ctr"/>
+          <a:lstStyle/>
+          <a:p>
+            <a:pPr indent="0" marL="0">
+              <a:buNone/>
+            </a:pPr>
+            <a:r>
+              <a:rPr lang="en-US" sz="1200" b="1" spc="200" kern="0" dirty="0">
+                <a:solidFill>
+                  <a:srgbClr val="7A1524"/>
+                </a:solidFill>
+                <a:latin typeface="Yu Gothic" pitchFamily="34" charset="0"/>
+                <a:ea typeface="Yu Gothic" pitchFamily="34" charset="-122"/>
+                <a:cs typeface="Yu Gothic" pitchFamily="34" charset="-120"/>
+              </a:rPr>
+              <a:t>PHASE 7　講座のご案内</a:t>
+            </a:r>
+            <a:endParaRPr lang="en-US" sz="1200" dirty="0"/>
+          </a:p>
+        </p:txBody>
+      </p:sp>
+      <p:sp>
+        <p:nvSpPr>
+          <p:cNvPr id="3" name="Text 1"/>
+          <p:cNvSpPr txBox="1"/>
+          <p:nvPr/>
+        </p:nvSpPr>
+        <p:spPr>
+          <a:xfrm>
+            <a:off x="8138160" y="4576572"/>
+            <a:ext cx="548640" cy="274320"/>
+          </a:xfrm>
+          <a:prstGeom prst="rect">
+            <a:avLst/>
+          </a:prstGeom>
+          <a:noFill/>
+          <a:ln/>
+        </p:spPr>
+        <p:txBody>
+          <a:bodyPr wrap="square" lIns="0" tIns="0" rIns="0" bIns="0" rtlCol="0" anchor="ctr"/>
+          <a:lstStyle/>
+          <a:p>
+            <a:pPr algn="r" indent="0" marL="0">
+              <a:buNone/>
+            </a:pPr>
+            <a:r>
+              <a:rPr lang="en-US" sz="1100" dirty="0">
+                <a:solidFill>
+                  <a:srgbClr val="6B6360"/>
+                </a:solidFill>
+                <a:latin typeface="Yu Gothic" pitchFamily="34" charset="0"/>
+                <a:ea typeface="Yu Gothic" pitchFamily="34" charset="-122"/>
+                <a:cs typeface="Yu Gothic" pitchFamily="34" charset="-120"/>
+              </a:rPr>
+              <a:t>33</a:t>
+            </a:r>
+            <a:endParaRPr lang="en-US" sz="1100" dirty="0"/>
+          </a:p>
+        </p:txBody>
+      </p:sp>
+      <p:sp>
+        <p:nvSpPr>
+          <p:cNvPr id="4" name="Text 2"/>
+          <p:cNvSpPr txBox="1"/>
+          <p:nvPr/>
+        </p:nvSpPr>
+        <p:spPr>
+          <a:xfrm>
+            <a:off x="457200" y="777240"/>
+            <a:ext cx="8138160" cy="1188720"/>
+          </a:xfrm>
+          <a:prstGeom prst="rect">
+            <a:avLst/>
+          </a:prstGeom>
+          <a:noFill/>
+          <a:ln/>
+        </p:spPr>
+        <p:txBody>
+          <a:bodyPr wrap="square" lIns="0" tIns="0" rIns="0" bIns="0" rtlCol="0" anchor="t"/>
+          <a:lstStyle/>
+          <a:p>
+            <a:pPr algn="l" indent="0" marL="0">
+              <a:lnSpc>
+                <a:spcPts val="4785"/>
+              </a:lnSpc>
+              <a:buNone/>
+            </a:pPr>
+            <a:r>
+              <a:rPr lang="en-US" sz="3300" b="1" dirty="0">
+                <a:solidFill>
+                  <a:srgbClr val="141416"/>
+                </a:solidFill>
+                <a:latin typeface="Yu Mincho" pitchFamily="34" charset="0"/>
+                <a:ea typeface="Yu Mincho" pitchFamily="34" charset="-122"/>
+                <a:cs typeface="Yu Mincho" pitchFamily="34" charset="-120"/>
+              </a:rPr>
+              <a:t>10回で扱うこと</a:t>
+            </a:r>
+            <a:endParaRPr lang="en-US" sz="3300" dirty="0"/>
+          </a:p>
+        </p:txBody>
+      </p:sp>
+      <p:sp>
+        <p:nvSpPr>
+          <p:cNvPr id="5" name="Shape 3"/>
+          <p:cNvSpPr/>
+          <p:nvPr/>
+        </p:nvSpPr>
+        <p:spPr>
+          <a:xfrm>
+            <a:off x="457200" y="1847088"/>
+            <a:ext cx="329184" cy="329184"/>
+          </a:xfrm>
+          <a:prstGeom prst="ellipse">
+            <a:avLst/>
+          </a:prstGeom>
+          <a:solidFill>
+            <a:srgbClr val="7A1524"/>
+          </a:solidFill>
+          <a:ln w="12700">
+            <a:solidFill>
+              <a:srgbClr val="7A1524"/>
+            </a:solidFill>
+            <a:prstDash val="solid"/>
+          </a:ln>
+        </p:spPr>
+      </p:sp>
+      <p:sp>
+        <p:nvSpPr>
+          <p:cNvPr id="6" name="Text 4"/>
+          <p:cNvSpPr txBox="1"/>
+          <p:nvPr/>
+        </p:nvSpPr>
+        <p:spPr>
+          <a:xfrm>
+            <a:off x="457200" y="1847088"/>
+            <a:ext cx="329184" cy="329184"/>
+          </a:xfrm>
+          <a:prstGeom prst="rect">
+            <a:avLst/>
+          </a:prstGeom>
+          <a:noFill/>
+          <a:ln/>
+        </p:spPr>
+        <p:txBody>
+          <a:bodyPr wrap="square" lIns="0" tIns="0" rIns="0" bIns="0" rtlCol="0" anchor="ctr"/>
+          <a:lstStyle/>
+          <a:p>
+            <a:pPr algn="ctr" indent="0" marL="0">
+              <a:buNone/>
+            </a:pPr>
+            <a:r>
+              <a:rPr lang="en-US" sz="1300" b="1" dirty="0">
+                <a:solidFill>
+                  <a:srgbClr val="FFFFFF"/>
+                </a:solidFill>
+                <a:latin typeface="Yu Gothic" pitchFamily="34" charset="0"/>
+                <a:ea typeface="Yu Gothic" pitchFamily="34" charset="-122"/>
+                <a:cs typeface="Yu Gothic" pitchFamily="34" charset="-120"/>
+              </a:rPr>
+              <a:t>1</a:t>
+            </a:r>
+            <a:endParaRPr lang="en-US" sz="1300" dirty="0"/>
+          </a:p>
+        </p:txBody>
+      </p:sp>
+      <p:sp>
+        <p:nvSpPr>
+          <p:cNvPr id="7" name="Text 5"/>
+          <p:cNvSpPr txBox="1"/>
+          <p:nvPr/>
+        </p:nvSpPr>
+        <p:spPr>
+          <a:xfrm>
+            <a:off x="914400" y="1783080"/>
+            <a:ext cx="3657600" cy="457200"/>
+          </a:xfrm>
+          <a:prstGeom prst="rect">
+            <a:avLst/>
+          </a:prstGeom>
+          <a:noFill/>
+          <a:ln/>
+        </p:spPr>
+        <p:txBody>
+          <a:bodyPr wrap="square" lIns="0" tIns="0" rIns="0" bIns="0" rtlCol="0" anchor="ctr"/>
+          <a:lstStyle/>
+          <a:p>
+            <a:pPr indent="0" marL="0">
+              <a:buNone/>
+            </a:pPr>
+            <a:r>
+              <a:rPr lang="en-US" sz="1700" dirty="0">
+                <a:solidFill>
+                  <a:srgbClr val="3B3634"/>
+                </a:solidFill>
+                <a:latin typeface="Yu Gothic" pitchFamily="34" charset="0"/>
+                <a:ea typeface="Yu Gothic" pitchFamily="34" charset="-122"/>
+                <a:cs typeface="Yu Gothic" pitchFamily="34" charset="-120"/>
+              </a:rPr>
+              <a:t>自分の崩れ方を知る</a:t>
+            </a:r>
+            <a:endParaRPr lang="en-US" sz="1700" dirty="0"/>
+          </a:p>
+        </p:txBody>
+      </p:sp>
+      <p:sp>
+        <p:nvSpPr>
+          <p:cNvPr id="8" name="Shape 6"/>
+          <p:cNvSpPr/>
+          <p:nvPr/>
+        </p:nvSpPr>
+        <p:spPr>
+          <a:xfrm>
+            <a:off x="457200" y="2450592"/>
+            <a:ext cx="329184" cy="329184"/>
+          </a:xfrm>
+          <a:prstGeom prst="ellipse">
+            <a:avLst/>
+          </a:prstGeom>
+          <a:solidFill>
+            <a:srgbClr val="7A1524"/>
+          </a:solidFill>
+          <a:ln w="12700">
+            <a:solidFill>
+              <a:srgbClr val="7A1524"/>
+            </a:solidFill>
+            <a:prstDash val="solid"/>
+          </a:ln>
+        </p:spPr>
+      </p:sp>
+      <p:sp>
+        <p:nvSpPr>
+          <p:cNvPr id="9" name="Text 7"/>
+          <p:cNvSpPr txBox="1"/>
+          <p:nvPr/>
+        </p:nvSpPr>
+        <p:spPr>
+          <a:xfrm>
+            <a:off x="457200" y="2450592"/>
+            <a:ext cx="329184" cy="329184"/>
+          </a:xfrm>
+          <a:prstGeom prst="rect">
+            <a:avLst/>
+          </a:prstGeom>
+          <a:noFill/>
+          <a:ln/>
+        </p:spPr>
+        <p:txBody>
+          <a:bodyPr wrap="square" lIns="0" tIns="0" rIns="0" bIns="0" rtlCol="0" anchor="ctr"/>
+          <a:lstStyle/>
+          <a:p>
+            <a:pPr algn="ctr" indent="0" marL="0">
+              <a:buNone/>
+            </a:pPr>
+            <a:r>
+              <a:rPr lang="en-US" sz="1300" b="1" dirty="0">
+                <a:solidFill>
+                  <a:srgbClr val="FFFFFF"/>
+                </a:solidFill>
+                <a:latin typeface="Yu Gothic" pitchFamily="34" charset="0"/>
+                <a:ea typeface="Yu Gothic" pitchFamily="34" charset="-122"/>
+                <a:cs typeface="Yu Gothic" pitchFamily="34" charset="-120"/>
+              </a:rPr>
+              <a:t>2</a:t>
+            </a:r>
+            <a:endParaRPr lang="en-US" sz="1300" dirty="0"/>
+          </a:p>
+        </p:txBody>
+      </p:sp>
+      <p:sp>
+        <p:nvSpPr>
+          <p:cNvPr id="10" name="Text 8"/>
+          <p:cNvSpPr txBox="1"/>
+          <p:nvPr/>
+        </p:nvSpPr>
+        <p:spPr>
+          <a:xfrm>
+            <a:off x="914400" y="2386584"/>
+            <a:ext cx="3657600" cy="457200"/>
+          </a:xfrm>
+          <a:prstGeom prst="rect">
+            <a:avLst/>
+          </a:prstGeom>
+          <a:noFill/>
+          <a:ln/>
+        </p:spPr>
+        <p:txBody>
+          <a:bodyPr wrap="square" lIns="0" tIns="0" rIns="0" bIns="0" rtlCol="0" anchor="ctr"/>
+          <a:lstStyle/>
+          <a:p>
+            <a:pPr indent="0" marL="0">
+              <a:buNone/>
+            </a:pPr>
+            <a:r>
+              <a:rPr lang="en-US" sz="1700" dirty="0">
+                <a:solidFill>
+                  <a:srgbClr val="3B3634"/>
+                </a:solidFill>
+                <a:latin typeface="Yu Gothic" pitchFamily="34" charset="0"/>
+                <a:ea typeface="Yu Gothic" pitchFamily="34" charset="-122"/>
+                <a:cs typeface="Yu Gothic" pitchFamily="34" charset="-120"/>
+              </a:rPr>
+              <a:t>取りたい記録から逆算する</a:t>
+            </a:r>
+            <a:endParaRPr lang="en-US" sz="1700" dirty="0"/>
+          </a:p>
+        </p:txBody>
+      </p:sp>
+      <p:sp>
+        <p:nvSpPr>
+          <p:cNvPr id="11" name="Shape 9"/>
+          <p:cNvSpPr/>
+          <p:nvPr/>
+        </p:nvSpPr>
+        <p:spPr>
+          <a:xfrm>
+            <a:off x="457200" y="3054096"/>
+            <a:ext cx="329184" cy="329184"/>
+          </a:xfrm>
+          <a:prstGeom prst="ellipse">
+            <a:avLst/>
+          </a:prstGeom>
+          <a:solidFill>
+            <a:srgbClr val="7A1524"/>
+          </a:solidFill>
+          <a:ln w="12700">
+            <a:solidFill>
+              <a:srgbClr val="7A1524"/>
+            </a:solidFill>
+            <a:prstDash val="solid"/>
+          </a:ln>
+        </p:spPr>
+      </p:sp>
+      <p:sp>
+        <p:nvSpPr>
+          <p:cNvPr id="12" name="Text 10"/>
+          <p:cNvSpPr txBox="1"/>
+          <p:nvPr/>
+        </p:nvSpPr>
+        <p:spPr>
+          <a:xfrm>
+            <a:off x="457200" y="3054096"/>
+            <a:ext cx="329184" cy="329184"/>
+          </a:xfrm>
+          <a:prstGeom prst="rect">
+            <a:avLst/>
+          </a:prstGeom>
+          <a:noFill/>
+          <a:ln/>
+        </p:spPr>
+        <p:txBody>
+          <a:bodyPr wrap="square" lIns="0" tIns="0" rIns="0" bIns="0" rtlCol="0" anchor="ctr"/>
+          <a:lstStyle/>
+          <a:p>
+            <a:pPr algn="ctr" indent="0" marL="0">
+              <a:buNone/>
+            </a:pPr>
+            <a:r>
+              <a:rPr lang="en-US" sz="1300" b="1" dirty="0">
+                <a:solidFill>
+                  <a:srgbClr val="FFFFFF"/>
+                </a:solidFill>
+                <a:latin typeface="Yu Gothic" pitchFamily="34" charset="0"/>
+                <a:ea typeface="Yu Gothic" pitchFamily="34" charset="-122"/>
+                <a:cs typeface="Yu Gothic" pitchFamily="34" charset="-120"/>
+              </a:rPr>
+              <a:t>3</a:t>
+            </a:r>
+            <a:endParaRPr lang="en-US" sz="1300" dirty="0"/>
+          </a:p>
+        </p:txBody>
+      </p:sp>
+      <p:sp>
+        <p:nvSpPr>
+          <p:cNvPr id="13" name="Text 11"/>
+          <p:cNvSpPr txBox="1"/>
+          <p:nvPr/>
+        </p:nvSpPr>
+        <p:spPr>
+          <a:xfrm>
+            <a:off x="914400" y="2990088"/>
+            <a:ext cx="3657600" cy="457200"/>
+          </a:xfrm>
+          <a:prstGeom prst="rect">
+            <a:avLst/>
+          </a:prstGeom>
+          <a:noFill/>
+          <a:ln/>
+        </p:spPr>
+        <p:txBody>
+          <a:bodyPr wrap="square" lIns="0" tIns="0" rIns="0" bIns="0" rtlCol="0" anchor="ctr"/>
+          <a:lstStyle/>
+          <a:p>
+            <a:pPr indent="0" marL="0">
+              <a:buNone/>
+            </a:pPr>
+            <a:r>
+              <a:rPr lang="en-US" sz="1700" dirty="0">
+                <a:solidFill>
+                  <a:srgbClr val="3B3634"/>
+                </a:solidFill>
+                <a:latin typeface="Yu Gothic" pitchFamily="34" charset="0"/>
+                <a:ea typeface="Yu Gothic" pitchFamily="34" charset="-122"/>
+                <a:cs typeface="Yu Gothic" pitchFamily="34" charset="-120"/>
+              </a:rPr>
+              <a:t>プレッシャーを理解する</a:t>
+            </a:r>
+            <a:endParaRPr lang="en-US" sz="1700" dirty="0"/>
+          </a:p>
+        </p:txBody>
+      </p:sp>
+      <p:sp>
+        <p:nvSpPr>
+          <p:cNvPr id="14" name="Shape 12"/>
+          <p:cNvSpPr/>
+          <p:nvPr/>
+        </p:nvSpPr>
+        <p:spPr>
+          <a:xfrm>
+            <a:off x="457200" y="3657600"/>
+            <a:ext cx="329184" cy="329184"/>
+          </a:xfrm>
+          <a:prstGeom prst="ellipse">
+            <a:avLst/>
+          </a:prstGeom>
+          <a:solidFill>
+            <a:srgbClr val="7A1524"/>
+          </a:solidFill>
+          <a:ln w="12700">
+            <a:solidFill>
+              <a:srgbClr val="7A1524"/>
+            </a:solidFill>
+            <a:prstDash val="solid"/>
+          </a:ln>
+        </p:spPr>
+      </p:sp>
+      <p:sp>
+        <p:nvSpPr>
+          <p:cNvPr id="15" name="Text 13"/>
+          <p:cNvSpPr txBox="1"/>
+          <p:nvPr/>
+        </p:nvSpPr>
+        <p:spPr>
+          <a:xfrm>
+            <a:off x="457200" y="3657600"/>
+            <a:ext cx="329184" cy="329184"/>
+          </a:xfrm>
+          <a:prstGeom prst="rect">
+            <a:avLst/>
+          </a:prstGeom>
+          <a:noFill/>
+          <a:ln/>
+        </p:spPr>
+        <p:txBody>
+          <a:bodyPr wrap="square" lIns="0" tIns="0" rIns="0" bIns="0" rtlCol="0" anchor="ctr"/>
+          <a:lstStyle/>
+          <a:p>
+            <a:pPr algn="ctr" indent="0" marL="0">
+              <a:buNone/>
+            </a:pPr>
+            <a:r>
+              <a:rPr lang="en-US" sz="1300" b="1" dirty="0">
+                <a:solidFill>
+                  <a:srgbClr val="FFFFFF"/>
+                </a:solidFill>
+                <a:latin typeface="Yu Gothic" pitchFamily="34" charset="0"/>
+                <a:ea typeface="Yu Gothic" pitchFamily="34" charset="-122"/>
+                <a:cs typeface="Yu Gothic" pitchFamily="34" charset="-120"/>
+              </a:rPr>
+              <a:t>4</a:t>
+            </a:r>
+            <a:endParaRPr lang="en-US" sz="1300" dirty="0"/>
+          </a:p>
+        </p:txBody>
+      </p:sp>
+      <p:sp>
+        <p:nvSpPr>
+          <p:cNvPr id="16" name="Text 14"/>
+          <p:cNvSpPr txBox="1"/>
+          <p:nvPr/>
+        </p:nvSpPr>
+        <p:spPr>
+          <a:xfrm>
+            <a:off x="914400" y="3593592"/>
+            <a:ext cx="3657600" cy="457200"/>
+          </a:xfrm>
+          <a:prstGeom prst="rect">
+            <a:avLst/>
+          </a:prstGeom>
+          <a:noFill/>
+          <a:ln/>
+        </p:spPr>
+        <p:txBody>
+          <a:bodyPr wrap="square" lIns="0" tIns="0" rIns="0" bIns="0" rtlCol="0" anchor="ctr"/>
+          <a:lstStyle/>
+          <a:p>
+            <a:pPr indent="0" marL="0">
+              <a:buNone/>
+            </a:pPr>
+            <a:r>
+              <a:rPr lang="en-US" sz="1700" dirty="0">
+                <a:solidFill>
+                  <a:srgbClr val="3B3634"/>
+                </a:solidFill>
+                <a:latin typeface="Yu Gothic" pitchFamily="34" charset="0"/>
+                <a:ea typeface="Yu Gothic" pitchFamily="34" charset="-122"/>
+                <a:cs typeface="Yu Gothic" pitchFamily="34" charset="-120"/>
+              </a:rPr>
+              <a:t>自分だけのルーティン</a:t>
+            </a:r>
+            <a:endParaRPr lang="en-US" sz="1700" dirty="0"/>
+          </a:p>
+        </p:txBody>
+      </p:sp>
+      <p:sp>
+        <p:nvSpPr>
+          <p:cNvPr id="17" name="Shape 15"/>
+          <p:cNvSpPr/>
+          <p:nvPr/>
+        </p:nvSpPr>
+        <p:spPr>
+          <a:xfrm>
+            <a:off x="457200" y="4261104"/>
+            <a:ext cx="329184" cy="329184"/>
+          </a:xfrm>
+          <a:prstGeom prst="ellipse">
+            <a:avLst/>
+          </a:prstGeom>
+          <a:solidFill>
+            <a:srgbClr val="7A1524"/>
+          </a:solidFill>
+          <a:ln w="12700">
+            <a:solidFill>
+              <a:srgbClr val="7A1524"/>
+            </a:solidFill>
+            <a:prstDash val="solid"/>
+          </a:ln>
+        </p:spPr>
+      </p:sp>
+      <p:sp>
+        <p:nvSpPr>
+          <p:cNvPr id="18" name="Text 16"/>
+          <p:cNvSpPr txBox="1"/>
+          <p:nvPr/>
+        </p:nvSpPr>
+        <p:spPr>
+          <a:xfrm>
+            <a:off x="457200" y="4261104"/>
+            <a:ext cx="329184" cy="329184"/>
+          </a:xfrm>
+          <a:prstGeom prst="rect">
+            <a:avLst/>
+          </a:prstGeom>
+          <a:noFill/>
+          <a:ln/>
+        </p:spPr>
+        <p:txBody>
+          <a:bodyPr wrap="square" lIns="0" tIns="0" rIns="0" bIns="0" rtlCol="0" anchor="ctr"/>
+          <a:lstStyle/>
+          <a:p>
+            <a:pPr algn="ctr" indent="0" marL="0">
+              <a:buNone/>
+            </a:pPr>
+            <a:r>
+              <a:rPr lang="en-US" sz="1300" b="1" dirty="0">
+                <a:solidFill>
+                  <a:srgbClr val="FFFFFF"/>
+                </a:solidFill>
+                <a:latin typeface="Yu Gothic" pitchFamily="34" charset="0"/>
+                <a:ea typeface="Yu Gothic" pitchFamily="34" charset="-122"/>
+                <a:cs typeface="Yu Gothic" pitchFamily="34" charset="-120"/>
+              </a:rPr>
+              <a:t>5</a:t>
+            </a:r>
+            <a:endParaRPr lang="en-US" sz="1300" dirty="0"/>
+          </a:p>
+        </p:txBody>
+      </p:sp>
+      <p:sp>
+        <p:nvSpPr>
+          <p:cNvPr id="19" name="Text 17"/>
+          <p:cNvSpPr txBox="1"/>
+          <p:nvPr/>
+        </p:nvSpPr>
+        <p:spPr>
+          <a:xfrm>
+            <a:off x="914400" y="4197096"/>
+            <a:ext cx="3657600" cy="457200"/>
+          </a:xfrm>
+          <a:prstGeom prst="rect">
+            <a:avLst/>
+          </a:prstGeom>
+          <a:noFill/>
+          <a:ln/>
+        </p:spPr>
+        <p:txBody>
+          <a:bodyPr wrap="square" lIns="0" tIns="0" rIns="0" bIns="0" rtlCol="0" anchor="ctr"/>
+          <a:lstStyle/>
+          <a:p>
+            <a:pPr indent="0" marL="0">
+              <a:buNone/>
+            </a:pPr>
+            <a:r>
+              <a:rPr lang="en-US" sz="1700" dirty="0">
+                <a:solidFill>
+                  <a:srgbClr val="3B3634"/>
+                </a:solidFill>
+                <a:latin typeface="Yu Gothic" pitchFamily="34" charset="0"/>
+                <a:ea typeface="Yu Gothic" pitchFamily="34" charset="-122"/>
+                <a:cs typeface="Yu Gothic" pitchFamily="34" charset="-120"/>
+              </a:rPr>
+              <a:t>失敗しても崩れない</a:t>
+            </a:r>
+            <a:endParaRPr lang="en-US" sz="1700" dirty="0"/>
+          </a:p>
+        </p:txBody>
+      </p:sp>
+      <p:sp>
+        <p:nvSpPr>
+          <p:cNvPr id="20" name="Shape 18"/>
+          <p:cNvSpPr/>
+          <p:nvPr/>
+        </p:nvSpPr>
+        <p:spPr>
+          <a:xfrm>
+            <a:off x="4800600" y="1847088"/>
+            <a:ext cx="329184" cy="329184"/>
+          </a:xfrm>
+          <a:prstGeom prst="ellipse">
+            <a:avLst/>
+          </a:prstGeom>
+          <a:solidFill>
+            <a:srgbClr val="7A1524"/>
+          </a:solidFill>
+          <a:ln w="12700">
+            <a:solidFill>
+              <a:srgbClr val="7A1524"/>
+            </a:solidFill>
+            <a:prstDash val="solid"/>
+          </a:ln>
+        </p:spPr>
+      </p:sp>
+      <p:sp>
+        <p:nvSpPr>
+          <p:cNvPr id="21" name="Text 19"/>
+          <p:cNvSpPr txBox="1"/>
+          <p:nvPr/>
+        </p:nvSpPr>
+        <p:spPr>
+          <a:xfrm>
+            <a:off x="4800600" y="1847088"/>
+            <a:ext cx="329184" cy="329184"/>
+          </a:xfrm>
+          <a:prstGeom prst="rect">
+            <a:avLst/>
+          </a:prstGeom>
+          <a:noFill/>
+          <a:ln/>
+        </p:spPr>
+        <p:txBody>
+          <a:bodyPr wrap="square" lIns="0" tIns="0" rIns="0" bIns="0" rtlCol="0" anchor="ctr"/>
+          <a:lstStyle/>
+          <a:p>
+            <a:pPr algn="ctr" indent="0" marL="0">
+              <a:buNone/>
+            </a:pPr>
+            <a:r>
+              <a:rPr lang="en-US" sz="1300" b="1" dirty="0">
+                <a:solidFill>
+                  <a:srgbClr val="FFFFFF"/>
+                </a:solidFill>
+                <a:latin typeface="Yu Gothic" pitchFamily="34" charset="0"/>
+                <a:ea typeface="Yu Gothic" pitchFamily="34" charset="-122"/>
+                <a:cs typeface="Yu Gothic" pitchFamily="34" charset="-120"/>
+              </a:rPr>
+              <a:t>6</a:t>
+            </a:r>
+            <a:endParaRPr lang="en-US" sz="1300" dirty="0"/>
+          </a:p>
+        </p:txBody>
+      </p:sp>
+      <p:sp>
+        <p:nvSpPr>
+          <p:cNvPr id="22" name="Text 20"/>
+          <p:cNvSpPr txBox="1"/>
+          <p:nvPr/>
+        </p:nvSpPr>
+        <p:spPr>
+          <a:xfrm>
+            <a:off x="5257800" y="1783080"/>
+            <a:ext cx="3657600" cy="457200"/>
+          </a:xfrm>
+          <a:prstGeom prst="rect">
+            <a:avLst/>
+          </a:prstGeom>
+          <a:noFill/>
+          <a:ln/>
+        </p:spPr>
+        <p:txBody>
+          <a:bodyPr wrap="square" lIns="0" tIns="0" rIns="0" bIns="0" rtlCol="0" anchor="ctr"/>
+          <a:lstStyle/>
+          <a:p>
+            <a:pPr indent="0" marL="0">
+              <a:buNone/>
+            </a:pPr>
+            <a:r>
+              <a:rPr lang="en-US" sz="1700" dirty="0">
+                <a:solidFill>
+                  <a:srgbClr val="3B3634"/>
+                </a:solidFill>
+                <a:latin typeface="Yu Gothic" pitchFamily="34" charset="0"/>
+                <a:ea typeface="Yu Gothic" pitchFamily="34" charset="-122"/>
+                <a:cs typeface="Yu Gothic" pitchFamily="34" charset="-120"/>
+              </a:rPr>
+              <a:t>自分の試合に集中する</a:t>
+            </a:r>
+            <a:endParaRPr lang="en-US" sz="1700" dirty="0"/>
+          </a:p>
+        </p:txBody>
+      </p:sp>
+      <p:sp>
+        <p:nvSpPr>
+          <p:cNvPr id="23" name="Shape 21"/>
+          <p:cNvSpPr/>
+          <p:nvPr/>
+        </p:nvSpPr>
+        <p:spPr>
+          <a:xfrm>
+            <a:off x="4800600" y="2450592"/>
+            <a:ext cx="329184" cy="329184"/>
+          </a:xfrm>
+          <a:prstGeom prst="ellipse">
+            <a:avLst/>
+          </a:prstGeom>
+          <a:solidFill>
+            <a:srgbClr val="7A1524"/>
+          </a:solidFill>
+          <a:ln w="12700">
+            <a:solidFill>
+              <a:srgbClr val="7A1524"/>
+            </a:solidFill>
+            <a:prstDash val="solid"/>
+          </a:ln>
+        </p:spPr>
+      </p:sp>
+      <p:sp>
+        <p:nvSpPr>
+          <p:cNvPr id="24" name="Text 22"/>
+          <p:cNvSpPr txBox="1"/>
+          <p:nvPr/>
+        </p:nvSpPr>
+        <p:spPr>
+          <a:xfrm>
+            <a:off x="4800600" y="2450592"/>
+            <a:ext cx="329184" cy="329184"/>
+          </a:xfrm>
+          <a:prstGeom prst="rect">
+            <a:avLst/>
+          </a:prstGeom>
+          <a:noFill/>
+          <a:ln/>
+        </p:spPr>
+        <p:txBody>
+          <a:bodyPr wrap="square" lIns="0" tIns="0" rIns="0" bIns="0" rtlCol="0" anchor="ctr"/>
+          <a:lstStyle/>
+          <a:p>
+            <a:pPr algn="ctr" indent="0" marL="0">
+              <a:buNone/>
+            </a:pPr>
+            <a:r>
+              <a:rPr lang="en-US" sz="1300" b="1" dirty="0">
+                <a:solidFill>
+                  <a:srgbClr val="FFFFFF"/>
+                </a:solidFill>
+                <a:latin typeface="Yu Gothic" pitchFamily="34" charset="0"/>
+                <a:ea typeface="Yu Gothic" pitchFamily="34" charset="-122"/>
+                <a:cs typeface="Yu Gothic" pitchFamily="34" charset="-120"/>
+              </a:rPr>
+              <a:t>7</a:t>
+            </a:r>
+            <a:endParaRPr lang="en-US" sz="1300" dirty="0"/>
+          </a:p>
+        </p:txBody>
+      </p:sp>
+      <p:sp>
+        <p:nvSpPr>
+          <p:cNvPr id="25" name="Text 23"/>
+          <p:cNvSpPr txBox="1"/>
+          <p:nvPr/>
+        </p:nvSpPr>
+        <p:spPr>
+          <a:xfrm>
+            <a:off x="5257800" y="2386584"/>
+            <a:ext cx="3657600" cy="457200"/>
+          </a:xfrm>
+          <a:prstGeom prst="rect">
+            <a:avLst/>
+          </a:prstGeom>
+          <a:noFill/>
+          <a:ln/>
+        </p:spPr>
+        <p:txBody>
+          <a:bodyPr wrap="square" lIns="0" tIns="0" rIns="0" bIns="0" rtlCol="0" anchor="ctr"/>
+          <a:lstStyle/>
+          <a:p>
+            <a:pPr indent="0" marL="0">
+              <a:buNone/>
+            </a:pPr>
+            <a:r>
+              <a:rPr lang="en-US" sz="1700" dirty="0">
+                <a:solidFill>
+                  <a:srgbClr val="3B3634"/>
+                </a:solidFill>
+                <a:latin typeface="Yu Gothic" pitchFamily="34" charset="0"/>
+                <a:ea typeface="Yu Gothic" pitchFamily="34" charset="-122"/>
+                <a:cs typeface="Yu Gothic" pitchFamily="34" charset="-120"/>
+              </a:rPr>
+              <a:t>頑張る・休むを選ぶ</a:t>
+            </a:r>
+            <a:endParaRPr lang="en-US" sz="1700" dirty="0"/>
+          </a:p>
+        </p:txBody>
+      </p:sp>
+      <p:sp>
+        <p:nvSpPr>
+          <p:cNvPr id="26" name="Shape 24"/>
+          <p:cNvSpPr/>
+          <p:nvPr/>
+        </p:nvSpPr>
+        <p:spPr>
+          <a:xfrm>
+            <a:off x="4800600" y="3054096"/>
+            <a:ext cx="329184" cy="329184"/>
+          </a:xfrm>
+          <a:prstGeom prst="ellipse">
+            <a:avLst/>
+          </a:prstGeom>
+          <a:solidFill>
+            <a:srgbClr val="7A1524"/>
+          </a:solidFill>
+          <a:ln w="12700">
+            <a:solidFill>
+              <a:srgbClr val="7A1524"/>
+            </a:solidFill>
+            <a:prstDash val="solid"/>
+          </a:ln>
+        </p:spPr>
+      </p:sp>
+      <p:sp>
+        <p:nvSpPr>
+          <p:cNvPr id="27" name="Text 25"/>
+          <p:cNvSpPr txBox="1"/>
+          <p:nvPr/>
+        </p:nvSpPr>
+        <p:spPr>
+          <a:xfrm>
+            <a:off x="4800600" y="3054096"/>
+            <a:ext cx="329184" cy="329184"/>
+          </a:xfrm>
+          <a:prstGeom prst="rect">
+            <a:avLst/>
+          </a:prstGeom>
+          <a:noFill/>
+          <a:ln/>
+        </p:spPr>
+        <p:txBody>
+          <a:bodyPr wrap="square" lIns="0" tIns="0" rIns="0" bIns="0" rtlCol="0" anchor="ctr"/>
+          <a:lstStyle/>
+          <a:p>
+            <a:pPr algn="ctr" indent="0" marL="0">
+              <a:buNone/>
+            </a:pPr>
+            <a:r>
+              <a:rPr lang="en-US" sz="1300" b="1" dirty="0">
+                <a:solidFill>
+                  <a:srgbClr val="FFFFFF"/>
+                </a:solidFill>
+                <a:latin typeface="Yu Gothic" pitchFamily="34" charset="0"/>
+                <a:ea typeface="Yu Gothic" pitchFamily="34" charset="-122"/>
+                <a:cs typeface="Yu Gothic" pitchFamily="34" charset="-120"/>
+              </a:rPr>
+              <a:t>8</a:t>
+            </a:r>
+            <a:endParaRPr lang="en-US" sz="1300" dirty="0"/>
+          </a:p>
+        </p:txBody>
+      </p:sp>
+      <p:sp>
+        <p:nvSpPr>
+          <p:cNvPr id="28" name="Text 26"/>
+          <p:cNvSpPr txBox="1"/>
+          <p:nvPr/>
+        </p:nvSpPr>
+        <p:spPr>
+          <a:xfrm>
+            <a:off x="5257800" y="2990088"/>
+            <a:ext cx="3657600" cy="457200"/>
+          </a:xfrm>
+          <a:prstGeom prst="rect">
+            <a:avLst/>
+          </a:prstGeom>
+          <a:noFill/>
+          <a:ln/>
+        </p:spPr>
+        <p:txBody>
+          <a:bodyPr wrap="square" lIns="0" tIns="0" rIns="0" bIns="0" rtlCol="0" anchor="ctr"/>
+          <a:lstStyle/>
+          <a:p>
+            <a:pPr indent="0" marL="0">
+              <a:buNone/>
+            </a:pPr>
+            <a:r>
+              <a:rPr lang="en-US" sz="1700" dirty="0">
+                <a:solidFill>
+                  <a:srgbClr val="3B3634"/>
+                </a:solidFill>
+                <a:latin typeface="Yu Gothic" pitchFamily="34" charset="0"/>
+                <a:ea typeface="Yu Gothic" pitchFamily="34" charset="-122"/>
+                <a:cs typeface="Yu Gothic" pitchFamily="34" charset="-120"/>
+              </a:rPr>
+              <a:t>自己信頼を育てる</a:t>
+            </a:r>
+            <a:endParaRPr lang="en-US" sz="1700" dirty="0"/>
+          </a:p>
+        </p:txBody>
+      </p:sp>
+      <p:sp>
+        <p:nvSpPr>
+          <p:cNvPr id="29" name="Shape 27"/>
+          <p:cNvSpPr/>
+          <p:nvPr/>
+        </p:nvSpPr>
+        <p:spPr>
+          <a:xfrm>
+            <a:off x="4800600" y="3657600"/>
+            <a:ext cx="329184" cy="329184"/>
+          </a:xfrm>
+          <a:prstGeom prst="ellipse">
+            <a:avLst/>
+          </a:prstGeom>
+          <a:solidFill>
+            <a:srgbClr val="7A1524"/>
+          </a:solidFill>
+          <a:ln w="12700">
+            <a:solidFill>
+              <a:srgbClr val="7A1524"/>
+            </a:solidFill>
+            <a:prstDash val="solid"/>
+          </a:ln>
+        </p:spPr>
+      </p:sp>
+      <p:sp>
+        <p:nvSpPr>
+          <p:cNvPr id="30" name="Text 28"/>
+          <p:cNvSpPr txBox="1"/>
+          <p:nvPr/>
+        </p:nvSpPr>
+        <p:spPr>
+          <a:xfrm>
+            <a:off x="4800600" y="3657600"/>
+            <a:ext cx="329184" cy="329184"/>
+          </a:xfrm>
+          <a:prstGeom prst="rect">
+            <a:avLst/>
+          </a:prstGeom>
+          <a:noFill/>
+          <a:ln/>
+        </p:spPr>
+        <p:txBody>
+          <a:bodyPr wrap="square" lIns="0" tIns="0" rIns="0" bIns="0" rtlCol="0" anchor="ctr"/>
+          <a:lstStyle/>
+          <a:p>
+            <a:pPr algn="ctr" indent="0" marL="0">
+              <a:buNone/>
+            </a:pPr>
+            <a:r>
+              <a:rPr lang="en-US" sz="1300" b="1" dirty="0">
+                <a:solidFill>
+                  <a:srgbClr val="FFFFFF"/>
+                </a:solidFill>
+                <a:latin typeface="Yu Gothic" pitchFamily="34" charset="0"/>
+                <a:ea typeface="Yu Gothic" pitchFamily="34" charset="-122"/>
+                <a:cs typeface="Yu Gothic" pitchFamily="34" charset="-120"/>
+              </a:rPr>
+              <a:t>9</a:t>
+            </a:r>
+            <a:endParaRPr lang="en-US" sz="1300" dirty="0"/>
+          </a:p>
+        </p:txBody>
+      </p:sp>
+      <p:sp>
+        <p:nvSpPr>
+          <p:cNvPr id="31" name="Text 29"/>
+          <p:cNvSpPr txBox="1"/>
+          <p:nvPr/>
+        </p:nvSpPr>
+        <p:spPr>
+          <a:xfrm>
+            <a:off x="5257800" y="3593592"/>
+            <a:ext cx="3657600" cy="457200"/>
+          </a:xfrm>
+          <a:prstGeom prst="rect">
+            <a:avLst/>
+          </a:prstGeom>
+          <a:noFill/>
+          <a:ln/>
+        </p:spPr>
+        <p:txBody>
+          <a:bodyPr wrap="square" lIns="0" tIns="0" rIns="0" bIns="0" rtlCol="0" anchor="ctr"/>
+          <a:lstStyle/>
+          <a:p>
+            <a:pPr indent="0" marL="0">
+              <a:buNone/>
+            </a:pPr>
+            <a:r>
+              <a:rPr lang="en-US" sz="1700" dirty="0">
+                <a:solidFill>
+                  <a:srgbClr val="3B3634"/>
+                </a:solidFill>
+                <a:latin typeface="Yu Gothic" pitchFamily="34" charset="0"/>
+                <a:ea typeface="Yu Gothic" pitchFamily="34" charset="-122"/>
+                <a:cs typeface="Yu Gothic" pitchFamily="34" charset="-120"/>
+              </a:rPr>
+              <a:t>プランBを持つ</a:t>
+            </a:r>
+            <a:endParaRPr lang="en-US" sz="1700" dirty="0"/>
+          </a:p>
+        </p:txBody>
+      </p:sp>
+      <p:sp>
+        <p:nvSpPr>
+          <p:cNvPr id="32" name="Shape 30"/>
+          <p:cNvSpPr/>
+          <p:nvPr/>
+        </p:nvSpPr>
+        <p:spPr>
+          <a:xfrm>
+            <a:off x="4800600" y="4261104"/>
+            <a:ext cx="329184" cy="329184"/>
+          </a:xfrm>
+          <a:prstGeom prst="ellipse">
+            <a:avLst/>
+          </a:prstGeom>
+          <a:solidFill>
+            <a:srgbClr val="7A1524"/>
+          </a:solidFill>
+          <a:ln w="12700">
+            <a:solidFill>
+              <a:srgbClr val="7A1524"/>
+            </a:solidFill>
+            <a:prstDash val="solid"/>
+          </a:ln>
+        </p:spPr>
+      </p:sp>
+      <p:sp>
+        <p:nvSpPr>
+          <p:cNvPr id="33" name="Text 31"/>
+          <p:cNvSpPr txBox="1"/>
+          <p:nvPr/>
+        </p:nvSpPr>
+        <p:spPr>
+          <a:xfrm>
+            <a:off x="4800600" y="4261104"/>
+            <a:ext cx="329184" cy="329184"/>
+          </a:xfrm>
+          <a:prstGeom prst="rect">
+            <a:avLst/>
+          </a:prstGeom>
+          <a:noFill/>
+          <a:ln/>
+        </p:spPr>
+        <p:txBody>
+          <a:bodyPr wrap="square" lIns="0" tIns="0" rIns="0" bIns="0" rtlCol="0" anchor="ctr"/>
+          <a:lstStyle/>
+          <a:p>
+            <a:pPr algn="ctr" indent="0" marL="0">
+              <a:buNone/>
+            </a:pPr>
+            <a:r>
+              <a:rPr lang="en-US" sz="1300" b="1" dirty="0">
+                <a:solidFill>
+                  <a:srgbClr val="FFFFFF"/>
+                </a:solidFill>
+                <a:latin typeface="Yu Gothic" pitchFamily="34" charset="0"/>
+                <a:ea typeface="Yu Gothic" pitchFamily="34" charset="-122"/>
+                <a:cs typeface="Yu Gothic" pitchFamily="34" charset="-120"/>
+              </a:rPr>
+              <a:t>10</a:t>
+            </a:r>
+            <a:endParaRPr lang="en-US" sz="1300" dirty="0"/>
+          </a:p>
+        </p:txBody>
+      </p:sp>
+      <p:sp>
+        <p:nvSpPr>
+          <p:cNvPr id="34" name="Text 32"/>
+          <p:cNvSpPr txBox="1"/>
+          <p:nvPr/>
+        </p:nvSpPr>
+        <p:spPr>
+          <a:xfrm>
+            <a:off x="5257800" y="4197096"/>
+            <a:ext cx="3657600" cy="457200"/>
+          </a:xfrm>
+          <a:prstGeom prst="rect">
+            <a:avLst/>
+          </a:prstGeom>
+          <a:noFill/>
+          <a:ln/>
+        </p:spPr>
+        <p:txBody>
+          <a:bodyPr wrap="square" lIns="0" tIns="0" rIns="0" bIns="0" rtlCol="0" anchor="ctr"/>
+          <a:lstStyle/>
+          <a:p>
+            <a:pPr indent="0" marL="0">
+              <a:buNone/>
+            </a:pPr>
+            <a:r>
+              <a:rPr lang="en-US" sz="1700" dirty="0">
+                <a:solidFill>
+                  <a:srgbClr val="3B3634"/>
+                </a:solidFill>
+                <a:latin typeface="Yu Gothic" pitchFamily="34" charset="0"/>
+                <a:ea typeface="Yu Gothic" pitchFamily="34" charset="-122"/>
+                <a:cs typeface="Yu Gothic" pitchFamily="34" charset="-120"/>
+              </a:rPr>
+              <a:t>自分だけの大会メンタルプラン</a:t>
+            </a:r>
+            <a:endParaRPr lang="en-US" sz="1700" dirty="0"/>
+          </a:p>
+        </p:txBody>
+      </p:sp>
+    </p:spTree>
+  </p:cSld>
+  <p:clrMapOvr>
+    <a:masterClrMapping/>
+  </p:clrMapOvr>
+</p:sld>
+</file>
+
+<file path=ppt/slides/slide34.xml><?xml version="1.0" encoding="utf-8"?>
+<p:sld xmlns:a="http://schemas.openxmlformats.org/drawingml/2006/main" xmlns:r="http://schemas.openxmlformats.org/officeDocument/2006/relationships" xmlns:p="http://schemas.openxmlformats.org/presentationml/2006/main">
+  <p:cSld name="Slide 34">
     <p:bg>
       <p:bgPr>
         <a:solidFill>
@@ -16344,7 +16962,7 @@
                 <a:ea typeface="Yu Gothic" pitchFamily="34" charset="-122"/>
                 <a:cs typeface="Yu Gothic" pitchFamily="34" charset="-120"/>
               </a:rPr>
-              <a:t>33</a:t>
+              <a:t>34</a:t>
             </a:r>
             <a:endParaRPr lang="en-US" sz="1100" dirty="0"/>
           </a:p>
@@ -16556,475 +17174,6 @@
               <a:t>そして「試合が楽しみです」と言える選手へ。</a:t>
             </a:r>
             <a:endParaRPr lang="en-US" sz="2000" dirty="0"/>
-          </a:p>
-        </p:txBody>
-      </p:sp>
-    </p:spTree>
-  </p:cSld>
-  <p:clrMapOvr>
-    <a:masterClrMapping/>
-  </p:clrMapOvr>
-</p:sld>
-</file>
-
-<file path=ppt/slides/slide34.xml><?xml version="1.0" encoding="utf-8"?>
-<p:sld xmlns:a="http://schemas.openxmlformats.org/drawingml/2006/main" xmlns:r="http://schemas.openxmlformats.org/officeDocument/2006/relationships" xmlns:p="http://schemas.openxmlformats.org/presentationml/2006/main">
-  <p:cSld name="Slide 34">
-    <p:bg>
-      <p:bgPr>
-        <a:solidFill>
-          <a:srgbClr val="FFFFFF"/>
-        </a:solidFill>
-      </p:bgPr>
-    </p:bg>
-    <p:spTree>
-      <p:nvGrpSpPr>
-        <p:cNvPr id="1" name=""/>
-        <p:cNvGrpSpPr/>
-        <p:nvPr/>
-      </p:nvGrpSpPr>
-      <p:grpSpPr>
-        <a:xfrm>
-          <a:off x="0" y="0"/>
-          <a:ext cx="0" cy="0"/>
-          <a:chOff x="0" y="0"/>
-          <a:chExt cx="0" cy="0"/>
-        </a:xfrm>
-      </p:grpSpPr>
-      <p:sp>
-        <p:nvSpPr>
-          <p:cNvPr id="2" name="Text 0"/>
-          <p:cNvSpPr txBox="1"/>
-          <p:nvPr/>
-        </p:nvSpPr>
-        <p:spPr>
-          <a:xfrm>
-            <a:off x="457200" y="237744"/>
-            <a:ext cx="5486400" cy="274320"/>
-          </a:xfrm>
-          <a:prstGeom prst="rect">
-            <a:avLst/>
-          </a:prstGeom>
-          <a:noFill/>
-          <a:ln/>
-        </p:spPr>
-        <p:txBody>
-          <a:bodyPr wrap="square" lIns="0" tIns="0" rIns="0" bIns="0" rtlCol="0" anchor="ctr"/>
-          <a:lstStyle/>
-          <a:p>
-            <a:pPr indent="0" marL="0">
-              <a:buNone/>
-            </a:pPr>
-            <a:r>
-              <a:rPr lang="en-US" sz="1200" b="1" spc="200" kern="0" dirty="0">
-                <a:solidFill>
-                  <a:srgbClr val="7A1524"/>
-                </a:solidFill>
-                <a:latin typeface="Yu Gothic" pitchFamily="34" charset="0"/>
-                <a:ea typeface="Yu Gothic" pitchFamily="34" charset="-122"/>
-                <a:cs typeface="Yu Gothic" pitchFamily="34" charset="-120"/>
-              </a:rPr>
-              <a:t>PHASE 7　講座のご案内</a:t>
-            </a:r>
-            <a:endParaRPr lang="en-US" sz="1200" dirty="0"/>
-          </a:p>
-        </p:txBody>
-      </p:sp>
-      <p:sp>
-        <p:nvSpPr>
-          <p:cNvPr id="3" name="Text 1"/>
-          <p:cNvSpPr txBox="1"/>
-          <p:nvPr/>
-        </p:nvSpPr>
-        <p:spPr>
-          <a:xfrm>
-            <a:off x="8138160" y="4576572"/>
-            <a:ext cx="548640" cy="274320"/>
-          </a:xfrm>
-          <a:prstGeom prst="rect">
-            <a:avLst/>
-          </a:prstGeom>
-          <a:noFill/>
-          <a:ln/>
-        </p:spPr>
-        <p:txBody>
-          <a:bodyPr wrap="square" lIns="0" tIns="0" rIns="0" bIns="0" rtlCol="0" anchor="ctr"/>
-          <a:lstStyle/>
-          <a:p>
-            <a:pPr algn="r" indent="0" marL="0">
-              <a:buNone/>
-            </a:pPr>
-            <a:r>
-              <a:rPr lang="en-US" sz="1100" dirty="0">
-                <a:solidFill>
-                  <a:srgbClr val="6B6360"/>
-                </a:solidFill>
-                <a:latin typeface="Yu Gothic" pitchFamily="34" charset="0"/>
-                <a:ea typeface="Yu Gothic" pitchFamily="34" charset="-122"/>
-                <a:cs typeface="Yu Gothic" pitchFamily="34" charset="-120"/>
-              </a:rPr>
-              <a:t>34</a:t>
-            </a:r>
-            <a:endParaRPr lang="en-US" sz="1100" dirty="0"/>
-          </a:p>
-        </p:txBody>
-      </p:sp>
-      <p:sp>
-        <p:nvSpPr>
-          <p:cNvPr id="4" name="Text 2"/>
-          <p:cNvSpPr txBox="1"/>
-          <p:nvPr/>
-        </p:nvSpPr>
-        <p:spPr>
-          <a:xfrm>
-            <a:off x="457200" y="914400"/>
-            <a:ext cx="8138160" cy="1188720"/>
-          </a:xfrm>
-          <a:prstGeom prst="rect">
-            <a:avLst/>
-          </a:prstGeom>
-          <a:noFill/>
-          <a:ln/>
-        </p:spPr>
-        <p:txBody>
-          <a:bodyPr wrap="square" lIns="0" tIns="0" rIns="0" bIns="0" rtlCol="0" anchor="t"/>
-          <a:lstStyle/>
-          <a:p>
-            <a:pPr algn="l" indent="0" marL="0">
-              <a:lnSpc>
-                <a:spcPts val="3770"/>
-              </a:lnSpc>
-              <a:buNone/>
-            </a:pPr>
-            <a:r>
-              <a:rPr lang="en-US" sz="2600" b="1" dirty="0">
-                <a:solidFill>
-                  <a:srgbClr val="6B6360"/>
-                </a:solidFill>
-                <a:latin typeface="Yu Mincho" pitchFamily="34" charset="0"/>
-                <a:ea typeface="Yu Mincho" pitchFamily="34" charset="-122"/>
-                <a:cs typeface="Yu Mincho" pitchFamily="34" charset="-120"/>
-              </a:rPr>
-              <a:t>受講料</a:t>
-            </a:r>
-            <a:endParaRPr lang="en-US" sz="2600" dirty="0"/>
-          </a:p>
-        </p:txBody>
-      </p:sp>
-      <p:sp>
-        <p:nvSpPr>
-          <p:cNvPr id="5" name="Text 3"/>
-          <p:cNvSpPr txBox="1"/>
-          <p:nvPr/>
-        </p:nvSpPr>
-        <p:spPr>
-          <a:xfrm>
-            <a:off x="457200" y="1463040"/>
-            <a:ext cx="7863840" cy="1371600"/>
-          </a:xfrm>
-          <a:prstGeom prst="rect">
-            <a:avLst/>
-          </a:prstGeom>
-          <a:noFill/>
-          <a:ln/>
-        </p:spPr>
-        <p:txBody>
-          <a:bodyPr wrap="square" lIns="0" tIns="0" rIns="0" bIns="0" rtlCol="0" anchor="b"/>
-          <a:lstStyle/>
-          <a:p>
-            <a:pPr indent="0" marL="0">
-              <a:buNone/>
-            </a:pPr>
-            <a:r>
-              <a:rPr lang="en-US" sz="8200" b="1" dirty="0">
-                <a:solidFill>
-                  <a:srgbClr val="7A1524"/>
-                </a:solidFill>
-                <a:latin typeface="Yu Mincho" pitchFamily="34" charset="0"/>
-                <a:ea typeface="Yu Mincho" pitchFamily="34" charset="-122"/>
-                <a:cs typeface="Yu Mincho" pitchFamily="34" charset="-120"/>
-              </a:rPr>
-              <a:t>98,000</a:t>
-            </a:r>
-            <a:pPr indent="0" marL="0">
-              <a:buNone/>
-            </a:pPr>
-            <a:r>
-              <a:rPr lang="en-US" sz="2400" b="1" dirty="0">
-                <a:solidFill>
-                  <a:srgbClr val="7A1524"/>
-                </a:solidFill>
-                <a:latin typeface="Yu Mincho" pitchFamily="34" charset="0"/>
-                <a:ea typeface="Yu Mincho" pitchFamily="34" charset="-122"/>
-                <a:cs typeface="Yu Mincho" pitchFamily="34" charset="-120"/>
-              </a:rPr>
-              <a:t>　円（税込）</a:t>
-            </a:r>
-            <a:endParaRPr lang="en-US" sz="8200" dirty="0"/>
-          </a:p>
-        </p:txBody>
-      </p:sp>
-      <p:sp>
-        <p:nvSpPr>
-          <p:cNvPr id="6" name="Shape 4"/>
-          <p:cNvSpPr/>
-          <p:nvPr/>
-        </p:nvSpPr>
-        <p:spPr>
-          <a:xfrm>
-            <a:off x="457200" y="3200400"/>
-            <a:ext cx="1920240" cy="658368"/>
-          </a:xfrm>
-          <a:prstGeom prst="roundRect">
-            <a:avLst>
-              <a:gd name="adj" fmla="val 50000"/>
-            </a:avLst>
-          </a:prstGeom>
-          <a:solidFill>
-            <a:srgbClr val="FAF3F4"/>
-          </a:solidFill>
-          <a:ln w="12700">
-            <a:solidFill>
-              <a:srgbClr val="FAF3F4"/>
-            </a:solidFill>
-            <a:prstDash val="solid"/>
-          </a:ln>
-        </p:spPr>
-      </p:sp>
-      <p:sp>
-        <p:nvSpPr>
-          <p:cNvPr id="7" name="Text 5"/>
-          <p:cNvSpPr txBox="1"/>
-          <p:nvPr/>
-        </p:nvSpPr>
-        <p:spPr>
-          <a:xfrm>
-            <a:off x="457200" y="3200400"/>
-            <a:ext cx="1920240" cy="658368"/>
-          </a:xfrm>
-          <a:prstGeom prst="rect">
-            <a:avLst/>
-          </a:prstGeom>
-          <a:noFill/>
-          <a:ln/>
-        </p:spPr>
-        <p:txBody>
-          <a:bodyPr wrap="square" lIns="0" tIns="0" rIns="0" bIns="0" rtlCol="0" anchor="ctr"/>
-          <a:lstStyle/>
-          <a:p>
-            <a:pPr algn="ctr" indent="0" marL="0">
-              <a:buNone/>
-            </a:pPr>
-            <a:r>
-              <a:rPr lang="en-US" sz="1700" b="1" dirty="0">
-                <a:solidFill>
-                  <a:srgbClr val="7A1524"/>
-                </a:solidFill>
-                <a:latin typeface="Yu Gothic" pitchFamily="34" charset="0"/>
-                <a:ea typeface="Yu Gothic" pitchFamily="34" charset="-122"/>
-                <a:cs typeface="Yu Gothic" pitchFamily="34" charset="-120"/>
-              </a:rPr>
-              <a:t>全10回</a:t>
-            </a:r>
-            <a:endParaRPr lang="en-US" sz="1700" dirty="0"/>
-          </a:p>
-        </p:txBody>
-      </p:sp>
-      <p:sp>
-        <p:nvSpPr>
-          <p:cNvPr id="8" name="Shape 6"/>
-          <p:cNvSpPr/>
-          <p:nvPr/>
-        </p:nvSpPr>
-        <p:spPr>
-          <a:xfrm>
-            <a:off x="2560320" y="3200400"/>
-            <a:ext cx="1920240" cy="658368"/>
-          </a:xfrm>
-          <a:prstGeom prst="roundRect">
-            <a:avLst>
-              <a:gd name="adj" fmla="val 50000"/>
-            </a:avLst>
-          </a:prstGeom>
-          <a:solidFill>
-            <a:srgbClr val="FAF3F4"/>
-          </a:solidFill>
-          <a:ln w="12700">
-            <a:solidFill>
-              <a:srgbClr val="FAF3F4"/>
-            </a:solidFill>
-            <a:prstDash val="solid"/>
-          </a:ln>
-        </p:spPr>
-      </p:sp>
-      <p:sp>
-        <p:nvSpPr>
-          <p:cNvPr id="9" name="Text 7"/>
-          <p:cNvSpPr txBox="1"/>
-          <p:nvPr/>
-        </p:nvSpPr>
-        <p:spPr>
-          <a:xfrm>
-            <a:off x="2560320" y="3200400"/>
-            <a:ext cx="1920240" cy="658368"/>
-          </a:xfrm>
-          <a:prstGeom prst="rect">
-            <a:avLst/>
-          </a:prstGeom>
-          <a:noFill/>
-          <a:ln/>
-        </p:spPr>
-        <p:txBody>
-          <a:bodyPr wrap="square" lIns="0" tIns="0" rIns="0" bIns="0" rtlCol="0" anchor="ctr"/>
-          <a:lstStyle/>
-          <a:p>
-            <a:pPr algn="ctr" indent="0" marL="0">
-              <a:buNone/>
-            </a:pPr>
-            <a:r>
-              <a:rPr lang="en-US" sz="1700" b="1" dirty="0">
-                <a:solidFill>
-                  <a:srgbClr val="7A1524"/>
-                </a:solidFill>
-                <a:latin typeface="Yu Gothic" pitchFamily="34" charset="0"/>
-                <a:ea typeface="Yu Gothic" pitchFamily="34" charset="-122"/>
-                <a:cs typeface="Yu Gothic" pitchFamily="34" charset="-120"/>
-              </a:rPr>
-              <a:t>1回60分</a:t>
-            </a:r>
-            <a:endParaRPr lang="en-US" sz="1700" dirty="0"/>
-          </a:p>
-        </p:txBody>
-      </p:sp>
-      <p:sp>
-        <p:nvSpPr>
-          <p:cNvPr id="10" name="Shape 8"/>
-          <p:cNvSpPr/>
-          <p:nvPr/>
-        </p:nvSpPr>
-        <p:spPr>
-          <a:xfrm>
-            <a:off x="4663440" y="3200400"/>
-            <a:ext cx="1920240" cy="658368"/>
-          </a:xfrm>
-          <a:prstGeom prst="roundRect">
-            <a:avLst>
-              <a:gd name="adj" fmla="val 50000"/>
-            </a:avLst>
-          </a:prstGeom>
-          <a:solidFill>
-            <a:srgbClr val="FAF3F4"/>
-          </a:solidFill>
-          <a:ln w="12700">
-            <a:solidFill>
-              <a:srgbClr val="FAF3F4"/>
-            </a:solidFill>
-            <a:prstDash val="solid"/>
-          </a:ln>
-        </p:spPr>
-      </p:sp>
-      <p:sp>
-        <p:nvSpPr>
-          <p:cNvPr id="11" name="Text 9"/>
-          <p:cNvSpPr txBox="1"/>
-          <p:nvPr/>
-        </p:nvSpPr>
-        <p:spPr>
-          <a:xfrm>
-            <a:off x="4663440" y="3200400"/>
-            <a:ext cx="1920240" cy="658368"/>
-          </a:xfrm>
-          <a:prstGeom prst="rect">
-            <a:avLst/>
-          </a:prstGeom>
-          <a:noFill/>
-          <a:ln/>
-        </p:spPr>
-        <p:txBody>
-          <a:bodyPr wrap="square" lIns="0" tIns="0" rIns="0" bIns="0" rtlCol="0" anchor="ctr"/>
-          <a:lstStyle/>
-          <a:p>
-            <a:pPr algn="ctr" indent="0" marL="0">
-              <a:buNone/>
-            </a:pPr>
-            <a:r>
-              <a:rPr lang="en-US" sz="1700" b="1" dirty="0">
-                <a:solidFill>
-                  <a:srgbClr val="7A1524"/>
-                </a:solidFill>
-                <a:latin typeface="Yu Gothic" pitchFamily="34" charset="0"/>
-                <a:ea typeface="Yu Gothic" pitchFamily="34" charset="-122"/>
-                <a:cs typeface="Yu Gothic" pitchFamily="34" charset="-120"/>
-              </a:rPr>
-              <a:t>完全1対1</a:t>
-            </a:r>
-            <a:endParaRPr lang="en-US" sz="1700" dirty="0"/>
-          </a:p>
-        </p:txBody>
-      </p:sp>
-      <p:sp>
-        <p:nvSpPr>
-          <p:cNvPr id="12" name="Shape 10"/>
-          <p:cNvSpPr/>
-          <p:nvPr/>
-        </p:nvSpPr>
-        <p:spPr>
-          <a:xfrm>
-            <a:off x="6766560" y="3200400"/>
-            <a:ext cx="1920240" cy="658368"/>
-          </a:xfrm>
-          <a:prstGeom prst="roundRect">
-            <a:avLst>
-              <a:gd name="adj" fmla="val 50000"/>
-            </a:avLst>
-          </a:prstGeom>
-          <a:solidFill>
-            <a:srgbClr val="FAF3F4"/>
-          </a:solidFill>
-          <a:ln w="12700">
-            <a:solidFill>
-              <a:srgbClr val="FAF3F4"/>
-            </a:solidFill>
-            <a:prstDash val="solid"/>
-          </a:ln>
-        </p:spPr>
-      </p:sp>
-      <p:sp>
-        <p:nvSpPr>
-          <p:cNvPr id="13" name="Text 11"/>
-          <p:cNvSpPr txBox="1"/>
-          <p:nvPr/>
-        </p:nvSpPr>
-        <p:spPr>
-          <a:xfrm>
-            <a:off x="6766560" y="3200400"/>
-            <a:ext cx="1920240" cy="658368"/>
-          </a:xfrm>
-          <a:prstGeom prst="rect">
-            <a:avLst/>
-          </a:prstGeom>
-          <a:noFill/>
-          <a:ln/>
-        </p:spPr>
-        <p:txBody>
-          <a:bodyPr wrap="square" lIns="0" tIns="0" rIns="0" bIns="0" rtlCol="0" anchor="ctr"/>
-          <a:lstStyle/>
-          <a:p>
-            <a:pPr algn="ctr" indent="0" marL="0">
-              <a:buNone/>
-            </a:pPr>
-            <a:r>
-              <a:rPr lang="en-US" sz="1700" b="1" dirty="0">
-                <a:solidFill>
-                  <a:srgbClr val="7A1524"/>
-                </a:solidFill>
-                <a:latin typeface="Yu Gothic" pitchFamily="34" charset="0"/>
-                <a:ea typeface="Yu Gothic" pitchFamily="34" charset="-122"/>
-                <a:cs typeface="Yu Gothic" pitchFamily="34" charset="-120"/>
-              </a:rPr>
-              <a:t>最長3か月</a:t>
-            </a:r>
-            <a:endParaRPr lang="en-US" sz="1700" dirty="0"/>
           </a:p>
         </p:txBody>
       </p:sp>
@@ -17146,7 +17295,7 @@
         </p:nvSpPr>
         <p:spPr>
           <a:xfrm>
-            <a:off x="457200" y="777240"/>
+            <a:off x="457200" y="914400"/>
             <a:ext cx="8138160" cy="1188720"/>
           </a:xfrm>
           <a:prstGeom prst="rect">
@@ -17161,22 +17310,22 @@
           <a:p>
             <a:pPr algn="l" indent="0" marL="0">
               <a:lnSpc>
-                <a:spcPts val="4785"/>
+                <a:spcPts val="3770"/>
               </a:lnSpc>
               <a:buNone/>
             </a:pPr>
             <a:r>
-              <a:rPr lang="en-US" sz="3300" b="1" dirty="0">
-                <a:solidFill>
-                  <a:srgbClr val="141416"/>
+              <a:rPr lang="en-US" sz="2600" b="1" dirty="0">
+                <a:solidFill>
+                  <a:srgbClr val="6B6360"/>
                 </a:solidFill>
                 <a:latin typeface="Yu Mincho" pitchFamily="34" charset="0"/>
                 <a:ea typeface="Yu Mincho" pitchFamily="34" charset="-122"/>
                 <a:cs typeface="Yu Mincho" pitchFamily="34" charset="-120"/>
               </a:rPr>
-              <a:t>今回は5名限定です</a:t>
-            </a:r>
-            <a:endParaRPr lang="en-US" sz="3300" dirty="0"/>
+              <a:t>受講料</a:t>
+            </a:r>
+            <a:endParaRPr lang="en-US" sz="2600" dirty="0"/>
           </a:p>
         </p:txBody>
       </p:sp>
@@ -17188,186 +17337,73 @@
         </p:nvSpPr>
         <p:spPr>
           <a:xfrm>
-            <a:off x="457200" y="1737360"/>
-            <a:ext cx="7863840" cy="411480"/>
-          </a:xfrm>
-          <a:prstGeom prst="rect">
-            <a:avLst/>
-          </a:prstGeom>
-          <a:noFill/>
-          <a:ln/>
-        </p:spPr>
-        <p:txBody>
-          <a:bodyPr wrap="square" lIns="0" tIns="0" rIns="0" bIns="0" rtlCol="0" anchor="ctr"/>
-          <a:lstStyle/>
-          <a:p>
-            <a:pPr indent="0" marL="0">
-              <a:buNone/>
-            </a:pPr>
-            <a:r>
-              <a:rPr lang="en-US" sz="1800" dirty="0">
-                <a:solidFill>
-                  <a:srgbClr val="3B3634"/>
-                </a:solidFill>
-                <a:latin typeface="Yu Gothic" pitchFamily="34" charset="0"/>
-                <a:ea typeface="Yu Gothic" pitchFamily="34" charset="-122"/>
-                <a:cs typeface="Yu Gothic" pitchFamily="34" charset="-120"/>
-              </a:rPr>
-              <a:t>たくさんの方へ一斉に教える講座ではありません。</a:t>
-            </a:r>
-            <a:endParaRPr lang="en-US" sz="1800" dirty="0"/>
-          </a:p>
-        </p:txBody>
-      </p:sp>
-      <p:sp>
-        <p:nvSpPr>
-          <p:cNvPr id="6" name="Text 4"/>
-          <p:cNvSpPr txBox="1"/>
-          <p:nvPr/>
-        </p:nvSpPr>
-        <p:spPr>
-          <a:xfrm>
-            <a:off x="640080" y="2240280"/>
-            <a:ext cx="7680960" cy="1554480"/>
-          </a:xfrm>
-          <a:prstGeom prst="rect">
-            <a:avLst/>
-          </a:prstGeom>
-          <a:noFill/>
-          <a:ln/>
-        </p:spPr>
-        <p:txBody>
-          <a:bodyPr wrap="square" lIns="0" tIns="0" rIns="0" bIns="0" rtlCol="0" anchor="ctr"/>
-          <a:lstStyle/>
-          <a:p>
-            <a:pPr marL="342900" indent="-342900">
-              <a:spcAft>
-                <a:spcPts val="600"/>
-              </a:spcAft>
-              <a:buSzPct val="100000"/>
-              <a:buChar char="•"/>
-            </a:pPr>
-            <a:r>
-              <a:rPr lang="en-US" sz="1800" dirty="0">
-                <a:solidFill>
-                  <a:srgbClr val="3B3634"/>
-                </a:solidFill>
-                <a:latin typeface="Yu Gothic" pitchFamily="34" charset="0"/>
-                <a:ea typeface="Yu Gothic" pitchFamily="34" charset="-122"/>
-                <a:cs typeface="Yu Gothic" pitchFamily="34" charset="-120"/>
-              </a:rPr>
-              <a:t>次の大会</a:t>
-            </a:r>
-            <a:endParaRPr lang="en-US" sz="1800" dirty="0"/>
-          </a:p>
-          <a:p>
-            <a:pPr marL="342900" indent="-342900">
-              <a:spcAft>
-                <a:spcPts val="600"/>
-              </a:spcAft>
-              <a:buSzPct val="100000"/>
-              <a:buChar char="•"/>
-            </a:pPr>
-            <a:r>
-              <a:rPr lang="en-US" sz="1800" dirty="0">
-                <a:solidFill>
-                  <a:srgbClr val="3B3634"/>
-                </a:solidFill>
-                <a:latin typeface="Yu Gothic" pitchFamily="34" charset="0"/>
-                <a:ea typeface="Yu Gothic" pitchFamily="34" charset="-122"/>
-                <a:cs typeface="Yu Gothic" pitchFamily="34" charset="-120"/>
-              </a:rPr>
-              <a:t>取りたい記録</a:t>
-            </a:r>
-            <a:endParaRPr lang="en-US" sz="1800" dirty="0"/>
-          </a:p>
-          <a:p>
-            <a:pPr marL="342900" indent="-342900">
-              <a:spcAft>
-                <a:spcPts val="600"/>
-              </a:spcAft>
-              <a:buSzPct val="100000"/>
-              <a:buChar char="•"/>
-            </a:pPr>
-            <a:r>
-              <a:rPr lang="en-US" sz="1800" dirty="0">
-                <a:solidFill>
-                  <a:srgbClr val="3B3634"/>
-                </a:solidFill>
-                <a:latin typeface="Yu Gothic" pitchFamily="34" charset="0"/>
-                <a:ea typeface="Yu Gothic" pitchFamily="34" charset="-122"/>
-                <a:cs typeface="Yu Gothic" pitchFamily="34" charset="-120"/>
-              </a:rPr>
-              <a:t>過去の試合</a:t>
-            </a:r>
-            <a:endParaRPr lang="en-US" sz="1800" dirty="0"/>
-          </a:p>
-          <a:p>
-            <a:pPr marL="342900" indent="-342900">
-              <a:spcAft>
-                <a:spcPts val="600"/>
-              </a:spcAft>
-              <a:buSzPct val="100000"/>
-              <a:buChar char="•"/>
-            </a:pPr>
-            <a:r>
-              <a:rPr lang="en-US" sz="1800" dirty="0">
-                <a:solidFill>
-                  <a:srgbClr val="3B3634"/>
-                </a:solidFill>
-                <a:latin typeface="Yu Gothic" pitchFamily="34" charset="0"/>
-                <a:ea typeface="Yu Gothic" pitchFamily="34" charset="-122"/>
-                <a:cs typeface="Yu Gothic" pitchFamily="34" charset="-120"/>
-              </a:rPr>
-              <a:t>考え方の特徴</a:t>
-            </a:r>
-            <a:endParaRPr lang="en-US" sz="1800" dirty="0"/>
-          </a:p>
-          <a:p>
-            <a:pPr marL="342900" indent="-342900">
-              <a:spcAft>
-                <a:spcPts val="600"/>
-              </a:spcAft>
-              <a:buSzPct val="100000"/>
-              <a:buChar char="•"/>
-            </a:pPr>
-            <a:r>
-              <a:rPr lang="en-US" sz="1800" dirty="0">
-                <a:solidFill>
-                  <a:srgbClr val="3B3634"/>
-                </a:solidFill>
-                <a:latin typeface="Yu Gothic" pitchFamily="34" charset="0"/>
-                <a:ea typeface="Yu Gothic" pitchFamily="34" charset="-122"/>
-                <a:cs typeface="Yu Gothic" pitchFamily="34" charset="-120"/>
-              </a:rPr>
-              <a:t>その人に必要なメンタルスキル</a:t>
-            </a:r>
-            <a:endParaRPr lang="en-US" sz="1800" dirty="0"/>
-          </a:p>
-        </p:txBody>
-      </p:sp>
-      <p:sp>
-        <p:nvSpPr>
-          <p:cNvPr id="7" name="Shape 5"/>
+            <a:off x="457200" y="1463040"/>
+            <a:ext cx="7863840" cy="1371600"/>
+          </a:xfrm>
+          <a:prstGeom prst="rect">
+            <a:avLst/>
+          </a:prstGeom>
+          <a:noFill/>
+          <a:ln/>
+        </p:spPr>
+        <p:txBody>
+          <a:bodyPr wrap="square" lIns="0" tIns="0" rIns="0" bIns="0" rtlCol="0" anchor="b"/>
+          <a:lstStyle/>
+          <a:p>
+            <a:pPr indent="0" marL="0">
+              <a:buNone/>
+            </a:pPr>
+            <a:r>
+              <a:rPr lang="en-US" sz="8200" b="1" dirty="0">
+                <a:solidFill>
+                  <a:srgbClr val="7A1524"/>
+                </a:solidFill>
+                <a:latin typeface="Yu Mincho" pitchFamily="34" charset="0"/>
+                <a:ea typeface="Yu Mincho" pitchFamily="34" charset="-122"/>
+                <a:cs typeface="Yu Mincho" pitchFamily="34" charset="-120"/>
+              </a:rPr>
+              <a:t>98,000</a:t>
+            </a:r>
+            <a:pPr indent="0" marL="0">
+              <a:buNone/>
+            </a:pPr>
+            <a:r>
+              <a:rPr lang="en-US" sz="2400" b="1" dirty="0">
+                <a:solidFill>
+                  <a:srgbClr val="7A1524"/>
+                </a:solidFill>
+                <a:latin typeface="Yu Mincho" pitchFamily="34" charset="0"/>
+                <a:ea typeface="Yu Mincho" pitchFamily="34" charset="-122"/>
+                <a:cs typeface="Yu Mincho" pitchFamily="34" charset="-120"/>
+              </a:rPr>
+              <a:t>　円（税込）</a:t>
+            </a:r>
+            <a:endParaRPr lang="en-US" sz="8200" dirty="0"/>
+          </a:p>
+        </p:txBody>
+      </p:sp>
+      <p:sp>
+        <p:nvSpPr>
+          <p:cNvPr id="6" name="Shape 4"/>
           <p:cNvSpPr/>
           <p:nvPr/>
         </p:nvSpPr>
         <p:spPr>
           <a:xfrm>
-            <a:off x="457200" y="3931920"/>
-            <a:ext cx="7863840" cy="685800"/>
+            <a:off x="457200" y="3200400"/>
+            <a:ext cx="1920240" cy="658368"/>
           </a:xfrm>
           <a:prstGeom prst="roundRect">
             <a:avLst>
-              <a:gd name="adj" fmla="val 10667"/>
+              <a:gd name="adj" fmla="val 50000"/>
             </a:avLst>
           </a:prstGeom>
           <a:solidFill>
-            <a:srgbClr val="540E19"/>
+            <a:srgbClr val="FAF3F4"/>
           </a:solidFill>
           <a:ln w="12700">
             <a:solidFill>
-              <a:srgbClr val="540E19"/>
+              <a:srgbClr val="FAF3F4"/>
             </a:solidFill>
             <a:prstDash val="solid"/>
           </a:ln>
@@ -17375,42 +17411,69 @@
       </p:sp>
       <p:sp>
         <p:nvSpPr>
-          <p:cNvPr id="8" name="Text 6"/>
-          <p:cNvSpPr txBox="1"/>
-          <p:nvPr/>
-        </p:nvSpPr>
-        <p:spPr>
-          <a:xfrm>
-            <a:off x="822960" y="3931920"/>
-            <a:ext cx="7406640" cy="685800"/>
-          </a:xfrm>
-          <a:prstGeom prst="rect">
-            <a:avLst/>
-          </a:prstGeom>
-          <a:noFill/>
-          <a:ln/>
-        </p:spPr>
-        <p:txBody>
-          <a:bodyPr wrap="square" lIns="0" tIns="0" rIns="0" bIns="0" rtlCol="0" anchor="ctr"/>
-          <a:lstStyle/>
-          <a:p>
-            <a:pPr indent="0" marL="0">
-              <a:buNone/>
-            </a:pPr>
-            <a:r>
-              <a:rPr lang="en-US" sz="1800" b="1" dirty="0">
-                <a:solidFill>
-                  <a:srgbClr val="FFFFFF"/>
-                </a:solidFill>
-                <a:latin typeface="Yu Gothic" pitchFamily="34" charset="0"/>
-                <a:ea typeface="Yu Gothic" pitchFamily="34" charset="-122"/>
-                <a:cs typeface="Yu Gothic" pitchFamily="34" charset="-120"/>
-              </a:rPr>
-              <a:t>一人ひとりを把握し、じっくり関わりたいから。</a:t>
-            </a:r>
-            <a:endParaRPr lang="en-US" sz="1800" dirty="0"/>
-          </a:p>
-        </p:txBody>
+          <p:cNvPr id="7" name="Text 5"/>
+          <p:cNvSpPr txBox="1"/>
+          <p:nvPr/>
+        </p:nvSpPr>
+        <p:spPr>
+          <a:xfrm>
+            <a:off x="457200" y="3200400"/>
+            <a:ext cx="1920240" cy="658368"/>
+          </a:xfrm>
+          <a:prstGeom prst="rect">
+            <a:avLst/>
+          </a:prstGeom>
+          <a:noFill/>
+          <a:ln/>
+        </p:spPr>
+        <p:txBody>
+          <a:bodyPr wrap="square" lIns="0" tIns="0" rIns="0" bIns="0" rtlCol="0" anchor="ctr"/>
+          <a:lstStyle/>
+          <a:p>
+            <a:pPr algn="ctr" indent="0" marL="0">
+              <a:buNone/>
+            </a:pPr>
+            <a:r>
+              <a:rPr lang="en-US" sz="1700" b="1" dirty="0">
+                <a:solidFill>
+                  <a:srgbClr val="7A1524"/>
+                </a:solidFill>
+                <a:latin typeface="Yu Gothic" pitchFamily="34" charset="0"/>
+                <a:ea typeface="Yu Gothic" pitchFamily="34" charset="-122"/>
+                <a:cs typeface="Yu Gothic" pitchFamily="34" charset="-120"/>
+              </a:rPr>
+              <a:t>全10回</a:t>
+            </a:r>
+            <a:endParaRPr lang="en-US" sz="1700" dirty="0"/>
+          </a:p>
+        </p:txBody>
+      </p:sp>
+      <p:sp>
+        <p:nvSpPr>
+          <p:cNvPr id="8" name="Shape 6"/>
+          <p:cNvSpPr/>
+          <p:nvPr/>
+        </p:nvSpPr>
+        <p:spPr>
+          <a:xfrm>
+            <a:off x="2560320" y="3200400"/>
+            <a:ext cx="1920240" cy="658368"/>
+          </a:xfrm>
+          <a:prstGeom prst="roundRect">
+            <a:avLst>
+              <a:gd name="adj" fmla="val 50000"/>
+            </a:avLst>
+          </a:prstGeom>
+          <a:solidFill>
+            <a:srgbClr val="FAF3F4"/>
+          </a:solidFill>
+          <a:ln w="12700">
+            <a:solidFill>
+              <a:srgbClr val="FAF3F4"/>
+            </a:solidFill>
+            <a:prstDash val="solid"/>
+          </a:ln>
+        </p:spPr>
       </p:sp>
       <p:sp>
         <p:nvSpPr>
@@ -17420,34 +17483,166 @@
         </p:nvSpPr>
         <p:spPr>
           <a:xfrm>
-            <a:off x="457200" y="4709160"/>
-            <a:ext cx="7863840" cy="320040"/>
-          </a:xfrm>
-          <a:prstGeom prst="rect">
-            <a:avLst/>
-          </a:prstGeom>
-          <a:noFill/>
-          <a:ln/>
-        </p:spPr>
-        <p:txBody>
-          <a:bodyPr wrap="square" lIns="0" tIns="0" rIns="0" bIns="0" rtlCol="0" anchor="ctr"/>
-          <a:lstStyle/>
-          <a:p>
-            <a:pPr indent="0" marL="0">
-              <a:buNone/>
-            </a:pPr>
-            <a:r>
-              <a:rPr lang="en-US" sz="1400" dirty="0">
-                <a:solidFill>
-                  <a:srgbClr val="6B6360"/>
-                </a:solidFill>
-                <a:latin typeface="Yu Gothic" pitchFamily="34" charset="0"/>
-                <a:ea typeface="Yu Gothic" pitchFamily="34" charset="-122"/>
-                <a:cs typeface="Yu Gothic" pitchFamily="34" charset="-120"/>
-              </a:rPr>
-              <a:t>5名に達した時点で、今回の受付は終了します。</a:t>
-            </a:r>
-            <a:endParaRPr lang="en-US" sz="1400" dirty="0"/>
+            <a:off x="2560320" y="3200400"/>
+            <a:ext cx="1920240" cy="658368"/>
+          </a:xfrm>
+          <a:prstGeom prst="rect">
+            <a:avLst/>
+          </a:prstGeom>
+          <a:noFill/>
+          <a:ln/>
+        </p:spPr>
+        <p:txBody>
+          <a:bodyPr wrap="square" lIns="0" tIns="0" rIns="0" bIns="0" rtlCol="0" anchor="ctr"/>
+          <a:lstStyle/>
+          <a:p>
+            <a:pPr algn="ctr" indent="0" marL="0">
+              <a:buNone/>
+            </a:pPr>
+            <a:r>
+              <a:rPr lang="en-US" sz="1700" b="1" dirty="0">
+                <a:solidFill>
+                  <a:srgbClr val="7A1524"/>
+                </a:solidFill>
+                <a:latin typeface="Yu Gothic" pitchFamily="34" charset="0"/>
+                <a:ea typeface="Yu Gothic" pitchFamily="34" charset="-122"/>
+                <a:cs typeface="Yu Gothic" pitchFamily="34" charset="-120"/>
+              </a:rPr>
+              <a:t>1回60分</a:t>
+            </a:r>
+            <a:endParaRPr lang="en-US" sz="1700" dirty="0"/>
+          </a:p>
+        </p:txBody>
+      </p:sp>
+      <p:sp>
+        <p:nvSpPr>
+          <p:cNvPr id="10" name="Shape 8"/>
+          <p:cNvSpPr/>
+          <p:nvPr/>
+        </p:nvSpPr>
+        <p:spPr>
+          <a:xfrm>
+            <a:off x="4663440" y="3200400"/>
+            <a:ext cx="1920240" cy="658368"/>
+          </a:xfrm>
+          <a:prstGeom prst="roundRect">
+            <a:avLst>
+              <a:gd name="adj" fmla="val 50000"/>
+            </a:avLst>
+          </a:prstGeom>
+          <a:solidFill>
+            <a:srgbClr val="FAF3F4"/>
+          </a:solidFill>
+          <a:ln w="12700">
+            <a:solidFill>
+              <a:srgbClr val="FAF3F4"/>
+            </a:solidFill>
+            <a:prstDash val="solid"/>
+          </a:ln>
+        </p:spPr>
+      </p:sp>
+      <p:sp>
+        <p:nvSpPr>
+          <p:cNvPr id="11" name="Text 9"/>
+          <p:cNvSpPr txBox="1"/>
+          <p:nvPr/>
+        </p:nvSpPr>
+        <p:spPr>
+          <a:xfrm>
+            <a:off x="4663440" y="3200400"/>
+            <a:ext cx="1920240" cy="658368"/>
+          </a:xfrm>
+          <a:prstGeom prst="rect">
+            <a:avLst/>
+          </a:prstGeom>
+          <a:noFill/>
+          <a:ln/>
+        </p:spPr>
+        <p:txBody>
+          <a:bodyPr wrap="square" lIns="0" tIns="0" rIns="0" bIns="0" rtlCol="0" anchor="ctr"/>
+          <a:lstStyle/>
+          <a:p>
+            <a:pPr algn="ctr" indent="0" marL="0">
+              <a:buNone/>
+            </a:pPr>
+            <a:r>
+              <a:rPr lang="en-US" sz="1700" b="1" dirty="0">
+                <a:solidFill>
+                  <a:srgbClr val="7A1524"/>
+                </a:solidFill>
+                <a:latin typeface="Yu Gothic" pitchFamily="34" charset="0"/>
+                <a:ea typeface="Yu Gothic" pitchFamily="34" charset="-122"/>
+                <a:cs typeface="Yu Gothic" pitchFamily="34" charset="-120"/>
+              </a:rPr>
+              <a:t>完全1対1</a:t>
+            </a:r>
+            <a:endParaRPr lang="en-US" sz="1700" dirty="0"/>
+          </a:p>
+        </p:txBody>
+      </p:sp>
+      <p:sp>
+        <p:nvSpPr>
+          <p:cNvPr id="12" name="Shape 10"/>
+          <p:cNvSpPr/>
+          <p:nvPr/>
+        </p:nvSpPr>
+        <p:spPr>
+          <a:xfrm>
+            <a:off x="6766560" y="3200400"/>
+            <a:ext cx="1920240" cy="658368"/>
+          </a:xfrm>
+          <a:prstGeom prst="roundRect">
+            <a:avLst>
+              <a:gd name="adj" fmla="val 50000"/>
+            </a:avLst>
+          </a:prstGeom>
+          <a:solidFill>
+            <a:srgbClr val="FAF3F4"/>
+          </a:solidFill>
+          <a:ln w="12700">
+            <a:solidFill>
+              <a:srgbClr val="FAF3F4"/>
+            </a:solidFill>
+            <a:prstDash val="solid"/>
+          </a:ln>
+        </p:spPr>
+      </p:sp>
+      <p:sp>
+        <p:nvSpPr>
+          <p:cNvPr id="13" name="Text 11"/>
+          <p:cNvSpPr txBox="1"/>
+          <p:nvPr/>
+        </p:nvSpPr>
+        <p:spPr>
+          <a:xfrm>
+            <a:off x="6766560" y="3200400"/>
+            <a:ext cx="1920240" cy="658368"/>
+          </a:xfrm>
+          <a:prstGeom prst="rect">
+            <a:avLst/>
+          </a:prstGeom>
+          <a:noFill/>
+          <a:ln/>
+        </p:spPr>
+        <p:txBody>
+          <a:bodyPr wrap="square" lIns="0" tIns="0" rIns="0" bIns="0" rtlCol="0" anchor="ctr"/>
+          <a:lstStyle/>
+          <a:p>
+            <a:pPr algn="ctr" indent="0" marL="0">
+              <a:buNone/>
+            </a:pPr>
+            <a:r>
+              <a:rPr lang="en-US" sz="1700" b="1" dirty="0">
+                <a:solidFill>
+                  <a:srgbClr val="7A1524"/>
+                </a:solidFill>
+                <a:latin typeface="Yu Gothic" pitchFamily="34" charset="0"/>
+                <a:ea typeface="Yu Gothic" pitchFamily="34" charset="-122"/>
+                <a:cs typeface="Yu Gothic" pitchFamily="34" charset="-120"/>
+              </a:rPr>
+              <a:t>最長3か月</a:t>
+            </a:r>
+            <a:endParaRPr lang="en-US" sz="1700" dirty="0"/>
           </a:p>
         </p:txBody>
       </p:sp>
@@ -17516,7 +17711,7 @@
                 <a:ea typeface="Yu Gothic" pitchFamily="34" charset="-122"/>
                 <a:cs typeface="Yu Gothic" pitchFamily="34" charset="-120"/>
               </a:rPr>
-              <a:t>PHASE 8　クロージング</a:t>
+              <a:t>PHASE 7　講座のご案内</a:t>
             </a:r>
             <a:endParaRPr lang="en-US" sz="1200" dirty="0"/>
           </a:p>
@@ -17569,8 +17764,8 @@
         </p:nvSpPr>
         <p:spPr>
           <a:xfrm>
-            <a:off x="457200" y="914400"/>
-            <a:ext cx="7863840" cy="1188720"/>
+            <a:off x="457200" y="777240"/>
+            <a:ext cx="8138160" cy="1188720"/>
           </a:xfrm>
           <a:prstGeom prst="rect">
             <a:avLst/>
@@ -17584,12 +17779,12 @@
           <a:p>
             <a:pPr algn="l" indent="0" marL="0">
               <a:lnSpc>
-                <a:spcPts val="4930"/>
+                <a:spcPts val="4785"/>
               </a:lnSpc>
               <a:buNone/>
             </a:pPr>
             <a:r>
-              <a:rPr lang="en-US" sz="3400" b="1" dirty="0">
+              <a:rPr lang="en-US" sz="3300" b="1" dirty="0">
                 <a:solidFill>
                   <a:srgbClr val="141416"/>
                 </a:solidFill>
@@ -17597,54 +17792,200 @@
                 <a:ea typeface="Yu Mincho" pitchFamily="34" charset="-122"/>
                 <a:cs typeface="Yu Mincho" pitchFamily="34" charset="-120"/>
               </a:rPr>
-              <a:t>今日話してみて、</a:t>
-            </a:r>
-            <a:endParaRPr lang="en-US" sz="3400" dirty="0"/>
-          </a:p>
-          <a:p>
-            <a:pPr algn="l" indent="0" marL="0">
-              <a:lnSpc>
-                <a:spcPts val="4930"/>
-              </a:lnSpc>
-              <a:buNone/>
-            </a:pPr>
-            <a:r>
-              <a:rPr lang="en-US" sz="3400" b="1" dirty="0">
-                <a:solidFill>
-                  <a:srgbClr val="141416"/>
-                </a:solidFill>
-                <a:latin typeface="Yu Mincho" pitchFamily="34" charset="0"/>
-                <a:ea typeface="Yu Mincho" pitchFamily="34" charset="-122"/>
-                <a:cs typeface="Yu Mincho" pitchFamily="34" charset="-120"/>
-              </a:rPr>
-              <a:t>何が一番印象に残りましたか？</a:t>
-            </a:r>
-            <a:endParaRPr lang="en-US" sz="3400" dirty="0"/>
-          </a:p>
-        </p:txBody>
-      </p:sp>
-      <p:sp>
-        <p:nvSpPr>
-          <p:cNvPr id="5" name="Shape 3"/>
+              <a:t>今回は5名限定です</a:t>
+            </a:r>
+            <a:endParaRPr lang="en-US" sz="3300" dirty="0"/>
+          </a:p>
+        </p:txBody>
+      </p:sp>
+      <p:sp>
+        <p:nvSpPr>
+          <p:cNvPr id="5" name="Text 3"/>
+          <p:cNvSpPr txBox="1"/>
+          <p:nvPr/>
+        </p:nvSpPr>
+        <p:spPr>
+          <a:xfrm>
+            <a:off x="457200" y="1737360"/>
+            <a:ext cx="7863840" cy="411480"/>
+          </a:xfrm>
+          <a:prstGeom prst="rect">
+            <a:avLst/>
+          </a:prstGeom>
+          <a:noFill/>
+          <a:ln/>
+        </p:spPr>
+        <p:txBody>
+          <a:bodyPr wrap="square" lIns="0" tIns="0" rIns="0" bIns="0" rtlCol="0" anchor="ctr"/>
+          <a:lstStyle/>
+          <a:p>
+            <a:pPr indent="0" marL="0">
+              <a:buNone/>
+            </a:pPr>
+            <a:r>
+              <a:rPr lang="en-US" sz="1800" dirty="0">
+                <a:solidFill>
+                  <a:srgbClr val="3B3634"/>
+                </a:solidFill>
+                <a:latin typeface="Yu Gothic" pitchFamily="34" charset="0"/>
+                <a:ea typeface="Yu Gothic" pitchFamily="34" charset="-122"/>
+                <a:cs typeface="Yu Gothic" pitchFamily="34" charset="-120"/>
+              </a:rPr>
+              <a:t>たくさんの方へ一斉に教える講座ではありません。</a:t>
+            </a:r>
+            <a:endParaRPr lang="en-US" sz="1800" dirty="0"/>
+          </a:p>
+        </p:txBody>
+      </p:sp>
+      <p:sp>
+        <p:nvSpPr>
+          <p:cNvPr id="6" name="Text 4"/>
+          <p:cNvSpPr txBox="1"/>
+          <p:nvPr/>
+        </p:nvSpPr>
+        <p:spPr>
+          <a:xfrm>
+            <a:off x="640080" y="2240280"/>
+            <a:ext cx="7680960" cy="1554480"/>
+          </a:xfrm>
+          <a:prstGeom prst="rect">
+            <a:avLst/>
+          </a:prstGeom>
+          <a:noFill/>
+          <a:ln/>
+        </p:spPr>
+        <p:txBody>
+          <a:bodyPr wrap="square" lIns="0" tIns="0" rIns="0" bIns="0" rtlCol="0" anchor="ctr"/>
+          <a:lstStyle/>
+          <a:p>
+            <a:pPr marL="342900" indent="-342900">
+              <a:spcAft>
+                <a:spcPts val="600"/>
+              </a:spcAft>
+              <a:buSzPct val="100000"/>
+              <a:buChar char="•"/>
+            </a:pPr>
+            <a:r>
+              <a:rPr lang="en-US" sz="1800" dirty="0">
+                <a:solidFill>
+                  <a:srgbClr val="3B3634"/>
+                </a:solidFill>
+                <a:latin typeface="Yu Gothic" pitchFamily="34" charset="0"/>
+                <a:ea typeface="Yu Gothic" pitchFamily="34" charset="-122"/>
+                <a:cs typeface="Yu Gothic" pitchFamily="34" charset="-120"/>
+              </a:rPr>
+              <a:t>次の大会</a:t>
+            </a:r>
+            <a:endParaRPr lang="en-US" sz="1800" dirty="0"/>
+          </a:p>
+          <a:p>
+            <a:pPr marL="342900" indent="-342900">
+              <a:spcAft>
+                <a:spcPts val="600"/>
+              </a:spcAft>
+              <a:buSzPct val="100000"/>
+              <a:buChar char="•"/>
+            </a:pPr>
+            <a:r>
+              <a:rPr lang="en-US" sz="1800" dirty="0">
+                <a:solidFill>
+                  <a:srgbClr val="3B3634"/>
+                </a:solidFill>
+                <a:latin typeface="Yu Gothic" pitchFamily="34" charset="0"/>
+                <a:ea typeface="Yu Gothic" pitchFamily="34" charset="-122"/>
+                <a:cs typeface="Yu Gothic" pitchFamily="34" charset="-120"/>
+              </a:rPr>
+              <a:t>取りたい記録</a:t>
+            </a:r>
+            <a:endParaRPr lang="en-US" sz="1800" dirty="0"/>
+          </a:p>
+          <a:p>
+            <a:pPr marL="342900" indent="-342900">
+              <a:spcAft>
+                <a:spcPts val="600"/>
+              </a:spcAft>
+              <a:buSzPct val="100000"/>
+              <a:buChar char="•"/>
+            </a:pPr>
+            <a:r>
+              <a:rPr lang="en-US" sz="1800" dirty="0">
+                <a:solidFill>
+                  <a:srgbClr val="3B3634"/>
+                </a:solidFill>
+                <a:latin typeface="Yu Gothic" pitchFamily="34" charset="0"/>
+                <a:ea typeface="Yu Gothic" pitchFamily="34" charset="-122"/>
+                <a:cs typeface="Yu Gothic" pitchFamily="34" charset="-120"/>
+              </a:rPr>
+              <a:t>過去の試合</a:t>
+            </a:r>
+            <a:endParaRPr lang="en-US" sz="1800" dirty="0"/>
+          </a:p>
+          <a:p>
+            <a:pPr marL="342900" indent="-342900">
+              <a:spcAft>
+                <a:spcPts val="600"/>
+              </a:spcAft>
+              <a:buSzPct val="100000"/>
+              <a:buChar char="•"/>
+            </a:pPr>
+            <a:r>
+              <a:rPr lang="en-US" sz="1800" dirty="0">
+                <a:solidFill>
+                  <a:srgbClr val="3B3634"/>
+                </a:solidFill>
+                <a:latin typeface="Yu Gothic" pitchFamily="34" charset="0"/>
+                <a:ea typeface="Yu Gothic" pitchFamily="34" charset="-122"/>
+                <a:cs typeface="Yu Gothic" pitchFamily="34" charset="-120"/>
+              </a:rPr>
+              <a:t>考え方の特徴</a:t>
+            </a:r>
+            <a:endParaRPr lang="en-US" sz="1800" dirty="0"/>
+          </a:p>
+          <a:p>
+            <a:pPr marL="342900" indent="-342900">
+              <a:spcAft>
+                <a:spcPts val="600"/>
+              </a:spcAft>
+              <a:buSzPct val="100000"/>
+              <a:buChar char="•"/>
+            </a:pPr>
+            <a:r>
+              <a:rPr lang="en-US" sz="1800" dirty="0">
+                <a:solidFill>
+                  <a:srgbClr val="3B3634"/>
+                </a:solidFill>
+                <a:latin typeface="Yu Gothic" pitchFamily="34" charset="0"/>
+                <a:ea typeface="Yu Gothic" pitchFamily="34" charset="-122"/>
+                <a:cs typeface="Yu Gothic" pitchFamily="34" charset="-120"/>
+              </a:rPr>
+              <a:t>その人に必要なメンタルスキル</a:t>
+            </a:r>
+            <a:endParaRPr lang="en-US" sz="1800" dirty="0"/>
+          </a:p>
+        </p:txBody>
+      </p:sp>
+      <p:sp>
+        <p:nvSpPr>
+          <p:cNvPr id="7" name="Shape 5"/>
           <p:cNvSpPr/>
           <p:nvPr/>
         </p:nvSpPr>
         <p:spPr>
           <a:xfrm>
-            <a:off x="457200" y="2651760"/>
-            <a:ext cx="7863840" cy="512064"/>
+            <a:off x="457200" y="3931920"/>
+            <a:ext cx="7863840" cy="685800"/>
           </a:xfrm>
           <a:prstGeom prst="roundRect">
             <a:avLst>
-              <a:gd name="adj" fmla="val 10714"/>
+              <a:gd name="adj" fmla="val 10667"/>
             </a:avLst>
           </a:prstGeom>
           <a:solidFill>
-            <a:srgbClr val="FAF3F4"/>
+            <a:srgbClr val="540E19"/>
           </a:solidFill>
           <a:ln w="12700">
             <a:solidFill>
-              <a:srgbClr val="FAF3F4"/>
+              <a:srgbClr val="540E19"/>
             </a:solidFill>
             <a:prstDash val="solid"/>
           </a:ln>
@@ -17652,185 +17993,14 @@
       </p:sp>
       <p:sp>
         <p:nvSpPr>
-          <p:cNvPr id="6" name="Text 4"/>
-          <p:cNvSpPr txBox="1"/>
-          <p:nvPr/>
-        </p:nvSpPr>
-        <p:spPr>
-          <a:xfrm>
-            <a:off x="713232" y="2651760"/>
-            <a:ext cx="7406640" cy="512064"/>
-          </a:xfrm>
-          <a:prstGeom prst="rect">
-            <a:avLst/>
-          </a:prstGeom>
-          <a:noFill/>
-          <a:ln/>
-        </p:spPr>
-        <p:txBody>
-          <a:bodyPr wrap="square" lIns="0" tIns="0" rIns="0" bIns="0" rtlCol="0" anchor="ctr"/>
-          <a:lstStyle/>
-          <a:p>
-            <a:pPr indent="0" marL="0">
-              <a:buNone/>
-            </a:pPr>
-            <a:r>
-              <a:rPr lang="en-US" sz="1900" dirty="0">
-                <a:solidFill>
-                  <a:srgbClr val="3B3634"/>
-                </a:solidFill>
-                <a:latin typeface="Yu Gothic" pitchFamily="34" charset="0"/>
-                <a:ea typeface="Yu Gothic" pitchFamily="34" charset="-122"/>
-                <a:cs typeface="Yu Gothic" pitchFamily="34" charset="-120"/>
-              </a:rPr>
-              <a:t>今の自分に必要だと思ったこと</a:t>
-            </a:r>
-            <a:endParaRPr lang="en-US" sz="1900" dirty="0"/>
-          </a:p>
-        </p:txBody>
-      </p:sp>
-      <p:sp>
-        <p:nvSpPr>
-          <p:cNvPr id="7" name="Shape 5"/>
-          <p:cNvSpPr/>
-          <p:nvPr/>
-        </p:nvSpPr>
-        <p:spPr>
-          <a:xfrm>
-            <a:off x="457200" y="3255264"/>
-            <a:ext cx="7863840" cy="512064"/>
-          </a:xfrm>
-          <a:prstGeom prst="roundRect">
-            <a:avLst>
-              <a:gd name="adj" fmla="val 10714"/>
-            </a:avLst>
-          </a:prstGeom>
-          <a:solidFill>
-            <a:srgbClr val="FAF3F4"/>
-          </a:solidFill>
-          <a:ln w="12700">
-            <a:solidFill>
-              <a:srgbClr val="FAF3F4"/>
-            </a:solidFill>
-            <a:prstDash val="solid"/>
-          </a:ln>
-        </p:spPr>
-      </p:sp>
-      <p:sp>
-        <p:nvSpPr>
           <p:cNvPr id="8" name="Text 6"/>
           <p:cNvSpPr txBox="1"/>
           <p:nvPr/>
         </p:nvSpPr>
         <p:spPr>
           <a:xfrm>
-            <a:off x="713232" y="3255264"/>
-            <a:ext cx="7406640" cy="512064"/>
-          </a:xfrm>
-          <a:prstGeom prst="rect">
-            <a:avLst/>
-          </a:prstGeom>
-          <a:noFill/>
-          <a:ln/>
-        </p:spPr>
-        <p:txBody>
-          <a:bodyPr wrap="square" lIns="0" tIns="0" rIns="0" bIns="0" rtlCol="0" anchor="ctr"/>
-          <a:lstStyle/>
-          <a:p>
-            <a:pPr indent="0" marL="0">
-              <a:buNone/>
-            </a:pPr>
-            <a:r>
-              <a:rPr lang="en-US" sz="1900" dirty="0">
-                <a:solidFill>
-                  <a:srgbClr val="3B3634"/>
-                </a:solidFill>
-                <a:latin typeface="Yu Gothic" pitchFamily="34" charset="0"/>
-                <a:ea typeface="Yu Gothic" pitchFamily="34" charset="-122"/>
-                <a:cs typeface="Yu Gothic" pitchFamily="34" charset="-120"/>
-              </a:rPr>
-              <a:t>次の試合までに変えたいこと</a:t>
-            </a:r>
-            <a:endParaRPr lang="en-US" sz="1900" dirty="0"/>
-          </a:p>
-        </p:txBody>
-      </p:sp>
-      <p:sp>
-        <p:nvSpPr>
-          <p:cNvPr id="9" name="Shape 7"/>
-          <p:cNvSpPr/>
-          <p:nvPr/>
-        </p:nvSpPr>
-        <p:spPr>
-          <a:xfrm>
-            <a:off x="457200" y="3858768"/>
-            <a:ext cx="7863840" cy="512064"/>
-          </a:xfrm>
-          <a:prstGeom prst="roundRect">
-            <a:avLst>
-              <a:gd name="adj" fmla="val 10714"/>
-            </a:avLst>
-          </a:prstGeom>
-          <a:solidFill>
-            <a:srgbClr val="FAF3F4"/>
-          </a:solidFill>
-          <a:ln w="12700">
-            <a:solidFill>
-              <a:srgbClr val="FAF3F4"/>
-            </a:solidFill>
-            <a:prstDash val="solid"/>
-          </a:ln>
-        </p:spPr>
-      </p:sp>
-      <p:sp>
-        <p:nvSpPr>
-          <p:cNvPr id="10" name="Text 8"/>
-          <p:cNvSpPr txBox="1"/>
-          <p:nvPr/>
-        </p:nvSpPr>
-        <p:spPr>
-          <a:xfrm>
-            <a:off x="713232" y="3858768"/>
-            <a:ext cx="7406640" cy="512064"/>
-          </a:xfrm>
-          <a:prstGeom prst="rect">
-            <a:avLst/>
-          </a:prstGeom>
-          <a:noFill/>
-          <a:ln/>
-        </p:spPr>
-        <p:txBody>
-          <a:bodyPr wrap="square" lIns="0" tIns="0" rIns="0" bIns="0" rtlCol="0" anchor="ctr"/>
-          <a:lstStyle/>
-          <a:p>
-            <a:pPr indent="0" marL="0">
-              <a:buNone/>
-            </a:pPr>
-            <a:r>
-              <a:rPr lang="en-US" sz="1900" dirty="0">
-                <a:solidFill>
-                  <a:srgbClr val="3B3634"/>
-                </a:solidFill>
-                <a:latin typeface="Yu Gothic" pitchFamily="34" charset="0"/>
-                <a:ea typeface="Yu Gothic" pitchFamily="34" charset="-122"/>
-                <a:cs typeface="Yu Gothic" pitchFamily="34" charset="-120"/>
-              </a:rPr>
-              <a:t>聞いておきたいこと</a:t>
-            </a:r>
-            <a:endParaRPr lang="en-US" sz="1900" dirty="0"/>
-          </a:p>
-        </p:txBody>
-      </p:sp>
-      <p:sp>
-        <p:nvSpPr>
-          <p:cNvPr id="11" name="Text 9"/>
-          <p:cNvSpPr txBox="1"/>
-          <p:nvPr/>
-        </p:nvSpPr>
-        <p:spPr>
-          <a:xfrm>
-            <a:off x="457200" y="4572000"/>
-            <a:ext cx="7863840" cy="411480"/>
+            <a:off x="822960" y="3931920"/>
+            <a:ext cx="7406640" cy="685800"/>
           </a:xfrm>
           <a:prstGeom prst="rect">
             <a:avLst/>
@@ -17848,15 +18018,54 @@
             <a:r>
               <a:rPr lang="en-US" sz="1800" b="1" dirty="0">
                 <a:solidFill>
-                  <a:srgbClr val="7A1524"/>
-                </a:solidFill>
-                <a:latin typeface="Yu Gothic" pitchFamily="34" charset="0"/>
-                <a:ea typeface="Yu Gothic" pitchFamily="34" charset="-122"/>
-                <a:cs typeface="Yu Gothic" pitchFamily="34" charset="-120"/>
-              </a:rPr>
-              <a:t>まず、あなたの感想を聞かせてください。</a:t>
+                  <a:srgbClr val="FFFFFF"/>
+                </a:solidFill>
+                <a:latin typeface="Yu Gothic" pitchFamily="34" charset="0"/>
+                <a:ea typeface="Yu Gothic" pitchFamily="34" charset="-122"/>
+                <a:cs typeface="Yu Gothic" pitchFamily="34" charset="-120"/>
+              </a:rPr>
+              <a:t>一人ひとりを把握し、じっくり関わりたいから。</a:t>
             </a:r>
             <a:endParaRPr lang="en-US" sz="1800" dirty="0"/>
+          </a:p>
+        </p:txBody>
+      </p:sp>
+      <p:sp>
+        <p:nvSpPr>
+          <p:cNvPr id="9" name="Text 7"/>
+          <p:cNvSpPr txBox="1"/>
+          <p:nvPr/>
+        </p:nvSpPr>
+        <p:spPr>
+          <a:xfrm>
+            <a:off x="457200" y="4709160"/>
+            <a:ext cx="7863840" cy="320040"/>
+          </a:xfrm>
+          <a:prstGeom prst="rect">
+            <a:avLst/>
+          </a:prstGeom>
+          <a:noFill/>
+          <a:ln/>
+        </p:spPr>
+        <p:txBody>
+          <a:bodyPr wrap="square" lIns="0" tIns="0" rIns="0" bIns="0" rtlCol="0" anchor="ctr"/>
+          <a:lstStyle/>
+          <a:p>
+            <a:pPr indent="0" marL="0">
+              <a:buNone/>
+            </a:pPr>
+            <a:r>
+              <a:rPr lang="en-US" sz="1400" dirty="0">
+                <a:solidFill>
+                  <a:srgbClr val="6B6360"/>
+                </a:solidFill>
+                <a:latin typeface="Yu Gothic" pitchFamily="34" charset="0"/>
+                <a:ea typeface="Yu Gothic" pitchFamily="34" charset="-122"/>
+                <a:cs typeface="Yu Gothic" pitchFamily="34" charset="-120"/>
+              </a:rPr>
+              <a:t>5名に達した時点で、今回の受付は終了します。</a:t>
+            </a:r>
+            <a:endParaRPr lang="en-US" sz="1400" dirty="0"/>
           </a:p>
         </p:txBody>
       </p:sp>
@@ -17871,6 +18080,784 @@
 <file path=ppt/slides/slide37.xml><?xml version="1.0" encoding="utf-8"?>
 <p:sld xmlns:a="http://schemas.openxmlformats.org/drawingml/2006/main" xmlns:r="http://schemas.openxmlformats.org/officeDocument/2006/relationships" xmlns:p="http://schemas.openxmlformats.org/presentationml/2006/main">
   <p:cSld name="Slide 37">
+    <p:bg>
+      <p:bgPr>
+        <a:solidFill>
+          <a:srgbClr val="FFFFFF"/>
+        </a:solidFill>
+      </p:bgPr>
+    </p:bg>
+    <p:spTree>
+      <p:nvGrpSpPr>
+        <p:cNvPr id="1" name=""/>
+        <p:cNvGrpSpPr/>
+        <p:nvPr/>
+      </p:nvGrpSpPr>
+      <p:grpSpPr>
+        <a:xfrm>
+          <a:off x="0" y="0"/>
+          <a:ext cx="0" cy="0"/>
+          <a:chOff x="0" y="0"/>
+          <a:chExt cx="0" cy="0"/>
+        </a:xfrm>
+      </p:grpSpPr>
+      <p:sp>
+        <p:nvSpPr>
+          <p:cNvPr id="2" name="Text 0"/>
+          <p:cNvSpPr txBox="1"/>
+          <p:nvPr/>
+        </p:nvSpPr>
+        <p:spPr>
+          <a:xfrm>
+            <a:off x="457200" y="237744"/>
+            <a:ext cx="5486400" cy="274320"/>
+          </a:xfrm>
+          <a:prstGeom prst="rect">
+            <a:avLst/>
+          </a:prstGeom>
+          <a:noFill/>
+          <a:ln/>
+        </p:spPr>
+        <p:txBody>
+          <a:bodyPr wrap="square" lIns="0" tIns="0" rIns="0" bIns="0" rtlCol="0" anchor="ctr"/>
+          <a:lstStyle/>
+          <a:p>
+            <a:pPr indent="0" marL="0">
+              <a:buNone/>
+            </a:pPr>
+            <a:r>
+              <a:rPr lang="en-US" sz="1200" b="1" spc="200" kern="0" dirty="0">
+                <a:solidFill>
+                  <a:srgbClr val="7A1524"/>
+                </a:solidFill>
+                <a:latin typeface="Yu Gothic" pitchFamily="34" charset="0"/>
+                <a:ea typeface="Yu Gothic" pitchFamily="34" charset="-122"/>
+                <a:cs typeface="Yu Gothic" pitchFamily="34" charset="-120"/>
+              </a:rPr>
+              <a:t>PHASE 8　クロージング</a:t>
+            </a:r>
+            <a:endParaRPr lang="en-US" sz="1200" dirty="0"/>
+          </a:p>
+        </p:txBody>
+      </p:sp>
+      <p:sp>
+        <p:nvSpPr>
+          <p:cNvPr id="3" name="Text 1"/>
+          <p:cNvSpPr txBox="1"/>
+          <p:nvPr/>
+        </p:nvSpPr>
+        <p:spPr>
+          <a:xfrm>
+            <a:off x="8138160" y="4576572"/>
+            <a:ext cx="548640" cy="274320"/>
+          </a:xfrm>
+          <a:prstGeom prst="rect">
+            <a:avLst/>
+          </a:prstGeom>
+          <a:noFill/>
+          <a:ln/>
+        </p:spPr>
+        <p:txBody>
+          <a:bodyPr wrap="square" lIns="0" tIns="0" rIns="0" bIns="0" rtlCol="0" anchor="ctr"/>
+          <a:lstStyle/>
+          <a:p>
+            <a:pPr algn="r" indent="0" marL="0">
+              <a:buNone/>
+            </a:pPr>
+            <a:r>
+              <a:rPr lang="en-US" sz="1100" dirty="0">
+                <a:solidFill>
+                  <a:srgbClr val="6B6360"/>
+                </a:solidFill>
+                <a:latin typeface="Yu Gothic" pitchFamily="34" charset="0"/>
+                <a:ea typeface="Yu Gothic" pitchFamily="34" charset="-122"/>
+                <a:cs typeface="Yu Gothic" pitchFamily="34" charset="-120"/>
+              </a:rPr>
+              <a:t>37</a:t>
+            </a:r>
+            <a:endParaRPr lang="en-US" sz="1100" dirty="0"/>
+          </a:p>
+        </p:txBody>
+      </p:sp>
+      <p:sp>
+        <p:nvSpPr>
+          <p:cNvPr id="4" name="Text 2"/>
+          <p:cNvSpPr txBox="1"/>
+          <p:nvPr/>
+        </p:nvSpPr>
+        <p:spPr>
+          <a:xfrm>
+            <a:off x="457200" y="777240"/>
+            <a:ext cx="8138160" cy="1188720"/>
+          </a:xfrm>
+          <a:prstGeom prst="rect">
+            <a:avLst/>
+          </a:prstGeom>
+          <a:noFill/>
+          <a:ln/>
+        </p:spPr>
+        <p:txBody>
+          <a:bodyPr wrap="square" lIns="0" tIns="0" rIns="0" bIns="0" rtlCol="0" anchor="t"/>
+          <a:lstStyle/>
+          <a:p>
+            <a:pPr algn="l" indent="0" marL="0">
+              <a:lnSpc>
+                <a:spcPts val="4785"/>
+              </a:lnSpc>
+              <a:buNone/>
+            </a:pPr>
+            <a:r>
+              <a:rPr lang="en-US" sz="3300" b="1" dirty="0">
+                <a:solidFill>
+                  <a:srgbClr val="141416"/>
+                </a:solidFill>
+                <a:latin typeface="Yu Mincho" pitchFamily="34" charset="0"/>
+                <a:ea typeface="Yu Mincho" pitchFamily="34" charset="-122"/>
+                <a:cs typeface="Yu Mincho" pitchFamily="34" charset="-120"/>
+              </a:rPr>
+              <a:t>今日、決めなくて大丈夫です</a:t>
+            </a:r>
+            <a:endParaRPr lang="en-US" sz="3300" dirty="0"/>
+          </a:p>
+        </p:txBody>
+      </p:sp>
+      <p:sp>
+        <p:nvSpPr>
+          <p:cNvPr id="5" name="Text 3"/>
+          <p:cNvSpPr txBox="1"/>
+          <p:nvPr/>
+        </p:nvSpPr>
+        <p:spPr>
+          <a:xfrm>
+            <a:off x="457200" y="1783080"/>
+            <a:ext cx="8229600" cy="914400"/>
+          </a:xfrm>
+          <a:prstGeom prst="rect">
+            <a:avLst/>
+          </a:prstGeom>
+          <a:noFill/>
+          <a:ln/>
+        </p:spPr>
+        <p:txBody>
+          <a:bodyPr wrap="square" lIns="0" tIns="0" rIns="0" bIns="0" rtlCol="0" anchor="ctr"/>
+          <a:lstStyle/>
+          <a:p>
+            <a:pPr indent="0" marL="0">
+              <a:lnSpc>
+                <a:spcPts val="3000"/>
+              </a:lnSpc>
+              <a:buNone/>
+            </a:pPr>
+            <a:r>
+              <a:rPr lang="en-US" sz="1800" dirty="0">
+                <a:solidFill>
+                  <a:srgbClr val="3B3634"/>
+                </a:solidFill>
+                <a:latin typeface="Yu Gothic" pitchFamily="34" charset="0"/>
+                <a:ea typeface="Yu Gothic" pitchFamily="34" charset="-122"/>
+                <a:cs typeface="Yu Gothic" pitchFamily="34" charset="-120"/>
+              </a:rPr>
+              <a:t>持ち帰って、考えてください。</a:t>
+            </a:r>
+            <a:endParaRPr lang="en-US" sz="1800" dirty="0"/>
+          </a:p>
+          <a:p>
+            <a:pPr indent="0" marL="0">
+              <a:lnSpc>
+                <a:spcPts val="3000"/>
+              </a:lnSpc>
+              <a:buNone/>
+            </a:pPr>
+            <a:r>
+              <a:rPr lang="en-US" sz="1800" dirty="0">
+                <a:solidFill>
+                  <a:srgbClr val="3B3634"/>
+                </a:solidFill>
+                <a:latin typeface="Yu Gothic" pitchFamily="34" charset="0"/>
+                <a:ea typeface="Yu Gothic" pitchFamily="34" charset="-122"/>
+                <a:cs typeface="Yu Gothic" pitchFamily="34" charset="-120"/>
+              </a:rPr>
+              <a:t>ご家族やコーチに相談してからでも、まったく問題ありません。</a:t>
+            </a:r>
+            <a:endParaRPr lang="en-US" sz="1800" dirty="0"/>
+          </a:p>
+        </p:txBody>
+      </p:sp>
+      <p:sp>
+        <p:nvSpPr>
+          <p:cNvPr id="6" name="Shape 4"/>
+          <p:cNvSpPr/>
+          <p:nvPr/>
+        </p:nvSpPr>
+        <p:spPr>
+          <a:xfrm>
+            <a:off x="457200" y="2788920"/>
+            <a:ext cx="8229600" cy="731520"/>
+          </a:xfrm>
+          <a:prstGeom prst="roundRect">
+            <a:avLst>
+              <a:gd name="adj" fmla="val 8750"/>
+            </a:avLst>
+          </a:prstGeom>
+          <a:solidFill>
+            <a:srgbClr val="FAF3F4"/>
+          </a:solidFill>
+          <a:ln w="12700">
+            <a:solidFill>
+              <a:srgbClr val="FAF3F4"/>
+            </a:solidFill>
+            <a:prstDash val="solid"/>
+          </a:ln>
+        </p:spPr>
+      </p:sp>
+      <p:sp>
+        <p:nvSpPr>
+          <p:cNvPr id="7" name="Text 5"/>
+          <p:cNvSpPr txBox="1"/>
+          <p:nvPr/>
+        </p:nvSpPr>
+        <p:spPr>
+          <a:xfrm>
+            <a:off x="822960" y="2788920"/>
+            <a:ext cx="7498080" cy="731520"/>
+          </a:xfrm>
+          <a:prstGeom prst="rect">
+            <a:avLst/>
+          </a:prstGeom>
+          <a:noFill/>
+          <a:ln/>
+        </p:spPr>
+        <p:txBody>
+          <a:bodyPr wrap="square" lIns="0" tIns="0" rIns="0" bIns="0" rtlCol="0" anchor="ctr"/>
+          <a:lstStyle/>
+          <a:p>
+            <a:pPr indent="0" marL="0">
+              <a:buNone/>
+            </a:pPr>
+            <a:r>
+              <a:rPr lang="en-US" sz="1800" b="1" dirty="0">
+                <a:solidFill>
+                  <a:srgbClr val="7A1524"/>
+                </a:solidFill>
+                <a:latin typeface="Yu Gothic" pitchFamily="34" charset="0"/>
+                <a:ea typeface="Yu Gothic" pitchFamily="34" charset="-122"/>
+                <a:cs typeface="Yu Gothic" pitchFamily="34" charset="-120"/>
+              </a:rPr>
+              <a:t>「やっぱり聞きたい」が出てきたら、いつでも連絡してください。</a:t>
+            </a:r>
+            <a:endParaRPr lang="en-US" sz="1800" dirty="0"/>
+          </a:p>
+        </p:txBody>
+      </p:sp>
+      <p:sp>
+        <p:nvSpPr>
+          <p:cNvPr id="8" name="Shape 6"/>
+          <p:cNvSpPr/>
+          <p:nvPr/>
+        </p:nvSpPr>
+        <p:spPr>
+          <a:xfrm>
+            <a:off x="457200" y="3749040"/>
+            <a:ext cx="8229600" cy="868680"/>
+          </a:xfrm>
+          <a:prstGeom prst="roundRect">
+            <a:avLst>
+              <a:gd name="adj" fmla="val 8421"/>
+            </a:avLst>
+          </a:prstGeom>
+          <a:solidFill>
+            <a:srgbClr val="540E19"/>
+          </a:solidFill>
+          <a:ln w="12700">
+            <a:solidFill>
+              <a:srgbClr val="540E19"/>
+            </a:solidFill>
+            <a:prstDash val="solid"/>
+          </a:ln>
+        </p:spPr>
+      </p:sp>
+      <p:sp>
+        <p:nvSpPr>
+          <p:cNvPr id="9" name="Text 7"/>
+          <p:cNvSpPr txBox="1"/>
+          <p:nvPr/>
+        </p:nvSpPr>
+        <p:spPr>
+          <a:xfrm>
+            <a:off x="822960" y="3749040"/>
+            <a:ext cx="7498080" cy="868680"/>
+          </a:xfrm>
+          <a:prstGeom prst="rect">
+            <a:avLst/>
+          </a:prstGeom>
+          <a:noFill/>
+          <a:ln/>
+        </p:spPr>
+        <p:txBody>
+          <a:bodyPr wrap="square" lIns="0" tIns="0" rIns="0" bIns="0" rtlCol="0" anchor="ctr"/>
+          <a:lstStyle/>
+          <a:p>
+            <a:pPr indent="0" marL="0">
+              <a:lnSpc>
+                <a:spcPts val="2600"/>
+              </a:lnSpc>
+              <a:buNone/>
+            </a:pPr>
+            <a:r>
+              <a:rPr lang="en-US" sz="1800" b="1" dirty="0">
+                <a:solidFill>
+                  <a:srgbClr val="FFFFFF"/>
+                </a:solidFill>
+                <a:latin typeface="Yu Mincho" pitchFamily="34" charset="0"/>
+                <a:ea typeface="Yu Mincho" pitchFamily="34" charset="-122"/>
+                <a:cs typeface="Yu Mincho" pitchFamily="34" charset="-120"/>
+              </a:rPr>
+              <a:t>今日いちばん大事なのは、</a:t>
+            </a:r>
+            <a:endParaRPr lang="en-US" sz="1800" dirty="0"/>
+          </a:p>
+          <a:p>
+            <a:pPr indent="0" marL="0">
+              <a:lnSpc>
+                <a:spcPts val="2600"/>
+              </a:lnSpc>
+              <a:buNone/>
+            </a:pPr>
+            <a:r>
+              <a:rPr lang="en-US" sz="1800" b="1" dirty="0">
+                <a:solidFill>
+                  <a:srgbClr val="FFFFFF"/>
+                </a:solidFill>
+                <a:latin typeface="Yu Mincho" pitchFamily="34" charset="0"/>
+                <a:ea typeface="Yu Mincho" pitchFamily="34" charset="-122"/>
+                <a:cs typeface="Yu Mincho" pitchFamily="34" charset="-120"/>
+              </a:rPr>
+              <a:t>あなたが次の試合に向けて動き出せることです。</a:t>
+            </a:r>
+            <a:endParaRPr lang="en-US" sz="1800" dirty="0"/>
+          </a:p>
+        </p:txBody>
+      </p:sp>
+    </p:spTree>
+  </p:cSld>
+  <p:clrMapOvr>
+    <a:masterClrMapping/>
+  </p:clrMapOvr>
+</p:sld>
+</file>
+
+<file path=ppt/slides/slide38.xml><?xml version="1.0" encoding="utf-8"?>
+<p:sld xmlns:a="http://schemas.openxmlformats.org/drawingml/2006/main" xmlns:r="http://schemas.openxmlformats.org/officeDocument/2006/relationships" xmlns:p="http://schemas.openxmlformats.org/presentationml/2006/main">
+  <p:cSld name="Slide 38">
+    <p:bg>
+      <p:bgPr>
+        <a:solidFill>
+          <a:srgbClr val="FFFFFF"/>
+        </a:solidFill>
+      </p:bgPr>
+    </p:bg>
+    <p:spTree>
+      <p:nvGrpSpPr>
+        <p:cNvPr id="1" name=""/>
+        <p:cNvGrpSpPr/>
+        <p:nvPr/>
+      </p:nvGrpSpPr>
+      <p:grpSpPr>
+        <a:xfrm>
+          <a:off x="0" y="0"/>
+          <a:ext cx="0" cy="0"/>
+          <a:chOff x="0" y="0"/>
+          <a:chExt cx="0" cy="0"/>
+        </a:xfrm>
+      </p:grpSpPr>
+      <p:sp>
+        <p:nvSpPr>
+          <p:cNvPr id="2" name="Text 0"/>
+          <p:cNvSpPr txBox="1"/>
+          <p:nvPr/>
+        </p:nvSpPr>
+        <p:spPr>
+          <a:xfrm>
+            <a:off x="457200" y="237744"/>
+            <a:ext cx="5486400" cy="274320"/>
+          </a:xfrm>
+          <a:prstGeom prst="rect">
+            <a:avLst/>
+          </a:prstGeom>
+          <a:noFill/>
+          <a:ln/>
+        </p:spPr>
+        <p:txBody>
+          <a:bodyPr wrap="square" lIns="0" tIns="0" rIns="0" bIns="0" rtlCol="0" anchor="ctr"/>
+          <a:lstStyle/>
+          <a:p>
+            <a:pPr indent="0" marL="0">
+              <a:buNone/>
+            </a:pPr>
+            <a:r>
+              <a:rPr lang="en-US" sz="1200" b="1" spc="200" kern="0" dirty="0">
+                <a:solidFill>
+                  <a:srgbClr val="7A1524"/>
+                </a:solidFill>
+                <a:latin typeface="Yu Gothic" pitchFamily="34" charset="0"/>
+                <a:ea typeface="Yu Gothic" pitchFamily="34" charset="-122"/>
+                <a:cs typeface="Yu Gothic" pitchFamily="34" charset="-120"/>
+              </a:rPr>
+              <a:t>PHASE 8　クロージング</a:t>
+            </a:r>
+            <a:endParaRPr lang="en-US" sz="1200" dirty="0"/>
+          </a:p>
+        </p:txBody>
+      </p:sp>
+      <p:sp>
+        <p:nvSpPr>
+          <p:cNvPr id="3" name="Text 1"/>
+          <p:cNvSpPr txBox="1"/>
+          <p:nvPr/>
+        </p:nvSpPr>
+        <p:spPr>
+          <a:xfrm>
+            <a:off x="8138160" y="4576572"/>
+            <a:ext cx="548640" cy="274320"/>
+          </a:xfrm>
+          <a:prstGeom prst="rect">
+            <a:avLst/>
+          </a:prstGeom>
+          <a:noFill/>
+          <a:ln/>
+        </p:spPr>
+        <p:txBody>
+          <a:bodyPr wrap="square" lIns="0" tIns="0" rIns="0" bIns="0" rtlCol="0" anchor="ctr"/>
+          <a:lstStyle/>
+          <a:p>
+            <a:pPr algn="r" indent="0" marL="0">
+              <a:buNone/>
+            </a:pPr>
+            <a:r>
+              <a:rPr lang="en-US" sz="1100" dirty="0">
+                <a:solidFill>
+                  <a:srgbClr val="6B6360"/>
+                </a:solidFill>
+                <a:latin typeface="Yu Gothic" pitchFamily="34" charset="0"/>
+                <a:ea typeface="Yu Gothic" pitchFamily="34" charset="-122"/>
+                <a:cs typeface="Yu Gothic" pitchFamily="34" charset="-120"/>
+              </a:rPr>
+              <a:t>38</a:t>
+            </a:r>
+            <a:endParaRPr lang="en-US" sz="1100" dirty="0"/>
+          </a:p>
+        </p:txBody>
+      </p:sp>
+      <p:sp>
+        <p:nvSpPr>
+          <p:cNvPr id="4" name="Text 2"/>
+          <p:cNvSpPr txBox="1"/>
+          <p:nvPr/>
+        </p:nvSpPr>
+        <p:spPr>
+          <a:xfrm>
+            <a:off x="457200" y="914400"/>
+            <a:ext cx="7863840" cy="1188720"/>
+          </a:xfrm>
+          <a:prstGeom prst="rect">
+            <a:avLst/>
+          </a:prstGeom>
+          <a:noFill/>
+          <a:ln/>
+        </p:spPr>
+        <p:txBody>
+          <a:bodyPr wrap="square" lIns="0" tIns="0" rIns="0" bIns="0" rtlCol="0" anchor="t"/>
+          <a:lstStyle/>
+          <a:p>
+            <a:pPr algn="l" indent="0" marL="0">
+              <a:lnSpc>
+                <a:spcPts val="4930"/>
+              </a:lnSpc>
+              <a:buNone/>
+            </a:pPr>
+            <a:r>
+              <a:rPr lang="en-US" sz="3400" b="1" dirty="0">
+                <a:solidFill>
+                  <a:srgbClr val="141416"/>
+                </a:solidFill>
+                <a:latin typeface="Yu Mincho" pitchFamily="34" charset="0"/>
+                <a:ea typeface="Yu Mincho" pitchFamily="34" charset="-122"/>
+                <a:cs typeface="Yu Mincho" pitchFamily="34" charset="-120"/>
+              </a:rPr>
+              <a:t>今日話してみて、</a:t>
+            </a:r>
+            <a:endParaRPr lang="en-US" sz="3400" dirty="0"/>
+          </a:p>
+          <a:p>
+            <a:pPr algn="l" indent="0" marL="0">
+              <a:lnSpc>
+                <a:spcPts val="4930"/>
+              </a:lnSpc>
+              <a:buNone/>
+            </a:pPr>
+            <a:r>
+              <a:rPr lang="en-US" sz="3400" b="1" dirty="0">
+                <a:solidFill>
+                  <a:srgbClr val="141416"/>
+                </a:solidFill>
+                <a:latin typeface="Yu Mincho" pitchFamily="34" charset="0"/>
+                <a:ea typeface="Yu Mincho" pitchFamily="34" charset="-122"/>
+                <a:cs typeface="Yu Mincho" pitchFamily="34" charset="-120"/>
+              </a:rPr>
+              <a:t>何が一番印象に残りましたか？</a:t>
+            </a:r>
+            <a:endParaRPr lang="en-US" sz="3400" dirty="0"/>
+          </a:p>
+        </p:txBody>
+      </p:sp>
+      <p:sp>
+        <p:nvSpPr>
+          <p:cNvPr id="5" name="Shape 3"/>
+          <p:cNvSpPr/>
+          <p:nvPr/>
+        </p:nvSpPr>
+        <p:spPr>
+          <a:xfrm>
+            <a:off x="457200" y="2651760"/>
+            <a:ext cx="7863840" cy="512064"/>
+          </a:xfrm>
+          <a:prstGeom prst="roundRect">
+            <a:avLst>
+              <a:gd name="adj" fmla="val 10714"/>
+            </a:avLst>
+          </a:prstGeom>
+          <a:solidFill>
+            <a:srgbClr val="FAF3F4"/>
+          </a:solidFill>
+          <a:ln w="12700">
+            <a:solidFill>
+              <a:srgbClr val="FAF3F4"/>
+            </a:solidFill>
+            <a:prstDash val="solid"/>
+          </a:ln>
+        </p:spPr>
+      </p:sp>
+      <p:sp>
+        <p:nvSpPr>
+          <p:cNvPr id="6" name="Text 4"/>
+          <p:cNvSpPr txBox="1"/>
+          <p:nvPr/>
+        </p:nvSpPr>
+        <p:spPr>
+          <a:xfrm>
+            <a:off x="713232" y="2651760"/>
+            <a:ext cx="7406640" cy="512064"/>
+          </a:xfrm>
+          <a:prstGeom prst="rect">
+            <a:avLst/>
+          </a:prstGeom>
+          <a:noFill/>
+          <a:ln/>
+        </p:spPr>
+        <p:txBody>
+          <a:bodyPr wrap="square" lIns="0" tIns="0" rIns="0" bIns="0" rtlCol="0" anchor="ctr"/>
+          <a:lstStyle/>
+          <a:p>
+            <a:pPr indent="0" marL="0">
+              <a:buNone/>
+            </a:pPr>
+            <a:r>
+              <a:rPr lang="en-US" sz="1900" dirty="0">
+                <a:solidFill>
+                  <a:srgbClr val="3B3634"/>
+                </a:solidFill>
+                <a:latin typeface="Yu Gothic" pitchFamily="34" charset="0"/>
+                <a:ea typeface="Yu Gothic" pitchFamily="34" charset="-122"/>
+                <a:cs typeface="Yu Gothic" pitchFamily="34" charset="-120"/>
+              </a:rPr>
+              <a:t>今の自分に必要だと思ったこと</a:t>
+            </a:r>
+            <a:endParaRPr lang="en-US" sz="1900" dirty="0"/>
+          </a:p>
+        </p:txBody>
+      </p:sp>
+      <p:sp>
+        <p:nvSpPr>
+          <p:cNvPr id="7" name="Shape 5"/>
+          <p:cNvSpPr/>
+          <p:nvPr/>
+        </p:nvSpPr>
+        <p:spPr>
+          <a:xfrm>
+            <a:off x="457200" y="3255264"/>
+            <a:ext cx="7863840" cy="512064"/>
+          </a:xfrm>
+          <a:prstGeom prst="roundRect">
+            <a:avLst>
+              <a:gd name="adj" fmla="val 10714"/>
+            </a:avLst>
+          </a:prstGeom>
+          <a:solidFill>
+            <a:srgbClr val="FAF3F4"/>
+          </a:solidFill>
+          <a:ln w="12700">
+            <a:solidFill>
+              <a:srgbClr val="FAF3F4"/>
+            </a:solidFill>
+            <a:prstDash val="solid"/>
+          </a:ln>
+        </p:spPr>
+      </p:sp>
+      <p:sp>
+        <p:nvSpPr>
+          <p:cNvPr id="8" name="Text 6"/>
+          <p:cNvSpPr txBox="1"/>
+          <p:nvPr/>
+        </p:nvSpPr>
+        <p:spPr>
+          <a:xfrm>
+            <a:off x="713232" y="3255264"/>
+            <a:ext cx="7406640" cy="512064"/>
+          </a:xfrm>
+          <a:prstGeom prst="rect">
+            <a:avLst/>
+          </a:prstGeom>
+          <a:noFill/>
+          <a:ln/>
+        </p:spPr>
+        <p:txBody>
+          <a:bodyPr wrap="square" lIns="0" tIns="0" rIns="0" bIns="0" rtlCol="0" anchor="ctr"/>
+          <a:lstStyle/>
+          <a:p>
+            <a:pPr indent="0" marL="0">
+              <a:buNone/>
+            </a:pPr>
+            <a:r>
+              <a:rPr lang="en-US" sz="1900" dirty="0">
+                <a:solidFill>
+                  <a:srgbClr val="3B3634"/>
+                </a:solidFill>
+                <a:latin typeface="Yu Gothic" pitchFamily="34" charset="0"/>
+                <a:ea typeface="Yu Gothic" pitchFamily="34" charset="-122"/>
+                <a:cs typeface="Yu Gothic" pitchFamily="34" charset="-120"/>
+              </a:rPr>
+              <a:t>次の試合までに変えたいこと</a:t>
+            </a:r>
+            <a:endParaRPr lang="en-US" sz="1900" dirty="0"/>
+          </a:p>
+        </p:txBody>
+      </p:sp>
+      <p:sp>
+        <p:nvSpPr>
+          <p:cNvPr id="9" name="Shape 7"/>
+          <p:cNvSpPr/>
+          <p:nvPr/>
+        </p:nvSpPr>
+        <p:spPr>
+          <a:xfrm>
+            <a:off x="457200" y="3858768"/>
+            <a:ext cx="7863840" cy="512064"/>
+          </a:xfrm>
+          <a:prstGeom prst="roundRect">
+            <a:avLst>
+              <a:gd name="adj" fmla="val 10714"/>
+            </a:avLst>
+          </a:prstGeom>
+          <a:solidFill>
+            <a:srgbClr val="FAF3F4"/>
+          </a:solidFill>
+          <a:ln w="12700">
+            <a:solidFill>
+              <a:srgbClr val="FAF3F4"/>
+            </a:solidFill>
+            <a:prstDash val="solid"/>
+          </a:ln>
+        </p:spPr>
+      </p:sp>
+      <p:sp>
+        <p:nvSpPr>
+          <p:cNvPr id="10" name="Text 8"/>
+          <p:cNvSpPr txBox="1"/>
+          <p:nvPr/>
+        </p:nvSpPr>
+        <p:spPr>
+          <a:xfrm>
+            <a:off x="713232" y="3858768"/>
+            <a:ext cx="7406640" cy="512064"/>
+          </a:xfrm>
+          <a:prstGeom prst="rect">
+            <a:avLst/>
+          </a:prstGeom>
+          <a:noFill/>
+          <a:ln/>
+        </p:spPr>
+        <p:txBody>
+          <a:bodyPr wrap="square" lIns="0" tIns="0" rIns="0" bIns="0" rtlCol="0" anchor="ctr"/>
+          <a:lstStyle/>
+          <a:p>
+            <a:pPr indent="0" marL="0">
+              <a:buNone/>
+            </a:pPr>
+            <a:r>
+              <a:rPr lang="en-US" sz="1900" dirty="0">
+                <a:solidFill>
+                  <a:srgbClr val="3B3634"/>
+                </a:solidFill>
+                <a:latin typeface="Yu Gothic" pitchFamily="34" charset="0"/>
+                <a:ea typeface="Yu Gothic" pitchFamily="34" charset="-122"/>
+                <a:cs typeface="Yu Gothic" pitchFamily="34" charset="-120"/>
+              </a:rPr>
+              <a:t>聞いておきたいこと</a:t>
+            </a:r>
+            <a:endParaRPr lang="en-US" sz="1900" dirty="0"/>
+          </a:p>
+        </p:txBody>
+      </p:sp>
+      <p:sp>
+        <p:nvSpPr>
+          <p:cNvPr id="11" name="Text 9"/>
+          <p:cNvSpPr txBox="1"/>
+          <p:nvPr/>
+        </p:nvSpPr>
+        <p:spPr>
+          <a:xfrm>
+            <a:off x="457200" y="4572000"/>
+            <a:ext cx="7863840" cy="411480"/>
+          </a:xfrm>
+          <a:prstGeom prst="rect">
+            <a:avLst/>
+          </a:prstGeom>
+          <a:noFill/>
+          <a:ln/>
+        </p:spPr>
+        <p:txBody>
+          <a:bodyPr wrap="square" lIns="0" tIns="0" rIns="0" bIns="0" rtlCol="0" anchor="ctr"/>
+          <a:lstStyle/>
+          <a:p>
+            <a:pPr indent="0" marL="0">
+              <a:buNone/>
+            </a:pPr>
+            <a:r>
+              <a:rPr lang="en-US" sz="1800" b="1" dirty="0">
+                <a:solidFill>
+                  <a:srgbClr val="7A1524"/>
+                </a:solidFill>
+                <a:latin typeface="Yu Gothic" pitchFamily="34" charset="0"/>
+                <a:ea typeface="Yu Gothic" pitchFamily="34" charset="-122"/>
+                <a:cs typeface="Yu Gothic" pitchFamily="34" charset="-120"/>
+              </a:rPr>
+              <a:t>まず、あなたの感想を聞かせてください。</a:t>
+            </a:r>
+            <a:endParaRPr lang="en-US" sz="1800" dirty="0"/>
+          </a:p>
+        </p:txBody>
+      </p:sp>
+    </p:spTree>
+  </p:cSld>
+  <p:clrMapOvr>
+    <a:masterClrMapping/>
+  </p:clrMapOvr>
+</p:sld>
+</file>
+
+<file path=ppt/slides/slide39.xml><?xml version="1.0" encoding="utf-8"?>
+<p:sld xmlns:a="http://schemas.openxmlformats.org/drawingml/2006/main" xmlns:r="http://schemas.openxmlformats.org/officeDocument/2006/relationships" xmlns:p="http://schemas.openxmlformats.org/presentationml/2006/main">
+  <p:cSld name="Slide 39">
     <p:bg>
       <p:bgPr>
         <a:solidFill>
@@ -17925,7 +18912,7 @@
                 <a:ea typeface="Yu Gothic" pitchFamily="34" charset="-122"/>
                 <a:cs typeface="Yu Gothic" pitchFamily="34" charset="-120"/>
               </a:rPr>
-              <a:t>37</a:t>
+              <a:t>39</a:t>
             </a:r>
             <a:endParaRPr lang="en-US" sz="1100" dirty="0"/>
           </a:p>
